--- a/02-PROFESORADO/03-PRESENTACIONES/POR-SESION/h1/S212-entrada-por-teclado-con-scanner-presentacion.pptx
+++ b/02-PROFESORADO/03-PRESENTACIONES/POR-SESION/h1/S212-entrada-por-teclado-con-scanner-presentacion.pptx
@@ -11,6 +11,8 @@
     <p:sldId id="259" r:id="rId10"/>
     <p:sldId id="260" r:id="rId11"/>
     <p:sldId id="261" r:id="rId12"/>
+    <p:sldId id="262" r:id="rId13"/>
+    <p:sldId id="263" r:id="rId14"/>
   </p:sldIdLst>
   <p:sldSz cx="12191695" cy="6858000" type="screen4x3"/>
   <p:notesSz cx="6858000" cy="9144000"/>
@@ -3145,7 +3147,7 @@
         <p:spPr>
           <a:xfrm>
             <a:off x="0" y="0"/>
-            <a:ext cx="228600" cy="6858000"/>
+            <a:ext cx="256032" cy="6858000"/>
           </a:xfrm>
           <a:prstGeom prst="rect">
             <a:avLst/>
@@ -3187,8 +3189,8 @@
         </p:nvSpPr>
         <p:spPr>
           <a:xfrm>
-            <a:off x="640080" y="566928"/>
-            <a:ext cx="1828800" cy="566928"/>
+            <a:off x="658368" y="566928"/>
+            <a:ext cx="1874519" cy="566928"/>
           </a:xfrm>
           <a:prstGeom prst="roundRect">
             <a:avLst/>
@@ -3197,7 +3199,9 @@
             <a:srgbClr val="2F5BA8"/>
           </a:solidFill>
           <a:ln>
-            <a:noFill/>
+            <a:solidFill>
+              <a:srgbClr val="2F5BA8"/>
+            </a:solidFill>
           </a:ln>
         </p:spPr>
         <p:style>
@@ -3230,8 +3234,8 @@
         </p:nvSpPr>
         <p:spPr>
           <a:xfrm>
-            <a:off x="713232" y="676656"/>
-            <a:ext cx="1682496" cy="256032"/>
+            <a:off x="731520" y="685800"/>
+            <a:ext cx="1719072" cy="228600"/>
           </a:xfrm>
           <a:prstGeom prst="rect">
             <a:avLst/>
@@ -3239,7 +3243,7 @@
           <a:noFill/>
         </p:spPr>
         <p:txBody>
-          <a:bodyPr wrap="square" lIns="36576" rIns="36576" tIns="27432" bIns="27432">
+          <a:bodyPr wrap="square" lIns="45720" rIns="45720" tIns="36576" bIns="36576" anchor="t">
             <a:spAutoFit/>
           </a:bodyPr>
           <a:lstStyle/>
@@ -3266,8 +3270,8 @@
         </p:nvSpPr>
         <p:spPr>
           <a:xfrm>
-            <a:off x="658368" y="1536192"/>
-            <a:ext cx="10789920" cy="1645920"/>
+            <a:off x="685800" y="1481328"/>
+            <a:ext cx="10789920" cy="1691640"/>
           </a:xfrm>
           <a:prstGeom prst="rect">
             <a:avLst/>
@@ -3275,7 +3279,7 @@
           <a:noFill/>
         </p:spPr>
         <p:txBody>
-          <a:bodyPr wrap="square" lIns="36576" rIns="36576" tIns="27432" bIns="27432">
+          <a:bodyPr wrap="square" lIns="45720" rIns="45720" tIns="36576" bIns="36576" anchor="t">
             <a:spAutoFit/>
           </a:bodyPr>
           <a:lstStyle/>
@@ -3302,8 +3306,8 @@
         </p:nvSpPr>
         <p:spPr>
           <a:xfrm>
-            <a:off x="685800" y="3822191"/>
-            <a:ext cx="6766560" cy="384048"/>
+            <a:off x="713232" y="3703320"/>
+            <a:ext cx="10424160" cy="411480"/>
           </a:xfrm>
           <a:prstGeom prst="rect">
             <a:avLst/>
@@ -3311,7 +3315,7 @@
           <a:noFill/>
         </p:spPr>
         <p:txBody>
-          <a:bodyPr wrap="square" lIns="36576" rIns="36576" tIns="27432" bIns="27432">
+          <a:bodyPr wrap="square" lIns="45720" rIns="45720" tIns="36576" bIns="36576" anchor="t">
             <a:spAutoFit/>
           </a:bodyPr>
           <a:lstStyle/>
@@ -3325,7 +3329,7 @@
               </a:defRPr>
             </a:pPr>
             <a:r>
-              <a:t>H1  ·  45 minutos</a:t>
+              <a:t>H1 · 45 minutos</a:t>
             </a:r>
           </a:p>
         </p:txBody>
@@ -3338,8 +3342,8 @@
         </p:nvSpPr>
         <p:spPr>
           <a:xfrm>
-            <a:off x="685800" y="5074920"/>
-            <a:ext cx="10241280" cy="640080"/>
+            <a:off x="713232" y="4315968"/>
+            <a:ext cx="10241280" cy="502920"/>
           </a:xfrm>
           <a:prstGeom prst="rect">
             <a:avLst/>
@@ -3347,13 +3351,13 @@
           <a:noFill/>
         </p:spPr>
         <p:txBody>
-          <a:bodyPr wrap="square" lIns="36576" rIns="36576" tIns="27432" bIns="27432">
+          <a:bodyPr wrap="square" lIns="45720" rIns="45720" tIns="36576" bIns="36576" anchor="t">
             <a:spAutoFit/>
           </a:bodyPr>
           <a:lstStyle/>
           <a:p>
             <a:pPr algn="l">
-              <a:defRPr sz="2400" b="0">
+              <a:defRPr sz="1900" b="0">
                 <a:solidFill>
                   <a:srgbClr val="FFFFFF"/>
                 </a:solidFill>
@@ -3361,7 +3365,7 @@
               </a:defRPr>
             </a:pPr>
             <a:r>
-              <a:t>Hoy construiremos una evidencia que puedas comprobar y explicar.</a:t>
+              <a:t>Fase HEXA: Investigar — aprender lo necesario</a:t>
             </a:r>
           </a:p>
         </p:txBody>
@@ -3374,7 +3378,7 @@
         </p:nvSpPr>
         <p:spPr>
           <a:xfrm>
-            <a:off x="685800" y="6272784"/>
+            <a:off x="713232" y="6272784"/>
             <a:ext cx="10607040" cy="201168"/>
           </a:xfrm>
           <a:prstGeom prst="rect">
@@ -3383,7 +3387,7 @@
           <a:noFill/>
         </p:spPr>
         <p:txBody>
-          <a:bodyPr wrap="square" lIns="36576" rIns="36576" tIns="27432" bIns="27432">
+          <a:bodyPr wrap="square" lIns="45720" rIns="45720" tIns="36576" bIns="36576" anchor="t">
             <a:spAutoFit/>
           </a:bodyPr>
           <a:lstStyle/>
@@ -3514,8 +3518,8 @@
         </p:nvSpPr>
         <p:spPr>
           <a:xfrm>
-            <a:off x="502920" y="310896"/>
-            <a:ext cx="5029200" cy="256032"/>
+            <a:off x="502920" y="274320"/>
+            <a:ext cx="5486400" cy="256032"/>
           </a:xfrm>
           <a:prstGeom prst="rect">
             <a:avLst/>
@@ -3523,7 +3527,7 @@
           <a:noFill/>
         </p:spPr>
         <p:txBody>
-          <a:bodyPr wrap="square" lIns="36576" rIns="36576" tIns="27432" bIns="27432">
+          <a:bodyPr wrap="square" lIns="45720" rIns="45720" tIns="36576" bIns="36576" anchor="t">
             <a:spAutoFit/>
           </a:bodyPr>
           <a:lstStyle/>
@@ -3550,7 +3554,7 @@
         </p:nvSpPr>
         <p:spPr>
           <a:xfrm>
-            <a:off x="502920" y="621792"/>
+            <a:off x="502920" y="603504"/>
             <a:ext cx="11064240" cy="530352"/>
           </a:xfrm>
           <a:prstGeom prst="rect">
@@ -3559,7 +3563,7 @@
           <a:noFill/>
         </p:spPr>
         <p:txBody>
-          <a:bodyPr wrap="square" lIns="36576" rIns="36576" tIns="27432" bIns="27432">
+          <a:bodyPr wrap="square" lIns="45720" rIns="45720" tIns="36576" bIns="36576" anchor="t">
             <a:spAutoFit/>
           </a:bodyPr>
           <a:lstStyle/>
@@ -3573,7 +3577,7 @@
               </a:defRPr>
             </a:pPr>
             <a:r>
-              <a:t>Qué vamos a conseguir</a:t>
+              <a:t>Qué debe conseguirse</a:t>
             </a:r>
           </a:p>
         </p:txBody>
@@ -3638,7 +3642,7 @@
           <a:noFill/>
         </p:spPr>
         <p:txBody>
-          <a:bodyPr wrap="square" lIns="36576" rIns="36576" tIns="27432" bIns="27432">
+          <a:bodyPr wrap="square" lIns="45720" rIns="45720" tIns="36576" bIns="36576" anchor="t">
             <a:spAutoFit/>
           </a:bodyPr>
           <a:lstStyle/>
@@ -3665,8 +3669,8 @@
         </p:nvSpPr>
         <p:spPr>
           <a:xfrm>
-            <a:off x="594360" y="1417320"/>
-            <a:ext cx="5349240" cy="4343400"/>
+            <a:off x="594360" y="1389888"/>
+            <a:ext cx="5184648" cy="4297680"/>
           </a:xfrm>
           <a:prstGeom prst="roundRect">
             <a:avLst/>
@@ -3676,7 +3680,7 @@
           </a:solidFill>
           <a:ln>
             <a:solidFill>
-              <a:srgbClr val="EBEEF2"/>
+              <a:srgbClr val="E5E9EF"/>
             </a:solidFill>
           </a:ln>
         </p:spPr>
@@ -3711,7 +3715,7 @@
         <p:spPr>
           <a:xfrm>
             <a:off x="822960" y="1618488"/>
-            <a:ext cx="438912" cy="411480"/>
+            <a:ext cx="4727448" cy="3840480"/>
           </a:xfrm>
           <a:prstGeom prst="rect">
             <a:avLst/>
@@ -3719,107 +3723,35 @@
           <a:noFill/>
         </p:spPr>
         <p:txBody>
-          <a:bodyPr wrap="square" lIns="36576" rIns="36576" tIns="27432" bIns="27432">
+          <a:bodyPr wrap="square" lIns="45720" rIns="45720" tIns="36576" bIns="36576" anchor="t">
             <a:spAutoFit/>
           </a:bodyPr>
           <a:lstStyle/>
           <a:p>
-            <a:pPr algn="ctr">
-              <a:defRPr sz="2400" b="1">
-                <a:solidFill>
-                  <a:srgbClr val="2F5BA8"/>
+            <a:pPr algn="l">
+              <a:defRPr sz="2100" b="1">
+                <a:solidFill>
+                  <a:srgbClr val="1C2330"/>
                 </a:solidFill>
                 <a:latin typeface="Aptos"/>
               </a:defRPr>
             </a:pPr>
             <a:r>
-              <a:t>01</a:t>
-            </a:r>
-          </a:p>
-        </p:txBody>
-      </p:sp>
-      <p:sp>
-        <p:nvSpPr>
-          <p:cNvPr id="10" name="TextBox 9"/>
-          <p:cNvSpPr txBox="1"/>
-          <p:nvPr/>
-        </p:nvSpPr>
-        <p:spPr>
-          <a:xfrm>
-            <a:off x="1344168" y="1645920"/>
-            <a:ext cx="4389120" cy="365760"/>
-          </a:xfrm>
-          <a:prstGeom prst="rect">
-            <a:avLst/>
-          </a:prstGeom>
-          <a:noFill/>
-        </p:spPr>
-        <p:txBody>
-          <a:bodyPr wrap="square" lIns="36576" rIns="36576" tIns="27432" bIns="27432">
-            <a:spAutoFit/>
-          </a:bodyPr>
-          <a:lstStyle/>
-          <a:p>
-            <a:pPr algn="l">
-              <a:defRPr sz="1700" b="1">
-                <a:solidFill>
-                  <a:srgbClr val="2F5BA8"/>
-                </a:solidFill>
-                <a:latin typeface="Aptos"/>
-              </a:defRPr>
-            </a:pPr>
-            <a:r>
-              <a:t>Hoy vas a…</a:t>
-            </a:r>
-          </a:p>
-        </p:txBody>
-      </p:sp>
-      <p:sp>
-        <p:nvSpPr>
-          <p:cNvPr id="11" name="TextBox 10"/>
-          <p:cNvSpPr txBox="1"/>
-          <p:nvPr/>
-        </p:nvSpPr>
-        <p:spPr>
-          <a:xfrm>
-            <a:off x="868680" y="2286000"/>
-            <a:ext cx="4800600" cy="3246120"/>
-          </a:xfrm>
-          <a:prstGeom prst="rect">
-            <a:avLst/>
-          </a:prstGeom>
-          <a:noFill/>
-        </p:spPr>
-        <p:txBody>
-          <a:bodyPr wrap="square" lIns="36576" rIns="36576" tIns="27432" bIns="27432">
-            <a:spAutoFit/>
-          </a:bodyPr>
-          <a:lstStyle/>
-          <a:p>
-            <a:pPr algn="l">
-              <a:defRPr sz="2200" b="0">
-                <a:solidFill>
-                  <a:srgbClr val="1C2330"/>
-                </a:solidFill>
-                <a:latin typeface="Aptos"/>
-              </a:defRPr>
-            </a:pPr>
-            <a:r>
-              <a:t>Asegurar conceptos del Tema 1 que no aparecen de forma natural en el saludo inicial.</a:t>
-            </a:r>
-          </a:p>
-        </p:txBody>
-      </p:sp>
-      <p:sp>
-        <p:nvSpPr>
-          <p:cNvPr id="12" name="Rounded Rectangle 11"/>
+              <a:t>Objetivo: Asegurar conceptos del Tema 1 que no aparecen de forma natural en el saludo inicial.</a:t>
+            </a:r>
+          </a:p>
+        </p:txBody>
+      </p:sp>
+      <p:sp>
+        <p:nvSpPr>
+          <p:cNvPr id="10" name="Rounded Rectangle 9"/>
           <p:cNvSpPr/>
           <p:nvPr/>
         </p:nvSpPr>
         <p:spPr>
           <a:xfrm>
-            <a:off x="6236208" y="1417320"/>
-            <a:ext cx="5349240" cy="4343400"/>
+            <a:off x="6035040" y="1389888"/>
+            <a:ext cx="5184648" cy="4297680"/>
           </a:xfrm>
           <a:prstGeom prst="roundRect">
             <a:avLst/>
@@ -3829,7 +3761,7 @@
           </a:solidFill>
           <a:ln>
             <a:solidFill>
-              <a:srgbClr val="EBEEF2"/>
+              <a:srgbClr val="E5E9EF"/>
             </a:solidFill>
           </a:ln>
         </p:spPr>
@@ -3857,14 +3789,14 @@
       </p:sp>
       <p:sp>
         <p:nvSpPr>
-          <p:cNvPr id="13" name="TextBox 12"/>
+          <p:cNvPr id="11" name="TextBox 10"/>
           <p:cNvSpPr txBox="1"/>
           <p:nvPr/>
         </p:nvSpPr>
         <p:spPr>
           <a:xfrm>
-            <a:off x="6464808" y="1618488"/>
-            <a:ext cx="438912" cy="411480"/>
+            <a:off x="6263640" y="1618488"/>
+            <a:ext cx="4727448" cy="3840480"/>
           </a:xfrm>
           <a:prstGeom prst="rect">
             <a:avLst/>
@@ -3872,93 +3804,21 @@
           <a:noFill/>
         </p:spPr>
         <p:txBody>
-          <a:bodyPr wrap="square" lIns="36576" rIns="36576" tIns="27432" bIns="27432">
+          <a:bodyPr wrap="square" lIns="45720" rIns="45720" tIns="36576" bIns="36576" anchor="t">
             <a:spAutoFit/>
           </a:bodyPr>
           <a:lstStyle/>
           <a:p>
-            <a:pPr algn="ctr">
-              <a:defRPr sz="2400" b="1">
-                <a:solidFill>
-                  <a:srgbClr val="2F5BA8"/>
+            <a:pPr algn="l">
+              <a:defRPr sz="2100" b="1">
+                <a:solidFill>
+                  <a:srgbClr val="1C2330"/>
                 </a:solidFill>
                 <a:latin typeface="Aptos"/>
               </a:defRPr>
             </a:pPr>
             <a:r>
-              <a:t>02</a:t>
-            </a:r>
-          </a:p>
-        </p:txBody>
-      </p:sp>
-      <p:sp>
-        <p:nvSpPr>
-          <p:cNvPr id="14" name="TextBox 13"/>
-          <p:cNvSpPr txBox="1"/>
-          <p:nvPr/>
-        </p:nvSpPr>
-        <p:spPr>
-          <a:xfrm>
-            <a:off x="6986016" y="1645920"/>
-            <a:ext cx="4389120" cy="365760"/>
-          </a:xfrm>
-          <a:prstGeom prst="rect">
-            <a:avLst/>
-          </a:prstGeom>
-          <a:noFill/>
-        </p:spPr>
-        <p:txBody>
-          <a:bodyPr wrap="square" lIns="36576" rIns="36576" tIns="27432" bIns="27432">
-            <a:spAutoFit/>
-          </a:bodyPr>
-          <a:lstStyle/>
-          <a:p>
-            <a:pPr algn="l">
-              <a:defRPr sz="1700" b="1">
-                <a:solidFill>
-                  <a:srgbClr val="2F5BA8"/>
-                </a:solidFill>
-                <a:latin typeface="Aptos"/>
-              </a:defRPr>
-            </a:pPr>
-            <a:r>
-              <a:t>Debe quedar…</a:t>
-            </a:r>
-          </a:p>
-        </p:txBody>
-      </p:sp>
-      <p:sp>
-        <p:nvSpPr>
-          <p:cNvPr id="15" name="TextBox 14"/>
-          <p:cNvSpPr txBox="1"/>
-          <p:nvPr/>
-        </p:nvSpPr>
-        <p:spPr>
-          <a:xfrm>
-            <a:off x="6510528" y="2286000"/>
-            <a:ext cx="4800600" cy="3246120"/>
-          </a:xfrm>
-          <a:prstGeom prst="rect">
-            <a:avLst/>
-          </a:prstGeom>
-          <a:noFill/>
-        </p:spPr>
-        <p:txBody>
-          <a:bodyPr wrap="square" lIns="36576" rIns="36576" tIns="27432" bIns="27432">
-            <a:spAutoFit/>
-          </a:bodyPr>
-          <a:lstStyle/>
-          <a:p>
-            <a:pPr algn="l">
-              <a:defRPr sz="2200" b="0">
-                <a:solidFill>
-                  <a:srgbClr val="1C2330"/>
-                </a:solidFill>
-                <a:latin typeface="Aptos"/>
-              </a:defRPr>
-            </a:pPr>
-            <a:r>
-              <a:t>Código o ejercicio corto con entrada numérica, cálculo, comparación y prueba con dato válido e inválido.</a:t>
+              <a:t>Evidencia: Código o ejercicio corto con entrada numérica, cálculo, comparación y prueba con dato válido e inválido.</a:t>
             </a:r>
           </a:p>
         </p:txBody>
@@ -4075,8 +3935,8 @@
         </p:nvSpPr>
         <p:spPr>
           <a:xfrm>
-            <a:off x="502920" y="310896"/>
-            <a:ext cx="5029200" cy="256032"/>
+            <a:off x="502920" y="274320"/>
+            <a:ext cx="5486400" cy="256032"/>
           </a:xfrm>
           <a:prstGeom prst="rect">
             <a:avLst/>
@@ -4084,7 +3944,7 @@
           <a:noFill/>
         </p:spPr>
         <p:txBody>
-          <a:bodyPr wrap="square" lIns="36576" rIns="36576" tIns="27432" bIns="27432">
+          <a:bodyPr wrap="square" lIns="45720" rIns="45720" tIns="36576" bIns="36576" anchor="t">
             <a:spAutoFit/>
           </a:bodyPr>
           <a:lstStyle/>
@@ -4098,7 +3958,7 @@
               </a:defRPr>
             </a:pPr>
             <a:r>
-              <a:t>PASO A PASO</a:t>
+              <a:t>RITMO DE LA SESIÓN</a:t>
             </a:r>
           </a:p>
         </p:txBody>
@@ -4111,7 +3971,7 @@
         </p:nvSpPr>
         <p:spPr>
           <a:xfrm>
-            <a:off x="502920" y="621792"/>
+            <a:off x="502920" y="603504"/>
             <a:ext cx="11064240" cy="530352"/>
           </a:xfrm>
           <a:prstGeom prst="rect">
@@ -4120,7 +3980,7 @@
           <a:noFill/>
         </p:spPr>
         <p:txBody>
-          <a:bodyPr wrap="square" lIns="36576" rIns="36576" tIns="27432" bIns="27432">
+          <a:bodyPr wrap="square" lIns="45720" rIns="45720" tIns="36576" bIns="36576" anchor="t">
             <a:spAutoFit/>
           </a:bodyPr>
           <a:lstStyle/>
@@ -4134,7 +3994,7 @@
               </a:defRPr>
             </a:pPr>
             <a:r>
-              <a:t>Ruta de trabajo</a:t>
+              <a:t>Secuencia de aula</a:t>
             </a:r>
           </a:p>
         </p:txBody>
@@ -4199,7 +4059,7 @@
           <a:noFill/>
         </p:spPr>
         <p:txBody>
-          <a:bodyPr wrap="square" lIns="36576" rIns="36576" tIns="27432" bIns="27432">
+          <a:bodyPr wrap="square" lIns="45720" rIns="45720" tIns="36576" bIns="36576" anchor="t">
             <a:spAutoFit/>
           </a:bodyPr>
           <a:lstStyle/>
@@ -4226,8 +4086,8 @@
         </p:nvSpPr>
         <p:spPr>
           <a:xfrm>
-            <a:off x="685800" y="1325880"/>
-            <a:ext cx="502920" cy="502920"/>
+            <a:off x="658368" y="1280160"/>
+            <a:ext cx="475488" cy="475488"/>
           </a:xfrm>
           <a:prstGeom prst="ellipse">
             <a:avLst/>
@@ -4269,8 +4129,8 @@
         </p:nvSpPr>
         <p:spPr>
           <a:xfrm>
-            <a:off x="685800" y="1435607"/>
-            <a:ext cx="502920" cy="201168"/>
+            <a:off x="658368" y="1380744"/>
+            <a:ext cx="475488" cy="201168"/>
           </a:xfrm>
           <a:prstGeom prst="rect">
             <a:avLst/>
@@ -4278,13 +4138,13 @@
           <a:noFill/>
         </p:spPr>
         <p:txBody>
-          <a:bodyPr wrap="square" lIns="36576" rIns="36576" tIns="27432" bIns="27432">
+          <a:bodyPr wrap="square" lIns="45720" rIns="45720" tIns="36576" bIns="36576" anchor="t">
             <a:spAutoFit/>
           </a:bodyPr>
           <a:lstStyle/>
           <a:p>
             <a:pPr algn="ctr">
-              <a:defRPr sz="1400" b="1">
+              <a:defRPr sz="1300" b="1">
                 <a:solidFill>
                   <a:srgbClr val="FFFFFF"/>
                 </a:solidFill>
@@ -4305,8 +4165,8 @@
         </p:nvSpPr>
         <p:spPr>
           <a:xfrm>
-            <a:off x="1417320" y="1344168"/>
-            <a:ext cx="9875520" cy="548640"/>
+            <a:off x="1389888" y="1261872"/>
+            <a:ext cx="10058400" cy="772668"/>
           </a:xfrm>
           <a:prstGeom prst="rect">
             <a:avLst/>
@@ -4314,13 +4174,13 @@
           <a:noFill/>
         </p:spPr>
         <p:txBody>
-          <a:bodyPr wrap="square" lIns="36576" rIns="36576" tIns="27432" bIns="27432">
+          <a:bodyPr wrap="square" lIns="45720" rIns="45720" tIns="36576" bIns="36576" anchor="t">
             <a:spAutoFit/>
           </a:bodyPr>
           <a:lstStyle/>
           <a:p>
             <a:pPr algn="l">
-              <a:defRPr sz="2000" b="0">
+              <a:defRPr sz="1400" b="0">
                 <a:solidFill>
                   <a:srgbClr val="1C2330"/>
                 </a:solidFill>
@@ -4328,7 +4188,7 @@
               </a:defRPr>
             </a:pPr>
             <a:r>
-              <a:t>Lee el objetivo y escribe con tus palabras qué debe quedar terminado.</a:t>
+              <a:t>0–5 min — Presentar objetivo, producto y evidencia de hoy.</a:t>
             </a:r>
           </a:p>
         </p:txBody>
@@ -4341,8 +4201,8 @@
         </p:nvSpPr>
         <p:spPr>
           <a:xfrm>
-            <a:off x="685800" y="2258568"/>
-            <a:ext cx="502920" cy="502920"/>
+            <a:off x="658368" y="2125979"/>
+            <a:ext cx="475488" cy="475488"/>
           </a:xfrm>
           <a:prstGeom prst="ellipse">
             <a:avLst/>
@@ -4384,8 +4244,8 @@
         </p:nvSpPr>
         <p:spPr>
           <a:xfrm>
-            <a:off x="685800" y="2368296"/>
-            <a:ext cx="502920" cy="201168"/>
+            <a:off x="658368" y="2226563"/>
+            <a:ext cx="475488" cy="201168"/>
           </a:xfrm>
           <a:prstGeom prst="rect">
             <a:avLst/>
@@ -4393,13 +4253,13 @@
           <a:noFill/>
         </p:spPr>
         <p:txBody>
-          <a:bodyPr wrap="square" lIns="36576" rIns="36576" tIns="27432" bIns="27432">
+          <a:bodyPr wrap="square" lIns="45720" rIns="45720" tIns="36576" bIns="36576" anchor="t">
             <a:spAutoFit/>
           </a:bodyPr>
           <a:lstStyle/>
           <a:p>
             <a:pPr algn="ctr">
-              <a:defRPr sz="1400" b="1">
+              <a:defRPr sz="1300" b="1">
                 <a:solidFill>
                   <a:srgbClr val="FFFFFF"/>
                 </a:solidFill>
@@ -4420,8 +4280,8 @@
         </p:nvSpPr>
         <p:spPr>
           <a:xfrm>
-            <a:off x="1417320" y="2276856"/>
-            <a:ext cx="9875520" cy="548640"/>
+            <a:off x="1389888" y="2107691"/>
+            <a:ext cx="10058400" cy="772668"/>
           </a:xfrm>
           <a:prstGeom prst="rect">
             <a:avLst/>
@@ -4429,13 +4289,13 @@
           <a:noFill/>
         </p:spPr>
         <p:txBody>
-          <a:bodyPr wrap="square" lIns="36576" rIns="36576" tIns="27432" bIns="27432">
+          <a:bodyPr wrap="square" lIns="45720" rIns="45720" tIns="36576" bIns="36576" anchor="t">
             <a:spAutoFit/>
           </a:bodyPr>
           <a:lstStyle/>
           <a:p>
             <a:pPr algn="l">
-              <a:defRPr sz="2000" b="0">
+              <a:defRPr sz="1400" b="0">
                 <a:solidFill>
                   <a:srgbClr val="1C2330"/>
                 </a:solidFill>
@@ -4443,7 +4303,7 @@
               </a:defRPr>
             </a:pPr>
             <a:r>
-              <a:t>Atiende al ejemplo breve y anota una predicción, duda o decisión.</a:t>
+              <a:t>5–13 min — Explicación breve: Scanner permite leer información introducida por usuario.</a:t>
             </a:r>
           </a:p>
         </p:txBody>
@@ -4456,8 +4316,8 @@
         </p:nvSpPr>
         <p:spPr>
           <a:xfrm>
-            <a:off x="685800" y="3191256"/>
-            <a:ext cx="502920" cy="502920"/>
+            <a:off x="658368" y="2971799"/>
+            <a:ext cx="475488" cy="475488"/>
           </a:xfrm>
           <a:prstGeom prst="ellipse">
             <a:avLst/>
@@ -4499,8 +4359,8 @@
         </p:nvSpPr>
         <p:spPr>
           <a:xfrm>
-            <a:off x="685800" y="3300984"/>
-            <a:ext cx="502920" cy="201168"/>
+            <a:off x="658368" y="3072383"/>
+            <a:ext cx="475488" cy="201168"/>
           </a:xfrm>
           <a:prstGeom prst="rect">
             <a:avLst/>
@@ -4508,13 +4368,13 @@
           <a:noFill/>
         </p:spPr>
         <p:txBody>
-          <a:bodyPr wrap="square" lIns="36576" rIns="36576" tIns="27432" bIns="27432">
+          <a:bodyPr wrap="square" lIns="45720" rIns="45720" tIns="36576" bIns="36576" anchor="t">
             <a:spAutoFit/>
           </a:bodyPr>
           <a:lstStyle/>
           <a:p>
             <a:pPr algn="ctr">
-              <a:defRPr sz="1400" b="1">
+              <a:defRPr sz="1300" b="1">
                 <a:solidFill>
                   <a:srgbClr val="FFFFFF"/>
                 </a:solidFill>
@@ -4535,8 +4395,8 @@
         </p:nvSpPr>
         <p:spPr>
           <a:xfrm>
-            <a:off x="1417320" y="3209544"/>
-            <a:ext cx="9875520" cy="548640"/>
+            <a:off x="1389888" y="2953511"/>
+            <a:ext cx="10058400" cy="772668"/>
           </a:xfrm>
           <a:prstGeom prst="rect">
             <a:avLst/>
@@ -4544,13 +4404,13 @@
           <a:noFill/>
         </p:spPr>
         <p:txBody>
-          <a:bodyPr wrap="square" lIns="36576" rIns="36576" tIns="27432" bIns="27432">
+          <a:bodyPr wrap="square" lIns="45720" rIns="45720" tIns="36576" bIns="36576" anchor="t">
             <a:spAutoFit/>
           </a:bodyPr>
           <a:lstStyle/>
           <a:p>
             <a:pPr algn="l">
-              <a:defRPr sz="2000" b="0">
+              <a:defRPr sz="1400" b="0">
                 <a:solidFill>
                   <a:srgbClr val="1C2330"/>
                 </a:solidFill>
@@ -4558,7 +4418,7 @@
               </a:defRPr>
             </a:pPr>
             <a:r>
-              <a:t>Realiza esta tarea: MiniJarvis pregunta cuántas horas se han estudiado esta semana, convierte la entrada a número y muestra una recomendación sencilla.</a:t>
+              <a:t>13–18 min — Demostración o ejemplo: Leer una línea y usarla en un saludo.</a:t>
             </a:r>
           </a:p>
         </p:txBody>
@@ -4571,8 +4431,8 @@
         </p:nvSpPr>
         <p:spPr>
           <a:xfrm>
-            <a:off x="685800" y="4123944"/>
-            <a:ext cx="502920" cy="502920"/>
+            <a:off x="658368" y="3817620"/>
+            <a:ext cx="475488" cy="475488"/>
           </a:xfrm>
           <a:prstGeom prst="ellipse">
             <a:avLst/>
@@ -4614,8 +4474,8 @@
         </p:nvSpPr>
         <p:spPr>
           <a:xfrm>
-            <a:off x="685800" y="4233672"/>
-            <a:ext cx="502920" cy="201168"/>
+            <a:off x="658368" y="3918204"/>
+            <a:ext cx="475488" cy="201168"/>
           </a:xfrm>
           <a:prstGeom prst="rect">
             <a:avLst/>
@@ -4623,13 +4483,13 @@
           <a:noFill/>
         </p:spPr>
         <p:txBody>
-          <a:bodyPr wrap="square" lIns="36576" rIns="36576" tIns="27432" bIns="27432">
+          <a:bodyPr wrap="square" lIns="45720" rIns="45720" tIns="36576" bIns="36576" anchor="t">
             <a:spAutoFit/>
           </a:bodyPr>
           <a:lstStyle/>
           <a:p>
             <a:pPr algn="ctr">
-              <a:defRPr sz="1400" b="1">
+              <a:defRPr sz="1300" b="1">
                 <a:solidFill>
                   <a:srgbClr val="FFFFFF"/>
                 </a:solidFill>
@@ -4650,8 +4510,8 @@
         </p:nvSpPr>
         <p:spPr>
           <a:xfrm>
-            <a:off x="1417320" y="4142231"/>
-            <a:ext cx="9875520" cy="548640"/>
+            <a:off x="1389888" y="3799332"/>
+            <a:ext cx="10058400" cy="772668"/>
           </a:xfrm>
           <a:prstGeom prst="rect">
             <a:avLst/>
@@ -4659,13 +4519,13 @@
           <a:noFill/>
         </p:spPr>
         <p:txBody>
-          <a:bodyPr wrap="square" lIns="36576" rIns="36576" tIns="27432" bIns="27432">
+          <a:bodyPr wrap="square" lIns="45720" rIns="45720" tIns="36576" bIns="36576" anchor="t">
             <a:spAutoFit/>
           </a:bodyPr>
           <a:lstStyle/>
           <a:p>
             <a:pPr algn="l">
-              <a:defRPr sz="2000" b="0">
+              <a:defRPr sz="1400" b="0">
                 <a:solidFill>
                   <a:srgbClr val="1C2330"/>
                 </a:solidFill>
@@ -4673,7 +4533,7 @@
               </a:defRPr>
             </a:pPr>
             <a:r>
-              <a:t>Comprueba el resultado con una prueba observable; no basta con decir “funciona”.</a:t>
+              <a:t>18–35 min — Trabajo del alumnado: MiniJarvis pregunta cuántas horas se han estudiado esta semana, convierte la entrada a número y muestra una recomendación sencilla.</a:t>
             </a:r>
           </a:p>
         </p:txBody>
@@ -4686,8 +4546,8 @@
         </p:nvSpPr>
         <p:spPr>
           <a:xfrm>
-            <a:off x="685800" y="5056631"/>
-            <a:ext cx="502920" cy="502920"/>
+            <a:off x="658368" y="4663440"/>
+            <a:ext cx="475488" cy="475488"/>
           </a:xfrm>
           <a:prstGeom prst="ellipse">
             <a:avLst/>
@@ -4729,8 +4589,8 @@
         </p:nvSpPr>
         <p:spPr>
           <a:xfrm>
-            <a:off x="685800" y="5166359"/>
-            <a:ext cx="502920" cy="201168"/>
+            <a:off x="658368" y="4764024"/>
+            <a:ext cx="475488" cy="201168"/>
           </a:xfrm>
           <a:prstGeom prst="rect">
             <a:avLst/>
@@ -4738,13 +4598,13 @@
           <a:noFill/>
         </p:spPr>
         <p:txBody>
-          <a:bodyPr wrap="square" lIns="36576" rIns="36576" tIns="27432" bIns="27432">
+          <a:bodyPr wrap="square" lIns="45720" rIns="45720" tIns="36576" bIns="36576" anchor="t">
             <a:spAutoFit/>
           </a:bodyPr>
           <a:lstStyle/>
           <a:p>
             <a:pPr algn="ctr">
-              <a:defRPr sz="1400" b="1">
+              <a:defRPr sz="1300" b="1">
                 <a:solidFill>
                   <a:srgbClr val="FFFFFF"/>
                 </a:solidFill>
@@ -4765,8 +4625,8 @@
         </p:nvSpPr>
         <p:spPr>
           <a:xfrm>
-            <a:off x="1417320" y="5074919"/>
-            <a:ext cx="9875520" cy="548640"/>
+            <a:off x="1389888" y="4645152"/>
+            <a:ext cx="10058400" cy="772668"/>
           </a:xfrm>
           <a:prstGeom prst="rect">
             <a:avLst/>
@@ -4774,13 +4634,13 @@
           <a:noFill/>
         </p:spPr>
         <p:txBody>
-          <a:bodyPr wrap="square" lIns="36576" rIns="36576" tIns="27432" bIns="27432">
+          <a:bodyPr wrap="square" lIns="45720" rIns="45720" tIns="36576" bIns="36576" anchor="t">
             <a:spAutoFit/>
           </a:bodyPr>
           <a:lstStyle/>
           <a:p>
             <a:pPr algn="l">
-              <a:defRPr sz="2000" b="0">
+              <a:defRPr sz="1400" b="0">
                 <a:solidFill>
                   <a:srgbClr val="1C2330"/>
                 </a:solidFill>
@@ -4788,7 +4648,122 @@
               </a:defRPr>
             </a:pPr>
             <a:r>
-              <a:t>Guarda o entrega la evidencia indicada y prepárate para explicarla.</a:t>
+              <a:t>35–40 min — Comprobar la evidencia con una explicación o prueba breve.</a:t>
+            </a:r>
+          </a:p>
+        </p:txBody>
+      </p:sp>
+      <p:sp>
+        <p:nvSpPr>
+          <p:cNvPr id="23" name="Oval 22"/>
+          <p:cNvSpPr/>
+          <p:nvPr/>
+        </p:nvSpPr>
+        <p:spPr>
+          <a:xfrm>
+            <a:off x="658368" y="5509259"/>
+            <a:ext cx="475488" cy="475488"/>
+          </a:xfrm>
+          <a:prstGeom prst="ellipse">
+            <a:avLst/>
+          </a:prstGeom>
+          <a:solidFill>
+            <a:srgbClr val="2F5BA8"/>
+          </a:solidFill>
+          <a:ln>
+            <a:noFill/>
+          </a:ln>
+        </p:spPr>
+        <p:style>
+          <a:lnRef idx="1">
+            <a:schemeClr val="accent1"/>
+          </a:lnRef>
+          <a:fillRef idx="3">
+            <a:schemeClr val="accent1"/>
+          </a:fillRef>
+          <a:effectRef idx="2">
+            <a:schemeClr val="accent1"/>
+          </a:effectRef>
+          <a:fontRef idx="minor">
+            <a:schemeClr val="lt1"/>
+          </a:fontRef>
+        </p:style>
+        <p:txBody>
+          <a:bodyPr rtlCol="0" anchor="ctr"/>
+          <a:lstStyle/>
+          <a:p>
+            <a:pPr algn="ctr"/>
+          </a:p>
+        </p:txBody>
+      </p:sp>
+      <p:sp>
+        <p:nvSpPr>
+          <p:cNvPr id="24" name="TextBox 23"/>
+          <p:cNvSpPr txBox="1"/>
+          <p:nvPr/>
+        </p:nvSpPr>
+        <p:spPr>
+          <a:xfrm>
+            <a:off x="658368" y="5609844"/>
+            <a:ext cx="475488" cy="201168"/>
+          </a:xfrm>
+          <a:prstGeom prst="rect">
+            <a:avLst/>
+          </a:prstGeom>
+          <a:noFill/>
+        </p:spPr>
+        <p:txBody>
+          <a:bodyPr wrap="square" lIns="45720" rIns="45720" tIns="36576" bIns="36576" anchor="t">
+            <a:spAutoFit/>
+          </a:bodyPr>
+          <a:lstStyle/>
+          <a:p>
+            <a:pPr algn="ctr">
+              <a:defRPr sz="1300" b="1">
+                <a:solidFill>
+                  <a:srgbClr val="FFFFFF"/>
+                </a:solidFill>
+                <a:latin typeface="Aptos"/>
+              </a:defRPr>
+            </a:pPr>
+            <a:r>
+              <a:t>6</a:t>
+            </a:r>
+          </a:p>
+        </p:txBody>
+      </p:sp>
+      <p:sp>
+        <p:nvSpPr>
+          <p:cNvPr id="25" name="TextBox 24"/>
+          <p:cNvSpPr txBox="1"/>
+          <p:nvPr/>
+        </p:nvSpPr>
+        <p:spPr>
+          <a:xfrm>
+            <a:off x="1389888" y="5490972"/>
+            <a:ext cx="10058400" cy="772668"/>
+          </a:xfrm>
+          <a:prstGeom prst="rect">
+            <a:avLst/>
+          </a:prstGeom>
+          <a:noFill/>
+        </p:spPr>
+        <p:txBody>
+          <a:bodyPr wrap="square" lIns="45720" rIns="45720" tIns="36576" bIns="36576" anchor="t">
+            <a:spAutoFit/>
+          </a:bodyPr>
+          <a:lstStyle/>
+          <a:p>
+            <a:pPr algn="l">
+              <a:defRPr sz="1400" b="0">
+                <a:solidFill>
+                  <a:srgbClr val="1C2330"/>
+                </a:solidFill>
+                <a:latin typeface="Aptos"/>
+              </a:defRPr>
+            </a:pPr>
+            <a:r>
+              <a:t>40–45 min — Cierre: ¿por qué scanner.nextLine() devuelve texto aunque escribas un número?</a:t>
             </a:r>
           </a:p>
         </p:txBody>
@@ -4905,8 +4880,8 @@
         </p:nvSpPr>
         <p:spPr>
           <a:xfrm>
-            <a:off x="502920" y="310896"/>
-            <a:ext cx="5029200" cy="256032"/>
+            <a:off x="502920" y="274320"/>
+            <a:ext cx="5486400" cy="256032"/>
           </a:xfrm>
           <a:prstGeom prst="rect">
             <a:avLst/>
@@ -4914,7 +4889,7 @@
           <a:noFill/>
         </p:spPr>
         <p:txBody>
-          <a:bodyPr wrap="square" lIns="36576" rIns="36576" tIns="27432" bIns="27432">
+          <a:bodyPr wrap="square" lIns="45720" rIns="45720" tIns="36576" bIns="36576" anchor="t">
             <a:spAutoFit/>
           </a:bodyPr>
           <a:lstStyle/>
@@ -4928,7 +4903,7 @@
               </a:defRPr>
             </a:pPr>
             <a:r>
-              <a:t>COMPRENDER Y APLICAR</a:t>
+              <a:t>COMPRENDER Y TRANSFERIR</a:t>
             </a:r>
           </a:p>
         </p:txBody>
@@ -4941,7 +4916,7 @@
         </p:nvSpPr>
         <p:spPr>
           <a:xfrm>
-            <a:off x="502920" y="621792"/>
+            <a:off x="502920" y="603504"/>
             <a:ext cx="11064240" cy="530352"/>
           </a:xfrm>
           <a:prstGeom prst="rect">
@@ -4950,7 +4925,7 @@
           <a:noFill/>
         </p:spPr>
         <p:txBody>
-          <a:bodyPr wrap="square" lIns="36576" rIns="36576" tIns="27432" bIns="27432">
+          <a:bodyPr wrap="square" lIns="45720" rIns="45720" tIns="36576" bIns="36576" anchor="t">
             <a:spAutoFit/>
           </a:bodyPr>
           <a:lstStyle/>
@@ -4964,7 +4939,7 @@
               </a:defRPr>
             </a:pPr>
             <a:r>
-              <a:t>Claves para avanzar</a:t>
+              <a:t>Idea clave y puesta en práctica</a:t>
             </a:r>
           </a:p>
         </p:txBody>
@@ -5029,7 +5004,7 @@
           <a:noFill/>
         </p:spPr>
         <p:txBody>
-          <a:bodyPr wrap="square" lIns="36576" rIns="36576" tIns="27432" bIns="27432">
+          <a:bodyPr wrap="square" lIns="45720" rIns="45720" tIns="36576" bIns="36576" anchor="t">
             <a:spAutoFit/>
           </a:bodyPr>
           <a:lstStyle/>
@@ -5056,8 +5031,8 @@
         </p:nvSpPr>
         <p:spPr>
           <a:xfrm>
-            <a:off x="594360" y="1325880"/>
-            <a:ext cx="5257800" cy="4526280"/>
+            <a:off x="621792" y="1325880"/>
+            <a:ext cx="5285232" cy="4736592"/>
           </a:xfrm>
           <a:prstGeom prst="roundRect">
             <a:avLst/>
@@ -5067,7 +5042,7 @@
           </a:solidFill>
           <a:ln>
             <a:solidFill>
-              <a:srgbClr val="EBEEF2"/>
+              <a:srgbClr val="E5E9EF"/>
             </a:solidFill>
           </a:ln>
         </p:spPr>
@@ -5095,25 +5070,98 @@
       </p:sp>
       <p:sp>
         <p:nvSpPr>
-          <p:cNvPr id="9" name="Rounded Rectangle 8"/>
+          <p:cNvPr id="9" name="TextBox 8"/>
+          <p:cNvSpPr txBox="1"/>
+          <p:nvPr/>
+        </p:nvSpPr>
+        <p:spPr>
+          <a:xfrm>
+            <a:off x="932688" y="1627632"/>
+            <a:ext cx="2011680" cy="329184"/>
+          </a:xfrm>
+          <a:prstGeom prst="rect">
+            <a:avLst/>
+          </a:prstGeom>
+          <a:noFill/>
+        </p:spPr>
+        <p:txBody>
+          <a:bodyPr wrap="square" lIns="45720" rIns="45720" tIns="36576" bIns="36576" anchor="t">
+            <a:spAutoFit/>
+          </a:bodyPr>
+          <a:lstStyle/>
+          <a:p>
+            <a:pPr algn="l">
+              <a:defRPr sz="1300" b="1">
+                <a:solidFill>
+                  <a:srgbClr val="2F5BA8"/>
+                </a:solidFill>
+                <a:latin typeface="Aptos"/>
+              </a:defRPr>
+            </a:pPr>
+            <a:r>
+              <a:t>IDEA CLAVE</a:t>
+            </a:r>
+          </a:p>
+        </p:txBody>
+      </p:sp>
+      <p:sp>
+        <p:nvSpPr>
+          <p:cNvPr id="10" name="TextBox 9"/>
+          <p:cNvSpPr txBox="1"/>
+          <p:nvPr/>
+        </p:nvSpPr>
+        <p:spPr>
+          <a:xfrm>
+            <a:off x="932688" y="2176272"/>
+            <a:ext cx="4617720" cy="3429000"/>
+          </a:xfrm>
+          <a:prstGeom prst="rect">
+            <a:avLst/>
+          </a:prstGeom>
+          <a:noFill/>
+        </p:spPr>
+        <p:txBody>
+          <a:bodyPr wrap="square" lIns="73152" rIns="45720" tIns="36576">
+            <a:spAutoFit/>
+          </a:bodyPr>
+          <a:lstStyle/>
+          <a:p>
+            <a:pPr>
+              <a:spcAft>
+                <a:spcPts val="900"/>
+              </a:spcAft>
+              <a:defRPr sz="2300">
+                <a:solidFill>
+                  <a:srgbClr val="1C2330"/>
+                </a:solidFill>
+                <a:latin typeface="Aptos"/>
+              </a:defRPr>
+            </a:pPr>
+            <a:r>
+              <a:t>•  int, double, operadores aritméticos, comparación, precedencia básica y conversión String -&gt; número con Integer.parseInt.</a:t>
+            </a:r>
+          </a:p>
+        </p:txBody>
+      </p:sp>
+      <p:sp>
+        <p:nvSpPr>
+          <p:cNvPr id="11" name="Rounded Rectangle 10"/>
           <p:cNvSpPr/>
           <p:nvPr/>
         </p:nvSpPr>
         <p:spPr>
           <a:xfrm>
             <a:off x="6172200" y="1325880"/>
-            <a:ext cx="5413248" cy="4526280"/>
+            <a:ext cx="5394960" cy="4736592"/>
           </a:xfrm>
           <a:prstGeom prst="roundRect">
             <a:avLst/>
           </a:prstGeom>
           <a:solidFill>
-            <a:srgbClr val="FFFFFF"/>
+            <a:srgbClr val="121824"/>
           </a:solidFill>
           <a:ln>
-            <a:solidFill>
-              <a:srgbClr val="EBEEF2"/>
-            </a:solidFill>
+            <a:noFill/>
           </a:ln>
         </p:spPr>
         <p:style>
@@ -5140,14 +5188,14 @@
       </p:sp>
       <p:sp>
         <p:nvSpPr>
-          <p:cNvPr id="10" name="TextBox 9"/>
+          <p:cNvPr id="12" name="TextBox 11"/>
           <p:cNvSpPr txBox="1"/>
           <p:nvPr/>
         </p:nvSpPr>
         <p:spPr>
           <a:xfrm>
-            <a:off x="868680" y="1600200"/>
-            <a:ext cx="4663440" cy="365760"/>
+            <a:off x="6492240" y="1627632"/>
+            <a:ext cx="2194560" cy="329184"/>
           </a:xfrm>
           <a:prstGeom prst="rect">
             <a:avLst/>
@@ -5155,13 +5203,13 @@
           <a:noFill/>
         </p:spPr>
         <p:txBody>
-          <a:bodyPr wrap="square" lIns="36576" rIns="36576" tIns="27432" bIns="27432">
+          <a:bodyPr wrap="square" lIns="45720" rIns="45720" tIns="36576" bIns="36576" anchor="t">
             <a:spAutoFit/>
           </a:bodyPr>
           <a:lstStyle/>
           <a:p>
             <a:pPr algn="l">
-              <a:defRPr sz="1600" b="1">
+              <a:defRPr sz="1300" b="1">
                 <a:solidFill>
                   <a:srgbClr val="2F5BA8"/>
                 </a:solidFill>
@@ -5169,21 +5217,21 @@
               </a:defRPr>
             </a:pPr>
             <a:r>
-              <a:t>IDEAS CLAVE</a:t>
-            </a:r>
-          </a:p>
-        </p:txBody>
-      </p:sp>
-      <p:sp>
-        <p:nvSpPr>
-          <p:cNvPr id="11" name="TextBox 10"/>
+              <a:t>EN PRÁCTICA</a:t>
+            </a:r>
+          </a:p>
+        </p:txBody>
+      </p:sp>
+      <p:sp>
+        <p:nvSpPr>
+          <p:cNvPr id="13" name="TextBox 12"/>
           <p:cNvSpPr txBox="1"/>
           <p:nvPr/>
         </p:nvSpPr>
         <p:spPr>
           <a:xfrm>
-            <a:off x="868680" y="2121408"/>
-            <a:ext cx="4572000" cy="3337560"/>
+            <a:off x="6492240" y="2176272"/>
+            <a:ext cx="4617720" cy="3429000"/>
           </a:xfrm>
           <a:prstGeom prst="rect">
             <a:avLst/>
@@ -5198,118 +5246,11 @@
           <a:p>
             <a:pPr>
               <a:spcAft>
-                <a:spcPts val="1000"/>
+                <a:spcPts val="900"/>
               </a:spcAft>
-              <a:defRPr sz="1800">
-                <a:solidFill>
-                  <a:srgbClr val="1C2330"/>
-                </a:solidFill>
-                <a:latin typeface="Aptos"/>
-              </a:defRPr>
-            </a:pPr>
-            <a:r>
-              <a:t>•  int, double, operadores aritméticos, comparación, precedencia básica y conversión String -&gt; número con Integer.parseInt.</a:t>
-            </a:r>
-          </a:p>
-          <a:p>
-            <a:pPr>
-              <a:spcAft>
-                <a:spcPts val="1000"/>
-              </a:spcAft>
-              <a:defRPr sz="1800">
-                <a:solidFill>
-                  <a:srgbClr val="1C2330"/>
-                </a:solidFill>
-                <a:latin typeface="Aptos"/>
-              </a:defRPr>
-            </a:pPr>
-            <a:r>
-              <a:t>•  Guion breve sugerido:</a:t>
-            </a:r>
-          </a:p>
-          <a:p>
-            <a:pPr>
-              <a:spcAft>
-                <a:spcPts val="1000"/>
-              </a:spcAft>
-              <a:defRPr sz="1800">
-                <a:solidFill>
-                  <a:srgbClr val="1C2330"/>
-                </a:solidFill>
-                <a:latin typeface="Aptos"/>
-              </a:defRPr>
-            </a:pPr>
-            <a:r>
-              <a:t>•  &gt; Hoy necesitamos comprender y practicar lo justo para producir una evidencia verificable. Primero observaremos un ejemplo, después trabajaréis y al final cada pers…</a:t>
-            </a:r>
-          </a:p>
-        </p:txBody>
-      </p:sp>
-      <p:sp>
-        <p:nvSpPr>
-          <p:cNvPr id="12" name="TextBox 11"/>
-          <p:cNvSpPr txBox="1"/>
-          <p:nvPr/>
-        </p:nvSpPr>
-        <p:spPr>
-          <a:xfrm>
-            <a:off x="6446520" y="1600200"/>
-            <a:ext cx="4572000" cy="365760"/>
-          </a:xfrm>
-          <a:prstGeom prst="rect">
-            <a:avLst/>
-          </a:prstGeom>
-          <a:noFill/>
-        </p:spPr>
-        <p:txBody>
-          <a:bodyPr wrap="square" lIns="36576" rIns="36576" tIns="27432" bIns="27432">
-            <a:spAutoFit/>
-          </a:bodyPr>
-          <a:lstStyle/>
-          <a:p>
-            <a:pPr algn="l">
-              <a:defRPr sz="1600" b="1">
-                <a:solidFill>
-                  <a:srgbClr val="2F5BA8"/>
-                </a:solidFill>
-                <a:latin typeface="Aptos"/>
-              </a:defRPr>
-            </a:pPr>
-            <a:r>
-              <a:t>ACTIVIDAD CENTRAL</a:t>
-            </a:r>
-          </a:p>
-        </p:txBody>
-      </p:sp>
-      <p:sp>
-        <p:nvSpPr>
-          <p:cNvPr id="13" name="TextBox 12"/>
-          <p:cNvSpPr txBox="1"/>
-          <p:nvPr/>
-        </p:nvSpPr>
-        <p:spPr>
-          <a:xfrm>
-            <a:off x="6446520" y="2121408"/>
-            <a:ext cx="4617720" cy="3337560"/>
-          </a:xfrm>
-          <a:prstGeom prst="rect">
-            <a:avLst/>
-          </a:prstGeom>
-          <a:noFill/>
-        </p:spPr>
-        <p:txBody>
-          <a:bodyPr wrap="square" lIns="73152" rIns="45720" tIns="36576">
-            <a:spAutoFit/>
-          </a:bodyPr>
-          <a:lstStyle/>
-          <a:p>
-            <a:pPr>
-              <a:spcAft>
-                <a:spcPts val="1000"/>
-              </a:spcAft>
-              <a:defRPr sz="1800">
-                <a:solidFill>
-                  <a:srgbClr val="1C2330"/>
+              <a:defRPr sz="2300">
+                <a:solidFill>
+                  <a:srgbClr val="FFFFFF"/>
                 </a:solidFill>
                 <a:latin typeface="Aptos"/>
               </a:defRPr>
@@ -5432,8 +5373,8 @@
         </p:nvSpPr>
         <p:spPr>
           <a:xfrm>
-            <a:off x="502920" y="310896"/>
-            <a:ext cx="5029200" cy="256032"/>
+            <a:off x="502920" y="274320"/>
+            <a:ext cx="5486400" cy="256032"/>
           </a:xfrm>
           <a:prstGeom prst="rect">
             <a:avLst/>
@@ -5441,7 +5382,7 @@
           <a:noFill/>
         </p:spPr>
         <p:txBody>
-          <a:bodyPr wrap="square" lIns="36576" rIns="36576" tIns="27432" bIns="27432">
+          <a:bodyPr wrap="square" lIns="45720" rIns="45720" tIns="36576" bIns="36576" anchor="t">
             <a:spAutoFit/>
           </a:bodyPr>
           <a:lstStyle/>
@@ -5455,7 +5396,7 @@
               </a:defRPr>
             </a:pPr>
             <a:r>
-              <a:t>EVIDENCIA MÍNIMA</a:t>
+              <a:t>APLICAR Y DECIDIR</a:t>
             </a:r>
           </a:p>
         </p:txBody>
@@ -5468,7 +5409,7 @@
         </p:nvSpPr>
         <p:spPr>
           <a:xfrm>
-            <a:off x="502920" y="621792"/>
+            <a:off x="502920" y="603504"/>
             <a:ext cx="11064240" cy="530352"/>
           </a:xfrm>
           <a:prstGeom prst="rect">
@@ -5477,7 +5418,7 @@
           <a:noFill/>
         </p:spPr>
         <p:txBody>
-          <a:bodyPr wrap="square" lIns="36576" rIns="36576" tIns="27432" bIns="27432">
+          <a:bodyPr wrap="square" lIns="45720" rIns="45720" tIns="36576" bIns="36576" anchor="t">
             <a:spAutoFit/>
           </a:bodyPr>
           <a:lstStyle/>
@@ -5491,7 +5432,7 @@
               </a:defRPr>
             </a:pPr>
             <a:r>
-              <a:t>Antes de salir, comprueba</a:t>
+              <a:t>Actividad central</a:t>
             </a:r>
           </a:p>
         </p:txBody>
@@ -5556,7 +5497,7 @@
           <a:noFill/>
         </p:spPr>
         <p:txBody>
-          <a:bodyPr wrap="square" lIns="36576" rIns="36576" tIns="27432" bIns="27432">
+          <a:bodyPr wrap="square" lIns="45720" rIns="45720" tIns="36576" bIns="36576" anchor="t">
             <a:spAutoFit/>
           </a:bodyPr>
           <a:lstStyle/>
@@ -5583,8 +5524,8 @@
         </p:nvSpPr>
         <p:spPr>
           <a:xfrm>
-            <a:off x="713232" y="1371600"/>
-            <a:ext cx="420624" cy="420624"/>
+            <a:off x="658368" y="1307592"/>
+            <a:ext cx="10835640" cy="2226564"/>
           </a:xfrm>
           <a:prstGeom prst="roundRect">
             <a:avLst/>
@@ -5594,7 +5535,7 @@
           </a:solidFill>
           <a:ln>
             <a:solidFill>
-              <a:srgbClr val="2F5BA8"/>
+              <a:srgbClr val="E5E9EF"/>
             </a:solidFill>
           </a:ln>
         </p:spPr>
@@ -5628,8 +5569,8 @@
         </p:nvSpPr>
         <p:spPr>
           <a:xfrm>
-            <a:off x="1389888" y="1362456"/>
-            <a:ext cx="9784080" cy="594360"/>
+            <a:off x="850392" y="1453895"/>
+            <a:ext cx="685800" cy="384048"/>
           </a:xfrm>
           <a:prstGeom prst="rect">
             <a:avLst/>
@@ -5637,12 +5578,48 @@
           <a:noFill/>
         </p:spPr>
         <p:txBody>
-          <a:bodyPr wrap="square" lIns="36576" rIns="36576" tIns="27432" bIns="27432">
+          <a:bodyPr wrap="square" lIns="45720" rIns="45720" tIns="36576" bIns="36576" anchor="t">
             <a:spAutoFit/>
           </a:bodyPr>
           <a:lstStyle/>
           <a:p>
             <a:pPr algn="l">
+              <a:defRPr sz="1200" b="1">
+                <a:solidFill>
+                  <a:srgbClr val="2F5BA8"/>
+                </a:solidFill>
+                <a:latin typeface="Aptos"/>
+              </a:defRPr>
+            </a:pPr>
+            <a:r>
+              <a:t>PASO 1</a:t>
+            </a:r>
+          </a:p>
+        </p:txBody>
+      </p:sp>
+      <p:sp>
+        <p:nvSpPr>
+          <p:cNvPr id="10" name="TextBox 9"/>
+          <p:cNvSpPr txBox="1"/>
+          <p:nvPr/>
+        </p:nvSpPr>
+        <p:spPr>
+          <a:xfrm>
+            <a:off x="1664208" y="1417319"/>
+            <a:ext cx="9464040" cy="2007108"/>
+          </a:xfrm>
+          <a:prstGeom prst="rect">
+            <a:avLst/>
+          </a:prstGeom>
+          <a:noFill/>
+        </p:spPr>
+        <p:txBody>
+          <a:bodyPr wrap="square" lIns="45720" rIns="45720" tIns="36576" bIns="36576" anchor="t">
+            <a:spAutoFit/>
+          </a:bodyPr>
+          <a:lstStyle/>
+          <a:p>
+            <a:pPr algn="l">
               <a:defRPr sz="2000" b="0">
                 <a:solidFill>
                   <a:srgbClr val="1C2330"/>
@@ -5651,21 +5628,21 @@
               </a:defRPr>
             </a:pPr>
             <a:r>
-              <a:t>He producido o actualizado: Código o ejercicio corto con entrada numérica, cálculo, comparación y prueba con dato válido e inválido.</a:t>
-            </a:r>
-          </a:p>
-        </p:txBody>
-      </p:sp>
-      <p:sp>
-        <p:nvSpPr>
-          <p:cNvPr id="10" name="Rounded Rectangle 9"/>
+              <a:t>Pedir nombre y responder con ese nombre.</a:t>
+            </a:r>
+          </a:p>
+        </p:txBody>
+      </p:sp>
+      <p:sp>
+        <p:nvSpPr>
+          <p:cNvPr id="11" name="Rounded Rectangle 10"/>
           <p:cNvSpPr/>
           <p:nvPr/>
         </p:nvSpPr>
         <p:spPr>
           <a:xfrm>
-            <a:off x="713232" y="2267712"/>
-            <a:ext cx="420624" cy="420624"/>
+            <a:off x="658368" y="3776472"/>
+            <a:ext cx="10835640" cy="2226564"/>
           </a:xfrm>
           <a:prstGeom prst="roundRect">
             <a:avLst/>
@@ -5675,7 +5652,7 @@
           </a:solidFill>
           <a:ln>
             <a:solidFill>
-              <a:srgbClr val="2F5BA8"/>
+              <a:srgbClr val="E5E9EF"/>
             </a:solidFill>
           </a:ln>
         </p:spPr>
@@ -5703,14 +5680,14 @@
       </p:sp>
       <p:sp>
         <p:nvSpPr>
-          <p:cNvPr id="11" name="TextBox 10"/>
+          <p:cNvPr id="12" name="TextBox 11"/>
           <p:cNvSpPr txBox="1"/>
           <p:nvPr/>
         </p:nvSpPr>
         <p:spPr>
           <a:xfrm>
-            <a:off x="1389888" y="2258568"/>
-            <a:ext cx="9784080" cy="594360"/>
+            <a:off x="850392" y="3922776"/>
+            <a:ext cx="685800" cy="384048"/>
           </a:xfrm>
           <a:prstGeom prst="rect">
             <a:avLst/>
@@ -5718,67 +5695,22 @@
           <a:noFill/>
         </p:spPr>
         <p:txBody>
-          <a:bodyPr wrap="square" lIns="36576" rIns="36576" tIns="27432" bIns="27432">
+          <a:bodyPr wrap="square" lIns="45720" rIns="45720" tIns="36576" bIns="36576" anchor="t">
             <a:spAutoFit/>
           </a:bodyPr>
           <a:lstStyle/>
           <a:p>
             <a:pPr algn="l">
-              <a:defRPr sz="2000" b="0">
-                <a:solidFill>
-                  <a:srgbClr val="1C2330"/>
+              <a:defRPr sz="1200" b="1">
+                <a:solidFill>
+                  <a:srgbClr val="2F5BA8"/>
                 </a:solidFill>
                 <a:latin typeface="Aptos"/>
               </a:defRPr>
             </a:pPr>
             <a:r>
-              <a:t>Puedo señalar dónde está.</a:t>
-            </a:r>
-          </a:p>
-        </p:txBody>
-      </p:sp>
-      <p:sp>
-        <p:nvSpPr>
-          <p:cNvPr id="12" name="Rounded Rectangle 11"/>
-          <p:cNvSpPr/>
-          <p:nvPr/>
-        </p:nvSpPr>
-        <p:spPr>
-          <a:xfrm>
-            <a:off x="713232" y="3163824"/>
-            <a:ext cx="420624" cy="420624"/>
-          </a:xfrm>
-          <a:prstGeom prst="roundRect">
-            <a:avLst/>
-          </a:prstGeom>
-          <a:solidFill>
-            <a:srgbClr val="FFFFFF"/>
-          </a:solidFill>
-          <a:ln>
-            <a:solidFill>
-              <a:srgbClr val="2F5BA8"/>
-            </a:solidFill>
-          </a:ln>
-        </p:spPr>
-        <p:style>
-          <a:lnRef idx="1">
-            <a:schemeClr val="accent1"/>
-          </a:lnRef>
-          <a:fillRef idx="3">
-            <a:schemeClr val="accent1"/>
-          </a:fillRef>
-          <a:effectRef idx="2">
-            <a:schemeClr val="accent1"/>
-          </a:effectRef>
-          <a:fontRef idx="minor">
-            <a:schemeClr val="lt1"/>
-          </a:fontRef>
-        </p:style>
-        <p:txBody>
-          <a:bodyPr rtlCol="0" anchor="ctr"/>
-          <a:lstStyle/>
-          <a:p>
-            <a:pPr algn="ctr"/>
+              <a:t>PASO 2</a:t>
+            </a:r>
           </a:p>
         </p:txBody>
       </p:sp>
@@ -5790,8 +5722,8 @@
         </p:nvSpPr>
         <p:spPr>
           <a:xfrm>
-            <a:off x="1389888" y="3154680"/>
-            <a:ext cx="9784080" cy="594360"/>
+            <a:off x="1664208" y="3886200"/>
+            <a:ext cx="9464040" cy="2007108"/>
           </a:xfrm>
           <a:prstGeom prst="rect">
             <a:avLst/>
@@ -5799,7 +5731,7 @@
           <a:noFill/>
         </p:spPr>
         <p:txBody>
-          <a:bodyPr wrap="square" lIns="36576" rIns="36576" tIns="27432" bIns="27432">
+          <a:bodyPr wrap="square" lIns="45720" rIns="45720" tIns="36576" bIns="36576" anchor="t">
             <a:spAutoFit/>
           </a:bodyPr>
           <a:lstStyle/>
@@ -5813,205 +5745,7 @@
               </a:defRPr>
             </a:pPr>
             <a:r>
-              <a:t>Puedo explicar una decisión tomada.</a:t>
-            </a:r>
-          </a:p>
-        </p:txBody>
-      </p:sp>
-      <p:sp>
-        <p:nvSpPr>
-          <p:cNvPr id="14" name="Rounded Rectangle 13"/>
-          <p:cNvSpPr/>
-          <p:nvPr/>
-        </p:nvSpPr>
-        <p:spPr>
-          <a:xfrm>
-            <a:off x="713232" y="4059935"/>
-            <a:ext cx="420624" cy="420624"/>
-          </a:xfrm>
-          <a:prstGeom prst="roundRect">
-            <a:avLst/>
-          </a:prstGeom>
-          <a:solidFill>
-            <a:srgbClr val="FFFFFF"/>
-          </a:solidFill>
-          <a:ln>
-            <a:solidFill>
-              <a:srgbClr val="2F5BA8"/>
-            </a:solidFill>
-          </a:ln>
-        </p:spPr>
-        <p:style>
-          <a:lnRef idx="1">
-            <a:schemeClr val="accent1"/>
-          </a:lnRef>
-          <a:fillRef idx="3">
-            <a:schemeClr val="accent1"/>
-          </a:fillRef>
-          <a:effectRef idx="2">
-            <a:schemeClr val="accent1"/>
-          </a:effectRef>
-          <a:fontRef idx="minor">
-            <a:schemeClr val="lt1"/>
-          </a:fontRef>
-        </p:style>
-        <p:txBody>
-          <a:bodyPr rtlCol="0" anchor="ctr"/>
-          <a:lstStyle/>
-          <a:p>
-            <a:pPr algn="ctr"/>
-          </a:p>
-        </p:txBody>
-      </p:sp>
-      <p:sp>
-        <p:nvSpPr>
-          <p:cNvPr id="15" name="TextBox 14"/>
-          <p:cNvSpPr txBox="1"/>
-          <p:nvPr/>
-        </p:nvSpPr>
-        <p:spPr>
-          <a:xfrm>
-            <a:off x="1389888" y="4050791"/>
-            <a:ext cx="9784080" cy="594360"/>
-          </a:xfrm>
-          <a:prstGeom prst="rect">
-            <a:avLst/>
-          </a:prstGeom>
-          <a:noFill/>
-        </p:spPr>
-        <p:txBody>
-          <a:bodyPr wrap="square" lIns="36576" rIns="36576" tIns="27432" bIns="27432">
-            <a:spAutoFit/>
-          </a:bodyPr>
-          <a:lstStyle/>
-          <a:p>
-            <a:pPr algn="l">
-              <a:defRPr sz="2000" b="0">
-                <a:solidFill>
-                  <a:srgbClr val="1C2330"/>
-                </a:solidFill>
-                <a:latin typeface="Aptos"/>
-              </a:defRPr>
-            </a:pPr>
-            <a:r>
-              <a:t>Puedo mostrar una prueba o comprobación.</a:t>
-            </a:r>
-          </a:p>
-        </p:txBody>
-      </p:sp>
-      <p:sp>
-        <p:nvSpPr>
-          <p:cNvPr id="16" name="Rounded Rectangle 15"/>
-          <p:cNvSpPr/>
-          <p:nvPr/>
-        </p:nvSpPr>
-        <p:spPr>
-          <a:xfrm>
-            <a:off x="713232" y="4956048"/>
-            <a:ext cx="420624" cy="420624"/>
-          </a:xfrm>
-          <a:prstGeom prst="roundRect">
-            <a:avLst/>
-          </a:prstGeom>
-          <a:solidFill>
-            <a:srgbClr val="FFFFFF"/>
-          </a:solidFill>
-          <a:ln>
-            <a:solidFill>
-              <a:srgbClr val="2F5BA8"/>
-            </a:solidFill>
-          </a:ln>
-        </p:spPr>
-        <p:style>
-          <a:lnRef idx="1">
-            <a:schemeClr val="accent1"/>
-          </a:lnRef>
-          <a:fillRef idx="3">
-            <a:schemeClr val="accent1"/>
-          </a:fillRef>
-          <a:effectRef idx="2">
-            <a:schemeClr val="accent1"/>
-          </a:effectRef>
-          <a:fontRef idx="minor">
-            <a:schemeClr val="lt1"/>
-          </a:fontRef>
-        </p:style>
-        <p:txBody>
-          <a:bodyPr rtlCol="0" anchor="ctr"/>
-          <a:lstStyle/>
-          <a:p>
-            <a:pPr algn="ctr"/>
-          </a:p>
-        </p:txBody>
-      </p:sp>
-      <p:sp>
-        <p:nvSpPr>
-          <p:cNvPr id="17" name="TextBox 16"/>
-          <p:cNvSpPr txBox="1"/>
-          <p:nvPr/>
-        </p:nvSpPr>
-        <p:spPr>
-          <a:xfrm>
-            <a:off x="1389888" y="4946904"/>
-            <a:ext cx="9784080" cy="594360"/>
-          </a:xfrm>
-          <a:prstGeom prst="rect">
-            <a:avLst/>
-          </a:prstGeom>
-          <a:noFill/>
-        </p:spPr>
-        <p:txBody>
-          <a:bodyPr wrap="square" lIns="36576" rIns="36576" tIns="27432" bIns="27432">
-            <a:spAutoFit/>
-          </a:bodyPr>
-          <a:lstStyle/>
-          <a:p>
-            <a:pPr algn="l">
-              <a:defRPr sz="2000" b="0">
-                <a:solidFill>
-                  <a:srgbClr val="1C2330"/>
-                </a:solidFill>
-                <a:latin typeface="Aptos"/>
-              </a:defRPr>
-            </a:pPr>
-            <a:r>
-              <a:t>He registrado mi aportación individual si el trabajo era de equipo.</a:t>
-            </a:r>
-          </a:p>
-        </p:txBody>
-      </p:sp>
-      <p:sp>
-        <p:nvSpPr>
-          <p:cNvPr id="18" name="TextBox 17"/>
-          <p:cNvSpPr txBox="1"/>
-          <p:nvPr/>
-        </p:nvSpPr>
-        <p:spPr>
-          <a:xfrm>
-            <a:off x="731520" y="5925312"/>
-            <a:ext cx="10789920" cy="274320"/>
-          </a:xfrm>
-          <a:prstGeom prst="rect">
-            <a:avLst/>
-          </a:prstGeom>
-          <a:noFill/>
-        </p:spPr>
-        <p:txBody>
-          <a:bodyPr wrap="square" lIns="36576" rIns="36576" tIns="27432" bIns="27432">
-            <a:spAutoFit/>
-          </a:bodyPr>
-          <a:lstStyle/>
-          <a:p>
-            <a:pPr algn="l">
-              <a:defRPr sz="1200" b="0">
-                <a:solidFill>
-                  <a:srgbClr val="586270"/>
-                </a:solidFill>
-                <a:latin typeface="Aptos"/>
-              </a:defRPr>
-            </a:pPr>
-            <a:r>
-              <a:t>Necesitas: Un ordenador por estudiante o pareja, con JDK e IntelliJ disponibles y el proyecto del hito accesible.</a:t>
+              <a:t>Comprueba y registra la evidencia: Código o ejercicio corto con entrada numérica, cálculo, comparación y prueba con dato válido e inválido.</a:t>
             </a:r>
           </a:p>
         </p:txBody>
@@ -6128,8 +5862,8 @@
         </p:nvSpPr>
         <p:spPr>
           <a:xfrm>
-            <a:off x="502920" y="310896"/>
-            <a:ext cx="5029200" cy="256032"/>
+            <a:off x="502920" y="274320"/>
+            <a:ext cx="5486400" cy="256032"/>
           </a:xfrm>
           <a:prstGeom prst="rect">
             <a:avLst/>
@@ -6137,7 +5871,7 @@
           <a:noFill/>
         </p:spPr>
         <p:txBody>
-          <a:bodyPr wrap="square" lIns="36576" rIns="36576" tIns="27432" bIns="27432">
+          <a:bodyPr wrap="square" lIns="45720" rIns="45720" tIns="36576" bIns="36576" anchor="t">
             <a:spAutoFit/>
           </a:bodyPr>
           <a:lstStyle/>
@@ -6151,7 +5885,7 @@
               </a:defRPr>
             </a:pPr>
             <a:r>
-              <a:t>COMPRUEBA Y EXPLICA</a:t>
+              <a:t>COMPROBAR</a:t>
             </a:r>
           </a:p>
         </p:txBody>
@@ -6164,7 +5898,7 @@
         </p:nvSpPr>
         <p:spPr>
           <a:xfrm>
-            <a:off x="502920" y="621792"/>
+            <a:off x="502920" y="603504"/>
             <a:ext cx="11064240" cy="530352"/>
           </a:xfrm>
           <a:prstGeom prst="rect">
@@ -6173,7 +5907,7 @@
           <a:noFill/>
         </p:spPr>
         <p:txBody>
-          <a:bodyPr wrap="square" lIns="36576" rIns="36576" tIns="27432" bIns="27432">
+          <a:bodyPr wrap="square" lIns="45720" rIns="45720" tIns="36576" bIns="36576" anchor="t">
             <a:spAutoFit/>
           </a:bodyPr>
           <a:lstStyle/>
@@ -6187,7 +5921,7 @@
               </a:defRPr>
             </a:pPr>
             <a:r>
-              <a:t>Cierre de la sesión</a:t>
+              <a:t>Evidencia y comprobación</a:t>
             </a:r>
           </a:p>
         </p:txBody>
@@ -6252,7 +5986,7 @@
           <a:noFill/>
         </p:spPr>
         <p:txBody>
-          <a:bodyPr wrap="square" lIns="36576" rIns="36576" tIns="27432" bIns="27432">
+          <a:bodyPr wrap="square" lIns="45720" rIns="45720" tIns="36576" bIns="36576" anchor="t">
             <a:spAutoFit/>
           </a:bodyPr>
           <a:lstStyle/>
@@ -6279,10 +6013,476 @@
         </p:nvSpPr>
         <p:spPr>
           <a:xfrm>
-            <a:off x="621792" y="1298448"/>
-            <a:ext cx="10927080" cy="1965960"/>
+            <a:off x="713232" y="1298448"/>
+            <a:ext cx="420624" cy="420624"/>
           </a:xfrm>
           <a:prstGeom prst="roundRect">
+            <a:avLst/>
+          </a:prstGeom>
+          <a:solidFill>
+            <a:srgbClr val="FFFFFF"/>
+          </a:solidFill>
+          <a:ln>
+            <a:solidFill>
+              <a:srgbClr val="2F5BA8"/>
+            </a:solidFill>
+          </a:ln>
+        </p:spPr>
+        <p:style>
+          <a:lnRef idx="1">
+            <a:schemeClr val="accent1"/>
+          </a:lnRef>
+          <a:fillRef idx="3">
+            <a:schemeClr val="accent1"/>
+          </a:fillRef>
+          <a:effectRef idx="2">
+            <a:schemeClr val="accent1"/>
+          </a:effectRef>
+          <a:fontRef idx="minor">
+            <a:schemeClr val="lt1"/>
+          </a:fontRef>
+        </p:style>
+        <p:txBody>
+          <a:bodyPr rtlCol="0" anchor="ctr"/>
+          <a:lstStyle/>
+          <a:p>
+            <a:pPr algn="ctr"/>
+          </a:p>
+        </p:txBody>
+      </p:sp>
+      <p:sp>
+        <p:nvSpPr>
+          <p:cNvPr id="9" name="TextBox 8"/>
+          <p:cNvSpPr txBox="1"/>
+          <p:nvPr/>
+        </p:nvSpPr>
+        <p:spPr>
+          <a:xfrm>
+            <a:off x="1389888" y="1280160"/>
+            <a:ext cx="9829800" cy="960120"/>
+          </a:xfrm>
+          <a:prstGeom prst="rect">
+            <a:avLst/>
+          </a:prstGeom>
+          <a:noFill/>
+        </p:spPr>
+        <p:txBody>
+          <a:bodyPr wrap="square" lIns="45720" rIns="45720" tIns="36576" bIns="36576" anchor="t">
+            <a:spAutoFit/>
+          </a:bodyPr>
+          <a:lstStyle/>
+          <a:p>
+            <a:pPr algn="l">
+              <a:defRPr sz="1900" b="0">
+                <a:solidFill>
+                  <a:srgbClr val="1C2330"/>
+                </a:solidFill>
+                <a:latin typeface="Aptos"/>
+              </a:defRPr>
+            </a:pPr>
+            <a:r>
+              <a:t>He producido o actualizado: Código o ejercicio corto con entrada numérica, cálculo, comparación y prueba con dato válido e inválido.</a:t>
+            </a:r>
+          </a:p>
+        </p:txBody>
+      </p:sp>
+      <p:sp>
+        <p:nvSpPr>
+          <p:cNvPr id="10" name="Rounded Rectangle 9"/>
+          <p:cNvSpPr/>
+          <p:nvPr/>
+        </p:nvSpPr>
+        <p:spPr>
+          <a:xfrm>
+            <a:off x="713232" y="2295144"/>
+            <a:ext cx="420624" cy="420624"/>
+          </a:xfrm>
+          <a:prstGeom prst="roundRect">
+            <a:avLst/>
+          </a:prstGeom>
+          <a:solidFill>
+            <a:srgbClr val="FFFFFF"/>
+          </a:solidFill>
+          <a:ln>
+            <a:solidFill>
+              <a:srgbClr val="2F5BA8"/>
+            </a:solidFill>
+          </a:ln>
+        </p:spPr>
+        <p:style>
+          <a:lnRef idx="1">
+            <a:schemeClr val="accent1"/>
+          </a:lnRef>
+          <a:fillRef idx="3">
+            <a:schemeClr val="accent1"/>
+          </a:fillRef>
+          <a:effectRef idx="2">
+            <a:schemeClr val="accent1"/>
+          </a:effectRef>
+          <a:fontRef idx="minor">
+            <a:schemeClr val="lt1"/>
+          </a:fontRef>
+        </p:style>
+        <p:txBody>
+          <a:bodyPr rtlCol="0" anchor="ctr"/>
+          <a:lstStyle/>
+          <a:p>
+            <a:pPr algn="ctr"/>
+          </a:p>
+        </p:txBody>
+      </p:sp>
+      <p:sp>
+        <p:nvSpPr>
+          <p:cNvPr id="11" name="TextBox 10"/>
+          <p:cNvSpPr txBox="1"/>
+          <p:nvPr/>
+        </p:nvSpPr>
+        <p:spPr>
+          <a:xfrm>
+            <a:off x="1389888" y="2276856"/>
+            <a:ext cx="9829800" cy="960120"/>
+          </a:xfrm>
+          <a:prstGeom prst="rect">
+            <a:avLst/>
+          </a:prstGeom>
+          <a:noFill/>
+        </p:spPr>
+        <p:txBody>
+          <a:bodyPr wrap="square" lIns="45720" rIns="45720" tIns="36576" bIns="36576" anchor="t">
+            <a:spAutoFit/>
+          </a:bodyPr>
+          <a:lstStyle/>
+          <a:p>
+            <a:pPr algn="l">
+              <a:defRPr sz="1900" b="0">
+                <a:solidFill>
+                  <a:srgbClr val="1C2330"/>
+                </a:solidFill>
+                <a:latin typeface="Aptos"/>
+              </a:defRPr>
+            </a:pPr>
+            <a:r>
+              <a:t>Puedo señalar dónde está.</a:t>
+            </a:r>
+          </a:p>
+        </p:txBody>
+      </p:sp>
+      <p:sp>
+        <p:nvSpPr>
+          <p:cNvPr id="12" name="Rounded Rectangle 11"/>
+          <p:cNvSpPr/>
+          <p:nvPr/>
+        </p:nvSpPr>
+        <p:spPr>
+          <a:xfrm>
+            <a:off x="713232" y="3291839"/>
+            <a:ext cx="420624" cy="420624"/>
+          </a:xfrm>
+          <a:prstGeom prst="roundRect">
+            <a:avLst/>
+          </a:prstGeom>
+          <a:solidFill>
+            <a:srgbClr val="FFFFFF"/>
+          </a:solidFill>
+          <a:ln>
+            <a:solidFill>
+              <a:srgbClr val="2F5BA8"/>
+            </a:solidFill>
+          </a:ln>
+        </p:spPr>
+        <p:style>
+          <a:lnRef idx="1">
+            <a:schemeClr val="accent1"/>
+          </a:lnRef>
+          <a:fillRef idx="3">
+            <a:schemeClr val="accent1"/>
+          </a:fillRef>
+          <a:effectRef idx="2">
+            <a:schemeClr val="accent1"/>
+          </a:effectRef>
+          <a:fontRef idx="minor">
+            <a:schemeClr val="lt1"/>
+          </a:fontRef>
+        </p:style>
+        <p:txBody>
+          <a:bodyPr rtlCol="0" anchor="ctr"/>
+          <a:lstStyle/>
+          <a:p>
+            <a:pPr algn="ctr"/>
+          </a:p>
+        </p:txBody>
+      </p:sp>
+      <p:sp>
+        <p:nvSpPr>
+          <p:cNvPr id="13" name="TextBox 12"/>
+          <p:cNvSpPr txBox="1"/>
+          <p:nvPr/>
+        </p:nvSpPr>
+        <p:spPr>
+          <a:xfrm>
+            <a:off x="1389888" y="3273551"/>
+            <a:ext cx="9829800" cy="960120"/>
+          </a:xfrm>
+          <a:prstGeom prst="rect">
+            <a:avLst/>
+          </a:prstGeom>
+          <a:noFill/>
+        </p:spPr>
+        <p:txBody>
+          <a:bodyPr wrap="square" lIns="45720" rIns="45720" tIns="36576" bIns="36576" anchor="t">
+            <a:spAutoFit/>
+          </a:bodyPr>
+          <a:lstStyle/>
+          <a:p>
+            <a:pPr algn="l">
+              <a:defRPr sz="1900" b="0">
+                <a:solidFill>
+                  <a:srgbClr val="1C2330"/>
+                </a:solidFill>
+                <a:latin typeface="Aptos"/>
+              </a:defRPr>
+            </a:pPr>
+            <a:r>
+              <a:t>Puedo explicar una decisión tomada.</a:t>
+            </a:r>
+          </a:p>
+        </p:txBody>
+      </p:sp>
+      <p:sp>
+        <p:nvSpPr>
+          <p:cNvPr id="14" name="Rounded Rectangle 13"/>
+          <p:cNvSpPr/>
+          <p:nvPr/>
+        </p:nvSpPr>
+        <p:spPr>
+          <a:xfrm>
+            <a:off x="713232" y="4288536"/>
+            <a:ext cx="420624" cy="420624"/>
+          </a:xfrm>
+          <a:prstGeom prst="roundRect">
+            <a:avLst/>
+          </a:prstGeom>
+          <a:solidFill>
+            <a:srgbClr val="FFFFFF"/>
+          </a:solidFill>
+          <a:ln>
+            <a:solidFill>
+              <a:srgbClr val="2F5BA8"/>
+            </a:solidFill>
+          </a:ln>
+        </p:spPr>
+        <p:style>
+          <a:lnRef idx="1">
+            <a:schemeClr val="accent1"/>
+          </a:lnRef>
+          <a:fillRef idx="3">
+            <a:schemeClr val="accent1"/>
+          </a:fillRef>
+          <a:effectRef idx="2">
+            <a:schemeClr val="accent1"/>
+          </a:effectRef>
+          <a:fontRef idx="minor">
+            <a:schemeClr val="lt1"/>
+          </a:fontRef>
+        </p:style>
+        <p:txBody>
+          <a:bodyPr rtlCol="0" anchor="ctr"/>
+          <a:lstStyle/>
+          <a:p>
+            <a:pPr algn="ctr"/>
+          </a:p>
+        </p:txBody>
+      </p:sp>
+      <p:sp>
+        <p:nvSpPr>
+          <p:cNvPr id="15" name="TextBox 14"/>
+          <p:cNvSpPr txBox="1"/>
+          <p:nvPr/>
+        </p:nvSpPr>
+        <p:spPr>
+          <a:xfrm>
+            <a:off x="1389888" y="4270248"/>
+            <a:ext cx="9829800" cy="960120"/>
+          </a:xfrm>
+          <a:prstGeom prst="rect">
+            <a:avLst/>
+          </a:prstGeom>
+          <a:noFill/>
+        </p:spPr>
+        <p:txBody>
+          <a:bodyPr wrap="square" lIns="45720" rIns="45720" tIns="36576" bIns="36576" anchor="t">
+            <a:spAutoFit/>
+          </a:bodyPr>
+          <a:lstStyle/>
+          <a:p>
+            <a:pPr algn="l">
+              <a:defRPr sz="1900" b="0">
+                <a:solidFill>
+                  <a:srgbClr val="1C2330"/>
+                </a:solidFill>
+                <a:latin typeface="Aptos"/>
+              </a:defRPr>
+            </a:pPr>
+            <a:r>
+              <a:t>Puedo mostrar una prueba o comprobación.</a:t>
+            </a:r>
+          </a:p>
+        </p:txBody>
+      </p:sp>
+      <p:sp>
+        <p:nvSpPr>
+          <p:cNvPr id="16" name="Rounded Rectangle 15"/>
+          <p:cNvSpPr/>
+          <p:nvPr/>
+        </p:nvSpPr>
+        <p:spPr>
+          <a:xfrm>
+            <a:off x="713232" y="5285231"/>
+            <a:ext cx="420624" cy="420624"/>
+          </a:xfrm>
+          <a:prstGeom prst="roundRect">
+            <a:avLst/>
+          </a:prstGeom>
+          <a:solidFill>
+            <a:srgbClr val="FFFFFF"/>
+          </a:solidFill>
+          <a:ln>
+            <a:solidFill>
+              <a:srgbClr val="2F5BA8"/>
+            </a:solidFill>
+          </a:ln>
+        </p:spPr>
+        <p:style>
+          <a:lnRef idx="1">
+            <a:schemeClr val="accent1"/>
+          </a:lnRef>
+          <a:fillRef idx="3">
+            <a:schemeClr val="accent1"/>
+          </a:fillRef>
+          <a:effectRef idx="2">
+            <a:schemeClr val="accent1"/>
+          </a:effectRef>
+          <a:fontRef idx="minor">
+            <a:schemeClr val="lt1"/>
+          </a:fontRef>
+        </p:style>
+        <p:txBody>
+          <a:bodyPr rtlCol="0" anchor="ctr"/>
+          <a:lstStyle/>
+          <a:p>
+            <a:pPr algn="ctr"/>
+          </a:p>
+        </p:txBody>
+      </p:sp>
+      <p:sp>
+        <p:nvSpPr>
+          <p:cNvPr id="17" name="TextBox 16"/>
+          <p:cNvSpPr txBox="1"/>
+          <p:nvPr/>
+        </p:nvSpPr>
+        <p:spPr>
+          <a:xfrm>
+            <a:off x="1389888" y="5266944"/>
+            <a:ext cx="9829800" cy="960120"/>
+          </a:xfrm>
+          <a:prstGeom prst="rect">
+            <a:avLst/>
+          </a:prstGeom>
+          <a:noFill/>
+        </p:spPr>
+        <p:txBody>
+          <a:bodyPr wrap="square" lIns="45720" rIns="45720" tIns="36576" bIns="36576" anchor="t">
+            <a:spAutoFit/>
+          </a:bodyPr>
+          <a:lstStyle/>
+          <a:p>
+            <a:pPr algn="l">
+              <a:defRPr sz="1900" b="0">
+                <a:solidFill>
+                  <a:srgbClr val="1C2330"/>
+                </a:solidFill>
+                <a:latin typeface="Aptos"/>
+              </a:defRPr>
+            </a:pPr>
+            <a:r>
+              <a:t>He registrado mi aportación individual si el trabajo era de equipo.</a:t>
+            </a:r>
+          </a:p>
+        </p:txBody>
+      </p:sp>
+    </p:spTree>
+  </p:cSld>
+  <p:clrMapOvr>
+    <a:masterClrMapping/>
+  </p:clrMapOvr>
+</p:sld>
+</file>
+
+<file path=ppt/slides/slide7.xml><?xml version="1.0" encoding="utf-8"?>
+<p:sld xmlns:a="http://schemas.openxmlformats.org/drawingml/2006/main" xmlns:p="http://schemas.openxmlformats.org/presentationml/2006/main" xmlns:r="http://schemas.openxmlformats.org/officeDocument/2006/relationships">
+  <p:cSld>
+    <p:spTree>
+      <p:nvGrpSpPr>
+        <p:cNvPr id="1" name=""/>
+        <p:cNvGrpSpPr/>
+        <p:nvPr/>
+      </p:nvGrpSpPr>
+      <p:grpSpPr/>
+      <p:sp>
+        <p:nvSpPr>
+          <p:cNvPr id="2" name="Rectangle 1"/>
+          <p:cNvSpPr/>
+          <p:nvPr/>
+        </p:nvSpPr>
+        <p:spPr>
+          <a:xfrm>
+            <a:off x="0" y="0"/>
+            <a:ext cx="12191695" cy="6858000"/>
+          </a:xfrm>
+          <a:prstGeom prst="rect">
+            <a:avLst/>
+          </a:prstGeom>
+          <a:solidFill>
+            <a:srgbClr val="F9F7F2"/>
+          </a:solidFill>
+          <a:ln>
+            <a:noFill/>
+          </a:ln>
+        </p:spPr>
+        <p:style>
+          <a:lnRef idx="1">
+            <a:schemeClr val="accent1"/>
+          </a:lnRef>
+          <a:fillRef idx="3">
+            <a:schemeClr val="accent1"/>
+          </a:fillRef>
+          <a:effectRef idx="2">
+            <a:schemeClr val="accent1"/>
+          </a:effectRef>
+          <a:fontRef idx="minor">
+            <a:schemeClr val="lt1"/>
+          </a:fontRef>
+        </p:style>
+        <p:txBody>
+          <a:bodyPr rtlCol="0" anchor="ctr"/>
+          <a:lstStyle/>
+          <a:p>
+            <a:pPr algn="ctr"/>
+          </a:p>
+        </p:txBody>
+      </p:sp>
+      <p:sp>
+        <p:nvSpPr>
+          <p:cNvPr id="3" name="Rectangle 2"/>
+          <p:cNvSpPr/>
+          <p:nvPr/>
+        </p:nvSpPr>
+        <p:spPr>
+          <a:xfrm>
+            <a:off x="0" y="0"/>
+            <a:ext cx="164592" cy="6858000"/>
+          </a:xfrm>
+          <a:prstGeom prst="rect">
             <a:avLst/>
           </a:prstGeom>
           <a:solidFill>
@@ -6316,14 +6516,14 @@
       </p:sp>
       <p:sp>
         <p:nvSpPr>
-          <p:cNvPr id="9" name="TextBox 8"/>
+          <p:cNvPr id="4" name="TextBox 3"/>
           <p:cNvSpPr txBox="1"/>
           <p:nvPr/>
         </p:nvSpPr>
         <p:spPr>
           <a:xfrm>
-            <a:off x="960120" y="1618488"/>
-            <a:ext cx="10195560" cy="320040"/>
+            <a:off x="502920" y="274320"/>
+            <a:ext cx="5486400" cy="256032"/>
           </a:xfrm>
           <a:prstGeom prst="rect">
             <a:avLst/>
@@ -6331,35 +6531,35 @@
           <a:noFill/>
         </p:spPr>
         <p:txBody>
-          <a:bodyPr wrap="square" lIns="36576" rIns="36576" tIns="27432" bIns="27432">
+          <a:bodyPr wrap="square" lIns="45720" rIns="45720" tIns="36576" bIns="36576" anchor="t">
             <a:spAutoFit/>
           </a:bodyPr>
           <a:lstStyle/>
           <a:p>
             <a:pPr algn="l">
-              <a:defRPr sz="1400" b="1">
-                <a:solidFill>
-                  <a:srgbClr val="FFFFFF"/>
+              <a:defRPr sz="1000" b="1">
+                <a:solidFill>
+                  <a:srgbClr val="2F5BA8"/>
                 </a:solidFill>
                 <a:latin typeface="Aptos"/>
               </a:defRPr>
             </a:pPr>
             <a:r>
-              <a:t>PREGUNTA DE SALIDA</a:t>
-            </a:r>
-          </a:p>
-        </p:txBody>
-      </p:sp>
-      <p:sp>
-        <p:nvSpPr>
-          <p:cNvPr id="10" name="TextBox 9"/>
+              <a:t>LÍMITES QUE PROTEGEN EL APRENDIZAJE</a:t>
+            </a:r>
+          </a:p>
+        </p:txBody>
+      </p:sp>
+      <p:sp>
+        <p:nvSpPr>
+          <p:cNvPr id="5" name="TextBox 4"/>
           <p:cNvSpPr txBox="1"/>
           <p:nvPr/>
         </p:nvSpPr>
         <p:spPr>
           <a:xfrm>
-            <a:off x="960120" y="2057400"/>
-            <a:ext cx="10058400" cy="822960"/>
+            <a:off x="502920" y="603504"/>
+            <a:ext cx="11064240" cy="530352"/>
           </a:xfrm>
           <a:prstGeom prst="rect">
             <a:avLst/>
@@ -6367,35 +6567,78 @@
           <a:noFill/>
         </p:spPr>
         <p:txBody>
-          <a:bodyPr wrap="square" lIns="36576" rIns="36576" tIns="27432" bIns="27432">
+          <a:bodyPr wrap="square" lIns="45720" rIns="45720" tIns="36576" bIns="36576" anchor="t">
             <a:spAutoFit/>
           </a:bodyPr>
           <a:lstStyle/>
           <a:p>
             <a:pPr algn="l">
-              <a:defRPr sz="2700" b="1">
-                <a:solidFill>
-                  <a:srgbClr val="FFFFFF"/>
+              <a:defRPr sz="2800" b="1">
+                <a:solidFill>
+                  <a:srgbClr val="1C2330"/>
                 </a:solidFill>
                 <a:latin typeface="Aptos"/>
               </a:defRPr>
             </a:pPr>
             <a:r>
-              <a:t>Pregunta: ¿por qué scanner.nextLine() devuelve texto aunque escribas un número?</a:t>
-            </a:r>
-          </a:p>
-        </p:txBody>
-      </p:sp>
-      <p:sp>
-        <p:nvSpPr>
-          <p:cNvPr id="11" name="TextBox 10"/>
+              <a:t>Seguridad y uso responsable</a:t>
+            </a:r>
+          </a:p>
+        </p:txBody>
+      </p:sp>
+      <p:sp>
+        <p:nvSpPr>
+          <p:cNvPr id="6" name="Rectangle 5"/>
+          <p:cNvSpPr/>
+          <p:nvPr/>
+        </p:nvSpPr>
+        <p:spPr>
+          <a:xfrm>
+            <a:off x="0" y="6601968"/>
+            <a:ext cx="12191695" cy="256032"/>
+          </a:xfrm>
+          <a:prstGeom prst="rect">
+            <a:avLst/>
+          </a:prstGeom>
+          <a:solidFill>
+            <a:srgbClr val="2F5BA8"/>
+          </a:solidFill>
+          <a:ln>
+            <a:noFill/>
+          </a:ln>
+        </p:spPr>
+        <p:style>
+          <a:lnRef idx="1">
+            <a:schemeClr val="accent1"/>
+          </a:lnRef>
+          <a:fillRef idx="3">
+            <a:schemeClr val="accent1"/>
+          </a:fillRef>
+          <a:effectRef idx="2">
+            <a:schemeClr val="accent1"/>
+          </a:effectRef>
+          <a:fontRef idx="minor">
+            <a:schemeClr val="lt1"/>
+          </a:fontRef>
+        </p:style>
+        <p:txBody>
+          <a:bodyPr rtlCol="0" anchor="ctr"/>
+          <a:lstStyle/>
+          <a:p>
+            <a:pPr algn="ctr"/>
+          </a:p>
+        </p:txBody>
+      </p:sp>
+      <p:sp>
+        <p:nvSpPr>
+          <p:cNvPr id="7" name="TextBox 6"/>
           <p:cNvSpPr txBox="1"/>
           <p:nvPr/>
         </p:nvSpPr>
         <p:spPr>
           <a:xfrm>
-            <a:off x="713232" y="3703320"/>
-            <a:ext cx="3749039" cy="320040"/>
+            <a:off x="411480" y="6629400"/>
+            <a:ext cx="11247120" cy="164592"/>
           </a:xfrm>
           <a:prstGeom prst="rect">
             <a:avLst/>
@@ -6403,106 +6646,35 @@
           <a:noFill/>
         </p:spPr>
         <p:txBody>
-          <a:bodyPr wrap="square" lIns="36576" rIns="36576" tIns="27432" bIns="27432">
+          <a:bodyPr wrap="square" lIns="45720" rIns="45720" tIns="36576" bIns="36576" anchor="t">
             <a:spAutoFit/>
           </a:bodyPr>
           <a:lstStyle/>
           <a:p>
             <a:pPr algn="l">
-              <a:defRPr sz="1500" b="1">
-                <a:solidFill>
-                  <a:srgbClr val="2F5BA8"/>
+              <a:defRPr sz="900" b="0">
+                <a:solidFill>
+                  <a:srgbClr val="FFFFFF"/>
                 </a:solidFill>
                 <a:latin typeface="Aptos"/>
               </a:defRPr>
             </a:pPr>
             <a:r>
-              <a:t>RECUERDA</a:t>
-            </a:r>
-          </a:p>
-        </p:txBody>
-      </p:sp>
-      <p:sp>
-        <p:nvSpPr>
-          <p:cNvPr id="12" name="TextBox 11"/>
-          <p:cNvSpPr txBox="1"/>
-          <p:nvPr/>
-        </p:nvSpPr>
-        <p:spPr>
-          <a:xfrm>
-            <a:off x="713232" y="4114800"/>
-            <a:ext cx="6583680" cy="1691640"/>
-          </a:xfrm>
-          <a:prstGeom prst="rect">
-            <a:avLst/>
-          </a:prstGeom>
-          <a:noFill/>
-        </p:spPr>
-        <p:txBody>
-          <a:bodyPr wrap="square" lIns="73152" rIns="45720" tIns="36576">
-            <a:spAutoFit/>
-          </a:bodyPr>
-          <a:lstStyle/>
-          <a:p>
-            <a:pPr>
-              <a:spcAft>
-                <a:spcPts val="1000"/>
-              </a:spcAft>
-              <a:defRPr sz="1700">
-                <a:solidFill>
-                  <a:srgbClr val="1C2330"/>
-                </a:solidFill>
-                <a:latin typeface="Aptos"/>
-              </a:defRPr>
-            </a:pPr>
-            <a:r>
-              <a:t>•  Trabaja únicamente con datos ficticios.</a:t>
-            </a:r>
-          </a:p>
-          <a:p>
-            <a:pPr>
-              <a:spcAft>
-                <a:spcPts val="1000"/>
-              </a:spcAft>
-              <a:defRPr sz="1700">
-                <a:solidFill>
-                  <a:srgbClr val="1C2330"/>
-                </a:solidFill>
-                <a:latin typeface="Aptos"/>
-              </a:defRPr>
-            </a:pPr>
-            <a:r>
-              <a:t>•  No escribas contraseñas, tokens, claves API ni datos personales.</a:t>
-            </a:r>
-          </a:p>
-          <a:p>
-            <a:pPr>
-              <a:spcAft>
-                <a:spcPts val="1000"/>
-              </a:spcAft>
-              <a:defRPr sz="1700">
-                <a:solidFill>
-                  <a:srgbClr val="1C2330"/>
-                </a:solidFill>
-                <a:latin typeface="Aptos"/>
-              </a:defRPr>
-            </a:pPr>
-            <a:r>
-              <a:t>•  Si utilizas IA en un uso permitido, registra qué pediste, qué recibiste, qué cambiaste y cómo lo comprobaste.</a:t>
-            </a:r>
-          </a:p>
-        </p:txBody>
-      </p:sp>
-      <p:sp>
-        <p:nvSpPr>
-          <p:cNvPr id="13" name="Rounded Rectangle 12"/>
+              <a:t>MiniJarvis · 1.º DAW · Sesión 212 · H1</a:t>
+            </a:r>
+          </a:p>
+        </p:txBody>
+      </p:sp>
+      <p:sp>
+        <p:nvSpPr>
+          <p:cNvPr id="8" name="Rounded Rectangle 7"/>
           <p:cNvSpPr/>
           <p:nvPr/>
         </p:nvSpPr>
         <p:spPr>
           <a:xfrm>
-            <a:off x="7726679" y="3794760"/>
-            <a:ext cx="3703320" cy="1600200"/>
+            <a:off x="621792" y="1298448"/>
+            <a:ext cx="5230368" cy="2176272"/>
           </a:xfrm>
           <a:prstGeom prst="roundRect">
             <a:avLst/>
@@ -6512,7 +6684,7 @@
           </a:solidFill>
           <a:ln>
             <a:solidFill>
-              <a:srgbClr val="EBEEF2"/>
+              <a:srgbClr val="E5E9EF"/>
             </a:solidFill>
           </a:ln>
         </p:spPr>
@@ -6540,14 +6712,57 @@
       </p:sp>
       <p:sp>
         <p:nvSpPr>
-          <p:cNvPr id="14" name="TextBox 13"/>
+          <p:cNvPr id="9" name="Rounded Rectangle 8"/>
+          <p:cNvSpPr/>
+          <p:nvPr/>
+        </p:nvSpPr>
+        <p:spPr>
+          <a:xfrm>
+            <a:off x="841248" y="1527048"/>
+            <a:ext cx="237744" cy="1719072"/>
+          </a:xfrm>
+          <a:prstGeom prst="roundRect">
+            <a:avLst/>
+          </a:prstGeom>
+          <a:solidFill>
+            <a:srgbClr val="247E5C"/>
+          </a:solidFill>
+          <a:ln>
+            <a:noFill/>
+          </a:ln>
+        </p:spPr>
+        <p:style>
+          <a:lnRef idx="1">
+            <a:schemeClr val="accent1"/>
+          </a:lnRef>
+          <a:fillRef idx="3">
+            <a:schemeClr val="accent1"/>
+          </a:fillRef>
+          <a:effectRef idx="2">
+            <a:schemeClr val="accent1"/>
+          </a:effectRef>
+          <a:fontRef idx="minor">
+            <a:schemeClr val="lt1"/>
+          </a:fontRef>
+        </p:style>
+        <p:txBody>
+          <a:bodyPr rtlCol="0" anchor="ctr"/>
+          <a:lstStyle/>
+          <a:p>
+            <a:pPr algn="ctr"/>
+          </a:p>
+        </p:txBody>
+      </p:sp>
+      <p:sp>
+        <p:nvSpPr>
+          <p:cNvPr id="10" name="TextBox 9"/>
           <p:cNvSpPr txBox="1"/>
           <p:nvPr/>
         </p:nvSpPr>
         <p:spPr>
           <a:xfrm>
-            <a:off x="8028431" y="4087368"/>
-            <a:ext cx="3063240" cy="868680"/>
+            <a:off x="1280160" y="1527048"/>
+            <a:ext cx="4224528" cy="1783080"/>
           </a:xfrm>
           <a:prstGeom prst="rect">
             <a:avLst/>
@@ -6555,13 +6770,793 @@
           <a:noFill/>
         </p:spPr>
         <p:txBody>
-          <a:bodyPr wrap="square" lIns="36576" rIns="36576" tIns="27432" bIns="27432">
+          <a:bodyPr wrap="square" lIns="45720" rIns="45720" tIns="36576" bIns="36576" anchor="t">
             <a:spAutoFit/>
           </a:bodyPr>
           <a:lstStyle/>
           <a:p>
+            <a:pPr algn="l">
+              <a:defRPr sz="1900" b="0">
+                <a:solidFill>
+                  <a:srgbClr val="1C2330"/>
+                </a:solidFill>
+                <a:latin typeface="Aptos"/>
+              </a:defRPr>
+            </a:pPr>
+            <a:r>
+              <a:t>Trabaja únicamente con datos ficticios.</a:t>
+            </a:r>
+          </a:p>
+        </p:txBody>
+      </p:sp>
+      <p:sp>
+        <p:nvSpPr>
+          <p:cNvPr id="11" name="Rounded Rectangle 10"/>
+          <p:cNvSpPr/>
+          <p:nvPr/>
+        </p:nvSpPr>
+        <p:spPr>
+          <a:xfrm>
+            <a:off x="6126479" y="1298448"/>
+            <a:ext cx="5230368" cy="2176272"/>
+          </a:xfrm>
+          <a:prstGeom prst="roundRect">
+            <a:avLst/>
+          </a:prstGeom>
+          <a:solidFill>
+            <a:srgbClr val="FFFFFF"/>
+          </a:solidFill>
+          <a:ln>
+            <a:solidFill>
+              <a:srgbClr val="E5E9EF"/>
+            </a:solidFill>
+          </a:ln>
+        </p:spPr>
+        <p:style>
+          <a:lnRef idx="1">
+            <a:schemeClr val="accent1"/>
+          </a:lnRef>
+          <a:fillRef idx="3">
+            <a:schemeClr val="accent1"/>
+          </a:fillRef>
+          <a:effectRef idx="2">
+            <a:schemeClr val="accent1"/>
+          </a:effectRef>
+          <a:fontRef idx="minor">
+            <a:schemeClr val="lt1"/>
+          </a:fontRef>
+        </p:style>
+        <p:txBody>
+          <a:bodyPr rtlCol="0" anchor="ctr"/>
+          <a:lstStyle/>
+          <a:p>
+            <a:pPr algn="ctr"/>
+          </a:p>
+        </p:txBody>
+      </p:sp>
+      <p:sp>
+        <p:nvSpPr>
+          <p:cNvPr id="12" name="Rounded Rectangle 11"/>
+          <p:cNvSpPr/>
+          <p:nvPr/>
+        </p:nvSpPr>
+        <p:spPr>
+          <a:xfrm>
+            <a:off x="6345936" y="1527048"/>
+            <a:ext cx="237744" cy="1719072"/>
+          </a:xfrm>
+          <a:prstGeom prst="roundRect">
+            <a:avLst/>
+          </a:prstGeom>
+          <a:solidFill>
+            <a:srgbClr val="C07020"/>
+          </a:solidFill>
+          <a:ln>
+            <a:noFill/>
+          </a:ln>
+        </p:spPr>
+        <p:style>
+          <a:lnRef idx="1">
+            <a:schemeClr val="accent1"/>
+          </a:lnRef>
+          <a:fillRef idx="3">
+            <a:schemeClr val="accent1"/>
+          </a:fillRef>
+          <a:effectRef idx="2">
+            <a:schemeClr val="accent1"/>
+          </a:effectRef>
+          <a:fontRef idx="minor">
+            <a:schemeClr val="lt1"/>
+          </a:fontRef>
+        </p:style>
+        <p:txBody>
+          <a:bodyPr rtlCol="0" anchor="ctr"/>
+          <a:lstStyle/>
+          <a:p>
+            <a:pPr algn="ctr"/>
+          </a:p>
+        </p:txBody>
+      </p:sp>
+      <p:sp>
+        <p:nvSpPr>
+          <p:cNvPr id="13" name="TextBox 12"/>
+          <p:cNvSpPr txBox="1"/>
+          <p:nvPr/>
+        </p:nvSpPr>
+        <p:spPr>
+          <a:xfrm>
+            <a:off x="6784847" y="1527048"/>
+            <a:ext cx="4224528" cy="1783080"/>
+          </a:xfrm>
+          <a:prstGeom prst="rect">
+            <a:avLst/>
+          </a:prstGeom>
+          <a:noFill/>
+        </p:spPr>
+        <p:txBody>
+          <a:bodyPr wrap="square" lIns="45720" rIns="45720" tIns="36576" bIns="36576" anchor="t">
+            <a:spAutoFit/>
+          </a:bodyPr>
+          <a:lstStyle/>
+          <a:p>
+            <a:pPr algn="l">
+              <a:defRPr sz="1900" b="0">
+                <a:solidFill>
+                  <a:srgbClr val="1C2330"/>
+                </a:solidFill>
+                <a:latin typeface="Aptos"/>
+              </a:defRPr>
+            </a:pPr>
+            <a:r>
+              <a:t>No escribas contraseñas, tokens, claves API ni datos personales.</a:t>
+            </a:r>
+          </a:p>
+        </p:txBody>
+      </p:sp>
+      <p:sp>
+        <p:nvSpPr>
+          <p:cNvPr id="14" name="Rounded Rectangle 13"/>
+          <p:cNvSpPr/>
+          <p:nvPr/>
+        </p:nvSpPr>
+        <p:spPr>
+          <a:xfrm>
+            <a:off x="621792" y="3675887"/>
+            <a:ext cx="5230368" cy="2176272"/>
+          </a:xfrm>
+          <a:prstGeom prst="roundRect">
+            <a:avLst/>
+          </a:prstGeom>
+          <a:solidFill>
+            <a:srgbClr val="FFFFFF"/>
+          </a:solidFill>
+          <a:ln>
+            <a:solidFill>
+              <a:srgbClr val="E5E9EF"/>
+            </a:solidFill>
+          </a:ln>
+        </p:spPr>
+        <p:style>
+          <a:lnRef idx="1">
+            <a:schemeClr val="accent1"/>
+          </a:lnRef>
+          <a:fillRef idx="3">
+            <a:schemeClr val="accent1"/>
+          </a:fillRef>
+          <a:effectRef idx="2">
+            <a:schemeClr val="accent1"/>
+          </a:effectRef>
+          <a:fontRef idx="minor">
+            <a:schemeClr val="lt1"/>
+          </a:fontRef>
+        </p:style>
+        <p:txBody>
+          <a:bodyPr rtlCol="0" anchor="ctr"/>
+          <a:lstStyle/>
+          <a:p>
+            <a:pPr algn="ctr"/>
+          </a:p>
+        </p:txBody>
+      </p:sp>
+      <p:sp>
+        <p:nvSpPr>
+          <p:cNvPr id="15" name="Rounded Rectangle 14"/>
+          <p:cNvSpPr/>
+          <p:nvPr/>
+        </p:nvSpPr>
+        <p:spPr>
+          <a:xfrm>
+            <a:off x="841248" y="3904487"/>
+            <a:ext cx="237744" cy="1719072"/>
+          </a:xfrm>
+          <a:prstGeom prst="roundRect">
+            <a:avLst/>
+          </a:prstGeom>
+          <a:solidFill>
+            <a:srgbClr val="B13A3A"/>
+          </a:solidFill>
+          <a:ln>
+            <a:noFill/>
+          </a:ln>
+        </p:spPr>
+        <p:style>
+          <a:lnRef idx="1">
+            <a:schemeClr val="accent1"/>
+          </a:lnRef>
+          <a:fillRef idx="3">
+            <a:schemeClr val="accent1"/>
+          </a:fillRef>
+          <a:effectRef idx="2">
+            <a:schemeClr val="accent1"/>
+          </a:effectRef>
+          <a:fontRef idx="minor">
+            <a:schemeClr val="lt1"/>
+          </a:fontRef>
+        </p:style>
+        <p:txBody>
+          <a:bodyPr rtlCol="0" anchor="ctr"/>
+          <a:lstStyle/>
+          <a:p>
+            <a:pPr algn="ctr"/>
+          </a:p>
+        </p:txBody>
+      </p:sp>
+      <p:sp>
+        <p:nvSpPr>
+          <p:cNvPr id="16" name="TextBox 15"/>
+          <p:cNvSpPr txBox="1"/>
+          <p:nvPr/>
+        </p:nvSpPr>
+        <p:spPr>
+          <a:xfrm>
+            <a:off x="1280160" y="3904487"/>
+            <a:ext cx="4224528" cy="1783080"/>
+          </a:xfrm>
+          <a:prstGeom prst="rect">
+            <a:avLst/>
+          </a:prstGeom>
+          <a:noFill/>
+        </p:spPr>
+        <p:txBody>
+          <a:bodyPr wrap="square" lIns="45720" rIns="45720" tIns="36576" bIns="36576" anchor="t">
+            <a:spAutoFit/>
+          </a:bodyPr>
+          <a:lstStyle/>
+          <a:p>
+            <a:pPr algn="l">
+              <a:defRPr sz="1900" b="0">
+                <a:solidFill>
+                  <a:srgbClr val="1C2330"/>
+                </a:solidFill>
+                <a:latin typeface="Aptos"/>
+              </a:defRPr>
+            </a:pPr>
+            <a:r>
+              <a:t>Si utilizas IA en un uso permitido, registra qué pediste, qué recibiste, qué cambiaste y cómo lo comprobaste.</a:t>
+            </a:r>
+          </a:p>
+        </p:txBody>
+      </p:sp>
+      <p:sp>
+        <p:nvSpPr>
+          <p:cNvPr id="17" name="Rounded Rectangle 16"/>
+          <p:cNvSpPr/>
+          <p:nvPr/>
+        </p:nvSpPr>
+        <p:spPr>
+          <a:xfrm>
+            <a:off x="6126479" y="3675887"/>
+            <a:ext cx="5230368" cy="2176272"/>
+          </a:xfrm>
+          <a:prstGeom prst="roundRect">
+            <a:avLst/>
+          </a:prstGeom>
+          <a:solidFill>
+            <a:srgbClr val="FFFFFF"/>
+          </a:solidFill>
+          <a:ln>
+            <a:solidFill>
+              <a:srgbClr val="E5E9EF"/>
+            </a:solidFill>
+          </a:ln>
+        </p:spPr>
+        <p:style>
+          <a:lnRef idx="1">
+            <a:schemeClr val="accent1"/>
+          </a:lnRef>
+          <a:fillRef idx="3">
+            <a:schemeClr val="accent1"/>
+          </a:fillRef>
+          <a:effectRef idx="2">
+            <a:schemeClr val="accent1"/>
+          </a:effectRef>
+          <a:fontRef idx="minor">
+            <a:schemeClr val="lt1"/>
+          </a:fontRef>
+        </p:style>
+        <p:txBody>
+          <a:bodyPr rtlCol="0" anchor="ctr"/>
+          <a:lstStyle/>
+          <a:p>
+            <a:pPr algn="ctr"/>
+          </a:p>
+        </p:txBody>
+      </p:sp>
+      <p:sp>
+        <p:nvSpPr>
+          <p:cNvPr id="18" name="Rounded Rectangle 17"/>
+          <p:cNvSpPr/>
+          <p:nvPr/>
+        </p:nvSpPr>
+        <p:spPr>
+          <a:xfrm>
+            <a:off x="6345936" y="3904487"/>
+            <a:ext cx="237744" cy="1719072"/>
+          </a:xfrm>
+          <a:prstGeom prst="roundRect">
+            <a:avLst/>
+          </a:prstGeom>
+          <a:solidFill>
+            <a:srgbClr val="2F5BA8"/>
+          </a:solidFill>
+          <a:ln>
+            <a:noFill/>
+          </a:ln>
+        </p:spPr>
+        <p:style>
+          <a:lnRef idx="1">
+            <a:schemeClr val="accent1"/>
+          </a:lnRef>
+          <a:fillRef idx="3">
+            <a:schemeClr val="accent1"/>
+          </a:fillRef>
+          <a:effectRef idx="2">
+            <a:schemeClr val="accent1"/>
+          </a:effectRef>
+          <a:fontRef idx="minor">
+            <a:schemeClr val="lt1"/>
+          </a:fontRef>
+        </p:style>
+        <p:txBody>
+          <a:bodyPr rtlCol="0" anchor="ctr"/>
+          <a:lstStyle/>
+          <a:p>
+            <a:pPr algn="ctr"/>
+          </a:p>
+        </p:txBody>
+      </p:sp>
+      <p:sp>
+        <p:nvSpPr>
+          <p:cNvPr id="19" name="TextBox 18"/>
+          <p:cNvSpPr txBox="1"/>
+          <p:nvPr/>
+        </p:nvSpPr>
+        <p:spPr>
+          <a:xfrm>
+            <a:off x="6784847" y="3904487"/>
+            <a:ext cx="4224528" cy="1783080"/>
+          </a:xfrm>
+          <a:prstGeom prst="rect">
+            <a:avLst/>
+          </a:prstGeom>
+          <a:noFill/>
+        </p:spPr>
+        <p:txBody>
+          <a:bodyPr wrap="square" lIns="45720" rIns="45720" tIns="36576" bIns="36576" anchor="t">
+            <a:spAutoFit/>
+          </a:bodyPr>
+          <a:lstStyle/>
+          <a:p>
+            <a:pPr algn="l">
+              <a:defRPr sz="1900" b="0">
+                <a:solidFill>
+                  <a:srgbClr val="1C2330"/>
+                </a:solidFill>
+                <a:latin typeface="Aptos"/>
+              </a:defRPr>
+            </a:pPr>
+            <a:r>
+              <a:t>Los ejemplos de Laura solo se consultan después del intento propio.</a:t>
+            </a:r>
+          </a:p>
+        </p:txBody>
+      </p:sp>
+    </p:spTree>
+  </p:cSld>
+  <p:clrMapOvr>
+    <a:masterClrMapping/>
+  </p:clrMapOvr>
+</p:sld>
+</file>
+
+<file path=ppt/slides/slide8.xml><?xml version="1.0" encoding="utf-8"?>
+<p:sld xmlns:a="http://schemas.openxmlformats.org/drawingml/2006/main" xmlns:p="http://schemas.openxmlformats.org/presentationml/2006/main" xmlns:r="http://schemas.openxmlformats.org/officeDocument/2006/relationships">
+  <p:cSld>
+    <p:spTree>
+      <p:nvGrpSpPr>
+        <p:cNvPr id="1" name=""/>
+        <p:cNvGrpSpPr/>
+        <p:nvPr/>
+      </p:nvGrpSpPr>
+      <p:grpSpPr/>
+      <p:sp>
+        <p:nvSpPr>
+          <p:cNvPr id="2" name="Rectangle 1"/>
+          <p:cNvSpPr/>
+          <p:nvPr/>
+        </p:nvSpPr>
+        <p:spPr>
+          <a:xfrm>
+            <a:off x="0" y="0"/>
+            <a:ext cx="12191695" cy="6858000"/>
+          </a:xfrm>
+          <a:prstGeom prst="rect">
+            <a:avLst/>
+          </a:prstGeom>
+          <a:solidFill>
+            <a:srgbClr val="F9F7F2"/>
+          </a:solidFill>
+          <a:ln>
+            <a:noFill/>
+          </a:ln>
+        </p:spPr>
+        <p:style>
+          <a:lnRef idx="1">
+            <a:schemeClr val="accent1"/>
+          </a:lnRef>
+          <a:fillRef idx="3">
+            <a:schemeClr val="accent1"/>
+          </a:fillRef>
+          <a:effectRef idx="2">
+            <a:schemeClr val="accent1"/>
+          </a:effectRef>
+          <a:fontRef idx="minor">
+            <a:schemeClr val="lt1"/>
+          </a:fontRef>
+        </p:style>
+        <p:txBody>
+          <a:bodyPr rtlCol="0" anchor="ctr"/>
+          <a:lstStyle/>
+          <a:p>
+            <a:pPr algn="ctr"/>
+          </a:p>
+        </p:txBody>
+      </p:sp>
+      <p:sp>
+        <p:nvSpPr>
+          <p:cNvPr id="3" name="Rectangle 2"/>
+          <p:cNvSpPr/>
+          <p:nvPr/>
+        </p:nvSpPr>
+        <p:spPr>
+          <a:xfrm>
+            <a:off x="0" y="0"/>
+            <a:ext cx="164592" cy="6858000"/>
+          </a:xfrm>
+          <a:prstGeom prst="rect">
+            <a:avLst/>
+          </a:prstGeom>
+          <a:solidFill>
+            <a:srgbClr val="2F5BA8"/>
+          </a:solidFill>
+          <a:ln>
+            <a:noFill/>
+          </a:ln>
+        </p:spPr>
+        <p:style>
+          <a:lnRef idx="1">
+            <a:schemeClr val="accent1"/>
+          </a:lnRef>
+          <a:fillRef idx="3">
+            <a:schemeClr val="accent1"/>
+          </a:fillRef>
+          <a:effectRef idx="2">
+            <a:schemeClr val="accent1"/>
+          </a:effectRef>
+          <a:fontRef idx="minor">
+            <a:schemeClr val="lt1"/>
+          </a:fontRef>
+        </p:style>
+        <p:txBody>
+          <a:bodyPr rtlCol="0" anchor="ctr"/>
+          <a:lstStyle/>
+          <a:p>
+            <a:pPr algn="ctr"/>
+          </a:p>
+        </p:txBody>
+      </p:sp>
+      <p:sp>
+        <p:nvSpPr>
+          <p:cNvPr id="4" name="TextBox 3"/>
+          <p:cNvSpPr txBox="1"/>
+          <p:nvPr/>
+        </p:nvSpPr>
+        <p:spPr>
+          <a:xfrm>
+            <a:off x="502920" y="274320"/>
+            <a:ext cx="5486400" cy="256032"/>
+          </a:xfrm>
+          <a:prstGeom prst="rect">
+            <a:avLst/>
+          </a:prstGeom>
+          <a:noFill/>
+        </p:spPr>
+        <p:txBody>
+          <a:bodyPr wrap="square" lIns="45720" rIns="45720" tIns="36576" bIns="36576" anchor="t">
+            <a:spAutoFit/>
+          </a:bodyPr>
+          <a:lstStyle/>
+          <a:p>
+            <a:pPr algn="l">
+              <a:defRPr sz="1000" b="1">
+                <a:solidFill>
+                  <a:srgbClr val="2F5BA8"/>
+                </a:solidFill>
+                <a:latin typeface="Aptos"/>
+              </a:defRPr>
+            </a:pPr>
+            <a:r>
+              <a:t>EXPLICAR Y DEFENDER</a:t>
+            </a:r>
+          </a:p>
+        </p:txBody>
+      </p:sp>
+      <p:sp>
+        <p:nvSpPr>
+          <p:cNvPr id="5" name="TextBox 4"/>
+          <p:cNvSpPr txBox="1"/>
+          <p:nvPr/>
+        </p:nvSpPr>
+        <p:spPr>
+          <a:xfrm>
+            <a:off x="502920" y="603504"/>
+            <a:ext cx="11064240" cy="530352"/>
+          </a:xfrm>
+          <a:prstGeom prst="rect">
+            <a:avLst/>
+          </a:prstGeom>
+          <a:noFill/>
+        </p:spPr>
+        <p:txBody>
+          <a:bodyPr wrap="square" lIns="45720" rIns="45720" tIns="36576" bIns="36576" anchor="t">
+            <a:spAutoFit/>
+          </a:bodyPr>
+          <a:lstStyle/>
+          <a:p>
+            <a:pPr algn="l">
+              <a:defRPr sz="2800" b="1">
+                <a:solidFill>
+                  <a:srgbClr val="1C2330"/>
+                </a:solidFill>
+                <a:latin typeface="Aptos"/>
+              </a:defRPr>
+            </a:pPr>
+            <a:r>
+              <a:t>Cierre y defensa</a:t>
+            </a:r>
+          </a:p>
+        </p:txBody>
+      </p:sp>
+      <p:sp>
+        <p:nvSpPr>
+          <p:cNvPr id="6" name="Rectangle 5"/>
+          <p:cNvSpPr/>
+          <p:nvPr/>
+        </p:nvSpPr>
+        <p:spPr>
+          <a:xfrm>
+            <a:off x="0" y="6601968"/>
+            <a:ext cx="12191695" cy="256032"/>
+          </a:xfrm>
+          <a:prstGeom prst="rect">
+            <a:avLst/>
+          </a:prstGeom>
+          <a:solidFill>
+            <a:srgbClr val="2F5BA8"/>
+          </a:solidFill>
+          <a:ln>
+            <a:noFill/>
+          </a:ln>
+        </p:spPr>
+        <p:style>
+          <a:lnRef idx="1">
+            <a:schemeClr val="accent1"/>
+          </a:lnRef>
+          <a:fillRef idx="3">
+            <a:schemeClr val="accent1"/>
+          </a:fillRef>
+          <a:effectRef idx="2">
+            <a:schemeClr val="accent1"/>
+          </a:effectRef>
+          <a:fontRef idx="minor">
+            <a:schemeClr val="lt1"/>
+          </a:fontRef>
+        </p:style>
+        <p:txBody>
+          <a:bodyPr rtlCol="0" anchor="ctr"/>
+          <a:lstStyle/>
+          <a:p>
+            <a:pPr algn="ctr"/>
+          </a:p>
+        </p:txBody>
+      </p:sp>
+      <p:sp>
+        <p:nvSpPr>
+          <p:cNvPr id="7" name="TextBox 6"/>
+          <p:cNvSpPr txBox="1"/>
+          <p:nvPr/>
+        </p:nvSpPr>
+        <p:spPr>
+          <a:xfrm>
+            <a:off x="411480" y="6629400"/>
+            <a:ext cx="11247120" cy="164592"/>
+          </a:xfrm>
+          <a:prstGeom prst="rect">
+            <a:avLst/>
+          </a:prstGeom>
+          <a:noFill/>
+        </p:spPr>
+        <p:txBody>
+          <a:bodyPr wrap="square" lIns="45720" rIns="45720" tIns="36576" bIns="36576" anchor="t">
+            <a:spAutoFit/>
+          </a:bodyPr>
+          <a:lstStyle/>
+          <a:p>
+            <a:pPr algn="l">
+              <a:defRPr sz="900" b="0">
+                <a:solidFill>
+                  <a:srgbClr val="FFFFFF"/>
+                </a:solidFill>
+                <a:latin typeface="Aptos"/>
+              </a:defRPr>
+            </a:pPr>
+            <a:r>
+              <a:t>MiniJarvis · 1.º DAW · Sesión 212 · H1</a:t>
+            </a:r>
+          </a:p>
+        </p:txBody>
+      </p:sp>
+      <p:sp>
+        <p:nvSpPr>
+          <p:cNvPr id="8" name="Rounded Rectangle 7"/>
+          <p:cNvSpPr/>
+          <p:nvPr/>
+        </p:nvSpPr>
+        <p:spPr>
+          <a:xfrm>
+            <a:off x="621792" y="1298448"/>
+            <a:ext cx="10927080" cy="1828800"/>
+          </a:xfrm>
+          <a:prstGeom prst="roundRect">
+            <a:avLst/>
+          </a:prstGeom>
+          <a:solidFill>
+            <a:srgbClr val="2F5BA8"/>
+          </a:solidFill>
+          <a:ln>
+            <a:solidFill>
+              <a:srgbClr val="2F5BA8"/>
+            </a:solidFill>
+          </a:ln>
+        </p:spPr>
+        <p:style>
+          <a:lnRef idx="1">
+            <a:schemeClr val="accent1"/>
+          </a:lnRef>
+          <a:fillRef idx="3">
+            <a:schemeClr val="accent1"/>
+          </a:fillRef>
+          <a:effectRef idx="2">
+            <a:schemeClr val="accent1"/>
+          </a:effectRef>
+          <a:fontRef idx="minor">
+            <a:schemeClr val="lt1"/>
+          </a:fontRef>
+        </p:style>
+        <p:txBody>
+          <a:bodyPr rtlCol="0" anchor="ctr"/>
+          <a:lstStyle/>
+          <a:p>
+            <a:pPr algn="ctr"/>
+          </a:p>
+        </p:txBody>
+      </p:sp>
+      <p:sp>
+        <p:nvSpPr>
+          <p:cNvPr id="9" name="TextBox 8"/>
+          <p:cNvSpPr txBox="1"/>
+          <p:nvPr/>
+        </p:nvSpPr>
+        <p:spPr>
+          <a:xfrm>
+            <a:off x="932688" y="1591056"/>
+            <a:ext cx="10241280" cy="256032"/>
+          </a:xfrm>
+          <a:prstGeom prst="rect">
+            <a:avLst/>
+          </a:prstGeom>
+          <a:noFill/>
+        </p:spPr>
+        <p:txBody>
+          <a:bodyPr wrap="square" lIns="45720" rIns="45720" tIns="36576" bIns="36576" anchor="t">
+            <a:spAutoFit/>
+          </a:bodyPr>
+          <a:lstStyle/>
+          <a:p>
+            <a:pPr algn="l">
+              <a:defRPr sz="1300" b="1">
+                <a:solidFill>
+                  <a:srgbClr val="FFFFFF"/>
+                </a:solidFill>
+                <a:latin typeface="Aptos"/>
+              </a:defRPr>
+            </a:pPr>
+            <a:r>
+              <a:t>PREGUNTA O DECISIÓN DE SALIDA</a:t>
+            </a:r>
+          </a:p>
+        </p:txBody>
+      </p:sp>
+      <p:sp>
+        <p:nvSpPr>
+          <p:cNvPr id="10" name="TextBox 9"/>
+          <p:cNvSpPr txBox="1"/>
+          <p:nvPr/>
+        </p:nvSpPr>
+        <p:spPr>
+          <a:xfrm>
+            <a:off x="932688" y="1975104"/>
+            <a:ext cx="10058400" cy="822960"/>
+          </a:xfrm>
+          <a:prstGeom prst="rect">
+            <a:avLst/>
+          </a:prstGeom>
+          <a:noFill/>
+        </p:spPr>
+        <p:txBody>
+          <a:bodyPr wrap="square" lIns="45720" rIns="45720" tIns="36576" bIns="36576" anchor="t">
+            <a:spAutoFit/>
+          </a:bodyPr>
+          <a:lstStyle/>
+          <a:p>
+            <a:pPr algn="l">
+              <a:defRPr sz="2500" b="1">
+                <a:solidFill>
+                  <a:srgbClr val="FFFFFF"/>
+                </a:solidFill>
+                <a:latin typeface="Aptos"/>
+              </a:defRPr>
+            </a:pPr>
+            <a:r>
+              <a:t>¿por qué scanner.nextLine() devuelve texto aunque escribas un número?</a:t>
+            </a:r>
+          </a:p>
+        </p:txBody>
+      </p:sp>
+      <p:sp>
+        <p:nvSpPr>
+          <p:cNvPr id="11" name="TextBox 10"/>
+          <p:cNvSpPr txBox="1"/>
+          <p:nvPr/>
+        </p:nvSpPr>
+        <p:spPr>
+          <a:xfrm>
+            <a:off x="749808" y="3886200"/>
+            <a:ext cx="10607040" cy="1280160"/>
+          </a:xfrm>
+          <a:prstGeom prst="rect">
+            <a:avLst/>
+          </a:prstGeom>
+          <a:noFill/>
+        </p:spPr>
+        <p:txBody>
+          <a:bodyPr wrap="square" lIns="45720" rIns="45720" tIns="36576" bIns="36576" anchor="ctr">
+            <a:spAutoFit/>
+          </a:bodyPr>
+          <a:lstStyle/>
+          <a:p>
             <a:pPr algn="ctr">
-              <a:defRPr sz="1800" b="1">
+              <a:defRPr sz="2300" b="1">
                 <a:solidFill>
                   <a:srgbClr val="247E5C"/>
                 </a:solidFill>
@@ -6569,7 +7564,7 @@
               </a:defRPr>
             </a:pPr>
             <a:r>
-              <a:t>La sesión termina cuando la evidencia existe, está comprobada y puedes defenderla.</a:t>
+              <a:t>La sesión termina cuando la evidencia existe, está comprobada y puede defenderse.</a:t>
             </a:r>
           </a:p>
         </p:txBody>

--- a/02-PROFESORADO/03-PRESENTACIONES/POR-SESION/h1/S212-entrada-por-teclado-con-scanner-presentacion.pptx
+++ b/02-PROFESORADO/03-PRESENTACIONES/POR-SESION/h1/S212-entrada-por-teclado-con-scanner-presentacion.pptx
@@ -6,13 +6,14 @@
   </p:sldMasterIdLst>
   <p:sldIdLst>
     <p:sldId id="256" r:id="rId7"/>
-    <p:sldId id="257" r:id="rId8"/>
-    <p:sldId id="258" r:id="rId9"/>
-    <p:sldId id="259" r:id="rId10"/>
-    <p:sldId id="260" r:id="rId11"/>
-    <p:sldId id="261" r:id="rId12"/>
-    <p:sldId id="262" r:id="rId13"/>
-    <p:sldId id="263" r:id="rId14"/>
+    <p:sldId id="257" r:id="rId9"/>
+    <p:sldId id="258" r:id="rId10"/>
+    <p:sldId id="259" r:id="rId11"/>
+    <p:sldId id="260" r:id="rId12"/>
+    <p:sldId id="261" r:id="rId13"/>
+    <p:sldId id="262" r:id="rId14"/>
+    <p:sldId id="263" r:id="rId15"/>
+    <p:sldId id="264" r:id="rId16"/>
   </p:sldIdLst>
   <p:sldSz cx="12191695" cy="6858000" type="screen4x3"/>
   <p:notesSz cx="6858000" cy="9144000"/>
@@ -112,6 +113,1346 @@
     </a:lvl9pPr>
   </p:defaultTextStyle>
 </p:presentation>
+</file>
+
+<file path=ppt/notesMasters/notesMaster1.xml><?xml version="1.0" encoding="utf-8"?>
+<p:notesMaster xmlns:a="http://schemas.openxmlformats.org/drawingml/2006/main" xmlns:p="http://schemas.openxmlformats.org/presentationml/2006/main" xmlns:r="http://schemas.openxmlformats.org/officeDocument/2006/relationships">
+  <p:cSld>
+    <p:bg>
+      <p:bgRef idx="1001">
+        <a:schemeClr val="bg1"/>
+      </p:bgRef>
+    </p:bg>
+    <p:spTree>
+      <p:nvGrpSpPr>
+        <p:cNvPr id="1" name=""/>
+        <p:cNvGrpSpPr/>
+        <p:nvPr/>
+      </p:nvGrpSpPr>
+      <p:grpSpPr>
+        <a:xfrm>
+          <a:off x="0" y="0"/>
+          <a:ext cx="0" cy="0"/>
+          <a:chOff x="0" y="0"/>
+          <a:chExt cx="0" cy="0"/>
+        </a:xfrm>
+      </p:grpSpPr>
+      <p:sp>
+        <p:nvSpPr>
+          <p:cNvPr id="2" name="Header Placeholder 1"/>
+          <p:cNvSpPr>
+            <a:spLocks noGrp="1"/>
+          </p:cNvSpPr>
+          <p:nvPr>
+            <p:ph type="hdr" sz="quarter"/>
+          </p:nvPr>
+        </p:nvSpPr>
+        <p:spPr>
+          <a:xfrm>
+            <a:off x="0" y="0"/>
+            <a:ext cx="2971800" cy="457200"/>
+          </a:xfrm>
+          <a:prstGeom prst="rect">
+            <a:avLst/>
+          </a:prstGeom>
+        </p:spPr>
+        <p:txBody>
+          <a:bodyPr vert="horz" lIns="91440" tIns="45720" rIns="91440" bIns="45720" rtlCol="0"/>
+          <a:lstStyle>
+            <a:lvl1pPr algn="l">
+              <a:defRPr sz="1200"/>
+            </a:lvl1pPr>
+          </a:lstStyle>
+          <a:p>
+            <a:endParaRPr lang="en-US"/>
+          </a:p>
+        </p:txBody>
+      </p:sp>
+      <p:sp>
+        <p:nvSpPr>
+          <p:cNvPr id="3" name="Date Placeholder 2"/>
+          <p:cNvSpPr>
+            <a:spLocks noGrp="1"/>
+          </p:cNvSpPr>
+          <p:nvPr>
+            <p:ph type="dt" idx="1"/>
+          </p:nvPr>
+        </p:nvSpPr>
+        <p:spPr>
+          <a:xfrm>
+            <a:off x="3884613" y="0"/>
+            <a:ext cx="2971800" cy="457200"/>
+          </a:xfrm>
+          <a:prstGeom prst="rect">
+            <a:avLst/>
+          </a:prstGeom>
+        </p:spPr>
+        <p:txBody>
+          <a:bodyPr vert="horz" lIns="91440" tIns="45720" rIns="91440" bIns="45720" rtlCol="0"/>
+          <a:lstStyle>
+            <a:lvl1pPr algn="r">
+              <a:defRPr sz="1200"/>
+            </a:lvl1pPr>
+          </a:lstStyle>
+          <a:p>
+            <a:fld id="{0F89C1C7-3DCD-1040-A9CF-14679D8B5DDD}" type="datetimeFigureOut">
+              <a:rPr lang="en-US" smtClean="0"/>
+              <a:t>10/17/16</a:t>
+            </a:fld>
+            <a:endParaRPr lang="en-US"/>
+          </a:p>
+        </p:txBody>
+      </p:sp>
+      <p:sp>
+        <p:nvSpPr>
+          <p:cNvPr id="4" name="Slide Image Placeholder 3"/>
+          <p:cNvSpPr>
+            <a:spLocks noGrp="1" noRot="1" noChangeAspect="1"/>
+          </p:cNvSpPr>
+          <p:nvPr>
+            <p:ph type="sldImg" idx="2"/>
+          </p:nvPr>
+        </p:nvSpPr>
+        <p:spPr>
+          <a:xfrm>
+            <a:off x="1143000" y="685800"/>
+            <a:ext cx="4572000" cy="3429000"/>
+          </a:xfrm>
+          <a:prstGeom prst="rect">
+            <a:avLst/>
+          </a:prstGeom>
+          <a:noFill/>
+          <a:ln w="12700">
+            <a:solidFill>
+              <a:prstClr val="black"/>
+            </a:solidFill>
+          </a:ln>
+        </p:spPr>
+        <p:txBody>
+          <a:bodyPr vert="horz" lIns="91440" tIns="45720" rIns="91440" bIns="45720" rtlCol="0" anchor="ctr"/>
+          <a:lstStyle/>
+          <a:p>
+            <a:endParaRPr lang="en-US"/>
+          </a:p>
+        </p:txBody>
+      </p:sp>
+      <p:sp>
+        <p:nvSpPr>
+          <p:cNvPr id="5" name="Notes Placeholder 4"/>
+          <p:cNvSpPr>
+            <a:spLocks noGrp="1"/>
+          </p:cNvSpPr>
+          <p:nvPr>
+            <p:ph type="body" sz="quarter" idx="3"/>
+          </p:nvPr>
+        </p:nvSpPr>
+        <p:spPr>
+          <a:xfrm>
+            <a:off x="685800" y="4343400"/>
+            <a:ext cx="5486400" cy="4114800"/>
+          </a:xfrm>
+          <a:prstGeom prst="rect">
+            <a:avLst/>
+          </a:prstGeom>
+        </p:spPr>
+        <p:txBody>
+          <a:bodyPr vert="horz" lIns="91440" tIns="45720" rIns="91440" bIns="45720" rtlCol="0"/>
+          <a:lstStyle/>
+          <a:p>
+            <a:pPr lvl="0"/>
+            <a:r>
+              <a:rPr lang="en-US" smtClean="0"/>
+              <a:t>Click to edit Master text styles</a:t>
+            </a:r>
+          </a:p>
+          <a:p>
+            <a:pPr lvl="1"/>
+            <a:r>
+              <a:rPr lang="en-US" smtClean="0"/>
+              <a:t>Second level</a:t>
+            </a:r>
+          </a:p>
+          <a:p>
+            <a:pPr lvl="2"/>
+            <a:r>
+              <a:rPr lang="en-US" smtClean="0"/>
+              <a:t>Third level</a:t>
+            </a:r>
+          </a:p>
+          <a:p>
+            <a:pPr lvl="3"/>
+            <a:r>
+              <a:rPr lang="en-US" smtClean="0"/>
+              <a:t>Fourth level</a:t>
+            </a:r>
+          </a:p>
+          <a:p>
+            <a:pPr lvl="4"/>
+            <a:r>
+              <a:rPr lang="en-US" smtClean="0"/>
+              <a:t>Fifth level</a:t>
+            </a:r>
+            <a:endParaRPr lang="en-US"/>
+          </a:p>
+        </p:txBody>
+      </p:sp>
+      <p:sp>
+        <p:nvSpPr>
+          <p:cNvPr id="6" name="Footer Placeholder 5"/>
+          <p:cNvSpPr>
+            <a:spLocks noGrp="1"/>
+          </p:cNvSpPr>
+          <p:nvPr>
+            <p:ph type="ftr" sz="quarter" idx="4"/>
+          </p:nvPr>
+        </p:nvSpPr>
+        <p:spPr>
+          <a:xfrm>
+            <a:off x="0" y="8685213"/>
+            <a:ext cx="2971800" cy="457200"/>
+          </a:xfrm>
+          <a:prstGeom prst="rect">
+            <a:avLst/>
+          </a:prstGeom>
+        </p:spPr>
+        <p:txBody>
+          <a:bodyPr vert="horz" lIns="91440" tIns="45720" rIns="91440" bIns="45720" rtlCol="0" anchor="b"/>
+          <a:lstStyle>
+            <a:lvl1pPr algn="l">
+              <a:defRPr sz="1200"/>
+            </a:lvl1pPr>
+          </a:lstStyle>
+          <a:p>
+            <a:endParaRPr lang="en-US"/>
+          </a:p>
+        </p:txBody>
+      </p:sp>
+      <p:sp>
+        <p:nvSpPr>
+          <p:cNvPr id="7" name="Slide Number Placeholder 6"/>
+          <p:cNvSpPr>
+            <a:spLocks noGrp="1"/>
+          </p:cNvSpPr>
+          <p:nvPr>
+            <p:ph type="sldNum" sz="quarter" idx="5"/>
+          </p:nvPr>
+        </p:nvSpPr>
+        <p:spPr>
+          <a:xfrm>
+            <a:off x="3884613" y="8685213"/>
+            <a:ext cx="2971800" cy="457200"/>
+          </a:xfrm>
+          <a:prstGeom prst="rect">
+            <a:avLst/>
+          </a:prstGeom>
+        </p:spPr>
+        <p:txBody>
+          <a:bodyPr vert="horz" lIns="91440" tIns="45720" rIns="91440" bIns="45720" rtlCol="0" anchor="b"/>
+          <a:lstStyle>
+            <a:lvl1pPr algn="r">
+              <a:defRPr sz="1200"/>
+            </a:lvl1pPr>
+          </a:lstStyle>
+          <a:p>
+            <a:fld id="{BB5E49A5-4136-284D-997B-48E1D791AD67}" type="slidenum">
+              <a:rPr lang="en-US" smtClean="0"/>
+              <a:t>‹#›</a:t>
+            </a:fld>
+            <a:endParaRPr lang="en-US"/>
+          </a:p>
+        </p:txBody>
+      </p:sp>
+    </p:spTree>
+    <p:extLst>
+      <p:ext uri="{BB962C8B-B14F-4D97-AF65-F5344CB8AC3E}">
+        <p14:creationId xmlns:p14="http://schemas.microsoft.com/office/powerpoint/2010/main" val="2623252185"/>
+      </p:ext>
+    </p:extLst>
+  </p:cSld>
+  <p:clrMap bg1="lt1" tx1="dk1" bg2="lt2" tx2="dk2" accent1="accent1" accent2="accent2" accent3="accent3" accent4="accent4" accent5="accent5" accent6="accent6" hlink="hlink" folHlink="folHlink"/>
+  <p:notesStyle>
+    <a:lvl1pPr marL="0" algn="l" defTabSz="457200" rtl="0" eaLnBrk="1" latinLnBrk="0" hangingPunct="1">
+      <a:defRPr sz="1200" kern="1200">
+        <a:solidFill>
+          <a:schemeClr val="tx1"/>
+        </a:solidFill>
+        <a:latin typeface="+mn-lt"/>
+        <a:ea typeface="+mn-ea"/>
+        <a:cs typeface="+mn-cs"/>
+      </a:defRPr>
+    </a:lvl1pPr>
+    <a:lvl2pPr marL="457200" algn="l" defTabSz="457200" rtl="0" eaLnBrk="1" latinLnBrk="0" hangingPunct="1">
+      <a:defRPr sz="1200" kern="1200">
+        <a:solidFill>
+          <a:schemeClr val="tx1"/>
+        </a:solidFill>
+        <a:latin typeface="+mn-lt"/>
+        <a:ea typeface="+mn-ea"/>
+        <a:cs typeface="+mn-cs"/>
+      </a:defRPr>
+    </a:lvl2pPr>
+    <a:lvl3pPr marL="914400" algn="l" defTabSz="457200" rtl="0" eaLnBrk="1" latinLnBrk="0" hangingPunct="1">
+      <a:defRPr sz="1200" kern="1200">
+        <a:solidFill>
+          <a:schemeClr val="tx1"/>
+        </a:solidFill>
+        <a:latin typeface="+mn-lt"/>
+        <a:ea typeface="+mn-ea"/>
+        <a:cs typeface="+mn-cs"/>
+      </a:defRPr>
+    </a:lvl3pPr>
+    <a:lvl4pPr marL="1371600" algn="l" defTabSz="457200" rtl="0" eaLnBrk="1" latinLnBrk="0" hangingPunct="1">
+      <a:defRPr sz="1200" kern="1200">
+        <a:solidFill>
+          <a:schemeClr val="tx1"/>
+        </a:solidFill>
+        <a:latin typeface="+mn-lt"/>
+        <a:ea typeface="+mn-ea"/>
+        <a:cs typeface="+mn-cs"/>
+      </a:defRPr>
+    </a:lvl4pPr>
+    <a:lvl5pPr marL="1828800" algn="l" defTabSz="457200" rtl="0" eaLnBrk="1" latinLnBrk="0" hangingPunct="1">
+      <a:defRPr sz="1200" kern="1200">
+        <a:solidFill>
+          <a:schemeClr val="tx1"/>
+        </a:solidFill>
+        <a:latin typeface="+mn-lt"/>
+        <a:ea typeface="+mn-ea"/>
+        <a:cs typeface="+mn-cs"/>
+      </a:defRPr>
+    </a:lvl5pPr>
+    <a:lvl6pPr marL="2286000" algn="l" defTabSz="457200" rtl="0" eaLnBrk="1" latinLnBrk="0" hangingPunct="1">
+      <a:defRPr sz="1200" kern="1200">
+        <a:solidFill>
+          <a:schemeClr val="tx1"/>
+        </a:solidFill>
+        <a:latin typeface="+mn-lt"/>
+        <a:ea typeface="+mn-ea"/>
+        <a:cs typeface="+mn-cs"/>
+      </a:defRPr>
+    </a:lvl6pPr>
+    <a:lvl7pPr marL="2743200" algn="l" defTabSz="457200" rtl="0" eaLnBrk="1" latinLnBrk="0" hangingPunct="1">
+      <a:defRPr sz="1200" kern="1200">
+        <a:solidFill>
+          <a:schemeClr val="tx1"/>
+        </a:solidFill>
+        <a:latin typeface="+mn-lt"/>
+        <a:ea typeface="+mn-ea"/>
+        <a:cs typeface="+mn-cs"/>
+      </a:defRPr>
+    </a:lvl7pPr>
+    <a:lvl8pPr marL="3200400" algn="l" defTabSz="457200" rtl="0" eaLnBrk="1" latinLnBrk="0" hangingPunct="1">
+      <a:defRPr sz="1200" kern="1200">
+        <a:solidFill>
+          <a:schemeClr val="tx1"/>
+        </a:solidFill>
+        <a:latin typeface="+mn-lt"/>
+        <a:ea typeface="+mn-ea"/>
+        <a:cs typeface="+mn-cs"/>
+      </a:defRPr>
+    </a:lvl8pPr>
+    <a:lvl9pPr marL="3657600" algn="l" defTabSz="457200" rtl="0" eaLnBrk="1" latinLnBrk="0" hangingPunct="1">
+      <a:defRPr sz="1200" kern="1200">
+        <a:solidFill>
+          <a:schemeClr val="tx1"/>
+        </a:solidFill>
+        <a:latin typeface="+mn-lt"/>
+        <a:ea typeface="+mn-ea"/>
+        <a:cs typeface="+mn-cs"/>
+      </a:defRPr>
+    </a:lvl9pPr>
+  </p:notesStyle>
+</p:notesMaster>
+</file>
+
+<file path=ppt/notesSlides/notesSlide1.xml><?xml version="1.0" encoding="utf-8"?>
+<p:notes xmlns:a="http://schemas.openxmlformats.org/drawingml/2006/main" xmlns:p="http://schemas.openxmlformats.org/presentationml/2006/main" xmlns:r="http://schemas.openxmlformats.org/officeDocument/2006/relationships">
+  <p:cSld>
+    <p:spTree>
+      <p:nvGrpSpPr>
+        <p:cNvPr id="1" name=""/>
+        <p:cNvGrpSpPr/>
+        <p:nvPr/>
+      </p:nvGrpSpPr>
+      <p:grpSpPr>
+        <a:xfrm>
+          <a:off x="0" y="0"/>
+          <a:ext cx="0" cy="0"/>
+          <a:chOff x="0" y="0"/>
+          <a:chExt cx="0" cy="0"/>
+        </a:xfrm>
+      </p:grpSpPr>
+      <p:sp>
+        <p:nvSpPr>
+          <p:cNvPr id="2" name="Slide Image Placeholder 1"/>
+          <p:cNvSpPr>
+            <a:spLocks noGrp="1"/>
+          </p:cNvSpPr>
+          <p:nvPr>
+            <p:ph type="sldImg" idx="2"/>
+          </p:nvPr>
+        </p:nvSpPr>
+        <p:spPr/>
+      </p:sp>
+      <p:sp>
+        <p:nvSpPr>
+          <p:cNvPr id="3" name="Notes Placeholder 2"/>
+          <p:cNvSpPr>
+            <a:spLocks noGrp="1"/>
+          </p:cNvSpPr>
+          <p:nvPr>
+            <p:ph type="body" idx="3" sz="quarter"/>
+          </p:nvPr>
+        </p:nvSpPr>
+        <p:spPr/>
+        <p:txBody>
+          <a:bodyPr/>
+          <a:lstStyle/>
+          <a:p>
+            <a:r>
+              <a:t>Objetivo docente: Leer entrada, convertir tipos y reconocer errores de conversión.</a:t>
+            </a:r>
+          </a:p>
+          <a:p>
+            <a:r>
+              <a:t>Diapositiva 1 de 9: Scanner y conversiones</a:t>
+            </a:r>
+          </a:p>
+          <a:p>
+            <a:r>
+              <a:t>Fase HEXA: Ejecutar — crear</a:t>
+            </a:r>
+          </a:p>
+          <a:p>
+            <a:r>
+              <a:t>Presenta el producto y anticipa la evidencia: Quede diagnóstico.</a:t>
+            </a:r>
+          </a:p>
+          <a:p>
+            <a:r>
+              <a:t>Secuencia docente:</a:t>
+            </a:r>
+          </a:p>
+          <a:p>
+            <a:r>
+              <a:t>- 00:00–00:05 / D1: MICROINVESTIGACIÓN: No expliques Scanner aún. Genera necesidad.</a:t>
+            </a:r>
+          </a:p>
+          <a:p>
+            <a:r>
+              <a:t>- 00:05–00:11 / D2: PÍLDORA DOCENTE 1/4: Explica import, lectura y variable destino. No introduzcas todo Scanner.</a:t>
+            </a:r>
+          </a:p>
+          <a:p>
+            <a:r>
+              <a:t>- 00:11–00:17 / D3: ACTIVIDAD: Circula sin añadir teoría.</a:t>
+            </a:r>
+          </a:p>
+          <a:p>
+            <a:r>
+              <a:t>- 00:17–00:20 / D4: CONFLICTO: Plantea una operación con el texto y pregunta qué falta.</a:t>
+            </a:r>
+          </a:p>
+          <a:p>
+            <a:r>
+              <a:t>- 00:20–00:25 / D5: PÍLDORA DOCENTE 2/4: Explica parseo como conversión desde String compatible.</a:t>
+            </a:r>
+          </a:p>
+          <a:p>
+            <a:r>
+              <a:t>- 00:25–00:29 / D6: EXPERIMENTO: Ejecuta con dos entradas válidas.</a:t>
+            </a:r>
+          </a:p>
+          <a:p>
+            <a:r>
+              <a:t>- 00:29–00:33 / D7: PÍLDORA DOCENTE 3/4: Presenta la idea pequeño→grande como en Tema 1, sin memorizar toda la jerarquía.</a:t>
+            </a:r>
+          </a:p>
+          <a:p>
+            <a:r>
+              <a:t>- 00:33–00:37 / D8: PÍLDORA DOCENTE 4/4: Explica que no redondea en este ejemplo; pierde parte decimal.</a:t>
+            </a:r>
+          </a:p>
+          <a:p>
+            <a:r>
+              <a:t>- 00:37–00:40 / D9: ERROR ÚTIL: Haz predecir compilación y ejecución. No introduzcas try-catch.</a:t>
+            </a:r>
+          </a:p>
+          <a:p>
+            <a:r>
+              <a:t>- 00:40–00:43 / D10: ACTIVIDAD: Pide evidencia concreta.</a:t>
+            </a:r>
+          </a:p>
+          <a:p>
+            <a:r>
+              <a:t>- 00:43–00:45 / D11: CIERRE: Haz preguntas rápidas.</a:t>
+            </a:r>
+          </a:p>
+          <a:p>
+            <a:r>
+              <a:t>Claves docentes:</a:t>
+            </a:r>
+          </a:p>
+          <a:p>
+            <a:r>
+              <a:t>- PÍLDORA DOCENTE 1/4: Explica import, lectura y variable destino. No introduzcas todo Scanner, PÍLDORA DOCENTE 2/4: Explica parseo como conversión desde String compatible, PÍLDORA DOCENTE 3/4: Presenta la idea pequeño→grande como en Tema 1, sin memorizar toda la jerarquía.</a:t>
+            </a:r>
+          </a:p>
+          <a:p>
+            <a:r>
+              <a:t>- PÍLDORA DOCENTE 4/4: Explica que no redondea en este ejemplo; pierde parte decimal.</a:t>
+            </a:r>
+          </a:p>
+          <a:p>
+            <a:r>
+              <a:t>Fuente docente: /mnt/compartido/Programación-26-27/Minijarvis/02-PROFESORADO/02-SESIONES/h1/S212-entrada-por-teclado-con-scanner-docente.md</a:t>
+            </a:r>
+          </a:p>
+        </p:txBody>
+      </p:sp>
+      <p:sp>
+        <p:nvSpPr>
+          <p:cNvPr id="4" name="Slide Number Placeholder 3"/>
+          <p:cNvSpPr>
+            <a:spLocks noGrp="1"/>
+          </p:cNvSpPr>
+          <p:nvPr>
+            <p:ph type="sldNum" idx="5" sz="quarter"/>
+          </p:nvPr>
+        </p:nvSpPr>
+        <p:spPr/>
+      </p:sp>
+    </p:spTree>
+  </p:cSld>
+  <p:clrMapOvr>
+    <a:masterClrMapping/>
+  </p:clrMapOvr>
+</p:notes>
+</file>
+
+<file path=ppt/notesSlides/notesSlide2.xml><?xml version="1.0" encoding="utf-8"?>
+<p:notes xmlns:a="http://schemas.openxmlformats.org/drawingml/2006/main" xmlns:p="http://schemas.openxmlformats.org/presentationml/2006/main" xmlns:r="http://schemas.openxmlformats.org/officeDocument/2006/relationships">
+  <p:cSld>
+    <p:spTree>
+      <p:nvGrpSpPr>
+        <p:cNvPr id="1" name=""/>
+        <p:cNvGrpSpPr/>
+        <p:nvPr/>
+      </p:nvGrpSpPr>
+      <p:grpSpPr>
+        <a:xfrm>
+          <a:off x="0" y="0"/>
+          <a:ext cx="0" cy="0"/>
+          <a:chOff x="0" y="0"/>
+          <a:chExt cx="0" cy="0"/>
+        </a:xfrm>
+      </p:grpSpPr>
+      <p:sp>
+        <p:nvSpPr>
+          <p:cNvPr id="2" name="Slide Image Placeholder 1"/>
+          <p:cNvSpPr>
+            <a:spLocks noGrp="1"/>
+          </p:cNvSpPr>
+          <p:nvPr>
+            <p:ph type="sldImg" idx="2"/>
+          </p:nvPr>
+        </p:nvSpPr>
+        <p:spPr/>
+      </p:sp>
+      <p:sp>
+        <p:nvSpPr>
+          <p:cNvPr id="3" name="Notes Placeholder 2"/>
+          <p:cNvSpPr>
+            <a:spLocks noGrp="1"/>
+          </p:cNvSpPr>
+          <p:nvPr>
+            <p:ph type="body" idx="3" sz="quarter"/>
+          </p:nvPr>
+        </p:nvSpPr>
+        <p:spPr/>
+        <p:txBody>
+          <a:bodyPr/>
+          <a:lstStyle/>
+          <a:p>
+            <a:r>
+              <a:t>Objetivo docente: Leer entrada, convertir tipos y reconocer errores de conversión.</a:t>
+            </a:r>
+          </a:p>
+          <a:p>
+            <a:r>
+              <a:t>Diapositiva 2 de 9: Qué debe conseguirse</a:t>
+            </a:r>
+          </a:p>
+          <a:p>
+            <a:r>
+              <a:t>Fase HEXA: Ejecutar — crear</a:t>
+            </a:r>
+          </a:p>
+          <a:p>
+            <a:r>
+              <a:t>- Objetivo: Leer entrada, convertir tipos y reconocer errores de conversión.</a:t>
+            </a:r>
+          </a:p>
+          <a:p>
+            <a:r>
+              <a:t>- Al terminar: señala la evidencia, explica qué demuestra y reproduce la prueba.</a:t>
+            </a:r>
+          </a:p>
+          <a:p>
+            <a:r>
+              <a:t>Fuente docente: /mnt/compartido/Programación-26-27/Minijarvis/02-PROFESORADO/02-SESIONES/h1/S212-entrada-por-teclado-con-scanner-docente.md</a:t>
+            </a:r>
+          </a:p>
+        </p:txBody>
+      </p:sp>
+      <p:sp>
+        <p:nvSpPr>
+          <p:cNvPr id="4" name="Slide Number Placeholder 3"/>
+          <p:cNvSpPr>
+            <a:spLocks noGrp="1"/>
+          </p:cNvSpPr>
+          <p:nvPr>
+            <p:ph type="sldNum" idx="5" sz="quarter"/>
+          </p:nvPr>
+        </p:nvSpPr>
+        <p:spPr/>
+      </p:sp>
+    </p:spTree>
+  </p:cSld>
+  <p:clrMapOvr>
+    <a:masterClrMapping/>
+  </p:clrMapOvr>
+</p:notes>
+</file>
+
+<file path=ppt/notesSlides/notesSlide3.xml><?xml version="1.0" encoding="utf-8"?>
+<p:notes xmlns:a="http://schemas.openxmlformats.org/drawingml/2006/main" xmlns:p="http://schemas.openxmlformats.org/presentationml/2006/main" xmlns:r="http://schemas.openxmlformats.org/officeDocument/2006/relationships">
+  <p:cSld>
+    <p:spTree>
+      <p:nvGrpSpPr>
+        <p:cNvPr id="1" name=""/>
+        <p:cNvGrpSpPr/>
+        <p:nvPr/>
+      </p:nvGrpSpPr>
+      <p:grpSpPr>
+        <a:xfrm>
+          <a:off x="0" y="0"/>
+          <a:ext cx="0" cy="0"/>
+          <a:chOff x="0" y="0"/>
+          <a:chExt cx="0" cy="0"/>
+        </a:xfrm>
+      </p:grpSpPr>
+      <p:sp>
+        <p:nvSpPr>
+          <p:cNvPr id="2" name="Slide Image Placeholder 1"/>
+          <p:cNvSpPr>
+            <a:spLocks noGrp="1"/>
+          </p:cNvSpPr>
+          <p:nvPr>
+            <p:ph type="sldImg" idx="2"/>
+          </p:nvPr>
+        </p:nvSpPr>
+        <p:spPr/>
+      </p:sp>
+      <p:sp>
+        <p:nvSpPr>
+          <p:cNvPr id="3" name="Notes Placeholder 2"/>
+          <p:cNvSpPr>
+            <a:spLocks noGrp="1"/>
+          </p:cNvSpPr>
+          <p:nvPr>
+            <p:ph type="body" idx="3" sz="quarter"/>
+          </p:nvPr>
+        </p:nvSpPr>
+        <p:spPr/>
+        <p:txBody>
+          <a:bodyPr/>
+          <a:lstStyle/>
+          <a:p>
+            <a:r>
+              <a:t>Objetivo docente: Leer entrada, convertir tipos y reconocer errores de conversión.</a:t>
+            </a:r>
+          </a:p>
+          <a:p>
+            <a:r>
+              <a:t>Diapositiva 3 de 9: Ejemplo o demostración · 1</a:t>
+            </a:r>
+          </a:p>
+          <a:p>
+            <a:r>
+              <a:t>Fase HEXA: Ejecutar — crear</a:t>
+            </a:r>
+          </a:p>
+          <a:p>
+            <a:r>
+              <a:t>Modela el ejemplo sin resolver la actividad completa; pide una predicción antes de ejecutar.</a:t>
+            </a:r>
+          </a:p>
+          <a:p>
+            <a:r>
+              <a:t>- D1 · Hasta ahora los datos los decide quien programa — ¿Cómo hacemos para que los escriba la persona que ejecuta MiniJarvis?</a:t>
+            </a:r>
+          </a:p>
+          <a:p>
+            <a:r>
+              <a:t>- D2 · Scanner: pedir → leer → guardar — import java.util.Scanner;</a:t>
+            </a:r>
+          </a:p>
+          <a:p>
+            <a:r>
+              <a:t>- Scanner scanner = new Scanner(System.in);</a:t>
+            </a:r>
+          </a:p>
+          <a:p>
+            <a:r>
+              <a:t>- String userName = scanner.nextLine();</a:t>
+            </a:r>
+          </a:p>
+          <a:p>
+            <a:r>
+              <a:t>- scanner.close();</a:t>
+            </a:r>
+          </a:p>
+          <a:p>
+            <a:r>
+              <a:t>Fuente docente: /mnt/compartido/Programación-26-27/Minijarvis/02-PROFESORADO/02-SESIONES/h1/S212-entrada-por-teclado-con-scanner-docente.md</a:t>
+            </a:r>
+          </a:p>
+        </p:txBody>
+      </p:sp>
+      <p:sp>
+        <p:nvSpPr>
+          <p:cNvPr id="4" name="Slide Number Placeholder 3"/>
+          <p:cNvSpPr>
+            <a:spLocks noGrp="1"/>
+          </p:cNvSpPr>
+          <p:nvPr>
+            <p:ph type="sldNum" idx="5" sz="quarter"/>
+          </p:nvPr>
+        </p:nvSpPr>
+        <p:spPr/>
+      </p:sp>
+    </p:spTree>
+  </p:cSld>
+  <p:clrMapOvr>
+    <a:masterClrMapping/>
+  </p:clrMapOvr>
+</p:notes>
+</file>
+
+<file path=ppt/notesSlides/notesSlide4.xml><?xml version="1.0" encoding="utf-8"?>
+<p:notes xmlns:a="http://schemas.openxmlformats.org/drawingml/2006/main" xmlns:p="http://schemas.openxmlformats.org/presentationml/2006/main" xmlns:r="http://schemas.openxmlformats.org/officeDocument/2006/relationships">
+  <p:cSld>
+    <p:spTree>
+      <p:nvGrpSpPr>
+        <p:cNvPr id="1" name=""/>
+        <p:cNvGrpSpPr/>
+        <p:nvPr/>
+      </p:nvGrpSpPr>
+      <p:grpSpPr>
+        <a:xfrm>
+          <a:off x="0" y="0"/>
+          <a:ext cx="0" cy="0"/>
+          <a:chOff x="0" y="0"/>
+          <a:chExt cx="0" cy="0"/>
+        </a:xfrm>
+      </p:grpSpPr>
+      <p:sp>
+        <p:nvSpPr>
+          <p:cNvPr id="2" name="Slide Image Placeholder 1"/>
+          <p:cNvSpPr>
+            <a:spLocks noGrp="1"/>
+          </p:cNvSpPr>
+          <p:nvPr>
+            <p:ph type="sldImg" idx="2"/>
+          </p:nvPr>
+        </p:nvSpPr>
+        <p:spPr/>
+      </p:sp>
+      <p:sp>
+        <p:nvSpPr>
+          <p:cNvPr id="3" name="Notes Placeholder 2"/>
+          <p:cNvSpPr>
+            <a:spLocks noGrp="1"/>
+          </p:cNvSpPr>
+          <p:nvPr>
+            <p:ph type="body" idx="3" sz="quarter"/>
+          </p:nvPr>
+        </p:nvSpPr>
+        <p:spPr/>
+        <p:txBody>
+          <a:bodyPr/>
+          <a:lstStyle/>
+          <a:p>
+            <a:r>
+              <a:t>Objetivo docente: Leer entrada, convertir tipos y reconocer errores de conversión.</a:t>
+            </a:r>
+          </a:p>
+          <a:p>
+            <a:r>
+              <a:t>Diapositiva 4 de 9: Ejemplo o demostración · 2</a:t>
+            </a:r>
+          </a:p>
+          <a:p>
+            <a:r>
+              <a:t>Fase HEXA: Ejecutar — crear</a:t>
+            </a:r>
+          </a:p>
+          <a:p>
+            <a:r>
+              <a:t>Modela el ejemplo sin resolver la actividad completa; pide una predicción antes de ejecutar.</a:t>
+            </a:r>
+          </a:p>
+          <a:p>
+            <a:r>
+              <a:t>- D3 · Pide un nombre y úsalo — Ejecuta dos veces con nombres ficticios distintos.</a:t>
+            </a:r>
+          </a:p>
+          <a:p>
+            <a:r>
+              <a:t>- ¿Qué cambia? ¿Qué no?</a:t>
+            </a:r>
+          </a:p>
+          <a:p>
+            <a:r>
+              <a:t>- D4 · Tengo "5". ¿Tengo el número 5? — "5" es texto si procede de nextLine().</a:t>
+            </a:r>
+          </a:p>
+          <a:p>
+            <a:r>
+              <a:t>Fuente docente: /mnt/compartido/Programación-26-27/Minijarvis/02-PROFESORADO/02-SESIONES/h1/S212-entrada-por-teclado-con-scanner-docente.md</a:t>
+            </a:r>
+          </a:p>
+        </p:txBody>
+      </p:sp>
+      <p:sp>
+        <p:nvSpPr>
+          <p:cNvPr id="4" name="Slide Number Placeholder 3"/>
+          <p:cNvSpPr>
+            <a:spLocks noGrp="1"/>
+          </p:cNvSpPr>
+          <p:nvPr>
+            <p:ph type="sldNum" idx="5" sz="quarter"/>
+          </p:nvPr>
+        </p:nvSpPr>
+        <p:spPr/>
+      </p:sp>
+    </p:spTree>
+  </p:cSld>
+  <p:clrMapOvr>
+    <a:masterClrMapping/>
+  </p:clrMapOvr>
+</p:notes>
+</file>
+
+<file path=ppt/notesSlides/notesSlide5.xml><?xml version="1.0" encoding="utf-8"?>
+<p:notes xmlns:a="http://schemas.openxmlformats.org/drawingml/2006/main" xmlns:p="http://schemas.openxmlformats.org/presentationml/2006/main" xmlns:r="http://schemas.openxmlformats.org/officeDocument/2006/relationships">
+  <p:cSld>
+    <p:spTree>
+      <p:nvGrpSpPr>
+        <p:cNvPr id="1" name=""/>
+        <p:cNvGrpSpPr/>
+        <p:nvPr/>
+      </p:nvGrpSpPr>
+      <p:grpSpPr>
+        <a:xfrm>
+          <a:off x="0" y="0"/>
+          <a:ext cx="0" cy="0"/>
+          <a:chOff x="0" y="0"/>
+          <a:chExt cx="0" cy="0"/>
+        </a:xfrm>
+      </p:grpSpPr>
+      <p:sp>
+        <p:nvSpPr>
+          <p:cNvPr id="2" name="Slide Image Placeholder 1"/>
+          <p:cNvSpPr>
+            <a:spLocks noGrp="1"/>
+          </p:cNvSpPr>
+          <p:nvPr>
+            <p:ph type="sldImg" idx="2"/>
+          </p:nvPr>
+        </p:nvSpPr>
+        <p:spPr/>
+      </p:sp>
+      <p:sp>
+        <p:nvSpPr>
+          <p:cNvPr id="3" name="Notes Placeholder 2"/>
+          <p:cNvSpPr>
+            <a:spLocks noGrp="1"/>
+          </p:cNvSpPr>
+          <p:nvPr>
+            <p:ph type="body" idx="3" sz="quarter"/>
+          </p:nvPr>
+        </p:nvSpPr>
+        <p:spPr/>
+        <p:txBody>
+          <a:bodyPr/>
+          <a:lstStyle/>
+          <a:p>
+            <a:r>
+              <a:t>Objetivo docente: Leer entrada, convertir tipos y reconocer errores de conversión.</a:t>
+            </a:r>
+          </a:p>
+          <a:p>
+            <a:r>
+              <a:t>Diapositiva 5 de 9: Actividad central · 1</a:t>
+            </a:r>
+          </a:p>
+          <a:p>
+            <a:r>
+              <a:t>Fase HEXA: Ejecutar — crear</a:t>
+            </a:r>
+          </a:p>
+          <a:p>
+            <a:r>
+              <a:t>Entrega la consigna, observa decisiones y pide una prueba reproducible.</a:t>
+            </a:r>
+          </a:p>
+          <a:p>
+            <a:r>
+              <a:t>- Predice antes de ejecutar cuando haya código.</a:t>
+            </a:r>
+          </a:p>
+          <a:p>
+            <a:r>
+              <a:t>- Realiza la micropráctica o modificación prevista.</a:t>
+            </a:r>
+          </a:p>
+          <a:p>
+            <a:r>
+              <a:t>- Prueba el caso normal y, cuando exista una decisión o conversión, también el caso alternativo o erróneo.</a:t>
+            </a:r>
+          </a:p>
+          <a:p>
+            <a:r>
+              <a:t>- Conserva el código o resultado en el repositorio o espacio indicado.</a:t>
+            </a:r>
+          </a:p>
+          <a:p>
+            <a:r>
+              <a:t>Fuente docente: /mnt/compartido/Programación-26-27/Minijarvis/02-PROFESORADO/02-SESIONES/h1/S212-entrada-por-teclado-con-scanner-docente.md</a:t>
+            </a:r>
+          </a:p>
+        </p:txBody>
+      </p:sp>
+      <p:sp>
+        <p:nvSpPr>
+          <p:cNvPr id="4" name="Slide Number Placeholder 3"/>
+          <p:cNvSpPr>
+            <a:spLocks noGrp="1"/>
+          </p:cNvSpPr>
+          <p:nvPr>
+            <p:ph type="sldNum" idx="5" sz="quarter"/>
+          </p:nvPr>
+        </p:nvSpPr>
+        <p:spPr/>
+      </p:sp>
+    </p:spTree>
+  </p:cSld>
+  <p:clrMapOvr>
+    <a:masterClrMapping/>
+  </p:clrMapOvr>
+</p:notes>
+</file>
+
+<file path=ppt/notesSlides/notesSlide6.xml><?xml version="1.0" encoding="utf-8"?>
+<p:notes xmlns:a="http://schemas.openxmlformats.org/drawingml/2006/main" xmlns:p="http://schemas.openxmlformats.org/presentationml/2006/main" xmlns:r="http://schemas.openxmlformats.org/officeDocument/2006/relationships">
+  <p:cSld>
+    <p:spTree>
+      <p:nvGrpSpPr>
+        <p:cNvPr id="1" name=""/>
+        <p:cNvGrpSpPr/>
+        <p:nvPr/>
+      </p:nvGrpSpPr>
+      <p:grpSpPr>
+        <a:xfrm>
+          <a:off x="0" y="0"/>
+          <a:ext cx="0" cy="0"/>
+          <a:chOff x="0" y="0"/>
+          <a:chExt cx="0" cy="0"/>
+        </a:xfrm>
+      </p:grpSpPr>
+      <p:sp>
+        <p:nvSpPr>
+          <p:cNvPr id="2" name="Slide Image Placeholder 1"/>
+          <p:cNvSpPr>
+            <a:spLocks noGrp="1"/>
+          </p:cNvSpPr>
+          <p:nvPr>
+            <p:ph type="sldImg" idx="2"/>
+          </p:nvPr>
+        </p:nvSpPr>
+        <p:spPr/>
+      </p:sp>
+      <p:sp>
+        <p:nvSpPr>
+          <p:cNvPr id="3" name="Notes Placeholder 2"/>
+          <p:cNvSpPr>
+            <a:spLocks noGrp="1"/>
+          </p:cNvSpPr>
+          <p:nvPr>
+            <p:ph type="body" idx="3" sz="quarter"/>
+          </p:nvPr>
+        </p:nvSpPr>
+        <p:spPr/>
+        <p:txBody>
+          <a:bodyPr/>
+          <a:lstStyle/>
+          <a:p>
+            <a:r>
+              <a:t>Objetivo docente: Leer entrada, convertir tipos y reconocer errores de conversión.</a:t>
+            </a:r>
+          </a:p>
+          <a:p>
+            <a:r>
+              <a:t>Diapositiva 6 de 9: Actividad central · 2</a:t>
+            </a:r>
+          </a:p>
+          <a:p>
+            <a:r>
+              <a:t>Fase HEXA: Ejecutar — crear</a:t>
+            </a:r>
+          </a:p>
+          <a:p>
+            <a:r>
+              <a:t>Entrega la consigna, observa decisiones y pide una prueba reproducible.</a:t>
+            </a:r>
+          </a:p>
+          <a:p>
+            <a:r>
+              <a:t>- Registra una sola entrada en el diario individual; no crees un informe paralelo.</a:t>
+            </a:r>
+          </a:p>
+          <a:p>
+            <a:r>
+              <a:t>- ¿Qué puedes señalar, explicar y probar al terminar este checkpoint?</a:t>
+            </a:r>
+          </a:p>
+          <a:p>
+            <a:r>
+              <a:t>Fuente docente: /mnt/compartido/Programación-26-27/Minijarvis/02-PROFESORADO/02-SESIONES/h1/S212-entrada-por-teclado-con-scanner-docente.md</a:t>
+            </a:r>
+          </a:p>
+        </p:txBody>
+      </p:sp>
+      <p:sp>
+        <p:nvSpPr>
+          <p:cNvPr id="4" name="Slide Number Placeholder 3"/>
+          <p:cNvSpPr>
+            <a:spLocks noGrp="1"/>
+          </p:cNvSpPr>
+          <p:nvPr>
+            <p:ph type="sldNum" idx="5" sz="quarter"/>
+          </p:nvPr>
+        </p:nvSpPr>
+        <p:spPr/>
+      </p:sp>
+    </p:spTree>
+  </p:cSld>
+  <p:clrMapOvr>
+    <a:masterClrMapping/>
+  </p:clrMapOvr>
+</p:notes>
+</file>
+
+<file path=ppt/notesSlides/notesSlide7.xml><?xml version="1.0" encoding="utf-8"?>
+<p:notes xmlns:a="http://schemas.openxmlformats.org/drawingml/2006/main" xmlns:p="http://schemas.openxmlformats.org/presentationml/2006/main" xmlns:r="http://schemas.openxmlformats.org/officeDocument/2006/relationships">
+  <p:cSld>
+    <p:spTree>
+      <p:nvGrpSpPr>
+        <p:cNvPr id="1" name=""/>
+        <p:cNvGrpSpPr/>
+        <p:nvPr/>
+      </p:nvGrpSpPr>
+      <p:grpSpPr>
+        <a:xfrm>
+          <a:off x="0" y="0"/>
+          <a:ext cx="0" cy="0"/>
+          <a:chOff x="0" y="0"/>
+          <a:chExt cx="0" cy="0"/>
+        </a:xfrm>
+      </p:grpSpPr>
+      <p:sp>
+        <p:nvSpPr>
+          <p:cNvPr id="2" name="Slide Image Placeholder 1"/>
+          <p:cNvSpPr>
+            <a:spLocks noGrp="1"/>
+          </p:cNvSpPr>
+          <p:nvPr>
+            <p:ph type="sldImg" idx="2"/>
+          </p:nvPr>
+        </p:nvSpPr>
+        <p:spPr/>
+      </p:sp>
+      <p:sp>
+        <p:nvSpPr>
+          <p:cNvPr id="3" name="Notes Placeholder 2"/>
+          <p:cNvSpPr>
+            <a:spLocks noGrp="1"/>
+          </p:cNvSpPr>
+          <p:nvPr>
+            <p:ph type="body" idx="3" sz="quarter"/>
+          </p:nvPr>
+        </p:nvSpPr>
+        <p:spPr/>
+        <p:txBody>
+          <a:bodyPr/>
+          <a:lstStyle/>
+          <a:p>
+            <a:r>
+              <a:t>Objetivo docente: Leer entrada, convertir tipos y reconocer errores de conversión.</a:t>
+            </a:r>
+          </a:p>
+          <a:p>
+            <a:r>
+              <a:t>Diapositiva 7 de 9: Evidencia y comprobación</a:t>
+            </a:r>
+          </a:p>
+          <a:p>
+            <a:r>
+              <a:t>Fase HEXA: Ejecutar — crear</a:t>
+            </a:r>
+          </a:p>
+          <a:p>
+            <a:r>
+              <a:t>Comprueba la evidencia en su fuente canónica: Quede diagnóstico.</a:t>
+            </a:r>
+          </a:p>
+          <a:p>
+            <a:r>
+              <a:t>- conserva el código o la prueba en el lugar indicado por la sesión;</a:t>
+            </a:r>
+          </a:p>
+          <a:p>
+            <a:r>
+              <a:t>- añade una sola entrada al diario individual con prueba, bloqueo y siguiente paso;</a:t>
+            </a:r>
+          </a:p>
+          <a:p>
+            <a:r>
+              <a:t>- no copies la misma reflexión en otro documento; el Site personal seleccionará evidencias al cerrar H1.</a:t>
+            </a:r>
+          </a:p>
+          <a:p>
+            <a:r>
+              <a:t>Fuente docente: /mnt/compartido/Programación-26-27/Minijarvis/02-PROFESORADO/02-SESIONES/h1/S212-entrada-por-teclado-con-scanner-docente.md</a:t>
+            </a:r>
+          </a:p>
+        </p:txBody>
+      </p:sp>
+      <p:sp>
+        <p:nvSpPr>
+          <p:cNvPr id="4" name="Slide Number Placeholder 3"/>
+          <p:cNvSpPr>
+            <a:spLocks noGrp="1"/>
+          </p:cNvSpPr>
+          <p:nvPr>
+            <p:ph type="sldNum" idx="5" sz="quarter"/>
+          </p:nvPr>
+        </p:nvSpPr>
+        <p:spPr/>
+      </p:sp>
+    </p:spTree>
+  </p:cSld>
+  <p:clrMapOvr>
+    <a:masterClrMapping/>
+  </p:clrMapOvr>
+</p:notes>
+</file>
+
+<file path=ppt/notesSlides/notesSlide8.xml><?xml version="1.0" encoding="utf-8"?>
+<p:notes xmlns:a="http://schemas.openxmlformats.org/drawingml/2006/main" xmlns:p="http://schemas.openxmlformats.org/presentationml/2006/main" xmlns:r="http://schemas.openxmlformats.org/officeDocument/2006/relationships">
+  <p:cSld>
+    <p:spTree>
+      <p:nvGrpSpPr>
+        <p:cNvPr id="1" name=""/>
+        <p:cNvGrpSpPr/>
+        <p:nvPr/>
+      </p:nvGrpSpPr>
+      <p:grpSpPr>
+        <a:xfrm>
+          <a:off x="0" y="0"/>
+          <a:ext cx="0" cy="0"/>
+          <a:chOff x="0" y="0"/>
+          <a:chExt cx="0" cy="0"/>
+        </a:xfrm>
+      </p:grpSpPr>
+      <p:sp>
+        <p:nvSpPr>
+          <p:cNvPr id="2" name="Slide Image Placeholder 1"/>
+          <p:cNvSpPr>
+            <a:spLocks noGrp="1"/>
+          </p:cNvSpPr>
+          <p:nvPr>
+            <p:ph type="sldImg" idx="2"/>
+          </p:nvPr>
+        </p:nvSpPr>
+        <p:spPr/>
+      </p:sp>
+      <p:sp>
+        <p:nvSpPr>
+          <p:cNvPr id="3" name="Notes Placeholder 2"/>
+          <p:cNvSpPr>
+            <a:spLocks noGrp="1"/>
+          </p:cNvSpPr>
+          <p:nvPr>
+            <p:ph type="body" idx="3" sz="quarter"/>
+          </p:nvPr>
+        </p:nvSpPr>
+        <p:spPr/>
+        <p:txBody>
+          <a:bodyPr/>
+          <a:lstStyle/>
+          <a:p>
+            <a:r>
+              <a:t>Objetivo docente: Leer entrada, convertir tipos y reconocer errores de conversión.</a:t>
+            </a:r>
+          </a:p>
+          <a:p>
+            <a:r>
+              <a:t>Diapositiva 8 de 9: Seguridad y uso responsable</a:t>
+            </a:r>
+          </a:p>
+          <a:p>
+            <a:r>
+              <a:t>Fase HEXA: Ejecutar — crear</a:t>
+            </a:r>
+          </a:p>
+          <a:p>
+            <a:r>
+              <a:t>Recuerda estos límites antes de que el alumnado comparta o publique:</a:t>
+            </a:r>
+          </a:p>
+          <a:p>
+            <a:r>
+              <a:t>- Usa datos ficticios y no publiques credenciales ni información personal.</a:t>
+            </a:r>
+          </a:p>
+          <a:p>
+            <a:r>
+              <a:t>- Si utilizas IA de forma sustantiva, registra propósito, propuesta, cambios propios y validación en el registro de IA del hito.</a:t>
+            </a:r>
+          </a:p>
+          <a:p>
+            <a:r>
+              <a:t>Fuente docente: /mnt/compartido/Programación-26-27/Minijarvis/02-PROFESORADO/02-SESIONES/h1/S212-entrada-por-teclado-con-scanner-docente.md</a:t>
+            </a:r>
+          </a:p>
+        </p:txBody>
+      </p:sp>
+      <p:sp>
+        <p:nvSpPr>
+          <p:cNvPr id="4" name="Slide Number Placeholder 3"/>
+          <p:cNvSpPr>
+            <a:spLocks noGrp="1"/>
+          </p:cNvSpPr>
+          <p:nvPr>
+            <p:ph type="sldNum" idx="5" sz="quarter"/>
+          </p:nvPr>
+        </p:nvSpPr>
+        <p:spPr/>
+      </p:sp>
+    </p:spTree>
+  </p:cSld>
+  <p:clrMapOvr>
+    <a:masterClrMapping/>
+  </p:clrMapOvr>
+</p:notes>
+</file>
+
+<file path=ppt/notesSlides/notesSlide9.xml><?xml version="1.0" encoding="utf-8"?>
+<p:notes xmlns:a="http://schemas.openxmlformats.org/drawingml/2006/main" xmlns:p="http://schemas.openxmlformats.org/presentationml/2006/main" xmlns:r="http://schemas.openxmlformats.org/officeDocument/2006/relationships">
+  <p:cSld>
+    <p:spTree>
+      <p:nvGrpSpPr>
+        <p:cNvPr id="1" name=""/>
+        <p:cNvGrpSpPr/>
+        <p:nvPr/>
+      </p:nvGrpSpPr>
+      <p:grpSpPr>
+        <a:xfrm>
+          <a:off x="0" y="0"/>
+          <a:ext cx="0" cy="0"/>
+          <a:chOff x="0" y="0"/>
+          <a:chExt cx="0" cy="0"/>
+        </a:xfrm>
+      </p:grpSpPr>
+      <p:sp>
+        <p:nvSpPr>
+          <p:cNvPr id="2" name="Slide Image Placeholder 1"/>
+          <p:cNvSpPr>
+            <a:spLocks noGrp="1"/>
+          </p:cNvSpPr>
+          <p:nvPr>
+            <p:ph type="sldImg" idx="2"/>
+          </p:nvPr>
+        </p:nvSpPr>
+        <p:spPr/>
+      </p:sp>
+      <p:sp>
+        <p:nvSpPr>
+          <p:cNvPr id="3" name="Notes Placeholder 2"/>
+          <p:cNvSpPr>
+            <a:spLocks noGrp="1"/>
+          </p:cNvSpPr>
+          <p:nvPr>
+            <p:ph type="body" idx="3" sz="quarter"/>
+          </p:nvPr>
+        </p:nvSpPr>
+        <p:spPr/>
+        <p:txBody>
+          <a:bodyPr/>
+          <a:lstStyle/>
+          <a:p>
+            <a:r>
+              <a:t>Objetivo docente: Leer entrada, convertir tipos y reconocer errores de conversión.</a:t>
+            </a:r>
+          </a:p>
+          <a:p>
+            <a:r>
+              <a:t>Diapositiva 9 de 9: Cierre y defensa</a:t>
+            </a:r>
+          </a:p>
+          <a:p>
+            <a:r>
+              <a:t>Fase HEXA: Ejecutar — crear</a:t>
+            </a:r>
+          </a:p>
+          <a:p>
+            <a:r>
+              <a:t>Cierra con explicación individual, prueba observable y siguiente paso concreto.</a:t>
+            </a:r>
+          </a:p>
+          <a:p>
+            <a:r>
+              <a:t>- ¿Qué puedes señalar, explicar y probar al terminar este checkpoint?</a:t>
+            </a:r>
+          </a:p>
+          <a:p>
+            <a:r>
+              <a:t>Fuente docente: /mnt/compartido/Programación-26-27/Minijarvis/02-PROFESORADO/02-SESIONES/h1/S212-entrada-por-teclado-con-scanner-docente.md</a:t>
+            </a:r>
+          </a:p>
+        </p:txBody>
+      </p:sp>
+      <p:sp>
+        <p:nvSpPr>
+          <p:cNvPr id="4" name="Slide Number Placeholder 3"/>
+          <p:cNvSpPr>
+            <a:spLocks noGrp="1"/>
+          </p:cNvSpPr>
+          <p:nvPr>
+            <p:ph type="sldNum" idx="5" sz="quarter"/>
+          </p:nvPr>
+        </p:nvSpPr>
+        <p:spPr/>
+      </p:sp>
+    </p:spTree>
+  </p:cSld>
+  <p:clrMapOvr>
+    <a:masterClrMapping/>
+  </p:clrMapOvr>
+</p:notes>
 </file>
 
 <file path=ppt/slideLayouts/slideLayout1.xml><?xml version="1.0" encoding="utf-8"?>
@@ -3293,7 +4634,7 @@
               </a:defRPr>
             </a:pPr>
             <a:r>
-              <a:t>Entrada por teclado con Scanner</a:t>
+              <a:t>Scanner y conversiones</a:t>
             </a:r>
           </a:p>
         </p:txBody>
@@ -3329,7 +4670,7 @@
               </a:defRPr>
             </a:pPr>
             <a:r>
-              <a:t>H1 · 45 minutos</a:t>
+              <a:t>H1 — Primer MiniJarvis · Fase HEXA: Ejecutar — crear</a:t>
             </a:r>
           </a:p>
         </p:txBody>
@@ -3365,7 +4706,7 @@
               </a:defRPr>
             </a:pPr>
             <a:r>
-              <a:t>Fase HEXA: Investigar — aprender lo necesario</a:t>
+              <a:t>Fase HEXA: Ejecutar — crear</a:t>
             </a:r>
           </a:p>
         </p:txBody>
@@ -3373,6 +4714,42 @@
       <p:sp>
         <p:nvSpPr>
           <p:cNvPr id="9" name="TextBox 8"/>
+          <p:cNvSpPr txBox="1"/>
+          <p:nvPr/>
+        </p:nvSpPr>
+        <p:spPr>
+          <a:xfrm>
+            <a:off x="713232" y="4965192"/>
+            <a:ext cx="10241280" cy="594360"/>
+          </a:xfrm>
+          <a:prstGeom prst="rect">
+            <a:avLst/>
+          </a:prstGeom>
+          <a:noFill/>
+        </p:spPr>
+        <p:txBody>
+          <a:bodyPr wrap="square" lIns="45720" rIns="45720" tIns="36576" bIns="36576" anchor="t">
+            <a:spAutoFit/>
+          </a:bodyPr>
+          <a:lstStyle/>
+          <a:p>
+            <a:pPr algn="l">
+              <a:defRPr sz="1700" b="0">
+                <a:solidFill>
+                  <a:srgbClr val="D2D9E4"/>
+                </a:solidFill>
+                <a:latin typeface="Aptos"/>
+              </a:defRPr>
+            </a:pPr>
+            <a:r>
+              <a:t>Individual con contraste por parejas o equipo cuando la práctica lo requiera</a:t>
+            </a:r>
+          </a:p>
+        </p:txBody>
+      </p:sp>
+      <p:sp>
+        <p:nvSpPr>
+          <p:cNvPr id="10" name="TextBox 9"/>
           <p:cNvSpPr txBox="1"/>
           <p:nvPr/>
         </p:nvSpPr>
@@ -3401,7 +4778,7 @@
               </a:defRPr>
             </a:pPr>
             <a:r>
-              <a:t>MINIJARVIS · PROGRAMACIÓN + ENTORNOS DE DESARROLLO</a:t>
+              <a:t>MINIJARVIS · PROGRAMACIÓN</a:t>
             </a:r>
           </a:p>
         </p:txBody>
@@ -3656,7 +5033,7 @@
               </a:defRPr>
             </a:pPr>
             <a:r>
-              <a:t>MiniJarvis · 1.º DAW · Sesión 212 · H1</a:t>
+              <a:t>MiniJarvis · 1.º DAW · Sesión 212 · H1 — Primer MiniJarvis</a:t>
             </a:r>
           </a:p>
         </p:txBody>
@@ -3737,7 +5114,7 @@
               </a:defRPr>
             </a:pPr>
             <a:r>
-              <a:t>Objetivo: Asegurar conceptos del Tema 1 que no aparecen de forma natural en el saludo inicial.</a:t>
+              <a:t>Objetivo: Leer entrada, convertir tipos y reconocer errores de conversión.</a:t>
             </a:r>
           </a:p>
         </p:txBody>
@@ -3818,7 +5195,7 @@
               </a:defRPr>
             </a:pPr>
             <a:r>
-              <a:t>Evidencia: Código o ejercicio corto con entrada numérica, cálculo, comparación y prueba con dato válido e inválido.</a:t>
+              <a:t>Al terminar: señala la evidencia, explica qué demuestra y reproduce la prueba.</a:t>
             </a:r>
           </a:p>
         </p:txBody>
@@ -3958,7 +5335,7 @@
               </a:defRPr>
             </a:pPr>
             <a:r>
-              <a:t>RITMO DE LA SESIÓN</a:t>
+              <a:t>OBSERVAR ANTES DE ACTUAR</a:t>
             </a:r>
           </a:p>
         </p:txBody>
@@ -3994,7 +5371,7 @@
               </a:defRPr>
             </a:pPr>
             <a:r>
-              <a:t>Secuencia de aula</a:t>
+              <a:t>Ejemplo o demostración · 1</a:t>
             </a:r>
           </a:p>
         </p:txBody>
@@ -4073,27 +5450,27 @@
               </a:defRPr>
             </a:pPr>
             <a:r>
-              <a:t>MiniJarvis · 1.º DAW · Sesión 212 · H1</a:t>
-            </a:r>
-          </a:p>
-        </p:txBody>
-      </p:sp>
-      <p:sp>
-        <p:nvSpPr>
-          <p:cNvPr id="8" name="Oval 7"/>
+              <a:t>MiniJarvis · 1.º DAW · Sesión 212 · H1 — Primer MiniJarvis</a:t>
+            </a:r>
+          </a:p>
+        </p:txBody>
+      </p:sp>
+      <p:sp>
+        <p:nvSpPr>
+          <p:cNvPr id="8" name="Rounded Rectangle 7"/>
           <p:cNvSpPr/>
           <p:nvPr/>
         </p:nvSpPr>
         <p:spPr>
           <a:xfrm>
-            <a:off x="658368" y="1280160"/>
-            <a:ext cx="475488" cy="475488"/>
-          </a:xfrm>
-          <a:prstGeom prst="ellipse">
+            <a:off x="621792" y="1353312"/>
+            <a:ext cx="10927080" cy="4526280"/>
+          </a:xfrm>
+          <a:prstGeom prst="roundRect">
             <a:avLst/>
           </a:prstGeom>
           <a:solidFill>
-            <a:srgbClr val="2F5BA8"/>
+            <a:srgbClr val="121824"/>
           </a:solidFill>
           <a:ln>
             <a:noFill/>
@@ -4129,8 +5506,8 @@
         </p:nvSpPr>
         <p:spPr>
           <a:xfrm>
-            <a:off x="658368" y="1380744"/>
-            <a:ext cx="475488" cy="201168"/>
+            <a:off x="932688" y="1627632"/>
+            <a:ext cx="2057400" cy="411480"/>
           </a:xfrm>
           <a:prstGeom prst="rect">
             <a:avLst/>
@@ -4143,8 +5520,47 @@
           </a:bodyPr>
           <a:lstStyle/>
           <a:p>
-            <a:pPr algn="ctr">
+            <a:pPr algn="l">
               <a:defRPr sz="1300" b="1">
+                <a:solidFill>
+                  <a:srgbClr val="2F5BA8"/>
+                </a:solidFill>
+                <a:latin typeface="Aptos"/>
+              </a:defRPr>
+            </a:pPr>
+            <a:r>
+              <a:t>DEMOSTRACIÓN</a:t>
+            </a:r>
+          </a:p>
+        </p:txBody>
+      </p:sp>
+      <p:sp>
+        <p:nvSpPr>
+          <p:cNvPr id="10" name="TextBox 9"/>
+          <p:cNvSpPr txBox="1"/>
+          <p:nvPr/>
+        </p:nvSpPr>
+        <p:spPr>
+          <a:xfrm>
+            <a:off x="932688" y="2212848"/>
+            <a:ext cx="9966960" cy="3246120"/>
+          </a:xfrm>
+          <a:prstGeom prst="rect">
+            <a:avLst/>
+          </a:prstGeom>
+          <a:noFill/>
+        </p:spPr>
+        <p:txBody>
+          <a:bodyPr wrap="square" lIns="73152" rIns="45720" tIns="36576">
+            <a:spAutoFit/>
+          </a:bodyPr>
+          <a:lstStyle/>
+          <a:p>
+            <a:pPr>
+              <a:spcAft>
+                <a:spcPts val="900"/>
+              </a:spcAft>
+              <a:defRPr sz="2200">
                 <a:solidFill>
                   <a:srgbClr val="FFFFFF"/>
                 </a:solidFill>
@@ -4152,114 +5568,15 @@
               </a:defRPr>
             </a:pPr>
             <a:r>
-              <a:t>1</a:t>
-            </a:r>
-          </a:p>
-        </p:txBody>
-      </p:sp>
-      <p:sp>
-        <p:nvSpPr>
-          <p:cNvPr id="10" name="TextBox 9"/>
-          <p:cNvSpPr txBox="1"/>
-          <p:nvPr/>
-        </p:nvSpPr>
-        <p:spPr>
-          <a:xfrm>
-            <a:off x="1389888" y="1261872"/>
-            <a:ext cx="10058400" cy="772668"/>
-          </a:xfrm>
-          <a:prstGeom prst="rect">
-            <a:avLst/>
-          </a:prstGeom>
-          <a:noFill/>
-        </p:spPr>
-        <p:txBody>
-          <a:bodyPr wrap="square" lIns="45720" rIns="45720" tIns="36576" bIns="36576" anchor="t">
-            <a:spAutoFit/>
-          </a:bodyPr>
-          <a:lstStyle/>
-          <a:p>
-            <a:pPr algn="l">
-              <a:defRPr sz="1400" b="0">
-                <a:solidFill>
-                  <a:srgbClr val="1C2330"/>
-                </a:solidFill>
-                <a:latin typeface="Aptos"/>
-              </a:defRPr>
-            </a:pPr>
-            <a:r>
-              <a:t>0–5 min — Presentar objetivo, producto y evidencia de hoy.</a:t>
-            </a:r>
-          </a:p>
-        </p:txBody>
-      </p:sp>
-      <p:sp>
-        <p:nvSpPr>
-          <p:cNvPr id="11" name="Oval 10"/>
-          <p:cNvSpPr/>
-          <p:nvPr/>
-        </p:nvSpPr>
-        <p:spPr>
-          <a:xfrm>
-            <a:off x="658368" y="2125979"/>
-            <a:ext cx="475488" cy="475488"/>
-          </a:xfrm>
-          <a:prstGeom prst="ellipse">
-            <a:avLst/>
-          </a:prstGeom>
-          <a:solidFill>
-            <a:srgbClr val="2F5BA8"/>
-          </a:solidFill>
-          <a:ln>
-            <a:noFill/>
-          </a:ln>
-        </p:spPr>
-        <p:style>
-          <a:lnRef idx="1">
-            <a:schemeClr val="accent1"/>
-          </a:lnRef>
-          <a:fillRef idx="3">
-            <a:schemeClr val="accent1"/>
-          </a:fillRef>
-          <a:effectRef idx="2">
-            <a:schemeClr val="accent1"/>
-          </a:effectRef>
-          <a:fontRef idx="minor">
-            <a:schemeClr val="lt1"/>
-          </a:fontRef>
-        </p:style>
-        <p:txBody>
-          <a:bodyPr rtlCol="0" anchor="ctr"/>
-          <a:lstStyle/>
-          <a:p>
-            <a:pPr algn="ctr"/>
-          </a:p>
-        </p:txBody>
-      </p:sp>
-      <p:sp>
-        <p:nvSpPr>
-          <p:cNvPr id="12" name="TextBox 11"/>
-          <p:cNvSpPr txBox="1"/>
-          <p:nvPr/>
-        </p:nvSpPr>
-        <p:spPr>
-          <a:xfrm>
-            <a:off x="658368" y="2226563"/>
-            <a:ext cx="475488" cy="201168"/>
-          </a:xfrm>
-          <a:prstGeom prst="rect">
-            <a:avLst/>
-          </a:prstGeom>
-          <a:noFill/>
-        </p:spPr>
-        <p:txBody>
-          <a:bodyPr wrap="square" lIns="45720" rIns="45720" tIns="36576" bIns="36576" anchor="t">
-            <a:spAutoFit/>
-          </a:bodyPr>
-          <a:lstStyle/>
-          <a:p>
-            <a:pPr algn="ctr">
-              <a:defRPr sz="1300" b="1">
+              <a:t>•  D1 · Hasta ahora los datos los decide quien programa — ¿Cómo hacemos para que los escriba la persona que ejecuta MiniJarvis?</a:t>
+            </a:r>
+          </a:p>
+          <a:p>
+            <a:pPr>
+              <a:spcAft>
+                <a:spcPts val="900"/>
+              </a:spcAft>
+              <a:defRPr sz="2200">
                 <a:solidFill>
                   <a:srgbClr val="FFFFFF"/>
                 </a:solidFill>
@@ -4267,114 +5584,15 @@
               </a:defRPr>
             </a:pPr>
             <a:r>
-              <a:t>2</a:t>
-            </a:r>
-          </a:p>
-        </p:txBody>
-      </p:sp>
-      <p:sp>
-        <p:nvSpPr>
-          <p:cNvPr id="13" name="TextBox 12"/>
-          <p:cNvSpPr txBox="1"/>
-          <p:nvPr/>
-        </p:nvSpPr>
-        <p:spPr>
-          <a:xfrm>
-            <a:off x="1389888" y="2107691"/>
-            <a:ext cx="10058400" cy="772668"/>
-          </a:xfrm>
-          <a:prstGeom prst="rect">
-            <a:avLst/>
-          </a:prstGeom>
-          <a:noFill/>
-        </p:spPr>
-        <p:txBody>
-          <a:bodyPr wrap="square" lIns="45720" rIns="45720" tIns="36576" bIns="36576" anchor="t">
-            <a:spAutoFit/>
-          </a:bodyPr>
-          <a:lstStyle/>
-          <a:p>
-            <a:pPr algn="l">
-              <a:defRPr sz="1400" b="0">
-                <a:solidFill>
-                  <a:srgbClr val="1C2330"/>
-                </a:solidFill>
-                <a:latin typeface="Aptos"/>
-              </a:defRPr>
-            </a:pPr>
-            <a:r>
-              <a:t>5–13 min — Explicación breve: Scanner permite leer información introducida por usuario.</a:t>
-            </a:r>
-          </a:p>
-        </p:txBody>
-      </p:sp>
-      <p:sp>
-        <p:nvSpPr>
-          <p:cNvPr id="14" name="Oval 13"/>
-          <p:cNvSpPr/>
-          <p:nvPr/>
-        </p:nvSpPr>
-        <p:spPr>
-          <a:xfrm>
-            <a:off x="658368" y="2971799"/>
-            <a:ext cx="475488" cy="475488"/>
-          </a:xfrm>
-          <a:prstGeom prst="ellipse">
-            <a:avLst/>
-          </a:prstGeom>
-          <a:solidFill>
-            <a:srgbClr val="2F5BA8"/>
-          </a:solidFill>
-          <a:ln>
-            <a:noFill/>
-          </a:ln>
-        </p:spPr>
-        <p:style>
-          <a:lnRef idx="1">
-            <a:schemeClr val="accent1"/>
-          </a:lnRef>
-          <a:fillRef idx="3">
-            <a:schemeClr val="accent1"/>
-          </a:fillRef>
-          <a:effectRef idx="2">
-            <a:schemeClr val="accent1"/>
-          </a:effectRef>
-          <a:fontRef idx="minor">
-            <a:schemeClr val="lt1"/>
-          </a:fontRef>
-        </p:style>
-        <p:txBody>
-          <a:bodyPr rtlCol="0" anchor="ctr"/>
-          <a:lstStyle/>
-          <a:p>
-            <a:pPr algn="ctr"/>
-          </a:p>
-        </p:txBody>
-      </p:sp>
-      <p:sp>
-        <p:nvSpPr>
-          <p:cNvPr id="15" name="TextBox 14"/>
-          <p:cNvSpPr txBox="1"/>
-          <p:nvPr/>
-        </p:nvSpPr>
-        <p:spPr>
-          <a:xfrm>
-            <a:off x="658368" y="3072383"/>
-            <a:ext cx="475488" cy="201168"/>
-          </a:xfrm>
-          <a:prstGeom prst="rect">
-            <a:avLst/>
-          </a:prstGeom>
-          <a:noFill/>
-        </p:spPr>
-        <p:txBody>
-          <a:bodyPr wrap="square" lIns="45720" rIns="45720" tIns="36576" bIns="36576" anchor="t">
-            <a:spAutoFit/>
-          </a:bodyPr>
-          <a:lstStyle/>
-          <a:p>
-            <a:pPr algn="ctr">
-              <a:defRPr sz="1300" b="1">
+              <a:t>•  D2 · Scanner: pedir → leer → guardar — import java.util.Scanner;</a:t>
+            </a:r>
+          </a:p>
+          <a:p>
+            <a:pPr>
+              <a:spcAft>
+                <a:spcPts val="900"/>
+              </a:spcAft>
+              <a:defRPr sz="2200">
                 <a:solidFill>
                   <a:srgbClr val="FFFFFF"/>
                 </a:solidFill>
@@ -4382,114 +5600,15 @@
               </a:defRPr>
             </a:pPr>
             <a:r>
-              <a:t>3</a:t>
-            </a:r>
-          </a:p>
-        </p:txBody>
-      </p:sp>
-      <p:sp>
-        <p:nvSpPr>
-          <p:cNvPr id="16" name="TextBox 15"/>
-          <p:cNvSpPr txBox="1"/>
-          <p:nvPr/>
-        </p:nvSpPr>
-        <p:spPr>
-          <a:xfrm>
-            <a:off x="1389888" y="2953511"/>
-            <a:ext cx="10058400" cy="772668"/>
-          </a:xfrm>
-          <a:prstGeom prst="rect">
-            <a:avLst/>
-          </a:prstGeom>
-          <a:noFill/>
-        </p:spPr>
-        <p:txBody>
-          <a:bodyPr wrap="square" lIns="45720" rIns="45720" tIns="36576" bIns="36576" anchor="t">
-            <a:spAutoFit/>
-          </a:bodyPr>
-          <a:lstStyle/>
-          <a:p>
-            <a:pPr algn="l">
-              <a:defRPr sz="1400" b="0">
-                <a:solidFill>
-                  <a:srgbClr val="1C2330"/>
-                </a:solidFill>
-                <a:latin typeface="Aptos"/>
-              </a:defRPr>
-            </a:pPr>
-            <a:r>
-              <a:t>13–18 min — Demostración o ejemplo: Leer una línea y usarla en un saludo.</a:t>
-            </a:r>
-          </a:p>
-        </p:txBody>
-      </p:sp>
-      <p:sp>
-        <p:nvSpPr>
-          <p:cNvPr id="17" name="Oval 16"/>
-          <p:cNvSpPr/>
-          <p:nvPr/>
-        </p:nvSpPr>
-        <p:spPr>
-          <a:xfrm>
-            <a:off x="658368" y="3817620"/>
-            <a:ext cx="475488" cy="475488"/>
-          </a:xfrm>
-          <a:prstGeom prst="ellipse">
-            <a:avLst/>
-          </a:prstGeom>
-          <a:solidFill>
-            <a:srgbClr val="2F5BA8"/>
-          </a:solidFill>
-          <a:ln>
-            <a:noFill/>
-          </a:ln>
-        </p:spPr>
-        <p:style>
-          <a:lnRef idx="1">
-            <a:schemeClr val="accent1"/>
-          </a:lnRef>
-          <a:fillRef idx="3">
-            <a:schemeClr val="accent1"/>
-          </a:fillRef>
-          <a:effectRef idx="2">
-            <a:schemeClr val="accent1"/>
-          </a:effectRef>
-          <a:fontRef idx="minor">
-            <a:schemeClr val="lt1"/>
-          </a:fontRef>
-        </p:style>
-        <p:txBody>
-          <a:bodyPr rtlCol="0" anchor="ctr"/>
-          <a:lstStyle/>
-          <a:p>
-            <a:pPr algn="ctr"/>
-          </a:p>
-        </p:txBody>
-      </p:sp>
-      <p:sp>
-        <p:nvSpPr>
-          <p:cNvPr id="18" name="TextBox 17"/>
-          <p:cNvSpPr txBox="1"/>
-          <p:nvPr/>
-        </p:nvSpPr>
-        <p:spPr>
-          <a:xfrm>
-            <a:off x="658368" y="3918204"/>
-            <a:ext cx="475488" cy="201168"/>
-          </a:xfrm>
-          <a:prstGeom prst="rect">
-            <a:avLst/>
-          </a:prstGeom>
-          <a:noFill/>
-        </p:spPr>
-        <p:txBody>
-          <a:bodyPr wrap="square" lIns="45720" rIns="45720" tIns="36576" bIns="36576" anchor="t">
-            <a:spAutoFit/>
-          </a:bodyPr>
-          <a:lstStyle/>
-          <a:p>
-            <a:pPr algn="ctr">
-              <a:defRPr sz="1300" b="1">
+              <a:t>•  Scanner scanner = new Scanner(System.in);</a:t>
+            </a:r>
+          </a:p>
+          <a:p>
+            <a:pPr>
+              <a:spcAft>
+                <a:spcPts val="900"/>
+              </a:spcAft>
+              <a:defRPr sz="2200">
                 <a:solidFill>
                   <a:srgbClr val="FFFFFF"/>
                 </a:solidFill>
@@ -4497,114 +5616,15 @@
               </a:defRPr>
             </a:pPr>
             <a:r>
-              <a:t>4</a:t>
-            </a:r>
-          </a:p>
-        </p:txBody>
-      </p:sp>
-      <p:sp>
-        <p:nvSpPr>
-          <p:cNvPr id="19" name="TextBox 18"/>
-          <p:cNvSpPr txBox="1"/>
-          <p:nvPr/>
-        </p:nvSpPr>
-        <p:spPr>
-          <a:xfrm>
-            <a:off x="1389888" y="3799332"/>
-            <a:ext cx="10058400" cy="772668"/>
-          </a:xfrm>
-          <a:prstGeom prst="rect">
-            <a:avLst/>
-          </a:prstGeom>
-          <a:noFill/>
-        </p:spPr>
-        <p:txBody>
-          <a:bodyPr wrap="square" lIns="45720" rIns="45720" tIns="36576" bIns="36576" anchor="t">
-            <a:spAutoFit/>
-          </a:bodyPr>
-          <a:lstStyle/>
-          <a:p>
-            <a:pPr algn="l">
-              <a:defRPr sz="1400" b="0">
-                <a:solidFill>
-                  <a:srgbClr val="1C2330"/>
-                </a:solidFill>
-                <a:latin typeface="Aptos"/>
-              </a:defRPr>
-            </a:pPr>
-            <a:r>
-              <a:t>18–35 min — Trabajo del alumnado: MiniJarvis pregunta cuántas horas se han estudiado esta semana, convierte la entrada a número y muestra una recomendación sencilla.</a:t>
-            </a:r>
-          </a:p>
-        </p:txBody>
-      </p:sp>
-      <p:sp>
-        <p:nvSpPr>
-          <p:cNvPr id="20" name="Oval 19"/>
-          <p:cNvSpPr/>
-          <p:nvPr/>
-        </p:nvSpPr>
-        <p:spPr>
-          <a:xfrm>
-            <a:off x="658368" y="4663440"/>
-            <a:ext cx="475488" cy="475488"/>
-          </a:xfrm>
-          <a:prstGeom prst="ellipse">
-            <a:avLst/>
-          </a:prstGeom>
-          <a:solidFill>
-            <a:srgbClr val="2F5BA8"/>
-          </a:solidFill>
-          <a:ln>
-            <a:noFill/>
-          </a:ln>
-        </p:spPr>
-        <p:style>
-          <a:lnRef idx="1">
-            <a:schemeClr val="accent1"/>
-          </a:lnRef>
-          <a:fillRef idx="3">
-            <a:schemeClr val="accent1"/>
-          </a:fillRef>
-          <a:effectRef idx="2">
-            <a:schemeClr val="accent1"/>
-          </a:effectRef>
-          <a:fontRef idx="minor">
-            <a:schemeClr val="lt1"/>
-          </a:fontRef>
-        </p:style>
-        <p:txBody>
-          <a:bodyPr rtlCol="0" anchor="ctr"/>
-          <a:lstStyle/>
-          <a:p>
-            <a:pPr algn="ctr"/>
-          </a:p>
-        </p:txBody>
-      </p:sp>
-      <p:sp>
-        <p:nvSpPr>
-          <p:cNvPr id="21" name="TextBox 20"/>
-          <p:cNvSpPr txBox="1"/>
-          <p:nvPr/>
-        </p:nvSpPr>
-        <p:spPr>
-          <a:xfrm>
-            <a:off x="658368" y="4764024"/>
-            <a:ext cx="475488" cy="201168"/>
-          </a:xfrm>
-          <a:prstGeom prst="rect">
-            <a:avLst/>
-          </a:prstGeom>
-          <a:noFill/>
-        </p:spPr>
-        <p:txBody>
-          <a:bodyPr wrap="square" lIns="45720" rIns="45720" tIns="36576" bIns="36576" anchor="t">
-            <a:spAutoFit/>
-          </a:bodyPr>
-          <a:lstStyle/>
-          <a:p>
-            <a:pPr algn="ctr">
-              <a:defRPr sz="1300" b="1">
+              <a:t>•  String userName = scanner.nextLine();</a:t>
+            </a:r>
+          </a:p>
+          <a:p>
+            <a:pPr>
+              <a:spcAft>
+                <a:spcPts val="900"/>
+              </a:spcAft>
+              <a:defRPr sz="2200">
                 <a:solidFill>
                   <a:srgbClr val="FFFFFF"/>
                 </a:solidFill>
@@ -4612,158 +5632,7 @@
               </a:defRPr>
             </a:pPr>
             <a:r>
-              <a:t>5</a:t>
-            </a:r>
-          </a:p>
-        </p:txBody>
-      </p:sp>
-      <p:sp>
-        <p:nvSpPr>
-          <p:cNvPr id="22" name="TextBox 21"/>
-          <p:cNvSpPr txBox="1"/>
-          <p:nvPr/>
-        </p:nvSpPr>
-        <p:spPr>
-          <a:xfrm>
-            <a:off x="1389888" y="4645152"/>
-            <a:ext cx="10058400" cy="772668"/>
-          </a:xfrm>
-          <a:prstGeom prst="rect">
-            <a:avLst/>
-          </a:prstGeom>
-          <a:noFill/>
-        </p:spPr>
-        <p:txBody>
-          <a:bodyPr wrap="square" lIns="45720" rIns="45720" tIns="36576" bIns="36576" anchor="t">
-            <a:spAutoFit/>
-          </a:bodyPr>
-          <a:lstStyle/>
-          <a:p>
-            <a:pPr algn="l">
-              <a:defRPr sz="1400" b="0">
-                <a:solidFill>
-                  <a:srgbClr val="1C2330"/>
-                </a:solidFill>
-                <a:latin typeface="Aptos"/>
-              </a:defRPr>
-            </a:pPr>
-            <a:r>
-              <a:t>35–40 min — Comprobar la evidencia con una explicación o prueba breve.</a:t>
-            </a:r>
-          </a:p>
-        </p:txBody>
-      </p:sp>
-      <p:sp>
-        <p:nvSpPr>
-          <p:cNvPr id="23" name="Oval 22"/>
-          <p:cNvSpPr/>
-          <p:nvPr/>
-        </p:nvSpPr>
-        <p:spPr>
-          <a:xfrm>
-            <a:off x="658368" y="5509259"/>
-            <a:ext cx="475488" cy="475488"/>
-          </a:xfrm>
-          <a:prstGeom prst="ellipse">
-            <a:avLst/>
-          </a:prstGeom>
-          <a:solidFill>
-            <a:srgbClr val="2F5BA8"/>
-          </a:solidFill>
-          <a:ln>
-            <a:noFill/>
-          </a:ln>
-        </p:spPr>
-        <p:style>
-          <a:lnRef idx="1">
-            <a:schemeClr val="accent1"/>
-          </a:lnRef>
-          <a:fillRef idx="3">
-            <a:schemeClr val="accent1"/>
-          </a:fillRef>
-          <a:effectRef idx="2">
-            <a:schemeClr val="accent1"/>
-          </a:effectRef>
-          <a:fontRef idx="minor">
-            <a:schemeClr val="lt1"/>
-          </a:fontRef>
-        </p:style>
-        <p:txBody>
-          <a:bodyPr rtlCol="0" anchor="ctr"/>
-          <a:lstStyle/>
-          <a:p>
-            <a:pPr algn="ctr"/>
-          </a:p>
-        </p:txBody>
-      </p:sp>
-      <p:sp>
-        <p:nvSpPr>
-          <p:cNvPr id="24" name="TextBox 23"/>
-          <p:cNvSpPr txBox="1"/>
-          <p:nvPr/>
-        </p:nvSpPr>
-        <p:spPr>
-          <a:xfrm>
-            <a:off x="658368" y="5609844"/>
-            <a:ext cx="475488" cy="201168"/>
-          </a:xfrm>
-          <a:prstGeom prst="rect">
-            <a:avLst/>
-          </a:prstGeom>
-          <a:noFill/>
-        </p:spPr>
-        <p:txBody>
-          <a:bodyPr wrap="square" lIns="45720" rIns="45720" tIns="36576" bIns="36576" anchor="t">
-            <a:spAutoFit/>
-          </a:bodyPr>
-          <a:lstStyle/>
-          <a:p>
-            <a:pPr algn="ctr">
-              <a:defRPr sz="1300" b="1">
-                <a:solidFill>
-                  <a:srgbClr val="FFFFFF"/>
-                </a:solidFill>
-                <a:latin typeface="Aptos"/>
-              </a:defRPr>
-            </a:pPr>
-            <a:r>
-              <a:t>6</a:t>
-            </a:r>
-          </a:p>
-        </p:txBody>
-      </p:sp>
-      <p:sp>
-        <p:nvSpPr>
-          <p:cNvPr id="25" name="TextBox 24"/>
-          <p:cNvSpPr txBox="1"/>
-          <p:nvPr/>
-        </p:nvSpPr>
-        <p:spPr>
-          <a:xfrm>
-            <a:off x="1389888" y="5490972"/>
-            <a:ext cx="10058400" cy="772668"/>
-          </a:xfrm>
-          <a:prstGeom prst="rect">
-            <a:avLst/>
-          </a:prstGeom>
-          <a:noFill/>
-        </p:spPr>
-        <p:txBody>
-          <a:bodyPr wrap="square" lIns="45720" rIns="45720" tIns="36576" bIns="36576" anchor="t">
-            <a:spAutoFit/>
-          </a:bodyPr>
-          <a:lstStyle/>
-          <a:p>
-            <a:pPr algn="l">
-              <a:defRPr sz="1400" b="0">
-                <a:solidFill>
-                  <a:srgbClr val="1C2330"/>
-                </a:solidFill>
-                <a:latin typeface="Aptos"/>
-              </a:defRPr>
-            </a:pPr>
-            <a:r>
-              <a:t>40–45 min — Cierre: ¿por qué scanner.nextLine() devuelve texto aunque escribas un número?</a:t>
+              <a:t>•  scanner.close();</a:t>
             </a:r>
           </a:p>
         </p:txBody>
@@ -4903,7 +5772,7 @@
               </a:defRPr>
             </a:pPr>
             <a:r>
-              <a:t>COMPRENDER Y TRANSFERIR</a:t>
+              <a:t>OBSERVAR ANTES DE ACTUAR</a:t>
             </a:r>
           </a:p>
         </p:txBody>
@@ -4939,7 +5808,7 @@
               </a:defRPr>
             </a:pPr>
             <a:r>
-              <a:t>Idea clave y puesta en práctica</a:t>
+              <a:t>Ejemplo o demostración · 2</a:t>
             </a:r>
           </a:p>
         </p:txBody>
@@ -5018,7 +5887,7 @@
               </a:defRPr>
             </a:pPr>
             <a:r>
-              <a:t>MiniJarvis · 1.º DAW · Sesión 212 · H1</a:t>
+              <a:t>MiniJarvis · 1.º DAW · Sesión 212 · H1 — Primer MiniJarvis</a:t>
             </a:r>
           </a:p>
         </p:txBody>
@@ -5031,19 +5900,17 @@
         </p:nvSpPr>
         <p:spPr>
           <a:xfrm>
-            <a:off x="621792" y="1325880"/>
-            <a:ext cx="5285232" cy="4736592"/>
+            <a:off x="621792" y="1353312"/>
+            <a:ext cx="10927080" cy="4526280"/>
           </a:xfrm>
           <a:prstGeom prst="roundRect">
             <a:avLst/>
           </a:prstGeom>
           <a:solidFill>
-            <a:srgbClr val="FFFFFF"/>
+            <a:srgbClr val="121824"/>
           </a:solidFill>
           <a:ln>
-            <a:solidFill>
-              <a:srgbClr val="E5E9EF"/>
-            </a:solidFill>
+            <a:noFill/>
           </a:ln>
         </p:spPr>
         <p:style>
@@ -5077,7 +5944,7 @@
         <p:spPr>
           <a:xfrm>
             <a:off x="932688" y="1627632"/>
-            <a:ext cx="2011680" cy="329184"/>
+            <a:ext cx="2057400" cy="411480"/>
           </a:xfrm>
           <a:prstGeom prst="rect">
             <a:avLst/>
@@ -5099,7 +5966,7 @@
               </a:defRPr>
             </a:pPr>
             <a:r>
-              <a:t>IDEA CLAVE</a:t>
+              <a:t>DEMOSTRACIÓN</a:t>
             </a:r>
           </a:p>
         </p:txBody>
@@ -5112,8 +5979,8 @@
         </p:nvSpPr>
         <p:spPr>
           <a:xfrm>
-            <a:off x="932688" y="2176272"/>
-            <a:ext cx="4617720" cy="3429000"/>
+            <a:off x="932688" y="2212848"/>
+            <a:ext cx="9966960" cy="3246120"/>
           </a:xfrm>
           <a:prstGeom prst="rect">
             <a:avLst/>
@@ -5130,125 +5997,7 @@
               <a:spcAft>
                 <a:spcPts val="900"/>
               </a:spcAft>
-              <a:defRPr sz="2300">
-                <a:solidFill>
-                  <a:srgbClr val="1C2330"/>
-                </a:solidFill>
-                <a:latin typeface="Aptos"/>
-              </a:defRPr>
-            </a:pPr>
-            <a:r>
-              <a:t>•  int, double, operadores aritméticos, comparación, precedencia básica y conversión String -&gt; número con Integer.parseInt.</a:t>
-            </a:r>
-          </a:p>
-        </p:txBody>
-      </p:sp>
-      <p:sp>
-        <p:nvSpPr>
-          <p:cNvPr id="11" name="Rounded Rectangle 10"/>
-          <p:cNvSpPr/>
-          <p:nvPr/>
-        </p:nvSpPr>
-        <p:spPr>
-          <a:xfrm>
-            <a:off x="6172200" y="1325880"/>
-            <a:ext cx="5394960" cy="4736592"/>
-          </a:xfrm>
-          <a:prstGeom prst="roundRect">
-            <a:avLst/>
-          </a:prstGeom>
-          <a:solidFill>
-            <a:srgbClr val="121824"/>
-          </a:solidFill>
-          <a:ln>
-            <a:noFill/>
-          </a:ln>
-        </p:spPr>
-        <p:style>
-          <a:lnRef idx="1">
-            <a:schemeClr val="accent1"/>
-          </a:lnRef>
-          <a:fillRef idx="3">
-            <a:schemeClr val="accent1"/>
-          </a:fillRef>
-          <a:effectRef idx="2">
-            <a:schemeClr val="accent1"/>
-          </a:effectRef>
-          <a:fontRef idx="minor">
-            <a:schemeClr val="lt1"/>
-          </a:fontRef>
-        </p:style>
-        <p:txBody>
-          <a:bodyPr rtlCol="0" anchor="ctr"/>
-          <a:lstStyle/>
-          <a:p>
-            <a:pPr algn="ctr"/>
-          </a:p>
-        </p:txBody>
-      </p:sp>
-      <p:sp>
-        <p:nvSpPr>
-          <p:cNvPr id="12" name="TextBox 11"/>
-          <p:cNvSpPr txBox="1"/>
-          <p:nvPr/>
-        </p:nvSpPr>
-        <p:spPr>
-          <a:xfrm>
-            <a:off x="6492240" y="1627632"/>
-            <a:ext cx="2194560" cy="329184"/>
-          </a:xfrm>
-          <a:prstGeom prst="rect">
-            <a:avLst/>
-          </a:prstGeom>
-          <a:noFill/>
-        </p:spPr>
-        <p:txBody>
-          <a:bodyPr wrap="square" lIns="45720" rIns="45720" tIns="36576" bIns="36576" anchor="t">
-            <a:spAutoFit/>
-          </a:bodyPr>
-          <a:lstStyle/>
-          <a:p>
-            <a:pPr algn="l">
-              <a:defRPr sz="1300" b="1">
-                <a:solidFill>
-                  <a:srgbClr val="2F5BA8"/>
-                </a:solidFill>
-                <a:latin typeface="Aptos"/>
-              </a:defRPr>
-            </a:pPr>
-            <a:r>
-              <a:t>EN PRÁCTICA</a:t>
-            </a:r>
-          </a:p>
-        </p:txBody>
-      </p:sp>
-      <p:sp>
-        <p:nvSpPr>
-          <p:cNvPr id="13" name="TextBox 12"/>
-          <p:cNvSpPr txBox="1"/>
-          <p:nvPr/>
-        </p:nvSpPr>
-        <p:spPr>
-          <a:xfrm>
-            <a:off x="6492240" y="2176272"/>
-            <a:ext cx="4617720" cy="3429000"/>
-          </a:xfrm>
-          <a:prstGeom prst="rect">
-            <a:avLst/>
-          </a:prstGeom>
-          <a:noFill/>
-        </p:spPr>
-        <p:txBody>
-          <a:bodyPr wrap="square" lIns="73152" rIns="45720" tIns="36576">
-            <a:spAutoFit/>
-          </a:bodyPr>
-          <a:lstStyle/>
-          <a:p>
-            <a:pPr>
-              <a:spcAft>
-                <a:spcPts val="900"/>
-              </a:spcAft>
-              <a:defRPr sz="2300">
+              <a:defRPr sz="2200">
                 <a:solidFill>
                   <a:srgbClr val="FFFFFF"/>
                 </a:solidFill>
@@ -5256,7 +6005,39 @@
               </a:defRPr>
             </a:pPr>
             <a:r>
-              <a:t>•  Leer una línea y usarla en un saludo.</a:t>
+              <a:t>•  D3 · Pide un nombre y úsalo — Ejecuta dos veces con nombres ficticios distintos.</a:t>
+            </a:r>
+          </a:p>
+          <a:p>
+            <a:pPr>
+              <a:spcAft>
+                <a:spcPts val="900"/>
+              </a:spcAft>
+              <a:defRPr sz="2200">
+                <a:solidFill>
+                  <a:srgbClr val="FFFFFF"/>
+                </a:solidFill>
+                <a:latin typeface="Aptos"/>
+              </a:defRPr>
+            </a:pPr>
+            <a:r>
+              <a:t>•  ¿Qué cambia? ¿Qué no?</a:t>
+            </a:r>
+          </a:p>
+          <a:p>
+            <a:pPr>
+              <a:spcAft>
+                <a:spcPts val="900"/>
+              </a:spcAft>
+              <a:defRPr sz="2200">
+                <a:solidFill>
+                  <a:srgbClr val="FFFFFF"/>
+                </a:solidFill>
+                <a:latin typeface="Aptos"/>
+              </a:defRPr>
+            </a:pPr>
+            <a:r>
+              <a:t>•  D4 · Tengo "5". ¿Tengo el número 5? — "5" es texto si procede de nextLine().</a:t>
             </a:r>
           </a:p>
         </p:txBody>
@@ -5432,7 +6213,7 @@
               </a:defRPr>
             </a:pPr>
             <a:r>
-              <a:t>Actividad central</a:t>
+              <a:t>Actividad central · 1</a:t>
             </a:r>
           </a:p>
         </p:txBody>
@@ -5511,7 +6292,7 @@
               </a:defRPr>
             </a:pPr>
             <a:r>
-              <a:t>MiniJarvis · 1.º DAW · Sesión 212 · H1</a:t>
+              <a:t>MiniJarvis · 1.º DAW · Sesión 212 · H1 — Primer MiniJarvis</a:t>
             </a:r>
           </a:p>
         </p:txBody>
@@ -5525,7 +6306,7 @@
         <p:spPr>
           <a:xfrm>
             <a:off x="658368" y="1307592"/>
-            <a:ext cx="10835640" cy="2226564"/>
+            <a:ext cx="10835640" cy="1049274"/>
           </a:xfrm>
           <a:prstGeom prst="roundRect">
             <a:avLst/>
@@ -5606,7 +6387,7 @@
         <p:spPr>
           <a:xfrm>
             <a:off x="1664208" y="1417319"/>
-            <a:ext cx="9464040" cy="2007108"/>
+            <a:ext cx="9464040" cy="829818"/>
           </a:xfrm>
           <a:prstGeom prst="rect">
             <a:avLst/>
@@ -5628,7 +6409,7 @@
               </a:defRPr>
             </a:pPr>
             <a:r>
-              <a:t>Pedir nombre y responder con ese nombre.</a:t>
+              <a:t>Predice antes de ejecutar cuando haya código.</a:t>
             </a:r>
           </a:p>
         </p:txBody>
@@ -5641,8 +6422,8 @@
         </p:nvSpPr>
         <p:spPr>
           <a:xfrm>
-            <a:off x="658368" y="3776472"/>
-            <a:ext cx="10835640" cy="2226564"/>
+            <a:off x="658368" y="2542032"/>
+            <a:ext cx="10835640" cy="1049274"/>
           </a:xfrm>
           <a:prstGeom prst="roundRect">
             <a:avLst/>
@@ -5686,7 +6467,7 @@
         </p:nvSpPr>
         <p:spPr>
           <a:xfrm>
-            <a:off x="850392" y="3922776"/>
+            <a:off x="850392" y="2688336"/>
             <a:ext cx="685800" cy="384048"/>
           </a:xfrm>
           <a:prstGeom prst="rect">
@@ -5722,8 +6503,8 @@
         </p:nvSpPr>
         <p:spPr>
           <a:xfrm>
-            <a:off x="1664208" y="3886200"/>
-            <a:ext cx="9464040" cy="2007108"/>
+            <a:off x="1664208" y="2651760"/>
+            <a:ext cx="9464040" cy="829818"/>
           </a:xfrm>
           <a:prstGeom prst="rect">
             <a:avLst/>
@@ -5745,7 +6526,241 @@
               </a:defRPr>
             </a:pPr>
             <a:r>
-              <a:t>Comprueba y registra la evidencia: Código o ejercicio corto con entrada numérica, cálculo, comparación y prueba con dato válido e inválido.</a:t>
+              <a:t>Realiza la micropráctica o modificación prevista.</a:t>
+            </a:r>
+          </a:p>
+        </p:txBody>
+      </p:sp>
+      <p:sp>
+        <p:nvSpPr>
+          <p:cNvPr id="14" name="Rounded Rectangle 13"/>
+          <p:cNvSpPr/>
+          <p:nvPr/>
+        </p:nvSpPr>
+        <p:spPr>
+          <a:xfrm>
+            <a:off x="658368" y="3776472"/>
+            <a:ext cx="10835640" cy="1049274"/>
+          </a:xfrm>
+          <a:prstGeom prst="roundRect">
+            <a:avLst/>
+          </a:prstGeom>
+          <a:solidFill>
+            <a:srgbClr val="FFFFFF"/>
+          </a:solidFill>
+          <a:ln>
+            <a:solidFill>
+              <a:srgbClr val="E5E9EF"/>
+            </a:solidFill>
+          </a:ln>
+        </p:spPr>
+        <p:style>
+          <a:lnRef idx="1">
+            <a:schemeClr val="accent1"/>
+          </a:lnRef>
+          <a:fillRef idx="3">
+            <a:schemeClr val="accent1"/>
+          </a:fillRef>
+          <a:effectRef idx="2">
+            <a:schemeClr val="accent1"/>
+          </a:effectRef>
+          <a:fontRef idx="minor">
+            <a:schemeClr val="lt1"/>
+          </a:fontRef>
+        </p:style>
+        <p:txBody>
+          <a:bodyPr rtlCol="0" anchor="ctr"/>
+          <a:lstStyle/>
+          <a:p>
+            <a:pPr algn="ctr"/>
+          </a:p>
+        </p:txBody>
+      </p:sp>
+      <p:sp>
+        <p:nvSpPr>
+          <p:cNvPr id="15" name="TextBox 14"/>
+          <p:cNvSpPr txBox="1"/>
+          <p:nvPr/>
+        </p:nvSpPr>
+        <p:spPr>
+          <a:xfrm>
+            <a:off x="850392" y="3922776"/>
+            <a:ext cx="685800" cy="384048"/>
+          </a:xfrm>
+          <a:prstGeom prst="rect">
+            <a:avLst/>
+          </a:prstGeom>
+          <a:noFill/>
+        </p:spPr>
+        <p:txBody>
+          <a:bodyPr wrap="square" lIns="45720" rIns="45720" tIns="36576" bIns="36576" anchor="t">
+            <a:spAutoFit/>
+          </a:bodyPr>
+          <a:lstStyle/>
+          <a:p>
+            <a:pPr algn="l">
+              <a:defRPr sz="1200" b="1">
+                <a:solidFill>
+                  <a:srgbClr val="2F5BA8"/>
+                </a:solidFill>
+                <a:latin typeface="Aptos"/>
+              </a:defRPr>
+            </a:pPr>
+            <a:r>
+              <a:t>PASO 3</a:t>
+            </a:r>
+          </a:p>
+        </p:txBody>
+      </p:sp>
+      <p:sp>
+        <p:nvSpPr>
+          <p:cNvPr id="16" name="TextBox 15"/>
+          <p:cNvSpPr txBox="1"/>
+          <p:nvPr/>
+        </p:nvSpPr>
+        <p:spPr>
+          <a:xfrm>
+            <a:off x="1664208" y="3886200"/>
+            <a:ext cx="9464040" cy="829818"/>
+          </a:xfrm>
+          <a:prstGeom prst="rect">
+            <a:avLst/>
+          </a:prstGeom>
+          <a:noFill/>
+        </p:spPr>
+        <p:txBody>
+          <a:bodyPr wrap="square" lIns="45720" rIns="45720" tIns="36576" bIns="36576" anchor="t">
+            <a:spAutoFit/>
+          </a:bodyPr>
+          <a:lstStyle/>
+          <a:p>
+            <a:pPr algn="l">
+              <a:defRPr sz="2000" b="0">
+                <a:solidFill>
+                  <a:srgbClr val="1C2330"/>
+                </a:solidFill>
+                <a:latin typeface="Aptos"/>
+              </a:defRPr>
+            </a:pPr>
+            <a:r>
+              <a:t>Prueba el caso normal y, cuando exista una decisión o conversión, también el caso alternativo o erróneo.</a:t>
+            </a:r>
+          </a:p>
+        </p:txBody>
+      </p:sp>
+      <p:sp>
+        <p:nvSpPr>
+          <p:cNvPr id="17" name="Rounded Rectangle 16"/>
+          <p:cNvSpPr/>
+          <p:nvPr/>
+        </p:nvSpPr>
+        <p:spPr>
+          <a:xfrm>
+            <a:off x="658368" y="5010912"/>
+            <a:ext cx="10835640" cy="1049274"/>
+          </a:xfrm>
+          <a:prstGeom prst="roundRect">
+            <a:avLst/>
+          </a:prstGeom>
+          <a:solidFill>
+            <a:srgbClr val="FFFFFF"/>
+          </a:solidFill>
+          <a:ln>
+            <a:solidFill>
+              <a:srgbClr val="E5E9EF"/>
+            </a:solidFill>
+          </a:ln>
+        </p:spPr>
+        <p:style>
+          <a:lnRef idx="1">
+            <a:schemeClr val="accent1"/>
+          </a:lnRef>
+          <a:fillRef idx="3">
+            <a:schemeClr val="accent1"/>
+          </a:fillRef>
+          <a:effectRef idx="2">
+            <a:schemeClr val="accent1"/>
+          </a:effectRef>
+          <a:fontRef idx="minor">
+            <a:schemeClr val="lt1"/>
+          </a:fontRef>
+        </p:style>
+        <p:txBody>
+          <a:bodyPr rtlCol="0" anchor="ctr"/>
+          <a:lstStyle/>
+          <a:p>
+            <a:pPr algn="ctr"/>
+          </a:p>
+        </p:txBody>
+      </p:sp>
+      <p:sp>
+        <p:nvSpPr>
+          <p:cNvPr id="18" name="TextBox 17"/>
+          <p:cNvSpPr txBox="1"/>
+          <p:nvPr/>
+        </p:nvSpPr>
+        <p:spPr>
+          <a:xfrm>
+            <a:off x="850392" y="5157216"/>
+            <a:ext cx="685800" cy="384048"/>
+          </a:xfrm>
+          <a:prstGeom prst="rect">
+            <a:avLst/>
+          </a:prstGeom>
+          <a:noFill/>
+        </p:spPr>
+        <p:txBody>
+          <a:bodyPr wrap="square" lIns="45720" rIns="45720" tIns="36576" bIns="36576" anchor="t">
+            <a:spAutoFit/>
+          </a:bodyPr>
+          <a:lstStyle/>
+          <a:p>
+            <a:pPr algn="l">
+              <a:defRPr sz="1200" b="1">
+                <a:solidFill>
+                  <a:srgbClr val="2F5BA8"/>
+                </a:solidFill>
+                <a:latin typeface="Aptos"/>
+              </a:defRPr>
+            </a:pPr>
+            <a:r>
+              <a:t>PASO 4</a:t>
+            </a:r>
+          </a:p>
+        </p:txBody>
+      </p:sp>
+      <p:sp>
+        <p:nvSpPr>
+          <p:cNvPr id="19" name="TextBox 18"/>
+          <p:cNvSpPr txBox="1"/>
+          <p:nvPr/>
+        </p:nvSpPr>
+        <p:spPr>
+          <a:xfrm>
+            <a:off x="1664208" y="5120640"/>
+            <a:ext cx="9464040" cy="829818"/>
+          </a:xfrm>
+          <a:prstGeom prst="rect">
+            <a:avLst/>
+          </a:prstGeom>
+          <a:noFill/>
+        </p:spPr>
+        <p:txBody>
+          <a:bodyPr wrap="square" lIns="45720" rIns="45720" tIns="36576" bIns="36576" anchor="t">
+            <a:spAutoFit/>
+          </a:bodyPr>
+          <a:lstStyle/>
+          <a:p>
+            <a:pPr algn="l">
+              <a:defRPr sz="2000" b="0">
+                <a:solidFill>
+                  <a:srgbClr val="1C2330"/>
+                </a:solidFill>
+                <a:latin typeface="Aptos"/>
+              </a:defRPr>
+            </a:pPr>
+            <a:r>
+              <a:t>Conserva el código o resultado en el repositorio o espacio indicado.</a:t>
             </a:r>
           </a:p>
         </p:txBody>
@@ -5885,7 +6900,7 @@
               </a:defRPr>
             </a:pPr>
             <a:r>
-              <a:t>COMPROBAR</a:t>
+              <a:t>APLICAR Y DECIDIR</a:t>
             </a:r>
           </a:p>
         </p:txBody>
@@ -5921,7 +6936,7 @@
               </a:defRPr>
             </a:pPr>
             <a:r>
-              <a:t>Evidencia y comprobación</a:t>
+              <a:t>Actividad central · 2</a:t>
             </a:r>
           </a:p>
         </p:txBody>
@@ -6000,7 +7015,7 @@
               </a:defRPr>
             </a:pPr>
             <a:r>
-              <a:t>MiniJarvis · 1.º DAW · Sesión 212 · H1</a:t>
+              <a:t>MiniJarvis · 1.º DAW · Sesión 212 · H1 — Primer MiniJarvis</a:t>
             </a:r>
           </a:p>
         </p:txBody>
@@ -6013,8 +7028,8 @@
         </p:nvSpPr>
         <p:spPr>
           <a:xfrm>
-            <a:off x="713232" y="1298448"/>
-            <a:ext cx="420624" cy="420624"/>
+            <a:off x="658368" y="1307592"/>
+            <a:ext cx="10835640" cy="2226564"/>
           </a:xfrm>
           <a:prstGeom prst="roundRect">
             <a:avLst/>
@@ -6024,7 +7039,7 @@
           </a:solidFill>
           <a:ln>
             <a:solidFill>
-              <a:srgbClr val="2F5BA8"/>
+              <a:srgbClr val="E5E9EF"/>
             </a:solidFill>
           </a:ln>
         </p:spPr>
@@ -6058,8 +7073,8 @@
         </p:nvSpPr>
         <p:spPr>
           <a:xfrm>
-            <a:off x="1389888" y="1280160"/>
-            <a:ext cx="9829800" cy="960120"/>
+            <a:off x="850392" y="1453895"/>
+            <a:ext cx="685800" cy="384048"/>
           </a:xfrm>
           <a:prstGeom prst="rect">
             <a:avLst/>
@@ -6073,7 +7088,43 @@
           <a:lstStyle/>
           <a:p>
             <a:pPr algn="l">
-              <a:defRPr sz="1900" b="0">
+              <a:defRPr sz="1200" b="1">
+                <a:solidFill>
+                  <a:srgbClr val="2F5BA8"/>
+                </a:solidFill>
+                <a:latin typeface="Aptos"/>
+              </a:defRPr>
+            </a:pPr>
+            <a:r>
+              <a:t>PASO 6</a:t>
+            </a:r>
+          </a:p>
+        </p:txBody>
+      </p:sp>
+      <p:sp>
+        <p:nvSpPr>
+          <p:cNvPr id="10" name="TextBox 9"/>
+          <p:cNvSpPr txBox="1"/>
+          <p:nvPr/>
+        </p:nvSpPr>
+        <p:spPr>
+          <a:xfrm>
+            <a:off x="1664208" y="1417319"/>
+            <a:ext cx="9464040" cy="2007108"/>
+          </a:xfrm>
+          <a:prstGeom prst="rect">
+            <a:avLst/>
+          </a:prstGeom>
+          <a:noFill/>
+        </p:spPr>
+        <p:txBody>
+          <a:bodyPr wrap="square" lIns="45720" rIns="45720" tIns="36576" bIns="36576" anchor="t">
+            <a:spAutoFit/>
+          </a:bodyPr>
+          <a:lstStyle/>
+          <a:p>
+            <a:pPr algn="l">
+              <a:defRPr sz="2000" b="0">
                 <a:solidFill>
                   <a:srgbClr val="1C2330"/>
                 </a:solidFill>
@@ -6081,21 +7132,21 @@
               </a:defRPr>
             </a:pPr>
             <a:r>
-              <a:t>He producido o actualizado: Código o ejercicio corto con entrada numérica, cálculo, comparación y prueba con dato válido e inválido.</a:t>
-            </a:r>
-          </a:p>
-        </p:txBody>
-      </p:sp>
-      <p:sp>
-        <p:nvSpPr>
-          <p:cNvPr id="10" name="Rounded Rectangle 9"/>
+              <a:t>Registra una sola entrada en el diario individual; no crees un informe paralelo.</a:t>
+            </a:r>
+          </a:p>
+        </p:txBody>
+      </p:sp>
+      <p:sp>
+        <p:nvSpPr>
+          <p:cNvPr id="11" name="Rounded Rectangle 10"/>
           <p:cNvSpPr/>
           <p:nvPr/>
         </p:nvSpPr>
         <p:spPr>
           <a:xfrm>
-            <a:off x="713232" y="2295144"/>
-            <a:ext cx="420624" cy="420624"/>
+            <a:off x="658368" y="3776472"/>
+            <a:ext cx="10835640" cy="2226564"/>
           </a:xfrm>
           <a:prstGeom prst="roundRect">
             <a:avLst/>
@@ -6105,7 +7156,7 @@
           </a:solidFill>
           <a:ln>
             <a:solidFill>
-              <a:srgbClr val="2F5BA8"/>
+              <a:srgbClr val="E5E9EF"/>
             </a:solidFill>
           </a:ln>
         </p:spPr>
@@ -6133,14 +7184,14 @@
       </p:sp>
       <p:sp>
         <p:nvSpPr>
-          <p:cNvPr id="11" name="TextBox 10"/>
+          <p:cNvPr id="12" name="TextBox 11"/>
           <p:cNvSpPr txBox="1"/>
           <p:nvPr/>
         </p:nvSpPr>
         <p:spPr>
           <a:xfrm>
-            <a:off x="1389888" y="2276856"/>
-            <a:ext cx="9829800" cy="960120"/>
+            <a:off x="850392" y="3922776"/>
+            <a:ext cx="685800" cy="384048"/>
           </a:xfrm>
           <a:prstGeom prst="rect">
             <a:avLst/>
@@ -6154,7 +7205,43 @@
           <a:lstStyle/>
           <a:p>
             <a:pPr algn="l">
-              <a:defRPr sz="1900" b="0">
+              <a:defRPr sz="1200" b="1">
+                <a:solidFill>
+                  <a:srgbClr val="2F5BA8"/>
+                </a:solidFill>
+                <a:latin typeface="Aptos"/>
+              </a:defRPr>
+            </a:pPr>
+            <a:r>
+              <a:t>PASO 7</a:t>
+            </a:r>
+          </a:p>
+        </p:txBody>
+      </p:sp>
+      <p:sp>
+        <p:nvSpPr>
+          <p:cNvPr id="13" name="TextBox 12"/>
+          <p:cNvSpPr txBox="1"/>
+          <p:nvPr/>
+        </p:nvSpPr>
+        <p:spPr>
+          <a:xfrm>
+            <a:off x="1664208" y="3886200"/>
+            <a:ext cx="9464040" cy="2007108"/>
+          </a:xfrm>
+          <a:prstGeom prst="rect">
+            <a:avLst/>
+          </a:prstGeom>
+          <a:noFill/>
+        </p:spPr>
+        <p:txBody>
+          <a:bodyPr wrap="square" lIns="45720" rIns="45720" tIns="36576" bIns="36576" anchor="t">
+            <a:spAutoFit/>
+          </a:bodyPr>
+          <a:lstStyle/>
+          <a:p>
+            <a:pPr algn="l">
+              <a:defRPr sz="2000" b="0">
                 <a:solidFill>
                   <a:srgbClr val="1C2330"/>
                 </a:solidFill>
@@ -6162,250 +7249,7 @@
               </a:defRPr>
             </a:pPr>
             <a:r>
-              <a:t>Puedo señalar dónde está.</a:t>
-            </a:r>
-          </a:p>
-        </p:txBody>
-      </p:sp>
-      <p:sp>
-        <p:nvSpPr>
-          <p:cNvPr id="12" name="Rounded Rectangle 11"/>
-          <p:cNvSpPr/>
-          <p:nvPr/>
-        </p:nvSpPr>
-        <p:spPr>
-          <a:xfrm>
-            <a:off x="713232" y="3291839"/>
-            <a:ext cx="420624" cy="420624"/>
-          </a:xfrm>
-          <a:prstGeom prst="roundRect">
-            <a:avLst/>
-          </a:prstGeom>
-          <a:solidFill>
-            <a:srgbClr val="FFFFFF"/>
-          </a:solidFill>
-          <a:ln>
-            <a:solidFill>
-              <a:srgbClr val="2F5BA8"/>
-            </a:solidFill>
-          </a:ln>
-        </p:spPr>
-        <p:style>
-          <a:lnRef idx="1">
-            <a:schemeClr val="accent1"/>
-          </a:lnRef>
-          <a:fillRef idx="3">
-            <a:schemeClr val="accent1"/>
-          </a:fillRef>
-          <a:effectRef idx="2">
-            <a:schemeClr val="accent1"/>
-          </a:effectRef>
-          <a:fontRef idx="minor">
-            <a:schemeClr val="lt1"/>
-          </a:fontRef>
-        </p:style>
-        <p:txBody>
-          <a:bodyPr rtlCol="0" anchor="ctr"/>
-          <a:lstStyle/>
-          <a:p>
-            <a:pPr algn="ctr"/>
-          </a:p>
-        </p:txBody>
-      </p:sp>
-      <p:sp>
-        <p:nvSpPr>
-          <p:cNvPr id="13" name="TextBox 12"/>
-          <p:cNvSpPr txBox="1"/>
-          <p:nvPr/>
-        </p:nvSpPr>
-        <p:spPr>
-          <a:xfrm>
-            <a:off x="1389888" y="3273551"/>
-            <a:ext cx="9829800" cy="960120"/>
-          </a:xfrm>
-          <a:prstGeom prst="rect">
-            <a:avLst/>
-          </a:prstGeom>
-          <a:noFill/>
-        </p:spPr>
-        <p:txBody>
-          <a:bodyPr wrap="square" lIns="45720" rIns="45720" tIns="36576" bIns="36576" anchor="t">
-            <a:spAutoFit/>
-          </a:bodyPr>
-          <a:lstStyle/>
-          <a:p>
-            <a:pPr algn="l">
-              <a:defRPr sz="1900" b="0">
-                <a:solidFill>
-                  <a:srgbClr val="1C2330"/>
-                </a:solidFill>
-                <a:latin typeface="Aptos"/>
-              </a:defRPr>
-            </a:pPr>
-            <a:r>
-              <a:t>Puedo explicar una decisión tomada.</a:t>
-            </a:r>
-          </a:p>
-        </p:txBody>
-      </p:sp>
-      <p:sp>
-        <p:nvSpPr>
-          <p:cNvPr id="14" name="Rounded Rectangle 13"/>
-          <p:cNvSpPr/>
-          <p:nvPr/>
-        </p:nvSpPr>
-        <p:spPr>
-          <a:xfrm>
-            <a:off x="713232" y="4288536"/>
-            <a:ext cx="420624" cy="420624"/>
-          </a:xfrm>
-          <a:prstGeom prst="roundRect">
-            <a:avLst/>
-          </a:prstGeom>
-          <a:solidFill>
-            <a:srgbClr val="FFFFFF"/>
-          </a:solidFill>
-          <a:ln>
-            <a:solidFill>
-              <a:srgbClr val="2F5BA8"/>
-            </a:solidFill>
-          </a:ln>
-        </p:spPr>
-        <p:style>
-          <a:lnRef idx="1">
-            <a:schemeClr val="accent1"/>
-          </a:lnRef>
-          <a:fillRef idx="3">
-            <a:schemeClr val="accent1"/>
-          </a:fillRef>
-          <a:effectRef idx="2">
-            <a:schemeClr val="accent1"/>
-          </a:effectRef>
-          <a:fontRef idx="minor">
-            <a:schemeClr val="lt1"/>
-          </a:fontRef>
-        </p:style>
-        <p:txBody>
-          <a:bodyPr rtlCol="0" anchor="ctr"/>
-          <a:lstStyle/>
-          <a:p>
-            <a:pPr algn="ctr"/>
-          </a:p>
-        </p:txBody>
-      </p:sp>
-      <p:sp>
-        <p:nvSpPr>
-          <p:cNvPr id="15" name="TextBox 14"/>
-          <p:cNvSpPr txBox="1"/>
-          <p:nvPr/>
-        </p:nvSpPr>
-        <p:spPr>
-          <a:xfrm>
-            <a:off x="1389888" y="4270248"/>
-            <a:ext cx="9829800" cy="960120"/>
-          </a:xfrm>
-          <a:prstGeom prst="rect">
-            <a:avLst/>
-          </a:prstGeom>
-          <a:noFill/>
-        </p:spPr>
-        <p:txBody>
-          <a:bodyPr wrap="square" lIns="45720" rIns="45720" tIns="36576" bIns="36576" anchor="t">
-            <a:spAutoFit/>
-          </a:bodyPr>
-          <a:lstStyle/>
-          <a:p>
-            <a:pPr algn="l">
-              <a:defRPr sz="1900" b="0">
-                <a:solidFill>
-                  <a:srgbClr val="1C2330"/>
-                </a:solidFill>
-                <a:latin typeface="Aptos"/>
-              </a:defRPr>
-            </a:pPr>
-            <a:r>
-              <a:t>Puedo mostrar una prueba o comprobación.</a:t>
-            </a:r>
-          </a:p>
-        </p:txBody>
-      </p:sp>
-      <p:sp>
-        <p:nvSpPr>
-          <p:cNvPr id="16" name="Rounded Rectangle 15"/>
-          <p:cNvSpPr/>
-          <p:nvPr/>
-        </p:nvSpPr>
-        <p:spPr>
-          <a:xfrm>
-            <a:off x="713232" y="5285231"/>
-            <a:ext cx="420624" cy="420624"/>
-          </a:xfrm>
-          <a:prstGeom prst="roundRect">
-            <a:avLst/>
-          </a:prstGeom>
-          <a:solidFill>
-            <a:srgbClr val="FFFFFF"/>
-          </a:solidFill>
-          <a:ln>
-            <a:solidFill>
-              <a:srgbClr val="2F5BA8"/>
-            </a:solidFill>
-          </a:ln>
-        </p:spPr>
-        <p:style>
-          <a:lnRef idx="1">
-            <a:schemeClr val="accent1"/>
-          </a:lnRef>
-          <a:fillRef idx="3">
-            <a:schemeClr val="accent1"/>
-          </a:fillRef>
-          <a:effectRef idx="2">
-            <a:schemeClr val="accent1"/>
-          </a:effectRef>
-          <a:fontRef idx="minor">
-            <a:schemeClr val="lt1"/>
-          </a:fontRef>
-        </p:style>
-        <p:txBody>
-          <a:bodyPr rtlCol="0" anchor="ctr"/>
-          <a:lstStyle/>
-          <a:p>
-            <a:pPr algn="ctr"/>
-          </a:p>
-        </p:txBody>
-      </p:sp>
-      <p:sp>
-        <p:nvSpPr>
-          <p:cNvPr id="17" name="TextBox 16"/>
-          <p:cNvSpPr txBox="1"/>
-          <p:nvPr/>
-        </p:nvSpPr>
-        <p:spPr>
-          <a:xfrm>
-            <a:off x="1389888" y="5266944"/>
-            <a:ext cx="9829800" cy="960120"/>
-          </a:xfrm>
-          <a:prstGeom prst="rect">
-            <a:avLst/>
-          </a:prstGeom>
-          <a:noFill/>
-        </p:spPr>
-        <p:txBody>
-          <a:bodyPr wrap="square" lIns="45720" rIns="45720" tIns="36576" bIns="36576" anchor="t">
-            <a:spAutoFit/>
-          </a:bodyPr>
-          <a:lstStyle/>
-          <a:p>
-            <a:pPr algn="l">
-              <a:defRPr sz="1900" b="0">
-                <a:solidFill>
-                  <a:srgbClr val="1C2330"/>
-                </a:solidFill>
-                <a:latin typeface="Aptos"/>
-              </a:defRPr>
-            </a:pPr>
-            <a:r>
-              <a:t>He registrado mi aportación individual si el trabajo era de equipo.</a:t>
+              <a:t>¿Qué puedes señalar, explicar y probar al terminar este checkpoint?</a:t>
             </a:r>
           </a:p>
         </p:txBody>
@@ -6545,7 +7389,7 @@
               </a:defRPr>
             </a:pPr>
             <a:r>
-              <a:t>LÍMITES QUE PROTEGEN EL APRENDIZAJE</a:t>
+              <a:t>COMPROBAR</a:t>
             </a:r>
           </a:p>
         </p:txBody>
@@ -6581,7 +7425,7 @@
               </a:defRPr>
             </a:pPr>
             <a:r>
-              <a:t>Seguridad y uso responsable</a:t>
+              <a:t>Evidencia y comprobación</a:t>
             </a:r>
           </a:p>
         </p:txBody>
@@ -6660,7 +7504,7 @@
               </a:defRPr>
             </a:pPr>
             <a:r>
-              <a:t>MiniJarvis · 1.º DAW · Sesión 212 · H1</a:t>
+              <a:t>MiniJarvis · 1.º DAW · Sesión 212 · H1 — Primer MiniJarvis</a:t>
             </a:r>
           </a:p>
         </p:txBody>
@@ -6673,8 +7517,8 @@
         </p:nvSpPr>
         <p:spPr>
           <a:xfrm>
-            <a:off x="621792" y="1298448"/>
-            <a:ext cx="5230368" cy="2176272"/>
+            <a:off x="713232" y="1298448"/>
+            <a:ext cx="420624" cy="420624"/>
           </a:xfrm>
           <a:prstGeom prst="roundRect">
             <a:avLst/>
@@ -6684,7 +7528,7 @@
           </a:solidFill>
           <a:ln>
             <a:solidFill>
-              <a:srgbClr val="E5E9EF"/>
+              <a:srgbClr val="2F5BA8"/>
             </a:solidFill>
           </a:ln>
         </p:spPr>
@@ -6712,57 +7556,14 @@
       </p:sp>
       <p:sp>
         <p:nvSpPr>
-          <p:cNvPr id="9" name="Rounded Rectangle 8"/>
-          <p:cNvSpPr/>
-          <p:nvPr/>
-        </p:nvSpPr>
-        <p:spPr>
-          <a:xfrm>
-            <a:off x="841248" y="1527048"/>
-            <a:ext cx="237744" cy="1719072"/>
-          </a:xfrm>
-          <a:prstGeom prst="roundRect">
-            <a:avLst/>
-          </a:prstGeom>
-          <a:solidFill>
-            <a:srgbClr val="247E5C"/>
-          </a:solidFill>
-          <a:ln>
-            <a:noFill/>
-          </a:ln>
-        </p:spPr>
-        <p:style>
-          <a:lnRef idx="1">
-            <a:schemeClr val="accent1"/>
-          </a:lnRef>
-          <a:fillRef idx="3">
-            <a:schemeClr val="accent1"/>
-          </a:fillRef>
-          <a:effectRef idx="2">
-            <a:schemeClr val="accent1"/>
-          </a:effectRef>
-          <a:fontRef idx="minor">
-            <a:schemeClr val="lt1"/>
-          </a:fontRef>
-        </p:style>
-        <p:txBody>
-          <a:bodyPr rtlCol="0" anchor="ctr"/>
-          <a:lstStyle/>
-          <a:p>
-            <a:pPr algn="ctr"/>
-          </a:p>
-        </p:txBody>
-      </p:sp>
-      <p:sp>
-        <p:nvSpPr>
-          <p:cNvPr id="10" name="TextBox 9"/>
+          <p:cNvPr id="9" name="TextBox 8"/>
           <p:cNvSpPr txBox="1"/>
           <p:nvPr/>
         </p:nvSpPr>
         <p:spPr>
           <a:xfrm>
-            <a:off x="1280160" y="1527048"/>
-            <a:ext cx="4224528" cy="1783080"/>
+            <a:off x="1389888" y="1280160"/>
+            <a:ext cx="9829800" cy="1624584"/>
           </a:xfrm>
           <a:prstGeom prst="rect">
             <a:avLst/>
@@ -6784,21 +7585,21 @@
               </a:defRPr>
             </a:pPr>
             <a:r>
-              <a:t>Trabaja únicamente con datos ficticios.</a:t>
-            </a:r>
-          </a:p>
-        </p:txBody>
-      </p:sp>
-      <p:sp>
-        <p:nvSpPr>
-          <p:cNvPr id="11" name="Rounded Rectangle 10"/>
+              <a:t>conserva el código o la prueba en el lugar indicado por la sesión;</a:t>
+            </a:r>
+          </a:p>
+        </p:txBody>
+      </p:sp>
+      <p:sp>
+        <p:nvSpPr>
+          <p:cNvPr id="10" name="Rounded Rectangle 9"/>
           <p:cNvSpPr/>
           <p:nvPr/>
         </p:nvSpPr>
         <p:spPr>
           <a:xfrm>
-            <a:off x="6126479" y="1298448"/>
-            <a:ext cx="5230368" cy="2176272"/>
+            <a:off x="713232" y="2959607"/>
+            <a:ext cx="420624" cy="420624"/>
           </a:xfrm>
           <a:prstGeom prst="roundRect">
             <a:avLst/>
@@ -6808,7 +7609,7 @@
           </a:solidFill>
           <a:ln>
             <a:solidFill>
-              <a:srgbClr val="E5E9EF"/>
+              <a:srgbClr val="2F5BA8"/>
             </a:solidFill>
           </a:ln>
         </p:spPr>
@@ -6836,57 +7637,14 @@
       </p:sp>
       <p:sp>
         <p:nvSpPr>
-          <p:cNvPr id="12" name="Rounded Rectangle 11"/>
-          <p:cNvSpPr/>
-          <p:nvPr/>
-        </p:nvSpPr>
-        <p:spPr>
-          <a:xfrm>
-            <a:off x="6345936" y="1527048"/>
-            <a:ext cx="237744" cy="1719072"/>
-          </a:xfrm>
-          <a:prstGeom prst="roundRect">
-            <a:avLst/>
-          </a:prstGeom>
-          <a:solidFill>
-            <a:srgbClr val="C07020"/>
-          </a:solidFill>
-          <a:ln>
-            <a:noFill/>
-          </a:ln>
-        </p:spPr>
-        <p:style>
-          <a:lnRef idx="1">
-            <a:schemeClr val="accent1"/>
-          </a:lnRef>
-          <a:fillRef idx="3">
-            <a:schemeClr val="accent1"/>
-          </a:fillRef>
-          <a:effectRef idx="2">
-            <a:schemeClr val="accent1"/>
-          </a:effectRef>
-          <a:fontRef idx="minor">
-            <a:schemeClr val="lt1"/>
-          </a:fontRef>
-        </p:style>
-        <p:txBody>
-          <a:bodyPr rtlCol="0" anchor="ctr"/>
-          <a:lstStyle/>
-          <a:p>
-            <a:pPr algn="ctr"/>
-          </a:p>
-        </p:txBody>
-      </p:sp>
-      <p:sp>
-        <p:nvSpPr>
-          <p:cNvPr id="13" name="TextBox 12"/>
+          <p:cNvPr id="11" name="TextBox 10"/>
           <p:cNvSpPr txBox="1"/>
           <p:nvPr/>
         </p:nvSpPr>
         <p:spPr>
           <a:xfrm>
-            <a:off x="6784847" y="1527048"/>
-            <a:ext cx="4224528" cy="1783080"/>
+            <a:off x="1389888" y="2941319"/>
+            <a:ext cx="9829800" cy="1624584"/>
           </a:xfrm>
           <a:prstGeom prst="rect">
             <a:avLst/>
@@ -6908,21 +7666,21 @@
               </a:defRPr>
             </a:pPr>
             <a:r>
-              <a:t>No escribas contraseñas, tokens, claves API ni datos personales.</a:t>
-            </a:r>
-          </a:p>
-        </p:txBody>
-      </p:sp>
-      <p:sp>
-        <p:nvSpPr>
-          <p:cNvPr id="14" name="Rounded Rectangle 13"/>
+              <a:t>añade una sola entrada al diario individual con prueba, bloqueo y siguiente paso;</a:t>
+            </a:r>
+          </a:p>
+        </p:txBody>
+      </p:sp>
+      <p:sp>
+        <p:nvSpPr>
+          <p:cNvPr id="12" name="Rounded Rectangle 11"/>
           <p:cNvSpPr/>
           <p:nvPr/>
         </p:nvSpPr>
         <p:spPr>
           <a:xfrm>
-            <a:off x="621792" y="3675887"/>
-            <a:ext cx="5230368" cy="2176272"/>
+            <a:off x="713232" y="4620767"/>
+            <a:ext cx="420624" cy="420624"/>
           </a:xfrm>
           <a:prstGeom prst="roundRect">
             <a:avLst/>
@@ -6932,7 +7690,7 @@
           </a:solidFill>
           <a:ln>
             <a:solidFill>
-              <a:srgbClr val="E5E9EF"/>
+              <a:srgbClr val="2F5BA8"/>
             </a:solidFill>
           </a:ln>
         </p:spPr>
@@ -6960,57 +7718,14 @@
       </p:sp>
       <p:sp>
         <p:nvSpPr>
-          <p:cNvPr id="15" name="Rounded Rectangle 14"/>
-          <p:cNvSpPr/>
-          <p:nvPr/>
-        </p:nvSpPr>
-        <p:spPr>
-          <a:xfrm>
-            <a:off x="841248" y="3904487"/>
-            <a:ext cx="237744" cy="1719072"/>
-          </a:xfrm>
-          <a:prstGeom prst="roundRect">
-            <a:avLst/>
-          </a:prstGeom>
-          <a:solidFill>
-            <a:srgbClr val="B13A3A"/>
-          </a:solidFill>
-          <a:ln>
-            <a:noFill/>
-          </a:ln>
-        </p:spPr>
-        <p:style>
-          <a:lnRef idx="1">
-            <a:schemeClr val="accent1"/>
-          </a:lnRef>
-          <a:fillRef idx="3">
-            <a:schemeClr val="accent1"/>
-          </a:fillRef>
-          <a:effectRef idx="2">
-            <a:schemeClr val="accent1"/>
-          </a:effectRef>
-          <a:fontRef idx="minor">
-            <a:schemeClr val="lt1"/>
-          </a:fontRef>
-        </p:style>
-        <p:txBody>
-          <a:bodyPr rtlCol="0" anchor="ctr"/>
-          <a:lstStyle/>
-          <a:p>
-            <a:pPr algn="ctr"/>
-          </a:p>
-        </p:txBody>
-      </p:sp>
-      <p:sp>
-        <p:nvSpPr>
-          <p:cNvPr id="16" name="TextBox 15"/>
+          <p:cNvPr id="13" name="TextBox 12"/>
           <p:cNvSpPr txBox="1"/>
           <p:nvPr/>
         </p:nvSpPr>
         <p:spPr>
           <a:xfrm>
-            <a:off x="1280160" y="3904487"/>
-            <a:ext cx="4224528" cy="1783080"/>
+            <a:off x="1389888" y="4602480"/>
+            <a:ext cx="9829800" cy="1624584"/>
           </a:xfrm>
           <a:prstGeom prst="rect">
             <a:avLst/>
@@ -7032,131 +7747,7 @@
               </a:defRPr>
             </a:pPr>
             <a:r>
-              <a:t>Si utilizas IA en un uso permitido, registra qué pediste, qué recibiste, qué cambiaste y cómo lo comprobaste.</a:t>
-            </a:r>
-          </a:p>
-        </p:txBody>
-      </p:sp>
-      <p:sp>
-        <p:nvSpPr>
-          <p:cNvPr id="17" name="Rounded Rectangle 16"/>
-          <p:cNvSpPr/>
-          <p:nvPr/>
-        </p:nvSpPr>
-        <p:spPr>
-          <a:xfrm>
-            <a:off x="6126479" y="3675887"/>
-            <a:ext cx="5230368" cy="2176272"/>
-          </a:xfrm>
-          <a:prstGeom prst="roundRect">
-            <a:avLst/>
-          </a:prstGeom>
-          <a:solidFill>
-            <a:srgbClr val="FFFFFF"/>
-          </a:solidFill>
-          <a:ln>
-            <a:solidFill>
-              <a:srgbClr val="E5E9EF"/>
-            </a:solidFill>
-          </a:ln>
-        </p:spPr>
-        <p:style>
-          <a:lnRef idx="1">
-            <a:schemeClr val="accent1"/>
-          </a:lnRef>
-          <a:fillRef idx="3">
-            <a:schemeClr val="accent1"/>
-          </a:fillRef>
-          <a:effectRef idx="2">
-            <a:schemeClr val="accent1"/>
-          </a:effectRef>
-          <a:fontRef idx="minor">
-            <a:schemeClr val="lt1"/>
-          </a:fontRef>
-        </p:style>
-        <p:txBody>
-          <a:bodyPr rtlCol="0" anchor="ctr"/>
-          <a:lstStyle/>
-          <a:p>
-            <a:pPr algn="ctr"/>
-          </a:p>
-        </p:txBody>
-      </p:sp>
-      <p:sp>
-        <p:nvSpPr>
-          <p:cNvPr id="18" name="Rounded Rectangle 17"/>
-          <p:cNvSpPr/>
-          <p:nvPr/>
-        </p:nvSpPr>
-        <p:spPr>
-          <a:xfrm>
-            <a:off x="6345936" y="3904487"/>
-            <a:ext cx="237744" cy="1719072"/>
-          </a:xfrm>
-          <a:prstGeom prst="roundRect">
-            <a:avLst/>
-          </a:prstGeom>
-          <a:solidFill>
-            <a:srgbClr val="2F5BA8"/>
-          </a:solidFill>
-          <a:ln>
-            <a:noFill/>
-          </a:ln>
-        </p:spPr>
-        <p:style>
-          <a:lnRef idx="1">
-            <a:schemeClr val="accent1"/>
-          </a:lnRef>
-          <a:fillRef idx="3">
-            <a:schemeClr val="accent1"/>
-          </a:fillRef>
-          <a:effectRef idx="2">
-            <a:schemeClr val="accent1"/>
-          </a:effectRef>
-          <a:fontRef idx="minor">
-            <a:schemeClr val="lt1"/>
-          </a:fontRef>
-        </p:style>
-        <p:txBody>
-          <a:bodyPr rtlCol="0" anchor="ctr"/>
-          <a:lstStyle/>
-          <a:p>
-            <a:pPr algn="ctr"/>
-          </a:p>
-        </p:txBody>
-      </p:sp>
-      <p:sp>
-        <p:nvSpPr>
-          <p:cNvPr id="19" name="TextBox 18"/>
-          <p:cNvSpPr txBox="1"/>
-          <p:nvPr/>
-        </p:nvSpPr>
-        <p:spPr>
-          <a:xfrm>
-            <a:off x="6784847" y="3904487"/>
-            <a:ext cx="4224528" cy="1783080"/>
-          </a:xfrm>
-          <a:prstGeom prst="rect">
-            <a:avLst/>
-          </a:prstGeom>
-          <a:noFill/>
-        </p:spPr>
-        <p:txBody>
-          <a:bodyPr wrap="square" lIns="45720" rIns="45720" tIns="36576" bIns="36576" anchor="t">
-            <a:spAutoFit/>
-          </a:bodyPr>
-          <a:lstStyle/>
-          <a:p>
-            <a:pPr algn="l">
-              <a:defRPr sz="1900" b="0">
-                <a:solidFill>
-                  <a:srgbClr val="1C2330"/>
-                </a:solidFill>
-                <a:latin typeface="Aptos"/>
-              </a:defRPr>
-            </a:pPr>
-            <a:r>
-              <a:t>Los ejemplos de Laura solo se consultan después del intento propio.</a:t>
+              <a:t>no copies la misma reflexión en otro documento; el Site personal seleccionará evidencias al cerrar H1.</a:t>
             </a:r>
           </a:p>
         </p:txBody>
@@ -7296,7 +7887,7 @@
               </a:defRPr>
             </a:pPr>
             <a:r>
-              <a:t>EXPLICAR Y DEFENDER</a:t>
+              <a:t>LÍMITES QUE PROTEGEN EL APRENDIZAJE</a:t>
             </a:r>
           </a:p>
         </p:txBody>
@@ -7332,7 +7923,7 @@
               </a:defRPr>
             </a:pPr>
             <a:r>
-              <a:t>Cierre y defensa</a:t>
+              <a:t>Seguridad y uso responsable</a:t>
             </a:r>
           </a:p>
         </p:txBody>
@@ -7411,7 +8002,510 @@
               </a:defRPr>
             </a:pPr>
             <a:r>
-              <a:t>MiniJarvis · 1.º DAW · Sesión 212 · H1</a:t>
+              <a:t>MiniJarvis · 1.º DAW · Sesión 212 · H1 — Primer MiniJarvis</a:t>
+            </a:r>
+          </a:p>
+        </p:txBody>
+      </p:sp>
+      <p:sp>
+        <p:nvSpPr>
+          <p:cNvPr id="8" name="Rounded Rectangle 7"/>
+          <p:cNvSpPr/>
+          <p:nvPr/>
+        </p:nvSpPr>
+        <p:spPr>
+          <a:xfrm>
+            <a:off x="621792" y="1298448"/>
+            <a:ext cx="5230368" cy="4553712"/>
+          </a:xfrm>
+          <a:prstGeom prst="roundRect">
+            <a:avLst/>
+          </a:prstGeom>
+          <a:solidFill>
+            <a:srgbClr val="FFFFFF"/>
+          </a:solidFill>
+          <a:ln>
+            <a:solidFill>
+              <a:srgbClr val="E5E9EF"/>
+            </a:solidFill>
+          </a:ln>
+        </p:spPr>
+        <p:style>
+          <a:lnRef idx="1">
+            <a:schemeClr val="accent1"/>
+          </a:lnRef>
+          <a:fillRef idx="3">
+            <a:schemeClr val="accent1"/>
+          </a:fillRef>
+          <a:effectRef idx="2">
+            <a:schemeClr val="accent1"/>
+          </a:effectRef>
+          <a:fontRef idx="minor">
+            <a:schemeClr val="lt1"/>
+          </a:fontRef>
+        </p:style>
+        <p:txBody>
+          <a:bodyPr rtlCol="0" anchor="ctr"/>
+          <a:lstStyle/>
+          <a:p>
+            <a:pPr algn="ctr"/>
+          </a:p>
+        </p:txBody>
+      </p:sp>
+      <p:sp>
+        <p:nvSpPr>
+          <p:cNvPr id="9" name="Rounded Rectangle 8"/>
+          <p:cNvSpPr/>
+          <p:nvPr/>
+        </p:nvSpPr>
+        <p:spPr>
+          <a:xfrm>
+            <a:off x="841248" y="1527048"/>
+            <a:ext cx="237744" cy="4096512"/>
+          </a:xfrm>
+          <a:prstGeom prst="roundRect">
+            <a:avLst/>
+          </a:prstGeom>
+          <a:solidFill>
+            <a:srgbClr val="247E5C"/>
+          </a:solidFill>
+          <a:ln>
+            <a:noFill/>
+          </a:ln>
+        </p:spPr>
+        <p:style>
+          <a:lnRef idx="1">
+            <a:schemeClr val="accent1"/>
+          </a:lnRef>
+          <a:fillRef idx="3">
+            <a:schemeClr val="accent1"/>
+          </a:fillRef>
+          <a:effectRef idx="2">
+            <a:schemeClr val="accent1"/>
+          </a:effectRef>
+          <a:fontRef idx="minor">
+            <a:schemeClr val="lt1"/>
+          </a:fontRef>
+        </p:style>
+        <p:txBody>
+          <a:bodyPr rtlCol="0" anchor="ctr"/>
+          <a:lstStyle/>
+          <a:p>
+            <a:pPr algn="ctr"/>
+          </a:p>
+        </p:txBody>
+      </p:sp>
+      <p:sp>
+        <p:nvSpPr>
+          <p:cNvPr id="10" name="TextBox 9"/>
+          <p:cNvSpPr txBox="1"/>
+          <p:nvPr/>
+        </p:nvSpPr>
+        <p:spPr>
+          <a:xfrm>
+            <a:off x="1280160" y="1527048"/>
+            <a:ext cx="4224528" cy="4160520"/>
+          </a:xfrm>
+          <a:prstGeom prst="rect">
+            <a:avLst/>
+          </a:prstGeom>
+          <a:noFill/>
+        </p:spPr>
+        <p:txBody>
+          <a:bodyPr wrap="square" lIns="45720" rIns="45720" tIns="36576" bIns="36576" anchor="t">
+            <a:spAutoFit/>
+          </a:bodyPr>
+          <a:lstStyle/>
+          <a:p>
+            <a:pPr algn="l">
+              <a:defRPr sz="1900" b="0">
+                <a:solidFill>
+                  <a:srgbClr val="1C2330"/>
+                </a:solidFill>
+                <a:latin typeface="Aptos"/>
+              </a:defRPr>
+            </a:pPr>
+            <a:r>
+              <a:t>Usa datos ficticios y no publiques credenciales ni información personal.</a:t>
+            </a:r>
+          </a:p>
+        </p:txBody>
+      </p:sp>
+      <p:sp>
+        <p:nvSpPr>
+          <p:cNvPr id="11" name="Rounded Rectangle 10"/>
+          <p:cNvSpPr/>
+          <p:nvPr/>
+        </p:nvSpPr>
+        <p:spPr>
+          <a:xfrm>
+            <a:off x="6126479" y="1298448"/>
+            <a:ext cx="5230368" cy="4553712"/>
+          </a:xfrm>
+          <a:prstGeom prst="roundRect">
+            <a:avLst/>
+          </a:prstGeom>
+          <a:solidFill>
+            <a:srgbClr val="FFFFFF"/>
+          </a:solidFill>
+          <a:ln>
+            <a:solidFill>
+              <a:srgbClr val="E5E9EF"/>
+            </a:solidFill>
+          </a:ln>
+        </p:spPr>
+        <p:style>
+          <a:lnRef idx="1">
+            <a:schemeClr val="accent1"/>
+          </a:lnRef>
+          <a:fillRef idx="3">
+            <a:schemeClr val="accent1"/>
+          </a:fillRef>
+          <a:effectRef idx="2">
+            <a:schemeClr val="accent1"/>
+          </a:effectRef>
+          <a:fontRef idx="minor">
+            <a:schemeClr val="lt1"/>
+          </a:fontRef>
+        </p:style>
+        <p:txBody>
+          <a:bodyPr rtlCol="0" anchor="ctr"/>
+          <a:lstStyle/>
+          <a:p>
+            <a:pPr algn="ctr"/>
+          </a:p>
+        </p:txBody>
+      </p:sp>
+      <p:sp>
+        <p:nvSpPr>
+          <p:cNvPr id="12" name="Rounded Rectangle 11"/>
+          <p:cNvSpPr/>
+          <p:nvPr/>
+        </p:nvSpPr>
+        <p:spPr>
+          <a:xfrm>
+            <a:off x="6345936" y="1527048"/>
+            <a:ext cx="237744" cy="4096512"/>
+          </a:xfrm>
+          <a:prstGeom prst="roundRect">
+            <a:avLst/>
+          </a:prstGeom>
+          <a:solidFill>
+            <a:srgbClr val="C07020"/>
+          </a:solidFill>
+          <a:ln>
+            <a:noFill/>
+          </a:ln>
+        </p:spPr>
+        <p:style>
+          <a:lnRef idx="1">
+            <a:schemeClr val="accent1"/>
+          </a:lnRef>
+          <a:fillRef idx="3">
+            <a:schemeClr val="accent1"/>
+          </a:fillRef>
+          <a:effectRef idx="2">
+            <a:schemeClr val="accent1"/>
+          </a:effectRef>
+          <a:fontRef idx="minor">
+            <a:schemeClr val="lt1"/>
+          </a:fontRef>
+        </p:style>
+        <p:txBody>
+          <a:bodyPr rtlCol="0" anchor="ctr"/>
+          <a:lstStyle/>
+          <a:p>
+            <a:pPr algn="ctr"/>
+          </a:p>
+        </p:txBody>
+      </p:sp>
+      <p:sp>
+        <p:nvSpPr>
+          <p:cNvPr id="13" name="TextBox 12"/>
+          <p:cNvSpPr txBox="1"/>
+          <p:nvPr/>
+        </p:nvSpPr>
+        <p:spPr>
+          <a:xfrm>
+            <a:off x="6784847" y="1527048"/>
+            <a:ext cx="4224528" cy="4160520"/>
+          </a:xfrm>
+          <a:prstGeom prst="rect">
+            <a:avLst/>
+          </a:prstGeom>
+          <a:noFill/>
+        </p:spPr>
+        <p:txBody>
+          <a:bodyPr wrap="square" lIns="45720" rIns="45720" tIns="36576" bIns="36576" anchor="t">
+            <a:spAutoFit/>
+          </a:bodyPr>
+          <a:lstStyle/>
+          <a:p>
+            <a:pPr algn="l">
+              <a:defRPr sz="1900" b="0">
+                <a:solidFill>
+                  <a:srgbClr val="1C2330"/>
+                </a:solidFill>
+                <a:latin typeface="Aptos"/>
+              </a:defRPr>
+            </a:pPr>
+            <a:r>
+              <a:t>Si utilizas IA de forma sustantiva, registra propósito, propuesta, cambios propios y validación en el registro de IA del hito.</a:t>
+            </a:r>
+          </a:p>
+        </p:txBody>
+      </p:sp>
+    </p:spTree>
+  </p:cSld>
+  <p:clrMapOvr>
+    <a:masterClrMapping/>
+  </p:clrMapOvr>
+</p:sld>
+</file>
+
+<file path=ppt/slides/slide9.xml><?xml version="1.0" encoding="utf-8"?>
+<p:sld xmlns:a="http://schemas.openxmlformats.org/drawingml/2006/main" xmlns:p="http://schemas.openxmlformats.org/presentationml/2006/main" xmlns:r="http://schemas.openxmlformats.org/officeDocument/2006/relationships">
+  <p:cSld>
+    <p:spTree>
+      <p:nvGrpSpPr>
+        <p:cNvPr id="1" name=""/>
+        <p:cNvGrpSpPr/>
+        <p:nvPr/>
+      </p:nvGrpSpPr>
+      <p:grpSpPr/>
+      <p:sp>
+        <p:nvSpPr>
+          <p:cNvPr id="2" name="Rectangle 1"/>
+          <p:cNvSpPr/>
+          <p:nvPr/>
+        </p:nvSpPr>
+        <p:spPr>
+          <a:xfrm>
+            <a:off x="0" y="0"/>
+            <a:ext cx="12191695" cy="6858000"/>
+          </a:xfrm>
+          <a:prstGeom prst="rect">
+            <a:avLst/>
+          </a:prstGeom>
+          <a:solidFill>
+            <a:srgbClr val="F9F7F2"/>
+          </a:solidFill>
+          <a:ln>
+            <a:noFill/>
+          </a:ln>
+        </p:spPr>
+        <p:style>
+          <a:lnRef idx="1">
+            <a:schemeClr val="accent1"/>
+          </a:lnRef>
+          <a:fillRef idx="3">
+            <a:schemeClr val="accent1"/>
+          </a:fillRef>
+          <a:effectRef idx="2">
+            <a:schemeClr val="accent1"/>
+          </a:effectRef>
+          <a:fontRef idx="minor">
+            <a:schemeClr val="lt1"/>
+          </a:fontRef>
+        </p:style>
+        <p:txBody>
+          <a:bodyPr rtlCol="0" anchor="ctr"/>
+          <a:lstStyle/>
+          <a:p>
+            <a:pPr algn="ctr"/>
+          </a:p>
+        </p:txBody>
+      </p:sp>
+      <p:sp>
+        <p:nvSpPr>
+          <p:cNvPr id="3" name="Rectangle 2"/>
+          <p:cNvSpPr/>
+          <p:nvPr/>
+        </p:nvSpPr>
+        <p:spPr>
+          <a:xfrm>
+            <a:off x="0" y="0"/>
+            <a:ext cx="164592" cy="6858000"/>
+          </a:xfrm>
+          <a:prstGeom prst="rect">
+            <a:avLst/>
+          </a:prstGeom>
+          <a:solidFill>
+            <a:srgbClr val="2F5BA8"/>
+          </a:solidFill>
+          <a:ln>
+            <a:noFill/>
+          </a:ln>
+        </p:spPr>
+        <p:style>
+          <a:lnRef idx="1">
+            <a:schemeClr val="accent1"/>
+          </a:lnRef>
+          <a:fillRef idx="3">
+            <a:schemeClr val="accent1"/>
+          </a:fillRef>
+          <a:effectRef idx="2">
+            <a:schemeClr val="accent1"/>
+          </a:effectRef>
+          <a:fontRef idx="minor">
+            <a:schemeClr val="lt1"/>
+          </a:fontRef>
+        </p:style>
+        <p:txBody>
+          <a:bodyPr rtlCol="0" anchor="ctr"/>
+          <a:lstStyle/>
+          <a:p>
+            <a:pPr algn="ctr"/>
+          </a:p>
+        </p:txBody>
+      </p:sp>
+      <p:sp>
+        <p:nvSpPr>
+          <p:cNvPr id="4" name="TextBox 3"/>
+          <p:cNvSpPr txBox="1"/>
+          <p:nvPr/>
+        </p:nvSpPr>
+        <p:spPr>
+          <a:xfrm>
+            <a:off x="502920" y="274320"/>
+            <a:ext cx="5486400" cy="256032"/>
+          </a:xfrm>
+          <a:prstGeom prst="rect">
+            <a:avLst/>
+          </a:prstGeom>
+          <a:noFill/>
+        </p:spPr>
+        <p:txBody>
+          <a:bodyPr wrap="square" lIns="45720" rIns="45720" tIns="36576" bIns="36576" anchor="t">
+            <a:spAutoFit/>
+          </a:bodyPr>
+          <a:lstStyle/>
+          <a:p>
+            <a:pPr algn="l">
+              <a:defRPr sz="1000" b="1">
+                <a:solidFill>
+                  <a:srgbClr val="2F5BA8"/>
+                </a:solidFill>
+                <a:latin typeface="Aptos"/>
+              </a:defRPr>
+            </a:pPr>
+            <a:r>
+              <a:t>EXPLICAR Y DEFENDER</a:t>
+            </a:r>
+          </a:p>
+        </p:txBody>
+      </p:sp>
+      <p:sp>
+        <p:nvSpPr>
+          <p:cNvPr id="5" name="TextBox 4"/>
+          <p:cNvSpPr txBox="1"/>
+          <p:nvPr/>
+        </p:nvSpPr>
+        <p:spPr>
+          <a:xfrm>
+            <a:off x="502920" y="603504"/>
+            <a:ext cx="11064240" cy="530352"/>
+          </a:xfrm>
+          <a:prstGeom prst="rect">
+            <a:avLst/>
+          </a:prstGeom>
+          <a:noFill/>
+        </p:spPr>
+        <p:txBody>
+          <a:bodyPr wrap="square" lIns="45720" rIns="45720" tIns="36576" bIns="36576" anchor="t">
+            <a:spAutoFit/>
+          </a:bodyPr>
+          <a:lstStyle/>
+          <a:p>
+            <a:pPr algn="l">
+              <a:defRPr sz="2800" b="1">
+                <a:solidFill>
+                  <a:srgbClr val="1C2330"/>
+                </a:solidFill>
+                <a:latin typeface="Aptos"/>
+              </a:defRPr>
+            </a:pPr>
+            <a:r>
+              <a:t>Cierre y defensa</a:t>
+            </a:r>
+          </a:p>
+        </p:txBody>
+      </p:sp>
+      <p:sp>
+        <p:nvSpPr>
+          <p:cNvPr id="6" name="Rectangle 5"/>
+          <p:cNvSpPr/>
+          <p:nvPr/>
+        </p:nvSpPr>
+        <p:spPr>
+          <a:xfrm>
+            <a:off x="0" y="6601968"/>
+            <a:ext cx="12191695" cy="256032"/>
+          </a:xfrm>
+          <a:prstGeom prst="rect">
+            <a:avLst/>
+          </a:prstGeom>
+          <a:solidFill>
+            <a:srgbClr val="2F5BA8"/>
+          </a:solidFill>
+          <a:ln>
+            <a:noFill/>
+          </a:ln>
+        </p:spPr>
+        <p:style>
+          <a:lnRef idx="1">
+            <a:schemeClr val="accent1"/>
+          </a:lnRef>
+          <a:fillRef idx="3">
+            <a:schemeClr val="accent1"/>
+          </a:fillRef>
+          <a:effectRef idx="2">
+            <a:schemeClr val="accent1"/>
+          </a:effectRef>
+          <a:fontRef idx="minor">
+            <a:schemeClr val="lt1"/>
+          </a:fontRef>
+        </p:style>
+        <p:txBody>
+          <a:bodyPr rtlCol="0" anchor="ctr"/>
+          <a:lstStyle/>
+          <a:p>
+            <a:pPr algn="ctr"/>
+          </a:p>
+        </p:txBody>
+      </p:sp>
+      <p:sp>
+        <p:nvSpPr>
+          <p:cNvPr id="7" name="TextBox 6"/>
+          <p:cNvSpPr txBox="1"/>
+          <p:nvPr/>
+        </p:nvSpPr>
+        <p:spPr>
+          <a:xfrm>
+            <a:off x="411480" y="6629400"/>
+            <a:ext cx="11247120" cy="164592"/>
+          </a:xfrm>
+          <a:prstGeom prst="rect">
+            <a:avLst/>
+          </a:prstGeom>
+          <a:noFill/>
+        </p:spPr>
+        <p:txBody>
+          <a:bodyPr wrap="square" lIns="45720" rIns="45720" tIns="36576" bIns="36576" anchor="t">
+            <a:spAutoFit/>
+          </a:bodyPr>
+          <a:lstStyle/>
+          <a:p>
+            <a:pPr algn="l">
+              <a:defRPr sz="900" b="0">
+                <a:solidFill>
+                  <a:srgbClr val="FFFFFF"/>
+                </a:solidFill>
+                <a:latin typeface="Aptos"/>
+              </a:defRPr>
+            </a:pPr>
+            <a:r>
+              <a:t>MiniJarvis · 1.º DAW · Sesión 212 · H1 — Primer MiniJarvis</a:t>
             </a:r>
           </a:p>
         </p:txBody>
@@ -7528,7 +8622,7 @@
               </a:defRPr>
             </a:pPr>
             <a:r>
-              <a:t>¿por qué scanner.nextLine() devuelve texto aunque escribas un número?</a:t>
+              <a:t>¿Qué puedes señalar, explicar y probar al terminar este checkpoint?</a:t>
             </a:r>
           </a:p>
         </p:txBody>
@@ -7895,4 +8989,324 @@
   </a:objectDefaults>
   <a:extraClrSchemeLst/>
 </a:theme>
+</file>
+
+<file path=ppt/theme/theme2.xml><?xml version="1.0" encoding="utf-8"?>
+<a:theme xmlns:a="http://schemas.openxmlformats.org/drawingml/2006/main" name="Office Theme">
+  <a:themeElements>
+    <a:clrScheme name="Office">
+      <a:dk1>
+        <a:sysClr val="windowText" lastClr="000000"/>
+      </a:dk1>
+      <a:lt1>
+        <a:sysClr val="window" lastClr="FFFFFF"/>
+      </a:lt1>
+      <a:dk2>
+        <a:srgbClr val="1F497D"/>
+      </a:dk2>
+      <a:lt2>
+        <a:srgbClr val="EEECE1"/>
+      </a:lt2>
+      <a:accent1>
+        <a:srgbClr val="4F81BD"/>
+      </a:accent1>
+      <a:accent2>
+        <a:srgbClr val="C0504D"/>
+      </a:accent2>
+      <a:accent3>
+        <a:srgbClr val="9BBB59"/>
+      </a:accent3>
+      <a:accent4>
+        <a:srgbClr val="8064A2"/>
+      </a:accent4>
+      <a:accent5>
+        <a:srgbClr val="4BACC6"/>
+      </a:accent5>
+      <a:accent6>
+        <a:srgbClr val="F79646"/>
+      </a:accent6>
+      <a:hlink>
+        <a:srgbClr val="0000FF"/>
+      </a:hlink>
+      <a:folHlink>
+        <a:srgbClr val="800080"/>
+      </a:folHlink>
+    </a:clrScheme>
+    <a:fontScheme name="Office">
+      <a:majorFont>
+        <a:latin typeface="Calibri"/>
+        <a:ea typeface=""/>
+        <a:cs typeface=""/>
+        <a:font script="Jpan" typeface="ＭＳ Ｐゴシック"/>
+        <a:font script="Hang" typeface="맑은 고딕"/>
+        <a:font script="Hans" typeface="宋体"/>
+        <a:font script="Hant" typeface="新細明體"/>
+        <a:font script="Arab" typeface="Times New Roman"/>
+        <a:font script="Hebr" typeface="Times New Roman"/>
+        <a:font script="Thai" typeface="Angsana New"/>
+        <a:font script="Ethi" typeface="Nyala"/>
+        <a:font script="Beng" typeface="Vrinda"/>
+        <a:font script="Gujr" typeface="Shruti"/>
+        <a:font script="Khmr" typeface="MoolBoran"/>
+        <a:font script="Knda" typeface="Tunga"/>
+        <a:font script="Guru" typeface="Raavi"/>
+        <a:font script="Cans" typeface="Euphemia"/>
+        <a:font script="Cher" typeface="Plantagenet Cherokee"/>
+        <a:font script="Yiii" typeface="Microsoft Yi Baiti"/>
+        <a:font script="Tibt" typeface="Microsoft Himalaya"/>
+        <a:font script="Thaa" typeface="MV Boli"/>
+        <a:font script="Deva" typeface="Mangal"/>
+        <a:font script="Telu" typeface="Gautami"/>
+        <a:font script="Taml" typeface="Latha"/>
+        <a:font script="Syrc" typeface="Estrangelo Edessa"/>
+        <a:font script="Orya" typeface="Kalinga"/>
+        <a:font script="Mlym" typeface="Kartika"/>
+        <a:font script="Laoo" typeface="DokChampa"/>
+        <a:font script="Sinh" typeface="Iskoola Pota"/>
+        <a:font script="Mong" typeface="Mongolian Baiti"/>
+        <a:font script="Viet" typeface="Times New Roman"/>
+        <a:font script="Uigh" typeface="Microsoft Uighur"/>
+        <a:font script="Geor" typeface="Sylfaen"/>
+      </a:majorFont>
+      <a:minorFont>
+        <a:latin typeface="Calibri"/>
+        <a:ea typeface=""/>
+        <a:cs typeface=""/>
+        <a:font script="Jpan" typeface="ＭＳ Ｐゴシック"/>
+        <a:font script="Hang" typeface="맑은 고딕"/>
+        <a:font script="Hans" typeface="宋体"/>
+        <a:font script="Hant" typeface="新細明體"/>
+        <a:font script="Arab" typeface="Arial"/>
+        <a:font script="Hebr" typeface="Arial"/>
+        <a:font script="Thai" typeface="Cordia New"/>
+        <a:font script="Ethi" typeface="Nyala"/>
+        <a:font script="Beng" typeface="Vrinda"/>
+        <a:font script="Gujr" typeface="Shruti"/>
+        <a:font script="Khmr" typeface="DaunPenh"/>
+        <a:font script="Knda" typeface="Tunga"/>
+        <a:font script="Guru" typeface="Raavi"/>
+        <a:font script="Cans" typeface="Euphemia"/>
+        <a:font script="Cher" typeface="Plantagenet Cherokee"/>
+        <a:font script="Yiii" typeface="Microsoft Yi Baiti"/>
+        <a:font script="Tibt" typeface="Microsoft Himalaya"/>
+        <a:font script="Thaa" typeface="MV Boli"/>
+        <a:font script="Deva" typeface="Mangal"/>
+        <a:font script="Telu" typeface="Gautami"/>
+        <a:font script="Taml" typeface="Latha"/>
+        <a:font script="Syrc" typeface="Estrangelo Edessa"/>
+        <a:font script="Orya" typeface="Kalinga"/>
+        <a:font script="Mlym" typeface="Kartika"/>
+        <a:font script="Laoo" typeface="DokChampa"/>
+        <a:font script="Sinh" typeface="Iskoola Pota"/>
+        <a:font script="Mong" typeface="Mongolian Baiti"/>
+        <a:font script="Viet" typeface="Arial"/>
+        <a:font script="Uigh" typeface="Microsoft Uighur"/>
+        <a:font script="Geor" typeface="Sylfaen"/>
+      </a:minorFont>
+    </a:fontScheme>
+    <a:fmtScheme name="Office">
+      <a:fillStyleLst>
+        <a:solidFill>
+          <a:schemeClr val="phClr"/>
+        </a:solidFill>
+        <a:gradFill rotWithShape="1">
+          <a:gsLst>
+            <a:gs pos="0">
+              <a:schemeClr val="phClr">
+                <a:tint val="50000"/>
+                <a:satMod val="300000"/>
+              </a:schemeClr>
+            </a:gs>
+            <a:gs pos="35000">
+              <a:schemeClr val="phClr">
+                <a:tint val="37000"/>
+                <a:satMod val="300000"/>
+              </a:schemeClr>
+            </a:gs>
+            <a:gs pos="100000">
+              <a:schemeClr val="phClr">
+                <a:tint val="15000"/>
+                <a:satMod val="350000"/>
+              </a:schemeClr>
+            </a:gs>
+          </a:gsLst>
+          <a:lin ang="16200000" scaled="1"/>
+        </a:gradFill>
+        <a:gradFill rotWithShape="1">
+          <a:gsLst>
+            <a:gs pos="0">
+              <a:schemeClr val="phClr">
+                <a:tint val="100000"/>
+                <a:shade val="100000"/>
+                <a:satMod val="130000"/>
+              </a:schemeClr>
+            </a:gs>
+            <a:gs pos="100000">
+              <a:schemeClr val="phClr">
+                <a:tint val="50000"/>
+                <a:shade val="100000"/>
+                <a:satMod val="350000"/>
+              </a:schemeClr>
+            </a:gs>
+          </a:gsLst>
+          <a:lin ang="16200000" scaled="0"/>
+        </a:gradFill>
+      </a:fillStyleLst>
+      <a:lnStyleLst>
+        <a:ln w="9525" cap="flat" cmpd="sng" algn="ctr">
+          <a:solidFill>
+            <a:schemeClr val="phClr">
+              <a:shade val="95000"/>
+              <a:satMod val="105000"/>
+            </a:schemeClr>
+          </a:solidFill>
+          <a:prstDash val="solid"/>
+        </a:ln>
+        <a:ln w="25400" cap="flat" cmpd="sng" algn="ctr">
+          <a:solidFill>
+            <a:schemeClr val="phClr"/>
+          </a:solidFill>
+          <a:prstDash val="solid"/>
+        </a:ln>
+        <a:ln w="38100" cap="flat" cmpd="sng" algn="ctr">
+          <a:solidFill>
+            <a:schemeClr val="phClr"/>
+          </a:solidFill>
+          <a:prstDash val="solid"/>
+        </a:ln>
+      </a:lnStyleLst>
+      <a:effectStyleLst>
+        <a:effectStyle>
+          <a:effectLst>
+            <a:outerShdw blurRad="40000" dist="20000" dir="5400000" rotWithShape="0">
+              <a:srgbClr val="000000">
+                <a:alpha val="38000"/>
+              </a:srgbClr>
+            </a:outerShdw>
+          </a:effectLst>
+        </a:effectStyle>
+        <a:effectStyle>
+          <a:effectLst>
+            <a:outerShdw blurRad="40000" dist="23000" dir="5400000" rotWithShape="0">
+              <a:srgbClr val="000000">
+                <a:alpha val="35000"/>
+              </a:srgbClr>
+            </a:outerShdw>
+          </a:effectLst>
+        </a:effectStyle>
+        <a:effectStyle>
+          <a:effectLst>
+            <a:outerShdw blurRad="40000" dist="23000" dir="5400000" rotWithShape="0">
+              <a:srgbClr val="000000">
+                <a:alpha val="35000"/>
+              </a:srgbClr>
+            </a:outerShdw>
+          </a:effectLst>
+          <a:scene3d>
+            <a:camera prst="orthographicFront">
+              <a:rot lat="0" lon="0" rev="0"/>
+            </a:camera>
+            <a:lightRig rig="threePt" dir="t">
+              <a:rot lat="0" lon="0" rev="1200000"/>
+            </a:lightRig>
+          </a:scene3d>
+          <a:sp3d>
+            <a:bevelT w="63500" h="25400"/>
+          </a:sp3d>
+        </a:effectStyle>
+      </a:effectStyleLst>
+      <a:bgFillStyleLst>
+        <a:solidFill>
+          <a:schemeClr val="phClr"/>
+        </a:solidFill>
+        <a:gradFill rotWithShape="1">
+          <a:gsLst>
+            <a:gs pos="0">
+              <a:schemeClr val="phClr">
+                <a:tint val="40000"/>
+                <a:satMod val="350000"/>
+              </a:schemeClr>
+            </a:gs>
+            <a:gs pos="40000">
+              <a:schemeClr val="phClr">
+                <a:tint val="45000"/>
+                <a:shade val="99000"/>
+                <a:satMod val="350000"/>
+              </a:schemeClr>
+            </a:gs>
+            <a:gs pos="100000">
+              <a:schemeClr val="phClr">
+                <a:shade val="20000"/>
+                <a:satMod val="255000"/>
+              </a:schemeClr>
+            </a:gs>
+          </a:gsLst>
+          <a:path path="circle">
+            <a:fillToRect l="50000" t="-80000" r="50000" b="180000"/>
+          </a:path>
+        </a:gradFill>
+        <a:gradFill rotWithShape="1">
+          <a:gsLst>
+            <a:gs pos="0">
+              <a:schemeClr val="phClr">
+                <a:tint val="80000"/>
+                <a:satMod val="300000"/>
+              </a:schemeClr>
+            </a:gs>
+            <a:gs pos="100000">
+              <a:schemeClr val="phClr">
+                <a:shade val="30000"/>
+                <a:satMod val="200000"/>
+              </a:schemeClr>
+            </a:gs>
+          </a:gsLst>
+          <a:path path="circle">
+            <a:fillToRect l="50000" t="50000" r="50000" b="50000"/>
+          </a:path>
+        </a:gradFill>
+      </a:bgFillStyleLst>
+    </a:fmtScheme>
+  </a:themeElements>
+  <a:objectDefaults>
+    <a:spDef>
+      <a:spPr/>
+      <a:bodyPr/>
+      <a:lstStyle/>
+      <a:style>
+        <a:lnRef idx="1">
+          <a:schemeClr val="accent1"/>
+        </a:lnRef>
+        <a:fillRef idx="3">
+          <a:schemeClr val="accent1"/>
+        </a:fillRef>
+        <a:effectRef idx="2">
+          <a:schemeClr val="accent1"/>
+        </a:effectRef>
+        <a:fontRef idx="minor">
+          <a:schemeClr val="lt1"/>
+        </a:fontRef>
+      </a:style>
+    </a:spDef>
+    <a:lnDef>
+      <a:spPr/>
+      <a:bodyPr/>
+      <a:lstStyle/>
+      <a:style>
+        <a:lnRef idx="2">
+          <a:schemeClr val="accent1"/>
+        </a:lnRef>
+        <a:fillRef idx="0">
+          <a:schemeClr val="accent1"/>
+        </a:fillRef>
+        <a:effectRef idx="1">
+          <a:schemeClr val="accent1"/>
+        </a:effectRef>
+        <a:fontRef idx="minor">
+          <a:schemeClr val="tx1"/>
+        </a:fontRef>
+      </a:style>
+    </a:lnDef>
+  </a:objectDefaults>
+  <a:extraClrSchemeLst/>
+</a:theme>
 </file>
--- a/02-PROFESORADO/03-PRESENTACIONES/POR-SESION/h1/S212-entrada-por-teclado-con-scanner-presentacion.pptx
+++ b/02-PROFESORADO/03-PRESENTACIONES/POR-SESION/h1/S212-entrada-por-teclado-con-scanner-presentacion.pptx
@@ -14,6 +14,8 @@
     <p:sldId id="262" r:id="rId14"/>
     <p:sldId id="263" r:id="rId15"/>
     <p:sldId id="264" r:id="rId16"/>
+    <p:sldId id="265" r:id="rId17"/>
+    <p:sldId id="266" r:id="rId18"/>
   </p:sldIdLst>
   <p:sldSz cx="12191695" cy="6858000" type="screen4x3"/>
   <p:notesSz cx="6858000" cy="9144000"/>
@@ -515,7 +517,7 @@
           </a:p>
           <a:p>
             <a:r>
-              <a:t>Diapositiva 1 de 9: Scanner y conversiones</a:t>
+              <a:t>Diapositiva 1 de 11: Scanner y conversiones</a:t>
             </a:r>
           </a:p>
           <a:p>
@@ -601,6 +603,206 @@
           <a:p>
             <a:r>
               <a:t>- PÍLDORA DOCENTE 4/4: Explica que no redondea en este ejemplo; pierde parte decimal.</a:t>
+            </a:r>
+          </a:p>
+          <a:p>
+            <a:r>
+              <a:t>Fuente docente: /mnt/compartido/Programación-26-27/Minijarvis/02-PROFESORADO/02-SESIONES/h1/S212-entrada-por-teclado-con-scanner-docente.md</a:t>
+            </a:r>
+          </a:p>
+        </p:txBody>
+      </p:sp>
+      <p:sp>
+        <p:nvSpPr>
+          <p:cNvPr id="4" name="Slide Number Placeholder 3"/>
+          <p:cNvSpPr>
+            <a:spLocks noGrp="1"/>
+          </p:cNvSpPr>
+          <p:nvPr>
+            <p:ph type="sldNum" idx="5" sz="quarter"/>
+          </p:nvPr>
+        </p:nvSpPr>
+        <p:spPr/>
+      </p:sp>
+    </p:spTree>
+  </p:cSld>
+  <p:clrMapOvr>
+    <a:masterClrMapping/>
+  </p:clrMapOvr>
+</p:notes>
+</file>
+
+<file path=ppt/notesSlides/notesSlide10.xml><?xml version="1.0" encoding="utf-8"?>
+<p:notes xmlns:a="http://schemas.openxmlformats.org/drawingml/2006/main" xmlns:p="http://schemas.openxmlformats.org/presentationml/2006/main" xmlns:r="http://schemas.openxmlformats.org/officeDocument/2006/relationships">
+  <p:cSld>
+    <p:spTree>
+      <p:nvGrpSpPr>
+        <p:cNvPr id="1" name=""/>
+        <p:cNvGrpSpPr/>
+        <p:nvPr/>
+      </p:nvGrpSpPr>
+      <p:grpSpPr>
+        <a:xfrm>
+          <a:off x="0" y="0"/>
+          <a:ext cx="0" cy="0"/>
+          <a:chOff x="0" y="0"/>
+          <a:chExt cx="0" cy="0"/>
+        </a:xfrm>
+      </p:grpSpPr>
+      <p:sp>
+        <p:nvSpPr>
+          <p:cNvPr id="2" name="Slide Image Placeholder 1"/>
+          <p:cNvSpPr>
+            <a:spLocks noGrp="1"/>
+          </p:cNvSpPr>
+          <p:nvPr>
+            <p:ph type="sldImg" idx="2"/>
+          </p:nvPr>
+        </p:nvSpPr>
+        <p:spPr/>
+      </p:sp>
+      <p:sp>
+        <p:nvSpPr>
+          <p:cNvPr id="3" name="Notes Placeholder 2"/>
+          <p:cNvSpPr>
+            <a:spLocks noGrp="1"/>
+          </p:cNvSpPr>
+          <p:nvPr>
+            <p:ph type="body" idx="3" sz="quarter"/>
+          </p:nvPr>
+        </p:nvSpPr>
+        <p:spPr/>
+        <p:txBody>
+          <a:bodyPr/>
+          <a:lstStyle/>
+          <a:p>
+            <a:r>
+              <a:t>Objetivo docente: Leer entrada, convertir tipos y reconocer errores de conversión.</a:t>
+            </a:r>
+          </a:p>
+          <a:p>
+            <a:r>
+              <a:t>Diapositiva 10 de 11: Comprobación final</a:t>
+            </a:r>
+          </a:p>
+          <a:p>
+            <a:r>
+              <a:t>Fase HEXA: Ejecutar — crear</a:t>
+            </a:r>
+          </a:p>
+          <a:p>
+            <a:r>
+              <a:t>Cierra con explicación individual, prueba observable y siguiente paso concreto.</a:t>
+            </a:r>
+          </a:p>
+          <a:p>
+            <a:r>
+              <a:t>- ¿Qué devuelve nextLine(), qué hace parseInt y qué información puede perder un casting?</a:t>
+            </a:r>
+          </a:p>
+          <a:p>
+            <a:r>
+              <a:t>Fuente docente: /mnt/compartido/Programación-26-27/Minijarvis/02-PROFESORADO/02-SESIONES/h1/S212-entrada-por-teclado-con-scanner-docente.md</a:t>
+            </a:r>
+          </a:p>
+        </p:txBody>
+      </p:sp>
+      <p:sp>
+        <p:nvSpPr>
+          <p:cNvPr id="4" name="Slide Number Placeholder 3"/>
+          <p:cNvSpPr>
+            <a:spLocks noGrp="1"/>
+          </p:cNvSpPr>
+          <p:nvPr>
+            <p:ph type="sldNum" idx="5" sz="quarter"/>
+          </p:nvPr>
+        </p:nvSpPr>
+        <p:spPr/>
+      </p:sp>
+    </p:spTree>
+  </p:cSld>
+  <p:clrMapOvr>
+    <a:masterClrMapping/>
+  </p:clrMapOvr>
+</p:notes>
+</file>
+
+<file path=ppt/notesSlides/notesSlide11.xml><?xml version="1.0" encoding="utf-8"?>
+<p:notes xmlns:a="http://schemas.openxmlformats.org/drawingml/2006/main" xmlns:p="http://schemas.openxmlformats.org/presentationml/2006/main" xmlns:r="http://schemas.openxmlformats.org/officeDocument/2006/relationships">
+  <p:cSld>
+    <p:spTree>
+      <p:nvGrpSpPr>
+        <p:cNvPr id="1" name=""/>
+        <p:cNvGrpSpPr/>
+        <p:nvPr/>
+      </p:nvGrpSpPr>
+      <p:grpSpPr>
+        <a:xfrm>
+          <a:off x="0" y="0"/>
+          <a:ext cx="0" cy="0"/>
+          <a:chOff x="0" y="0"/>
+          <a:chExt cx="0" cy="0"/>
+        </a:xfrm>
+      </p:grpSpPr>
+      <p:sp>
+        <p:nvSpPr>
+          <p:cNvPr id="2" name="Slide Image Placeholder 1"/>
+          <p:cNvSpPr>
+            <a:spLocks noGrp="1"/>
+          </p:cNvSpPr>
+          <p:nvPr>
+            <p:ph type="sldImg" idx="2"/>
+          </p:nvPr>
+        </p:nvSpPr>
+        <p:spPr/>
+      </p:sp>
+      <p:sp>
+        <p:nvSpPr>
+          <p:cNvPr id="3" name="Notes Placeholder 2"/>
+          <p:cNvSpPr>
+            <a:spLocks noGrp="1"/>
+          </p:cNvSpPr>
+          <p:nvPr>
+            <p:ph type="body" idx="3" sz="quarter"/>
+          </p:nvPr>
+        </p:nvSpPr>
+        <p:spPr/>
+        <p:txBody>
+          <a:bodyPr/>
+          <a:lstStyle/>
+          <a:p>
+            <a:r>
+              <a:t>Objetivo docente: Leer entrada, convertir tipos y reconocer errores de conversión.</a:t>
+            </a:r>
+          </a:p>
+          <a:p>
+            <a:r>
+              <a:t>Diapositiva 11 de 11: Fuentes utilizadas</a:t>
+            </a:r>
+          </a:p>
+          <a:p>
+            <a:r>
+              <a:t>Fase HEXA: Ejecutar — crear</a:t>
+            </a:r>
+          </a:p>
+          <a:p>
+            <a:r>
+              <a:t>Indica al alumnado dónde ampliar el contenido y qué fragmentos se han adaptado.</a:t>
+            </a:r>
+          </a:p>
+          <a:p>
+            <a:r>
+              <a:t>- Libro: capítulo 02 · Tema 1: entrada y conversiones</a:t>
+            </a:r>
+          </a:p>
+          <a:p>
+            <a:r>
+              <a:t>- Fichas S206-S215 y píldoras H1</a:t>
+            </a:r>
+          </a:p>
+          <a:p>
+            <a:r>
+              <a:t>- Ejemplos revisados y adaptados a MiniJarvis; no se copian errores ni capturas antiguas del PDF.</a:t>
             </a:r>
           </a:p>
           <a:p>
@@ -680,7 +882,7 @@
           </a:p>
           <a:p>
             <a:r>
-              <a:t>Diapositiva 2 de 9: Qué debe conseguirse</a:t>
+              <a:t>Diapositiva 2 de 11: Qué aprenderás y cómo lo demostrarás</a:t>
             </a:r>
           </a:p>
           <a:p>
@@ -695,7 +897,7 @@
           </a:p>
           <a:p>
             <a:r>
-              <a:t>- Al terminar: señala la evidencia, explica qué demuestra y reproduce la prueba.</a:t>
+              <a:t>- Comprobación: Quede diagnóstico.</a:t>
             </a:r>
           </a:p>
           <a:p>
@@ -775,7 +977,7 @@
           </a:p>
           <a:p>
             <a:r>
-              <a:t>Diapositiva 3 de 9: Ejemplo o demostración · 1</a:t>
+              <a:t>Diapositiva 3 de 11: Flujo de entrada</a:t>
             </a:r>
           </a:p>
           <a:p>
@@ -785,32 +987,37 @@
           </a:p>
           <a:p>
             <a:r>
-              <a:t>Modela el ejemplo sin resolver la actividad completa; pide una predicción antes de ejecutar.</a:t>
-            </a:r>
-          </a:p>
-          <a:p>
-            <a:r>
-              <a:t>- D1 · Hasta ahora los datos los decide quien programa — ¿Cómo hacemos para que los escriba la persona que ejecuta MiniJarvis?</a:t>
-            </a:r>
-          </a:p>
-          <a:p>
-            <a:r>
-              <a:t>- D2 · Scanner: pedir → leer → guardar — import java.util.Scanner;</a:t>
-            </a:r>
-          </a:p>
-          <a:p>
-            <a:r>
-              <a:t>- Scanner scanner = new Scanner(System.in);</a:t>
-            </a:r>
-          </a:p>
-          <a:p>
-            <a:r>
-              <a:t>- String userName = scanner.nextLine();</a:t>
-            </a:r>
-          </a:p>
-          <a:p>
-            <a:r>
-              <a:t>- scanner.close();</a:t>
+              <a:t>Explica con predicción y ejemplo mínimo; comprueba comprensión antes de continuar.</a:t>
+            </a:r>
+          </a:p>
+          <a:p>
+            <a:r>
+              <a:t>- pedir</a:t>
+            </a:r>
+          </a:p>
+          <a:p>
+            <a:r>
+              <a:t>- leer texto</a:t>
+            </a:r>
+          </a:p>
+          <a:p>
+            <a:r>
+              <a:t>- guardar</a:t>
+            </a:r>
+          </a:p>
+          <a:p>
+            <a:r>
+              <a:t>- convertir</a:t>
+            </a:r>
+          </a:p>
+          <a:p>
+            <a:r>
+              <a:t>- calcular</a:t>
+            </a:r>
+          </a:p>
+          <a:p>
+            <a:r>
+              <a:t>- mostrar</a:t>
             </a:r>
           </a:p>
           <a:p>
@@ -890,7 +1097,7 @@
           </a:p>
           <a:p>
             <a:r>
-              <a:t>Diapositiva 4 de 9: Ejemplo o demostración · 2</a:t>
+              <a:t>Diapositiva 4 de 11: Una sola instancia de Scanner</a:t>
             </a:r>
           </a:p>
           <a:p>
@@ -900,22 +1107,48 @@
           </a:p>
           <a:p>
             <a:r>
-              <a:t>Modela el ejemplo sin resolver la actividad completa; pide una predicción antes de ejecutar.</a:t>
-            </a:r>
-          </a:p>
-          <a:p>
-            <a:r>
-              <a:t>- D3 · Pide un nombre y úsalo — Ejecuta dos veces con nombres ficticios distintos.</a:t>
-            </a:r>
-          </a:p>
-          <a:p>
-            <a:r>
-              <a:t>- ¿Qué cambia? ¿Qué no?</a:t>
-            </a:r>
-          </a:p>
-          <a:p>
-            <a:r>
-              <a:t>- D4 · Tengo "5". ¿Tengo el número 5? — "5" es texto si procede de nextLine().</a:t>
+              <a:t>Explica con predicción y ejemplo mínimo; comprueba comprensión antes de continuar.</a:t>
+            </a:r>
+          </a:p>
+          <a:p>
+            <a:r>
+              <a:t>- import java.util.Scanner;</a:t>
+            </a:r>
+          </a:p>
+          <a:p/>
+          <a:p>
+            <a:r>
+              <a:t>Scanner scanner = new Scanner(System.in);</a:t>
+            </a:r>
+          </a:p>
+          <a:p>
+            <a:r>
+              <a:t>System.out.print("Nombre ficticio: ");</a:t>
+            </a:r>
+          </a:p>
+          <a:p>
+            <a:r>
+              <a:t>String userName = scanner.nextLine();</a:t>
+            </a:r>
+          </a:p>
+          <a:p>
+            <a:r>
+              <a:t>System.out.println("Hola, " + userName + ".");</a:t>
+            </a:r>
+          </a:p>
+          <a:p>
+            <a:r>
+              <a:t>scanner.close();</a:t>
+            </a:r>
+          </a:p>
+          <a:p>
+            <a:r>
+              <a:t>- nextLine() devuelve String.</a:t>
+            </a:r>
+          </a:p>
+          <a:p>
+            <a:r>
+              <a:t>- La entrada se guarda y cambia una salida observable.</a:t>
             </a:r>
           </a:p>
           <a:p>
@@ -995,7 +1228,7 @@
           </a:p>
           <a:p>
             <a:r>
-              <a:t>Diapositiva 5 de 9: Actividad central · 1</a:t>
+              <a:t>Diapositiva 5 de 11: Texto a número</a:t>
             </a:r>
           </a:p>
           <a:p>
@@ -1005,27 +1238,37 @@
           </a:p>
           <a:p>
             <a:r>
-              <a:t>Entrega la consigna, observa decisiones y pide una prueba reproducible.</a:t>
-            </a:r>
-          </a:p>
-          <a:p>
-            <a:r>
-              <a:t>- Predice antes de ejecutar cuando haya código.</a:t>
-            </a:r>
-          </a:p>
-          <a:p>
-            <a:r>
-              <a:t>- Realiza la micropráctica o modificación prevista.</a:t>
-            </a:r>
-          </a:p>
-          <a:p>
-            <a:r>
-              <a:t>- Prueba el caso normal y, cuando exista una decisión o conversión, también el caso alternativo o erróneo.</a:t>
-            </a:r>
-          </a:p>
-          <a:p>
-            <a:r>
-              <a:t>- Conserva el código o resultado en el repositorio o espacio indicado.</a:t>
+              <a:t>Explica con predicción y ejemplo mínimo; comprueba comprensión antes de continuar.</a:t>
+            </a:r>
+          </a:p>
+          <a:p>
+            <a:r>
+              <a:t>- String text = "5";</a:t>
+            </a:r>
+          </a:p>
+          <a:p>
+            <a:r>
+              <a:t>int hours = Integer.parseInt(text);</a:t>
+            </a:r>
+          </a:p>
+          <a:p>
+            <a:r>
+              <a:t>int minutes = hours * 60;</a:t>
+            </a:r>
+          </a:p>
+          <a:p>
+            <a:r>
+              <a:t>System.out.println(minutes);</a:t>
+            </a:r>
+          </a:p>
+          <a:p>
+            <a:r>
+              <a:t>- Salida esperada: 300</a:t>
+            </a:r>
+          </a:p>
+          <a:p>
+            <a:r>
+              <a:t>- Parsear texto no es lo mismo que convertir entre tipos numéricos.</a:t>
             </a:r>
           </a:p>
           <a:p>
@@ -1105,7 +1348,7 @@
           </a:p>
           <a:p>
             <a:r>
-              <a:t>Diapositiva 6 de 9: Actividad central · 2</a:t>
+              <a:t>Diapositiva 6 de 11: Conversión automática y casting</a:t>
             </a:r>
           </a:p>
           <a:p>
@@ -1115,17 +1358,32 @@
           </a:p>
           <a:p>
             <a:r>
-              <a:t>Entrega la consigna, observa decisiones y pide una prueba reproducible.</a:t>
-            </a:r>
-          </a:p>
-          <a:p>
-            <a:r>
-              <a:t>- Registra una sola entrada en el diario individual; no crees un informe paralelo.</a:t>
-            </a:r>
-          </a:p>
-          <a:p>
-            <a:r>
-              <a:t>- ¿Qué puedes señalar, explicar y probar al terminar este checkpoint?</a:t>
+              <a:t>Explica con predicción y ejemplo mínimo; comprueba comprensión antes de continuar.</a:t>
+            </a:r>
+          </a:p>
+          <a:p>
+            <a:r>
+              <a:t>- AMPLIACIÓN · int whole = 7;</a:t>
+            </a:r>
+          </a:p>
+          <a:p>
+            <a:r>
+              <a:t>double wider = whole; // 7.0</a:t>
+            </a:r>
+          </a:p>
+          <a:p>
+            <a:r>
+              <a:t>- CASTING · double price = 12.75;</a:t>
+            </a:r>
+          </a:p>
+          <a:p>
+            <a:r>
+              <a:t>int wholePrice = (int) price; // 12</a:t>
+            </a:r>
+          </a:p>
+          <a:p>
+            <a:r>
+              <a:t>- El casting descarta la parte decimal hacia cero; no redondea.</a:t>
             </a:r>
           </a:p>
           <a:p>
@@ -1205,7 +1463,7 @@
           </a:p>
           <a:p>
             <a:r>
-              <a:t>Diapositiva 7 de 9: Evidencia y comprobación</a:t>
+              <a:t>Diapositiva 7 de 11: Compila, pero falla al ejecutar</a:t>
             </a:r>
           </a:p>
           <a:p>
@@ -1215,22 +1473,22 @@
           </a:p>
           <a:p>
             <a:r>
-              <a:t>Comprueba la evidencia en su fuente canónica: Quede diagnóstico.</a:t>
-            </a:r>
-          </a:p>
-          <a:p>
-            <a:r>
-              <a:t>- conserva el código o la prueba en el lugar indicado por la sesión;</a:t>
-            </a:r>
-          </a:p>
-          <a:p>
-            <a:r>
-              <a:t>- añade una sola entrada al diario individual con prueba, bloqueo y siguiente paso;</a:t>
-            </a:r>
-          </a:p>
-          <a:p>
-            <a:r>
-              <a:t>- no copies la misma reflexión en otro documento; el Site personal seleccionará evidencias al cerrar H1.</a:t>
+              <a:t>Explica con predicción y ejemplo mínimo; comprueba comprensión antes de continuar.</a:t>
+            </a:r>
+          </a:p>
+          <a:p>
+            <a:r>
+              <a:t>- VÁLIDO · Integer.parseInt("12") → 12</a:t>
+            </a:r>
+          </a:p>
+          <a:p>
+            <a:r>
+              <a:t>- ERROR · Integer.parseInt("hola") → NumberFormatException</a:t>
+            </a:r>
+          </a:p>
+          <a:p>
+            <a:r>
+              <a:t>- H1 observa y explica el error de ejecución; try-catch llegará más adelante.</a:t>
             </a:r>
           </a:p>
           <a:p>
@@ -1310,7 +1568,7 @@
           </a:p>
           <a:p>
             <a:r>
-              <a:t>Diapositiva 8 de 9: Seguridad y uso responsable</a:t>
+              <a:t>Diapositiva 8 de 11: Prueba entrada válida e inválida</a:t>
             </a:r>
           </a:p>
           <a:p>
@@ -1320,17 +1578,27 @@
           </a:p>
           <a:p>
             <a:r>
-              <a:t>Recuerda estos límites antes de que el alumnado comparta o publique:</a:t>
-            </a:r>
-          </a:p>
-          <a:p>
-            <a:r>
-              <a:t>- Usa datos ficticios y no publiques credenciales ni información personal.</a:t>
-            </a:r>
-          </a:p>
-          <a:p>
-            <a:r>
-              <a:t>- Si utilizas IA de forma sustantiva, registra propósito, propuesta, cambios propios y validación en el registro de IA del hito.</a:t>
+              <a:t>Entrega la consigna, observa decisiones y pide una prueba reproducible.</a:t>
+            </a:r>
+          </a:p>
+          <a:p>
+            <a:r>
+              <a:t>- Pide un nombre ficticio y úsalo en un saludo.</a:t>
+            </a:r>
+          </a:p>
+          <a:p>
+            <a:r>
+              <a:t>- Lee horas como texto, conviértelas a int y calcula minutos.</a:t>
+            </a:r>
+          </a:p>
+          <a:p>
+            <a:r>
+              <a:t>- Ejecuta con un número válido y registra salida esperada y observada.</a:t>
+            </a:r>
+          </a:p>
+          <a:p>
+            <a:r>
+              <a:t>- Ejecuta con hola, identifica cuándo falla y explica por qué.</a:t>
             </a:r>
           </a:p>
           <a:p>
@@ -1410,7 +1678,7 @@
           </a:p>
           <a:p>
             <a:r>
-              <a:t>Diapositiva 9 de 9: Cierre y defensa</a:t>
+              <a:t>Diapositiva 9 de 11: Qué debe demostrar la prueba</a:t>
             </a:r>
           </a:p>
           <a:p>
@@ -1420,12 +1688,27 @@
           </a:p>
           <a:p>
             <a:r>
-              <a:t>Cierra con explicación individual, prueba observable y siguiente paso concreto.</a:t>
-            </a:r>
-          </a:p>
-          <a:p>
-            <a:r>
-              <a:t>- ¿Qué puedes señalar, explicar y probar al terminar este checkpoint?</a:t>
+              <a:t>Comprueba la evidencia en su fuente canónica: Quede diagnóstico.</a:t>
+            </a:r>
+          </a:p>
+          <a:p>
+            <a:r>
+              <a:t>- Uso una sola instancia de Scanner.</a:t>
+            </a:r>
+          </a:p>
+          <a:p>
+            <a:r>
+              <a:t>- La entrada afecta a la salida o al cálculo.</a:t>
+            </a:r>
+          </a:p>
+          <a:p>
+            <a:r>
+              <a:t>- Distingo nextLine, parseInt, ampliación y casting.</a:t>
+            </a:r>
+          </a:p>
+          <a:p>
+            <a:r>
+              <a:t>- Distingo error de compilación y error de ejecución.</a:t>
             </a:r>
           </a:p>
           <a:p>
@@ -4670,7 +4953,7 @@
               </a:defRPr>
             </a:pPr>
             <a:r>
-              <a:t>H1 — Primer MiniJarvis · Fase HEXA: Ejecutar — crear</a:t>
+              <a:t>H1 — Primer MiniJarvis</a:t>
             </a:r>
           </a:p>
         </p:txBody>
@@ -4779,6 +5062,812 @@
             </a:pPr>
             <a:r>
               <a:t>MINIJARVIS · PROGRAMACIÓN</a:t>
+            </a:r>
+          </a:p>
+        </p:txBody>
+      </p:sp>
+    </p:spTree>
+  </p:cSld>
+  <p:clrMapOvr>
+    <a:masterClrMapping/>
+  </p:clrMapOvr>
+</p:sld>
+</file>
+
+<file path=ppt/slides/slide10.xml><?xml version="1.0" encoding="utf-8"?>
+<p:sld xmlns:a="http://schemas.openxmlformats.org/drawingml/2006/main" xmlns:p="http://schemas.openxmlformats.org/presentationml/2006/main" xmlns:r="http://schemas.openxmlformats.org/officeDocument/2006/relationships">
+  <p:cSld>
+    <p:spTree>
+      <p:nvGrpSpPr>
+        <p:cNvPr id="1" name=""/>
+        <p:cNvGrpSpPr/>
+        <p:nvPr/>
+      </p:nvGrpSpPr>
+      <p:grpSpPr/>
+      <p:sp>
+        <p:nvSpPr>
+          <p:cNvPr id="2" name="Rectangle 1"/>
+          <p:cNvSpPr/>
+          <p:nvPr/>
+        </p:nvSpPr>
+        <p:spPr>
+          <a:xfrm>
+            <a:off x="0" y="0"/>
+            <a:ext cx="12191695" cy="6858000"/>
+          </a:xfrm>
+          <a:prstGeom prst="rect">
+            <a:avLst/>
+          </a:prstGeom>
+          <a:solidFill>
+            <a:srgbClr val="F9F7F2"/>
+          </a:solidFill>
+          <a:ln>
+            <a:noFill/>
+          </a:ln>
+        </p:spPr>
+        <p:style>
+          <a:lnRef idx="1">
+            <a:schemeClr val="accent1"/>
+          </a:lnRef>
+          <a:fillRef idx="3">
+            <a:schemeClr val="accent1"/>
+          </a:fillRef>
+          <a:effectRef idx="2">
+            <a:schemeClr val="accent1"/>
+          </a:effectRef>
+          <a:fontRef idx="minor">
+            <a:schemeClr val="lt1"/>
+          </a:fontRef>
+        </p:style>
+        <p:txBody>
+          <a:bodyPr rtlCol="0" anchor="ctr"/>
+          <a:lstStyle/>
+          <a:p>
+            <a:pPr algn="ctr"/>
+          </a:p>
+        </p:txBody>
+      </p:sp>
+      <p:sp>
+        <p:nvSpPr>
+          <p:cNvPr id="3" name="Rectangle 2"/>
+          <p:cNvSpPr/>
+          <p:nvPr/>
+        </p:nvSpPr>
+        <p:spPr>
+          <a:xfrm>
+            <a:off x="0" y="0"/>
+            <a:ext cx="164592" cy="6858000"/>
+          </a:xfrm>
+          <a:prstGeom prst="rect">
+            <a:avLst/>
+          </a:prstGeom>
+          <a:solidFill>
+            <a:srgbClr val="2F5BA8"/>
+          </a:solidFill>
+          <a:ln>
+            <a:noFill/>
+          </a:ln>
+        </p:spPr>
+        <p:style>
+          <a:lnRef idx="1">
+            <a:schemeClr val="accent1"/>
+          </a:lnRef>
+          <a:fillRef idx="3">
+            <a:schemeClr val="accent1"/>
+          </a:fillRef>
+          <a:effectRef idx="2">
+            <a:schemeClr val="accent1"/>
+          </a:effectRef>
+          <a:fontRef idx="minor">
+            <a:schemeClr val="lt1"/>
+          </a:fontRef>
+        </p:style>
+        <p:txBody>
+          <a:bodyPr rtlCol="0" anchor="ctr"/>
+          <a:lstStyle/>
+          <a:p>
+            <a:pPr algn="ctr"/>
+          </a:p>
+        </p:txBody>
+      </p:sp>
+      <p:sp>
+        <p:nvSpPr>
+          <p:cNvPr id="4" name="TextBox 3"/>
+          <p:cNvSpPr txBox="1"/>
+          <p:nvPr/>
+        </p:nvSpPr>
+        <p:spPr>
+          <a:xfrm>
+            <a:off x="502920" y="274320"/>
+            <a:ext cx="5486400" cy="256032"/>
+          </a:xfrm>
+          <a:prstGeom prst="rect">
+            <a:avLst/>
+          </a:prstGeom>
+          <a:noFill/>
+        </p:spPr>
+        <p:txBody>
+          <a:bodyPr wrap="square" lIns="45720" rIns="45720" tIns="36576" bIns="36576" anchor="t">
+            <a:spAutoFit/>
+          </a:bodyPr>
+          <a:lstStyle/>
+          <a:p>
+            <a:pPr algn="l">
+              <a:defRPr sz="1000" b="1">
+                <a:solidFill>
+                  <a:srgbClr val="2F5BA8"/>
+                </a:solidFill>
+                <a:latin typeface="Aptos"/>
+              </a:defRPr>
+            </a:pPr>
+            <a:r>
+              <a:t>EXPLICAR Y DEFENDER</a:t>
+            </a:r>
+          </a:p>
+        </p:txBody>
+      </p:sp>
+      <p:sp>
+        <p:nvSpPr>
+          <p:cNvPr id="5" name="TextBox 4"/>
+          <p:cNvSpPr txBox="1"/>
+          <p:nvPr/>
+        </p:nvSpPr>
+        <p:spPr>
+          <a:xfrm>
+            <a:off x="502920" y="603504"/>
+            <a:ext cx="11064240" cy="530352"/>
+          </a:xfrm>
+          <a:prstGeom prst="rect">
+            <a:avLst/>
+          </a:prstGeom>
+          <a:noFill/>
+        </p:spPr>
+        <p:txBody>
+          <a:bodyPr wrap="square" lIns="45720" rIns="45720" tIns="36576" bIns="36576" anchor="t">
+            <a:spAutoFit/>
+          </a:bodyPr>
+          <a:lstStyle/>
+          <a:p>
+            <a:pPr algn="l">
+              <a:defRPr sz="2800" b="1">
+                <a:solidFill>
+                  <a:srgbClr val="1C2330"/>
+                </a:solidFill>
+                <a:latin typeface="Aptos"/>
+              </a:defRPr>
+            </a:pPr>
+            <a:r>
+              <a:t>Comprobación final</a:t>
+            </a:r>
+          </a:p>
+        </p:txBody>
+      </p:sp>
+      <p:sp>
+        <p:nvSpPr>
+          <p:cNvPr id="6" name="Rectangle 5"/>
+          <p:cNvSpPr/>
+          <p:nvPr/>
+        </p:nvSpPr>
+        <p:spPr>
+          <a:xfrm>
+            <a:off x="0" y="6601968"/>
+            <a:ext cx="12191695" cy="256032"/>
+          </a:xfrm>
+          <a:prstGeom prst="rect">
+            <a:avLst/>
+          </a:prstGeom>
+          <a:solidFill>
+            <a:srgbClr val="2F5BA8"/>
+          </a:solidFill>
+          <a:ln>
+            <a:noFill/>
+          </a:ln>
+        </p:spPr>
+        <p:style>
+          <a:lnRef idx="1">
+            <a:schemeClr val="accent1"/>
+          </a:lnRef>
+          <a:fillRef idx="3">
+            <a:schemeClr val="accent1"/>
+          </a:fillRef>
+          <a:effectRef idx="2">
+            <a:schemeClr val="accent1"/>
+          </a:effectRef>
+          <a:fontRef idx="minor">
+            <a:schemeClr val="lt1"/>
+          </a:fontRef>
+        </p:style>
+        <p:txBody>
+          <a:bodyPr rtlCol="0" anchor="ctr"/>
+          <a:lstStyle/>
+          <a:p>
+            <a:pPr algn="ctr"/>
+          </a:p>
+        </p:txBody>
+      </p:sp>
+      <p:sp>
+        <p:nvSpPr>
+          <p:cNvPr id="7" name="TextBox 6"/>
+          <p:cNvSpPr txBox="1"/>
+          <p:nvPr/>
+        </p:nvSpPr>
+        <p:spPr>
+          <a:xfrm>
+            <a:off x="411480" y="6629400"/>
+            <a:ext cx="11247120" cy="164592"/>
+          </a:xfrm>
+          <a:prstGeom prst="rect">
+            <a:avLst/>
+          </a:prstGeom>
+          <a:noFill/>
+        </p:spPr>
+        <p:txBody>
+          <a:bodyPr wrap="square" lIns="45720" rIns="45720" tIns="36576" bIns="36576" anchor="t">
+            <a:spAutoFit/>
+          </a:bodyPr>
+          <a:lstStyle/>
+          <a:p>
+            <a:pPr algn="l">
+              <a:defRPr sz="900" b="0">
+                <a:solidFill>
+                  <a:srgbClr val="FFFFFF"/>
+                </a:solidFill>
+                <a:latin typeface="Aptos"/>
+              </a:defRPr>
+            </a:pPr>
+            <a:r>
+              <a:t>MiniJarvis · 1.º DAW · Sesión 212 · H1 — Primer MiniJarvis</a:t>
+            </a:r>
+          </a:p>
+        </p:txBody>
+      </p:sp>
+      <p:sp>
+        <p:nvSpPr>
+          <p:cNvPr id="8" name="Rounded Rectangle 7"/>
+          <p:cNvSpPr/>
+          <p:nvPr/>
+        </p:nvSpPr>
+        <p:spPr>
+          <a:xfrm>
+            <a:off x="621792" y="1298448"/>
+            <a:ext cx="10927080" cy="1828800"/>
+          </a:xfrm>
+          <a:prstGeom prst="roundRect">
+            <a:avLst/>
+          </a:prstGeom>
+          <a:solidFill>
+            <a:srgbClr val="2F5BA8"/>
+          </a:solidFill>
+          <a:ln>
+            <a:solidFill>
+              <a:srgbClr val="2F5BA8"/>
+            </a:solidFill>
+          </a:ln>
+        </p:spPr>
+        <p:style>
+          <a:lnRef idx="1">
+            <a:schemeClr val="accent1"/>
+          </a:lnRef>
+          <a:fillRef idx="3">
+            <a:schemeClr val="accent1"/>
+          </a:fillRef>
+          <a:effectRef idx="2">
+            <a:schemeClr val="accent1"/>
+          </a:effectRef>
+          <a:fontRef idx="minor">
+            <a:schemeClr val="lt1"/>
+          </a:fontRef>
+        </p:style>
+        <p:txBody>
+          <a:bodyPr rtlCol="0" anchor="ctr"/>
+          <a:lstStyle/>
+          <a:p>
+            <a:pPr algn="ctr"/>
+          </a:p>
+        </p:txBody>
+      </p:sp>
+      <p:sp>
+        <p:nvSpPr>
+          <p:cNvPr id="9" name="TextBox 8"/>
+          <p:cNvSpPr txBox="1"/>
+          <p:nvPr/>
+        </p:nvSpPr>
+        <p:spPr>
+          <a:xfrm>
+            <a:off x="932688" y="1591056"/>
+            <a:ext cx="10241280" cy="256032"/>
+          </a:xfrm>
+          <a:prstGeom prst="rect">
+            <a:avLst/>
+          </a:prstGeom>
+          <a:noFill/>
+        </p:spPr>
+        <p:txBody>
+          <a:bodyPr wrap="square" lIns="45720" rIns="45720" tIns="36576" bIns="36576" anchor="t">
+            <a:spAutoFit/>
+          </a:bodyPr>
+          <a:lstStyle/>
+          <a:p>
+            <a:pPr algn="l">
+              <a:defRPr sz="1300" b="1">
+                <a:solidFill>
+                  <a:srgbClr val="FFFFFF"/>
+                </a:solidFill>
+                <a:latin typeface="Aptos"/>
+              </a:defRPr>
+            </a:pPr>
+            <a:r>
+              <a:t>PREGUNTA O DECISIÓN DE SALIDA</a:t>
+            </a:r>
+          </a:p>
+        </p:txBody>
+      </p:sp>
+      <p:sp>
+        <p:nvSpPr>
+          <p:cNvPr id="10" name="TextBox 9"/>
+          <p:cNvSpPr txBox="1"/>
+          <p:nvPr/>
+        </p:nvSpPr>
+        <p:spPr>
+          <a:xfrm>
+            <a:off x="932688" y="1975104"/>
+            <a:ext cx="10058400" cy="822960"/>
+          </a:xfrm>
+          <a:prstGeom prst="rect">
+            <a:avLst/>
+          </a:prstGeom>
+          <a:noFill/>
+        </p:spPr>
+        <p:txBody>
+          <a:bodyPr wrap="square" lIns="45720" rIns="45720" tIns="36576" bIns="36576" anchor="t">
+            <a:spAutoFit/>
+          </a:bodyPr>
+          <a:lstStyle/>
+          <a:p>
+            <a:pPr algn="l">
+              <a:defRPr sz="2500" b="1">
+                <a:solidFill>
+                  <a:srgbClr val="FFFFFF"/>
+                </a:solidFill>
+                <a:latin typeface="Aptos"/>
+              </a:defRPr>
+            </a:pPr>
+            <a:r>
+              <a:t>¿Qué devuelve nextLine(), qué hace parseInt y qué información puede perder un casting?</a:t>
+            </a:r>
+          </a:p>
+        </p:txBody>
+      </p:sp>
+      <p:sp>
+        <p:nvSpPr>
+          <p:cNvPr id="11" name="TextBox 10"/>
+          <p:cNvSpPr txBox="1"/>
+          <p:nvPr/>
+        </p:nvSpPr>
+        <p:spPr>
+          <a:xfrm>
+            <a:off x="749808" y="3886200"/>
+            <a:ext cx="10607040" cy="1280160"/>
+          </a:xfrm>
+          <a:prstGeom prst="rect">
+            <a:avLst/>
+          </a:prstGeom>
+          <a:noFill/>
+        </p:spPr>
+        <p:txBody>
+          <a:bodyPr wrap="square" lIns="45720" rIns="45720" tIns="36576" bIns="36576" anchor="ctr">
+            <a:spAutoFit/>
+          </a:bodyPr>
+          <a:lstStyle/>
+          <a:p>
+            <a:pPr algn="ctr">
+              <a:defRPr sz="2300" b="1">
+                <a:solidFill>
+                  <a:srgbClr val="247E5C"/>
+                </a:solidFill>
+                <a:latin typeface="Aptos"/>
+              </a:defRPr>
+            </a:pPr>
+            <a:r>
+              <a:t>La sesión termina cuando la evidencia existe, está comprobada y puede defenderse.</a:t>
+            </a:r>
+          </a:p>
+        </p:txBody>
+      </p:sp>
+    </p:spTree>
+  </p:cSld>
+  <p:clrMapOvr>
+    <a:masterClrMapping/>
+  </p:clrMapOvr>
+</p:sld>
+</file>
+
+<file path=ppt/slides/slide11.xml><?xml version="1.0" encoding="utf-8"?>
+<p:sld xmlns:a="http://schemas.openxmlformats.org/drawingml/2006/main" xmlns:p="http://schemas.openxmlformats.org/presentationml/2006/main" xmlns:r="http://schemas.openxmlformats.org/officeDocument/2006/relationships">
+  <p:cSld>
+    <p:spTree>
+      <p:nvGrpSpPr>
+        <p:cNvPr id="1" name=""/>
+        <p:cNvGrpSpPr/>
+        <p:nvPr/>
+      </p:nvGrpSpPr>
+      <p:grpSpPr/>
+      <p:sp>
+        <p:nvSpPr>
+          <p:cNvPr id="2" name="Rectangle 1"/>
+          <p:cNvSpPr/>
+          <p:nvPr/>
+        </p:nvSpPr>
+        <p:spPr>
+          <a:xfrm>
+            <a:off x="0" y="0"/>
+            <a:ext cx="12191695" cy="6858000"/>
+          </a:xfrm>
+          <a:prstGeom prst="rect">
+            <a:avLst/>
+          </a:prstGeom>
+          <a:solidFill>
+            <a:srgbClr val="F9F7F2"/>
+          </a:solidFill>
+          <a:ln>
+            <a:noFill/>
+          </a:ln>
+        </p:spPr>
+        <p:style>
+          <a:lnRef idx="1">
+            <a:schemeClr val="accent1"/>
+          </a:lnRef>
+          <a:fillRef idx="3">
+            <a:schemeClr val="accent1"/>
+          </a:fillRef>
+          <a:effectRef idx="2">
+            <a:schemeClr val="accent1"/>
+          </a:effectRef>
+          <a:fontRef idx="minor">
+            <a:schemeClr val="lt1"/>
+          </a:fontRef>
+        </p:style>
+        <p:txBody>
+          <a:bodyPr rtlCol="0" anchor="ctr"/>
+          <a:lstStyle/>
+          <a:p>
+            <a:pPr algn="ctr"/>
+          </a:p>
+        </p:txBody>
+      </p:sp>
+      <p:sp>
+        <p:nvSpPr>
+          <p:cNvPr id="3" name="Rectangle 2"/>
+          <p:cNvSpPr/>
+          <p:nvPr/>
+        </p:nvSpPr>
+        <p:spPr>
+          <a:xfrm>
+            <a:off x="0" y="0"/>
+            <a:ext cx="164592" cy="6858000"/>
+          </a:xfrm>
+          <a:prstGeom prst="rect">
+            <a:avLst/>
+          </a:prstGeom>
+          <a:solidFill>
+            <a:srgbClr val="2F5BA8"/>
+          </a:solidFill>
+          <a:ln>
+            <a:noFill/>
+          </a:ln>
+        </p:spPr>
+        <p:style>
+          <a:lnRef idx="1">
+            <a:schemeClr val="accent1"/>
+          </a:lnRef>
+          <a:fillRef idx="3">
+            <a:schemeClr val="accent1"/>
+          </a:fillRef>
+          <a:effectRef idx="2">
+            <a:schemeClr val="accent1"/>
+          </a:effectRef>
+          <a:fontRef idx="minor">
+            <a:schemeClr val="lt1"/>
+          </a:fontRef>
+        </p:style>
+        <p:txBody>
+          <a:bodyPr rtlCol="0" anchor="ctr"/>
+          <a:lstStyle/>
+          <a:p>
+            <a:pPr algn="ctr"/>
+          </a:p>
+        </p:txBody>
+      </p:sp>
+      <p:sp>
+        <p:nvSpPr>
+          <p:cNvPr id="4" name="TextBox 3"/>
+          <p:cNvSpPr txBox="1"/>
+          <p:nvPr/>
+        </p:nvSpPr>
+        <p:spPr>
+          <a:xfrm>
+            <a:off x="502920" y="274320"/>
+            <a:ext cx="5486400" cy="256032"/>
+          </a:xfrm>
+          <a:prstGeom prst="rect">
+            <a:avLst/>
+          </a:prstGeom>
+          <a:noFill/>
+        </p:spPr>
+        <p:txBody>
+          <a:bodyPr wrap="square" lIns="45720" rIns="45720" tIns="36576" bIns="36576" anchor="t">
+            <a:spAutoFit/>
+          </a:bodyPr>
+          <a:lstStyle/>
+          <a:p>
+            <a:pPr algn="l">
+              <a:defRPr sz="1000" b="1">
+                <a:solidFill>
+                  <a:srgbClr val="2F5BA8"/>
+                </a:solidFill>
+                <a:latin typeface="Aptos"/>
+              </a:defRPr>
+            </a:pPr>
+            <a:r>
+              <a:t>TRAZABILIDAD DEL CONTENIDO</a:t>
+            </a:r>
+          </a:p>
+        </p:txBody>
+      </p:sp>
+      <p:sp>
+        <p:nvSpPr>
+          <p:cNvPr id="5" name="TextBox 4"/>
+          <p:cNvSpPr txBox="1"/>
+          <p:nvPr/>
+        </p:nvSpPr>
+        <p:spPr>
+          <a:xfrm>
+            <a:off x="502920" y="603504"/>
+            <a:ext cx="11064240" cy="530352"/>
+          </a:xfrm>
+          <a:prstGeom prst="rect">
+            <a:avLst/>
+          </a:prstGeom>
+          <a:noFill/>
+        </p:spPr>
+        <p:txBody>
+          <a:bodyPr wrap="square" lIns="45720" rIns="45720" tIns="36576" bIns="36576" anchor="t">
+            <a:spAutoFit/>
+          </a:bodyPr>
+          <a:lstStyle/>
+          <a:p>
+            <a:pPr algn="l">
+              <a:defRPr sz="2800" b="1">
+                <a:solidFill>
+                  <a:srgbClr val="1C2330"/>
+                </a:solidFill>
+                <a:latin typeface="Aptos"/>
+              </a:defRPr>
+            </a:pPr>
+            <a:r>
+              <a:t>Fuentes utilizadas</a:t>
+            </a:r>
+          </a:p>
+        </p:txBody>
+      </p:sp>
+      <p:sp>
+        <p:nvSpPr>
+          <p:cNvPr id="6" name="Rectangle 5"/>
+          <p:cNvSpPr/>
+          <p:nvPr/>
+        </p:nvSpPr>
+        <p:spPr>
+          <a:xfrm>
+            <a:off x="0" y="6601968"/>
+            <a:ext cx="12191695" cy="256032"/>
+          </a:xfrm>
+          <a:prstGeom prst="rect">
+            <a:avLst/>
+          </a:prstGeom>
+          <a:solidFill>
+            <a:srgbClr val="2F5BA8"/>
+          </a:solidFill>
+          <a:ln>
+            <a:noFill/>
+          </a:ln>
+        </p:spPr>
+        <p:style>
+          <a:lnRef idx="1">
+            <a:schemeClr val="accent1"/>
+          </a:lnRef>
+          <a:fillRef idx="3">
+            <a:schemeClr val="accent1"/>
+          </a:fillRef>
+          <a:effectRef idx="2">
+            <a:schemeClr val="accent1"/>
+          </a:effectRef>
+          <a:fontRef idx="minor">
+            <a:schemeClr val="lt1"/>
+          </a:fontRef>
+        </p:style>
+        <p:txBody>
+          <a:bodyPr rtlCol="0" anchor="ctr"/>
+          <a:lstStyle/>
+          <a:p>
+            <a:pPr algn="ctr"/>
+          </a:p>
+        </p:txBody>
+      </p:sp>
+      <p:sp>
+        <p:nvSpPr>
+          <p:cNvPr id="7" name="TextBox 6"/>
+          <p:cNvSpPr txBox="1"/>
+          <p:nvPr/>
+        </p:nvSpPr>
+        <p:spPr>
+          <a:xfrm>
+            <a:off x="411480" y="6629400"/>
+            <a:ext cx="11247120" cy="164592"/>
+          </a:xfrm>
+          <a:prstGeom prst="rect">
+            <a:avLst/>
+          </a:prstGeom>
+          <a:noFill/>
+        </p:spPr>
+        <p:txBody>
+          <a:bodyPr wrap="square" lIns="45720" rIns="45720" tIns="36576" bIns="36576" anchor="t">
+            <a:spAutoFit/>
+          </a:bodyPr>
+          <a:lstStyle/>
+          <a:p>
+            <a:pPr algn="l">
+              <a:defRPr sz="900" b="0">
+                <a:solidFill>
+                  <a:srgbClr val="FFFFFF"/>
+                </a:solidFill>
+                <a:latin typeface="Aptos"/>
+              </a:defRPr>
+            </a:pPr>
+            <a:r>
+              <a:t>MiniJarvis · 1.º DAW · Sesión 212 · H1 — Primer MiniJarvis</a:t>
+            </a:r>
+          </a:p>
+        </p:txBody>
+      </p:sp>
+      <p:sp>
+        <p:nvSpPr>
+          <p:cNvPr id="8" name="TextBox 7"/>
+          <p:cNvSpPr txBox="1"/>
+          <p:nvPr/>
+        </p:nvSpPr>
+        <p:spPr>
+          <a:xfrm>
+            <a:off x="777240" y="1417320"/>
+            <a:ext cx="10515600" cy="658368"/>
+          </a:xfrm>
+          <a:prstGeom prst="rect">
+            <a:avLst/>
+          </a:prstGeom>
+          <a:noFill/>
+        </p:spPr>
+        <p:txBody>
+          <a:bodyPr wrap="square" lIns="45720" rIns="45720" tIns="36576" bIns="36576" anchor="t">
+            <a:spAutoFit/>
+          </a:bodyPr>
+          <a:lstStyle/>
+          <a:p>
+            <a:pPr algn="ctr">
+              <a:defRPr sz="2300" b="1">
+                <a:solidFill>
+                  <a:srgbClr val="1C2330"/>
+                </a:solidFill>
+                <a:latin typeface="Aptos"/>
+              </a:defRPr>
+            </a:pPr>
+            <a:r>
+              <a:t>Esta presentación selecciona y adapta contenido; no sustituye al libro ni copia el PDF completo.</a:t>
+            </a:r>
+          </a:p>
+        </p:txBody>
+      </p:sp>
+      <p:sp>
+        <p:nvSpPr>
+          <p:cNvPr id="9" name="TextBox 8"/>
+          <p:cNvSpPr txBox="1"/>
+          <p:nvPr/>
+        </p:nvSpPr>
+        <p:spPr>
+          <a:xfrm>
+            <a:off x="1005840" y="2468880"/>
+            <a:ext cx="10058400" cy="2331720"/>
+          </a:xfrm>
+          <a:prstGeom prst="rect">
+            <a:avLst/>
+          </a:prstGeom>
+          <a:noFill/>
+        </p:spPr>
+        <p:txBody>
+          <a:bodyPr wrap="square" lIns="73152" rIns="45720" tIns="36576">
+            <a:spAutoFit/>
+          </a:bodyPr>
+          <a:lstStyle/>
+          <a:p>
+            <a:pPr>
+              <a:spcAft>
+                <a:spcPts val="900"/>
+              </a:spcAft>
+              <a:defRPr sz="2000">
+                <a:solidFill>
+                  <a:srgbClr val="1C2330"/>
+                </a:solidFill>
+                <a:latin typeface="Aptos"/>
+              </a:defRPr>
+            </a:pPr>
+            <a:r>
+              <a:t>•  Libro: capítulo 02 · Tema 1: entrada y conversiones</a:t>
+            </a:r>
+          </a:p>
+          <a:p>
+            <a:pPr>
+              <a:spcAft>
+                <a:spcPts val="900"/>
+              </a:spcAft>
+              <a:defRPr sz="2000">
+                <a:solidFill>
+                  <a:srgbClr val="1C2330"/>
+                </a:solidFill>
+                <a:latin typeface="Aptos"/>
+              </a:defRPr>
+            </a:pPr>
+            <a:r>
+              <a:t>•  Fichas S206-S215 y píldoras H1</a:t>
+            </a:r>
+          </a:p>
+          <a:p>
+            <a:pPr>
+              <a:spcAft>
+                <a:spcPts val="900"/>
+              </a:spcAft>
+              <a:defRPr sz="2000">
+                <a:solidFill>
+                  <a:srgbClr val="1C2330"/>
+                </a:solidFill>
+                <a:latin typeface="Aptos"/>
+              </a:defRPr>
+            </a:pPr>
+            <a:r>
+              <a:t>•  Ejemplos revisados y adaptados a MiniJarvis; no se copian errores ni capturas antiguas del PDF.</a:t>
+            </a:r>
+          </a:p>
+        </p:txBody>
+      </p:sp>
+      <p:sp>
+        <p:nvSpPr>
+          <p:cNvPr id="10" name="TextBox 9"/>
+          <p:cNvSpPr txBox="1"/>
+          <p:nvPr/>
+        </p:nvSpPr>
+        <p:spPr>
+          <a:xfrm>
+            <a:off x="960120" y="5257800"/>
+            <a:ext cx="10241280" cy="411480"/>
+          </a:xfrm>
+          <a:prstGeom prst="rect">
+            <a:avLst/>
+          </a:prstGeom>
+          <a:noFill/>
+        </p:spPr>
+        <p:txBody>
+          <a:bodyPr wrap="square" lIns="45720" rIns="45720" tIns="36576" bIns="36576" anchor="t">
+            <a:spAutoFit/>
+          </a:bodyPr>
+          <a:lstStyle/>
+          <a:p>
+            <a:pPr algn="ctr">
+              <a:defRPr sz="1800" b="1">
+                <a:solidFill>
+                  <a:srgbClr val="2F5BA8"/>
+                </a:solidFill>
+                <a:latin typeface="Aptos"/>
+              </a:defRPr>
+            </a:pPr>
+            <a:r>
+              <a:t>Consulta el libro para ampliar, practicar y repasar errores frecuentes.</a:t>
             </a:r>
           </a:p>
         </p:txBody>
@@ -4954,7 +6043,7 @@
               </a:defRPr>
             </a:pPr>
             <a:r>
-              <a:t>Qué debe conseguirse</a:t>
+              <a:t>Qué aprenderás y cómo lo demostrarás</a:t>
             </a:r>
           </a:p>
         </p:txBody>
@@ -5195,7 +6284,7 @@
               </a:defRPr>
             </a:pPr>
             <a:r>
-              <a:t>Al terminar: señala la evidencia, explica qué demuestra y reproduce la prueba.</a:t>
+              <a:t>Comprobación: Quede diagnóstico.</a:t>
             </a:r>
           </a:p>
         </p:txBody>
@@ -5335,7 +6424,7 @@
               </a:defRPr>
             </a:pPr>
             <a:r>
-              <a:t>OBSERVAR ANTES DE ACTUAR</a:t>
+              <a:t>PROCESO</a:t>
             </a:r>
           </a:p>
         </p:txBody>
@@ -5371,7 +6460,7 @@
               </a:defRPr>
             </a:pPr>
             <a:r>
-              <a:t>Ejemplo o demostración · 1</a:t>
+              <a:t>Flujo de entrada</a:t>
             </a:r>
           </a:p>
         </p:txBody>
@@ -5463,17 +6552,19 @@
         </p:nvSpPr>
         <p:spPr>
           <a:xfrm>
-            <a:off x="621792" y="1353312"/>
-            <a:ext cx="10927080" cy="4526280"/>
+            <a:off x="713232" y="2240280"/>
+            <a:ext cx="1760220" cy="1874519"/>
           </a:xfrm>
           <a:prstGeom prst="roundRect">
             <a:avLst/>
           </a:prstGeom>
           <a:solidFill>
-            <a:srgbClr val="121824"/>
+            <a:srgbClr val="FFFFFF"/>
           </a:solidFill>
           <a:ln>
-            <a:noFill/>
+            <a:solidFill>
+              <a:srgbClr val="2F5BA8"/>
+            </a:solidFill>
           </a:ln>
         </p:spPr>
         <p:style>
@@ -5506,8 +6597,8 @@
         </p:nvSpPr>
         <p:spPr>
           <a:xfrm>
-            <a:off x="932688" y="1627632"/>
-            <a:ext cx="2057400" cy="411480"/>
+            <a:off x="850392" y="2487168"/>
+            <a:ext cx="1485900" cy="320040"/>
           </a:xfrm>
           <a:prstGeom prst="rect">
             <a:avLst/>
@@ -5520,8 +6611,8 @@
           </a:bodyPr>
           <a:lstStyle/>
           <a:p>
-            <a:pPr algn="l">
-              <a:defRPr sz="1300" b="1">
+            <a:pPr algn="ctr">
+              <a:defRPr sz="1400" b="1">
                 <a:solidFill>
                   <a:srgbClr val="2F5BA8"/>
                 </a:solidFill>
@@ -5529,7 +6620,7 @@
               </a:defRPr>
             </a:pPr>
             <a:r>
-              <a:t>DEMOSTRACIÓN</a:t>
+              <a:t>01</a:t>
             </a:r>
           </a:p>
         </p:txBody>
@@ -5542,8 +6633,8 @@
         </p:nvSpPr>
         <p:spPr>
           <a:xfrm>
-            <a:off x="932688" y="2212848"/>
-            <a:ext cx="9966960" cy="3246120"/>
+            <a:off x="850392" y="2971800"/>
+            <a:ext cx="1485900" cy="658368"/>
           </a:xfrm>
           <a:prstGeom prst="rect">
             <a:avLst/>
@@ -5551,16 +6642,777 @@
           <a:noFill/>
         </p:spPr>
         <p:txBody>
-          <a:bodyPr wrap="square" lIns="73152" rIns="45720" tIns="36576">
+          <a:bodyPr wrap="square" lIns="45720" rIns="45720" tIns="36576" bIns="36576" anchor="ctr">
             <a:spAutoFit/>
           </a:bodyPr>
           <a:lstStyle/>
           <a:p>
-            <a:pPr>
-              <a:spcAft>
-                <a:spcPts val="900"/>
-              </a:spcAft>
-              <a:defRPr sz="2200">
+            <a:pPr algn="ctr">
+              <a:defRPr sz="1700" b="1">
+                <a:solidFill>
+                  <a:srgbClr val="1C2330"/>
+                </a:solidFill>
+                <a:latin typeface="Aptos"/>
+              </a:defRPr>
+            </a:pPr>
+            <a:r>
+              <a:t>pedir</a:t>
+            </a:r>
+          </a:p>
+        </p:txBody>
+      </p:sp>
+      <p:sp>
+        <p:nvSpPr>
+          <p:cNvPr id="11" name="Right Arrow 10"/>
+          <p:cNvSpPr/>
+          <p:nvPr/>
+        </p:nvSpPr>
+        <p:spPr>
+          <a:xfrm>
+            <a:off x="2519172" y="2907792"/>
+            <a:ext cx="228600" cy="411480"/>
+          </a:xfrm>
+          <a:prstGeom prst="rightArrow">
+            <a:avLst/>
+          </a:prstGeom>
+          <a:solidFill>
+            <a:srgbClr val="586270"/>
+          </a:solidFill>
+          <a:ln>
+            <a:noFill/>
+          </a:ln>
+        </p:spPr>
+        <p:style>
+          <a:lnRef idx="1">
+            <a:schemeClr val="accent1"/>
+          </a:lnRef>
+          <a:fillRef idx="3">
+            <a:schemeClr val="accent1"/>
+          </a:fillRef>
+          <a:effectRef idx="2">
+            <a:schemeClr val="accent1"/>
+          </a:effectRef>
+          <a:fontRef idx="minor">
+            <a:schemeClr val="lt1"/>
+          </a:fontRef>
+        </p:style>
+        <p:txBody>
+          <a:bodyPr rtlCol="0" anchor="ctr"/>
+          <a:lstStyle/>
+          <a:p>
+            <a:pPr algn="ctr"/>
+          </a:p>
+        </p:txBody>
+      </p:sp>
+      <p:sp>
+        <p:nvSpPr>
+          <p:cNvPr id="12" name="Rounded Rectangle 11"/>
+          <p:cNvSpPr/>
+          <p:nvPr/>
+        </p:nvSpPr>
+        <p:spPr>
+          <a:xfrm>
+            <a:off x="2510028" y="2240280"/>
+            <a:ext cx="1760220" cy="1874519"/>
+          </a:xfrm>
+          <a:prstGeom prst="roundRect">
+            <a:avLst/>
+          </a:prstGeom>
+          <a:solidFill>
+            <a:srgbClr val="FFFFFF"/>
+          </a:solidFill>
+          <a:ln>
+            <a:solidFill>
+              <a:srgbClr val="2F5BA8"/>
+            </a:solidFill>
+          </a:ln>
+        </p:spPr>
+        <p:style>
+          <a:lnRef idx="1">
+            <a:schemeClr val="accent1"/>
+          </a:lnRef>
+          <a:fillRef idx="3">
+            <a:schemeClr val="accent1"/>
+          </a:fillRef>
+          <a:effectRef idx="2">
+            <a:schemeClr val="accent1"/>
+          </a:effectRef>
+          <a:fontRef idx="minor">
+            <a:schemeClr val="lt1"/>
+          </a:fontRef>
+        </p:style>
+        <p:txBody>
+          <a:bodyPr rtlCol="0" anchor="ctr"/>
+          <a:lstStyle/>
+          <a:p>
+            <a:pPr algn="ctr"/>
+          </a:p>
+        </p:txBody>
+      </p:sp>
+      <p:sp>
+        <p:nvSpPr>
+          <p:cNvPr id="13" name="TextBox 12"/>
+          <p:cNvSpPr txBox="1"/>
+          <p:nvPr/>
+        </p:nvSpPr>
+        <p:spPr>
+          <a:xfrm>
+            <a:off x="2647188" y="2487168"/>
+            <a:ext cx="1485900" cy="320040"/>
+          </a:xfrm>
+          <a:prstGeom prst="rect">
+            <a:avLst/>
+          </a:prstGeom>
+          <a:noFill/>
+        </p:spPr>
+        <p:txBody>
+          <a:bodyPr wrap="square" lIns="45720" rIns="45720" tIns="36576" bIns="36576" anchor="t">
+            <a:spAutoFit/>
+          </a:bodyPr>
+          <a:lstStyle/>
+          <a:p>
+            <a:pPr algn="ctr">
+              <a:defRPr sz="1400" b="1">
+                <a:solidFill>
+                  <a:srgbClr val="2F5BA8"/>
+                </a:solidFill>
+                <a:latin typeface="Aptos"/>
+              </a:defRPr>
+            </a:pPr>
+            <a:r>
+              <a:t>02</a:t>
+            </a:r>
+          </a:p>
+        </p:txBody>
+      </p:sp>
+      <p:sp>
+        <p:nvSpPr>
+          <p:cNvPr id="14" name="TextBox 13"/>
+          <p:cNvSpPr txBox="1"/>
+          <p:nvPr/>
+        </p:nvSpPr>
+        <p:spPr>
+          <a:xfrm>
+            <a:off x="2647188" y="2971800"/>
+            <a:ext cx="1485900" cy="658368"/>
+          </a:xfrm>
+          <a:prstGeom prst="rect">
+            <a:avLst/>
+          </a:prstGeom>
+          <a:noFill/>
+        </p:spPr>
+        <p:txBody>
+          <a:bodyPr wrap="square" lIns="45720" rIns="45720" tIns="36576" bIns="36576" anchor="ctr">
+            <a:spAutoFit/>
+          </a:bodyPr>
+          <a:lstStyle/>
+          <a:p>
+            <a:pPr algn="ctr">
+              <a:defRPr sz="1700" b="1">
+                <a:solidFill>
+                  <a:srgbClr val="1C2330"/>
+                </a:solidFill>
+                <a:latin typeface="Aptos"/>
+              </a:defRPr>
+            </a:pPr>
+            <a:r>
+              <a:t>leer texto</a:t>
+            </a:r>
+          </a:p>
+        </p:txBody>
+      </p:sp>
+      <p:sp>
+        <p:nvSpPr>
+          <p:cNvPr id="15" name="Right Arrow 14"/>
+          <p:cNvSpPr/>
+          <p:nvPr/>
+        </p:nvSpPr>
+        <p:spPr>
+          <a:xfrm>
+            <a:off x="4315968" y="2907792"/>
+            <a:ext cx="228600" cy="411480"/>
+          </a:xfrm>
+          <a:prstGeom prst="rightArrow">
+            <a:avLst/>
+          </a:prstGeom>
+          <a:solidFill>
+            <a:srgbClr val="586270"/>
+          </a:solidFill>
+          <a:ln>
+            <a:noFill/>
+          </a:ln>
+        </p:spPr>
+        <p:style>
+          <a:lnRef idx="1">
+            <a:schemeClr val="accent1"/>
+          </a:lnRef>
+          <a:fillRef idx="3">
+            <a:schemeClr val="accent1"/>
+          </a:fillRef>
+          <a:effectRef idx="2">
+            <a:schemeClr val="accent1"/>
+          </a:effectRef>
+          <a:fontRef idx="minor">
+            <a:schemeClr val="lt1"/>
+          </a:fontRef>
+        </p:style>
+        <p:txBody>
+          <a:bodyPr rtlCol="0" anchor="ctr"/>
+          <a:lstStyle/>
+          <a:p>
+            <a:pPr algn="ctr"/>
+          </a:p>
+        </p:txBody>
+      </p:sp>
+      <p:sp>
+        <p:nvSpPr>
+          <p:cNvPr id="16" name="Rounded Rectangle 15"/>
+          <p:cNvSpPr/>
+          <p:nvPr/>
+        </p:nvSpPr>
+        <p:spPr>
+          <a:xfrm>
+            <a:off x="4306824" y="2240280"/>
+            <a:ext cx="1760220" cy="1874519"/>
+          </a:xfrm>
+          <a:prstGeom prst="roundRect">
+            <a:avLst/>
+          </a:prstGeom>
+          <a:solidFill>
+            <a:srgbClr val="FFFFFF"/>
+          </a:solidFill>
+          <a:ln>
+            <a:solidFill>
+              <a:srgbClr val="2F5BA8"/>
+            </a:solidFill>
+          </a:ln>
+        </p:spPr>
+        <p:style>
+          <a:lnRef idx="1">
+            <a:schemeClr val="accent1"/>
+          </a:lnRef>
+          <a:fillRef idx="3">
+            <a:schemeClr val="accent1"/>
+          </a:fillRef>
+          <a:effectRef idx="2">
+            <a:schemeClr val="accent1"/>
+          </a:effectRef>
+          <a:fontRef idx="minor">
+            <a:schemeClr val="lt1"/>
+          </a:fontRef>
+        </p:style>
+        <p:txBody>
+          <a:bodyPr rtlCol="0" anchor="ctr"/>
+          <a:lstStyle/>
+          <a:p>
+            <a:pPr algn="ctr"/>
+          </a:p>
+        </p:txBody>
+      </p:sp>
+      <p:sp>
+        <p:nvSpPr>
+          <p:cNvPr id="17" name="TextBox 16"/>
+          <p:cNvSpPr txBox="1"/>
+          <p:nvPr/>
+        </p:nvSpPr>
+        <p:spPr>
+          <a:xfrm>
+            <a:off x="4443984" y="2487168"/>
+            <a:ext cx="1485900" cy="320040"/>
+          </a:xfrm>
+          <a:prstGeom prst="rect">
+            <a:avLst/>
+          </a:prstGeom>
+          <a:noFill/>
+        </p:spPr>
+        <p:txBody>
+          <a:bodyPr wrap="square" lIns="45720" rIns="45720" tIns="36576" bIns="36576" anchor="t">
+            <a:spAutoFit/>
+          </a:bodyPr>
+          <a:lstStyle/>
+          <a:p>
+            <a:pPr algn="ctr">
+              <a:defRPr sz="1400" b="1">
+                <a:solidFill>
+                  <a:srgbClr val="2F5BA8"/>
+                </a:solidFill>
+                <a:latin typeface="Aptos"/>
+              </a:defRPr>
+            </a:pPr>
+            <a:r>
+              <a:t>03</a:t>
+            </a:r>
+          </a:p>
+        </p:txBody>
+      </p:sp>
+      <p:sp>
+        <p:nvSpPr>
+          <p:cNvPr id="18" name="TextBox 17"/>
+          <p:cNvSpPr txBox="1"/>
+          <p:nvPr/>
+        </p:nvSpPr>
+        <p:spPr>
+          <a:xfrm>
+            <a:off x="4443984" y="2971800"/>
+            <a:ext cx="1485900" cy="658368"/>
+          </a:xfrm>
+          <a:prstGeom prst="rect">
+            <a:avLst/>
+          </a:prstGeom>
+          <a:noFill/>
+        </p:spPr>
+        <p:txBody>
+          <a:bodyPr wrap="square" lIns="45720" rIns="45720" tIns="36576" bIns="36576" anchor="ctr">
+            <a:spAutoFit/>
+          </a:bodyPr>
+          <a:lstStyle/>
+          <a:p>
+            <a:pPr algn="ctr">
+              <a:defRPr sz="1700" b="1">
+                <a:solidFill>
+                  <a:srgbClr val="1C2330"/>
+                </a:solidFill>
+                <a:latin typeface="Aptos"/>
+              </a:defRPr>
+            </a:pPr>
+            <a:r>
+              <a:t>guardar</a:t>
+            </a:r>
+          </a:p>
+        </p:txBody>
+      </p:sp>
+      <p:sp>
+        <p:nvSpPr>
+          <p:cNvPr id="19" name="Right Arrow 18"/>
+          <p:cNvSpPr/>
+          <p:nvPr/>
+        </p:nvSpPr>
+        <p:spPr>
+          <a:xfrm>
+            <a:off x="6112764" y="2907792"/>
+            <a:ext cx="228600" cy="411480"/>
+          </a:xfrm>
+          <a:prstGeom prst="rightArrow">
+            <a:avLst/>
+          </a:prstGeom>
+          <a:solidFill>
+            <a:srgbClr val="586270"/>
+          </a:solidFill>
+          <a:ln>
+            <a:noFill/>
+          </a:ln>
+        </p:spPr>
+        <p:style>
+          <a:lnRef idx="1">
+            <a:schemeClr val="accent1"/>
+          </a:lnRef>
+          <a:fillRef idx="3">
+            <a:schemeClr val="accent1"/>
+          </a:fillRef>
+          <a:effectRef idx="2">
+            <a:schemeClr val="accent1"/>
+          </a:effectRef>
+          <a:fontRef idx="minor">
+            <a:schemeClr val="lt1"/>
+          </a:fontRef>
+        </p:style>
+        <p:txBody>
+          <a:bodyPr rtlCol="0" anchor="ctr"/>
+          <a:lstStyle/>
+          <a:p>
+            <a:pPr algn="ctr"/>
+          </a:p>
+        </p:txBody>
+      </p:sp>
+      <p:sp>
+        <p:nvSpPr>
+          <p:cNvPr id="20" name="Rounded Rectangle 19"/>
+          <p:cNvSpPr/>
+          <p:nvPr/>
+        </p:nvSpPr>
+        <p:spPr>
+          <a:xfrm>
+            <a:off x="6103620" y="2240280"/>
+            <a:ext cx="1760220" cy="1874519"/>
+          </a:xfrm>
+          <a:prstGeom prst="roundRect">
+            <a:avLst/>
+          </a:prstGeom>
+          <a:solidFill>
+            <a:srgbClr val="FFFFFF"/>
+          </a:solidFill>
+          <a:ln>
+            <a:solidFill>
+              <a:srgbClr val="2F5BA8"/>
+            </a:solidFill>
+          </a:ln>
+        </p:spPr>
+        <p:style>
+          <a:lnRef idx="1">
+            <a:schemeClr val="accent1"/>
+          </a:lnRef>
+          <a:fillRef idx="3">
+            <a:schemeClr val="accent1"/>
+          </a:fillRef>
+          <a:effectRef idx="2">
+            <a:schemeClr val="accent1"/>
+          </a:effectRef>
+          <a:fontRef idx="minor">
+            <a:schemeClr val="lt1"/>
+          </a:fontRef>
+        </p:style>
+        <p:txBody>
+          <a:bodyPr rtlCol="0" anchor="ctr"/>
+          <a:lstStyle/>
+          <a:p>
+            <a:pPr algn="ctr"/>
+          </a:p>
+        </p:txBody>
+      </p:sp>
+      <p:sp>
+        <p:nvSpPr>
+          <p:cNvPr id="21" name="TextBox 20"/>
+          <p:cNvSpPr txBox="1"/>
+          <p:nvPr/>
+        </p:nvSpPr>
+        <p:spPr>
+          <a:xfrm>
+            <a:off x="6240780" y="2487168"/>
+            <a:ext cx="1485900" cy="320040"/>
+          </a:xfrm>
+          <a:prstGeom prst="rect">
+            <a:avLst/>
+          </a:prstGeom>
+          <a:noFill/>
+        </p:spPr>
+        <p:txBody>
+          <a:bodyPr wrap="square" lIns="45720" rIns="45720" tIns="36576" bIns="36576" anchor="t">
+            <a:spAutoFit/>
+          </a:bodyPr>
+          <a:lstStyle/>
+          <a:p>
+            <a:pPr algn="ctr">
+              <a:defRPr sz="1400" b="1">
+                <a:solidFill>
+                  <a:srgbClr val="2F5BA8"/>
+                </a:solidFill>
+                <a:latin typeface="Aptos"/>
+              </a:defRPr>
+            </a:pPr>
+            <a:r>
+              <a:t>04</a:t>
+            </a:r>
+          </a:p>
+        </p:txBody>
+      </p:sp>
+      <p:sp>
+        <p:nvSpPr>
+          <p:cNvPr id="22" name="TextBox 21"/>
+          <p:cNvSpPr txBox="1"/>
+          <p:nvPr/>
+        </p:nvSpPr>
+        <p:spPr>
+          <a:xfrm>
+            <a:off x="6240780" y="2971800"/>
+            <a:ext cx="1485900" cy="658368"/>
+          </a:xfrm>
+          <a:prstGeom prst="rect">
+            <a:avLst/>
+          </a:prstGeom>
+          <a:noFill/>
+        </p:spPr>
+        <p:txBody>
+          <a:bodyPr wrap="square" lIns="45720" rIns="45720" tIns="36576" bIns="36576" anchor="ctr">
+            <a:spAutoFit/>
+          </a:bodyPr>
+          <a:lstStyle/>
+          <a:p>
+            <a:pPr algn="ctr">
+              <a:defRPr sz="1700" b="1">
+                <a:solidFill>
+                  <a:srgbClr val="1C2330"/>
+                </a:solidFill>
+                <a:latin typeface="Aptos"/>
+              </a:defRPr>
+            </a:pPr>
+            <a:r>
+              <a:t>convertir</a:t>
+            </a:r>
+          </a:p>
+        </p:txBody>
+      </p:sp>
+      <p:sp>
+        <p:nvSpPr>
+          <p:cNvPr id="23" name="Right Arrow 22"/>
+          <p:cNvSpPr/>
+          <p:nvPr/>
+        </p:nvSpPr>
+        <p:spPr>
+          <a:xfrm>
+            <a:off x="7909560" y="2907792"/>
+            <a:ext cx="228600" cy="411480"/>
+          </a:xfrm>
+          <a:prstGeom prst="rightArrow">
+            <a:avLst/>
+          </a:prstGeom>
+          <a:solidFill>
+            <a:srgbClr val="586270"/>
+          </a:solidFill>
+          <a:ln>
+            <a:noFill/>
+          </a:ln>
+        </p:spPr>
+        <p:style>
+          <a:lnRef idx="1">
+            <a:schemeClr val="accent1"/>
+          </a:lnRef>
+          <a:fillRef idx="3">
+            <a:schemeClr val="accent1"/>
+          </a:fillRef>
+          <a:effectRef idx="2">
+            <a:schemeClr val="accent1"/>
+          </a:effectRef>
+          <a:fontRef idx="minor">
+            <a:schemeClr val="lt1"/>
+          </a:fontRef>
+        </p:style>
+        <p:txBody>
+          <a:bodyPr rtlCol="0" anchor="ctr"/>
+          <a:lstStyle/>
+          <a:p>
+            <a:pPr algn="ctr"/>
+          </a:p>
+        </p:txBody>
+      </p:sp>
+      <p:sp>
+        <p:nvSpPr>
+          <p:cNvPr id="24" name="Rounded Rectangle 23"/>
+          <p:cNvSpPr/>
+          <p:nvPr/>
+        </p:nvSpPr>
+        <p:spPr>
+          <a:xfrm>
+            <a:off x="7900416" y="2240280"/>
+            <a:ext cx="1760220" cy="1874519"/>
+          </a:xfrm>
+          <a:prstGeom prst="roundRect">
+            <a:avLst/>
+          </a:prstGeom>
+          <a:solidFill>
+            <a:srgbClr val="FFFFFF"/>
+          </a:solidFill>
+          <a:ln>
+            <a:solidFill>
+              <a:srgbClr val="2F5BA8"/>
+            </a:solidFill>
+          </a:ln>
+        </p:spPr>
+        <p:style>
+          <a:lnRef idx="1">
+            <a:schemeClr val="accent1"/>
+          </a:lnRef>
+          <a:fillRef idx="3">
+            <a:schemeClr val="accent1"/>
+          </a:fillRef>
+          <a:effectRef idx="2">
+            <a:schemeClr val="accent1"/>
+          </a:effectRef>
+          <a:fontRef idx="minor">
+            <a:schemeClr val="lt1"/>
+          </a:fontRef>
+        </p:style>
+        <p:txBody>
+          <a:bodyPr rtlCol="0" anchor="ctr"/>
+          <a:lstStyle/>
+          <a:p>
+            <a:pPr algn="ctr"/>
+          </a:p>
+        </p:txBody>
+      </p:sp>
+      <p:sp>
+        <p:nvSpPr>
+          <p:cNvPr id="25" name="TextBox 24"/>
+          <p:cNvSpPr txBox="1"/>
+          <p:nvPr/>
+        </p:nvSpPr>
+        <p:spPr>
+          <a:xfrm>
+            <a:off x="8037576" y="2487168"/>
+            <a:ext cx="1485900" cy="320040"/>
+          </a:xfrm>
+          <a:prstGeom prst="rect">
+            <a:avLst/>
+          </a:prstGeom>
+          <a:noFill/>
+        </p:spPr>
+        <p:txBody>
+          <a:bodyPr wrap="square" lIns="45720" rIns="45720" tIns="36576" bIns="36576" anchor="t">
+            <a:spAutoFit/>
+          </a:bodyPr>
+          <a:lstStyle/>
+          <a:p>
+            <a:pPr algn="ctr">
+              <a:defRPr sz="1400" b="1">
+                <a:solidFill>
+                  <a:srgbClr val="2F5BA8"/>
+                </a:solidFill>
+                <a:latin typeface="Aptos"/>
+              </a:defRPr>
+            </a:pPr>
+            <a:r>
+              <a:t>05</a:t>
+            </a:r>
+          </a:p>
+        </p:txBody>
+      </p:sp>
+      <p:sp>
+        <p:nvSpPr>
+          <p:cNvPr id="26" name="TextBox 25"/>
+          <p:cNvSpPr txBox="1"/>
+          <p:nvPr/>
+        </p:nvSpPr>
+        <p:spPr>
+          <a:xfrm>
+            <a:off x="8037576" y="2971800"/>
+            <a:ext cx="1485900" cy="658368"/>
+          </a:xfrm>
+          <a:prstGeom prst="rect">
+            <a:avLst/>
+          </a:prstGeom>
+          <a:noFill/>
+        </p:spPr>
+        <p:txBody>
+          <a:bodyPr wrap="square" lIns="45720" rIns="45720" tIns="36576" bIns="36576" anchor="ctr">
+            <a:spAutoFit/>
+          </a:bodyPr>
+          <a:lstStyle/>
+          <a:p>
+            <a:pPr algn="ctr">
+              <a:defRPr sz="1700" b="1">
+                <a:solidFill>
+                  <a:srgbClr val="1C2330"/>
+                </a:solidFill>
+                <a:latin typeface="Aptos"/>
+              </a:defRPr>
+            </a:pPr>
+            <a:r>
+              <a:t>calcular</a:t>
+            </a:r>
+          </a:p>
+        </p:txBody>
+      </p:sp>
+      <p:sp>
+        <p:nvSpPr>
+          <p:cNvPr id="27" name="Right Arrow 26"/>
+          <p:cNvSpPr/>
+          <p:nvPr/>
+        </p:nvSpPr>
+        <p:spPr>
+          <a:xfrm>
+            <a:off x="9706356" y="2907792"/>
+            <a:ext cx="228600" cy="411480"/>
+          </a:xfrm>
+          <a:prstGeom prst="rightArrow">
+            <a:avLst/>
+          </a:prstGeom>
+          <a:solidFill>
+            <a:srgbClr val="586270"/>
+          </a:solidFill>
+          <a:ln>
+            <a:noFill/>
+          </a:ln>
+        </p:spPr>
+        <p:style>
+          <a:lnRef idx="1">
+            <a:schemeClr val="accent1"/>
+          </a:lnRef>
+          <a:fillRef idx="3">
+            <a:schemeClr val="accent1"/>
+          </a:fillRef>
+          <a:effectRef idx="2">
+            <a:schemeClr val="accent1"/>
+          </a:effectRef>
+          <a:fontRef idx="minor">
+            <a:schemeClr val="lt1"/>
+          </a:fontRef>
+        </p:style>
+        <p:txBody>
+          <a:bodyPr rtlCol="0" anchor="ctr"/>
+          <a:lstStyle/>
+          <a:p>
+            <a:pPr algn="ctr"/>
+          </a:p>
+        </p:txBody>
+      </p:sp>
+      <p:sp>
+        <p:nvSpPr>
+          <p:cNvPr id="28" name="Rounded Rectangle 27"/>
+          <p:cNvSpPr/>
+          <p:nvPr/>
+        </p:nvSpPr>
+        <p:spPr>
+          <a:xfrm>
+            <a:off x="9697212" y="2240280"/>
+            <a:ext cx="1760220" cy="1874519"/>
+          </a:xfrm>
+          <a:prstGeom prst="roundRect">
+            <a:avLst/>
+          </a:prstGeom>
+          <a:solidFill>
+            <a:srgbClr val="2F5BA8"/>
+          </a:solidFill>
+          <a:ln>
+            <a:solidFill>
+              <a:srgbClr val="2F5BA8"/>
+            </a:solidFill>
+          </a:ln>
+        </p:spPr>
+        <p:style>
+          <a:lnRef idx="1">
+            <a:schemeClr val="accent1"/>
+          </a:lnRef>
+          <a:fillRef idx="3">
+            <a:schemeClr val="accent1"/>
+          </a:fillRef>
+          <a:effectRef idx="2">
+            <a:schemeClr val="accent1"/>
+          </a:effectRef>
+          <a:fontRef idx="minor">
+            <a:schemeClr val="lt1"/>
+          </a:fontRef>
+        </p:style>
+        <p:txBody>
+          <a:bodyPr rtlCol="0" anchor="ctr"/>
+          <a:lstStyle/>
+          <a:p>
+            <a:pPr algn="ctr"/>
+          </a:p>
+        </p:txBody>
+      </p:sp>
+      <p:sp>
+        <p:nvSpPr>
+          <p:cNvPr id="29" name="TextBox 28"/>
+          <p:cNvSpPr txBox="1"/>
+          <p:nvPr/>
+        </p:nvSpPr>
+        <p:spPr>
+          <a:xfrm>
+            <a:off x="9834372" y="2487168"/>
+            <a:ext cx="1485900" cy="320040"/>
+          </a:xfrm>
+          <a:prstGeom prst="rect">
+            <a:avLst/>
+          </a:prstGeom>
+          <a:noFill/>
+        </p:spPr>
+        <p:txBody>
+          <a:bodyPr wrap="square" lIns="45720" rIns="45720" tIns="36576" bIns="36576" anchor="t">
+            <a:spAutoFit/>
+          </a:bodyPr>
+          <a:lstStyle/>
+          <a:p>
+            <a:pPr algn="ctr">
+              <a:defRPr sz="1400" b="1">
                 <a:solidFill>
                   <a:srgbClr val="FFFFFF"/>
                 </a:solidFill>
@@ -5568,15 +7420,35 @@
               </a:defRPr>
             </a:pPr>
             <a:r>
-              <a:t>•  D1 · Hasta ahora los datos los decide quien programa — ¿Cómo hacemos para que los escriba la persona que ejecuta MiniJarvis?</a:t>
-            </a:r>
-          </a:p>
-          <a:p>
-            <a:pPr>
-              <a:spcAft>
-                <a:spcPts val="900"/>
-              </a:spcAft>
-              <a:defRPr sz="2200">
+              <a:t>06</a:t>
+            </a:r>
+          </a:p>
+        </p:txBody>
+      </p:sp>
+      <p:sp>
+        <p:nvSpPr>
+          <p:cNvPr id="30" name="TextBox 29"/>
+          <p:cNvSpPr txBox="1"/>
+          <p:nvPr/>
+        </p:nvSpPr>
+        <p:spPr>
+          <a:xfrm>
+            <a:off x="9834372" y="2971800"/>
+            <a:ext cx="1485900" cy="658368"/>
+          </a:xfrm>
+          <a:prstGeom prst="rect">
+            <a:avLst/>
+          </a:prstGeom>
+          <a:noFill/>
+        </p:spPr>
+        <p:txBody>
+          <a:bodyPr wrap="square" lIns="45720" rIns="45720" tIns="36576" bIns="36576" anchor="ctr">
+            <a:spAutoFit/>
+          </a:bodyPr>
+          <a:lstStyle/>
+          <a:p>
+            <a:pPr algn="ctr">
+              <a:defRPr sz="1700" b="1">
                 <a:solidFill>
                   <a:srgbClr val="FFFFFF"/>
                 </a:solidFill>
@@ -5584,55 +7456,7 @@
               </a:defRPr>
             </a:pPr>
             <a:r>
-              <a:t>•  D2 · Scanner: pedir → leer → guardar — import java.util.Scanner;</a:t>
-            </a:r>
-          </a:p>
-          <a:p>
-            <a:pPr>
-              <a:spcAft>
-                <a:spcPts val="900"/>
-              </a:spcAft>
-              <a:defRPr sz="2200">
-                <a:solidFill>
-                  <a:srgbClr val="FFFFFF"/>
-                </a:solidFill>
-                <a:latin typeface="Aptos"/>
-              </a:defRPr>
-            </a:pPr>
-            <a:r>
-              <a:t>•  Scanner scanner = new Scanner(System.in);</a:t>
-            </a:r>
-          </a:p>
-          <a:p>
-            <a:pPr>
-              <a:spcAft>
-                <a:spcPts val="900"/>
-              </a:spcAft>
-              <a:defRPr sz="2200">
-                <a:solidFill>
-                  <a:srgbClr val="FFFFFF"/>
-                </a:solidFill>
-                <a:latin typeface="Aptos"/>
-              </a:defRPr>
-            </a:pPr>
-            <a:r>
-              <a:t>•  String userName = scanner.nextLine();</a:t>
-            </a:r>
-          </a:p>
-          <a:p>
-            <a:pPr>
-              <a:spcAft>
-                <a:spcPts val="900"/>
-              </a:spcAft>
-              <a:defRPr sz="2200">
-                <a:solidFill>
-                  <a:srgbClr val="FFFFFF"/>
-                </a:solidFill>
-                <a:latin typeface="Aptos"/>
-              </a:defRPr>
-            </a:pPr>
-            <a:r>
-              <a:t>•  scanner.close();</a:t>
+              <a:t>mostrar</a:t>
             </a:r>
           </a:p>
         </p:txBody>
@@ -5772,7 +7596,7 @@
               </a:defRPr>
             </a:pPr>
             <a:r>
-              <a:t>OBSERVAR ANTES DE ACTUAR</a:t>
+              <a:t>CÓDIGO EXPLICADO</a:t>
             </a:r>
           </a:p>
         </p:txBody>
@@ -5808,7 +7632,7 @@
               </a:defRPr>
             </a:pPr>
             <a:r>
-              <a:t>Ejemplo o demostración · 2</a:t>
+              <a:t>Una sola instancia de Scanner</a:t>
             </a:r>
           </a:p>
         </p:txBody>
@@ -5900,8 +7724,8 @@
         </p:nvSpPr>
         <p:spPr>
           <a:xfrm>
-            <a:off x="621792" y="1353312"/>
-            <a:ext cx="10927080" cy="4526280"/>
+            <a:off x="621792" y="1325880"/>
+            <a:ext cx="7315200" cy="4709160"/>
           </a:xfrm>
           <a:prstGeom prst="roundRect">
             <a:avLst/>
@@ -5910,7 +7734,9 @@
             <a:srgbClr val="121824"/>
           </a:solidFill>
           <a:ln>
-            <a:noFill/>
+            <a:solidFill>
+              <a:srgbClr val="121824"/>
+            </a:solidFill>
           </a:ln>
         </p:spPr>
         <p:style>
@@ -5943,8 +7769,113 @@
         </p:nvSpPr>
         <p:spPr>
           <a:xfrm>
-            <a:off x="932688" y="1627632"/>
-            <a:ext cx="2057400" cy="411480"/>
+            <a:off x="822960" y="1572768"/>
+            <a:ext cx="6903720" cy="4251960"/>
+          </a:xfrm>
+          <a:prstGeom prst="rect">
+            <a:avLst/>
+          </a:prstGeom>
+          <a:noFill/>
+        </p:spPr>
+        <p:txBody>
+          <a:bodyPr wrap="none" lIns="164592" rIns="164592" tIns="109728" bIns="109728">
+            <a:spAutoFit/>
+          </a:bodyPr>
+          <a:lstStyle/>
+          <a:p>
+            <a:pPr>
+              <a:spcAft>
+                <a:spcPts val="0"/>
+              </a:spcAft>
+              <a:defRPr sz="1600">
+                <a:solidFill>
+                  <a:srgbClr val="FFFFFF"/>
+                </a:solidFill>
+                <a:latin typeface="Liberation Mono"/>
+              </a:defRPr>
+            </a:pPr>
+            <a:r>
+              <a:t>import java.util.Scanner;</a:t>
+            </a:r>
+            <a:br/>
+            <a:br/>
+            <a:r>
+              <a:t>Scanner scanner = new Scanner(System.in);</a:t>
+            </a:r>
+            <a:br/>
+            <a:r>
+              <a:t>System.out.print("Nombre ficticio: ");</a:t>
+            </a:r>
+            <a:br/>
+            <a:r>
+              <a:t>String userName = scanner.nextLine();</a:t>
+            </a:r>
+            <a:br/>
+            <a:r>
+              <a:t>System.out.println("Hola, " + userName + ".");</a:t>
+            </a:r>
+            <a:br/>
+            <a:r>
+              <a:t>scanner.close();</a:t>
+            </a:r>
+          </a:p>
+        </p:txBody>
+      </p:sp>
+      <p:sp>
+        <p:nvSpPr>
+          <p:cNvPr id="10" name="Rounded Rectangle 9"/>
+          <p:cNvSpPr/>
+          <p:nvPr/>
+        </p:nvSpPr>
+        <p:spPr>
+          <a:xfrm>
+            <a:off x="8156448" y="1325880"/>
+            <a:ext cx="3401568" cy="4709160"/>
+          </a:xfrm>
+          <a:prstGeom prst="roundRect">
+            <a:avLst/>
+          </a:prstGeom>
+          <a:solidFill>
+            <a:srgbClr val="FFFFFF"/>
+          </a:solidFill>
+          <a:ln>
+            <a:solidFill>
+              <a:srgbClr val="E5E9EF"/>
+            </a:solidFill>
+          </a:ln>
+        </p:spPr>
+        <p:style>
+          <a:lnRef idx="1">
+            <a:schemeClr val="accent1"/>
+          </a:lnRef>
+          <a:fillRef idx="3">
+            <a:schemeClr val="accent1"/>
+          </a:fillRef>
+          <a:effectRef idx="2">
+            <a:schemeClr val="accent1"/>
+          </a:effectRef>
+          <a:fontRef idx="minor">
+            <a:schemeClr val="lt1"/>
+          </a:fontRef>
+        </p:style>
+        <p:txBody>
+          <a:bodyPr rtlCol="0" anchor="ctr"/>
+          <a:lstStyle/>
+          <a:p>
+            <a:pPr algn="ctr"/>
+          </a:p>
+        </p:txBody>
+      </p:sp>
+      <p:sp>
+        <p:nvSpPr>
+          <p:cNvPr id="11" name="TextBox 10"/>
+          <p:cNvSpPr txBox="1"/>
+          <p:nvPr/>
+        </p:nvSpPr>
+        <p:spPr>
+          <a:xfrm>
+            <a:off x="8412480" y="1627632"/>
+            <a:ext cx="2880360" cy="320040"/>
           </a:xfrm>
           <a:prstGeom prst="rect">
             <a:avLst/>
@@ -5958,7 +7889,7 @@
           <a:lstStyle/>
           <a:p>
             <a:pPr algn="l">
-              <a:defRPr sz="1300" b="1">
+              <a:defRPr sz="1200" b="1">
                 <a:solidFill>
                   <a:srgbClr val="2F5BA8"/>
                 </a:solidFill>
@@ -5966,21 +7897,21 @@
               </a:defRPr>
             </a:pPr>
             <a:r>
-              <a:t>DEMOSTRACIÓN</a:t>
-            </a:r>
-          </a:p>
-        </p:txBody>
-      </p:sp>
-      <p:sp>
-        <p:nvSpPr>
-          <p:cNvPr id="10" name="TextBox 9"/>
+              <a:t>LEE Y PREDICE</a:t>
+            </a:r>
+          </a:p>
+        </p:txBody>
+      </p:sp>
+      <p:sp>
+        <p:nvSpPr>
+          <p:cNvPr id="12" name="TextBox 11"/>
           <p:cNvSpPr txBox="1"/>
           <p:nvPr/>
         </p:nvSpPr>
         <p:spPr>
           <a:xfrm>
-            <a:off x="932688" y="2212848"/>
-            <a:ext cx="9966960" cy="3246120"/>
+            <a:off x="8394192" y="2103120"/>
+            <a:ext cx="2788920" cy="3474720"/>
           </a:xfrm>
           <a:prstGeom prst="rect">
             <a:avLst/>
@@ -5997,15 +7928,15 @@
               <a:spcAft>
                 <a:spcPts val="900"/>
               </a:spcAft>
-              <a:defRPr sz="2200">
+              <a:defRPr sz="1700">
                 <a:solidFill>
-                  <a:srgbClr val="FFFFFF"/>
+                  <a:srgbClr val="1C2330"/>
                 </a:solidFill>
                 <a:latin typeface="Aptos"/>
               </a:defRPr>
             </a:pPr>
             <a:r>
-              <a:t>•  D3 · Pide un nombre y úsalo — Ejecuta dos veces con nombres ficticios distintos.</a:t>
+              <a:t>•  nextLine() devuelve String.</a:t>
             </a:r>
           </a:p>
           <a:p>
@@ -6013,31 +7944,15 @@
               <a:spcAft>
                 <a:spcPts val="900"/>
               </a:spcAft>
-              <a:defRPr sz="2200">
+              <a:defRPr sz="1700">
                 <a:solidFill>
-                  <a:srgbClr val="FFFFFF"/>
+                  <a:srgbClr val="1C2330"/>
                 </a:solidFill>
                 <a:latin typeface="Aptos"/>
               </a:defRPr>
             </a:pPr>
             <a:r>
-              <a:t>•  ¿Qué cambia? ¿Qué no?</a:t>
-            </a:r>
-          </a:p>
-          <a:p>
-            <a:pPr>
-              <a:spcAft>
-                <a:spcPts val="900"/>
-              </a:spcAft>
-              <a:defRPr sz="2200">
-                <a:solidFill>
-                  <a:srgbClr val="FFFFFF"/>
-                </a:solidFill>
-                <a:latin typeface="Aptos"/>
-              </a:defRPr>
-            </a:pPr>
-            <a:r>
-              <a:t>•  D4 · Tengo "5". ¿Tengo el número 5? — "5" es texto si procede de nextLine().</a:t>
+              <a:t>•  La entrada se guarda y cambia una salida observable.</a:t>
             </a:r>
           </a:p>
         </p:txBody>
@@ -6177,7 +8092,7 @@
               </a:defRPr>
             </a:pPr>
             <a:r>
-              <a:t>APLICAR Y DECIDIR</a:t>
+              <a:t>CÓDIGO EXPLICADO</a:t>
             </a:r>
           </a:p>
         </p:txBody>
@@ -6213,7 +8128,7 @@
               </a:defRPr>
             </a:pPr>
             <a:r>
-              <a:t>Actividad central · 1</a:t>
+              <a:t>Texto a número</a:t>
             </a:r>
           </a:p>
         </p:txBody>
@@ -6305,8 +8220,104 @@
         </p:nvSpPr>
         <p:spPr>
           <a:xfrm>
-            <a:off x="658368" y="1307592"/>
-            <a:ext cx="10835640" cy="1049274"/>
+            <a:off x="621792" y="1325880"/>
+            <a:ext cx="7315200" cy="4709160"/>
+          </a:xfrm>
+          <a:prstGeom prst="roundRect">
+            <a:avLst/>
+          </a:prstGeom>
+          <a:solidFill>
+            <a:srgbClr val="121824"/>
+          </a:solidFill>
+          <a:ln>
+            <a:solidFill>
+              <a:srgbClr val="121824"/>
+            </a:solidFill>
+          </a:ln>
+        </p:spPr>
+        <p:style>
+          <a:lnRef idx="1">
+            <a:schemeClr val="accent1"/>
+          </a:lnRef>
+          <a:fillRef idx="3">
+            <a:schemeClr val="accent1"/>
+          </a:fillRef>
+          <a:effectRef idx="2">
+            <a:schemeClr val="accent1"/>
+          </a:effectRef>
+          <a:fontRef idx="minor">
+            <a:schemeClr val="lt1"/>
+          </a:fontRef>
+        </p:style>
+        <p:txBody>
+          <a:bodyPr rtlCol="0" anchor="ctr"/>
+          <a:lstStyle/>
+          <a:p>
+            <a:pPr algn="ctr"/>
+          </a:p>
+        </p:txBody>
+      </p:sp>
+      <p:sp>
+        <p:nvSpPr>
+          <p:cNvPr id="9" name="TextBox 8"/>
+          <p:cNvSpPr txBox="1"/>
+          <p:nvPr/>
+        </p:nvSpPr>
+        <p:spPr>
+          <a:xfrm>
+            <a:off x="822960" y="1572768"/>
+            <a:ext cx="6903720" cy="4251960"/>
+          </a:xfrm>
+          <a:prstGeom prst="rect">
+            <a:avLst/>
+          </a:prstGeom>
+          <a:noFill/>
+        </p:spPr>
+        <p:txBody>
+          <a:bodyPr wrap="none" lIns="164592" rIns="164592" tIns="109728" bIns="109728">
+            <a:spAutoFit/>
+          </a:bodyPr>
+          <a:lstStyle/>
+          <a:p>
+            <a:pPr>
+              <a:spcAft>
+                <a:spcPts val="0"/>
+              </a:spcAft>
+              <a:defRPr sz="1800">
+                <a:solidFill>
+                  <a:srgbClr val="FFFFFF"/>
+                </a:solidFill>
+                <a:latin typeface="Liberation Mono"/>
+              </a:defRPr>
+            </a:pPr>
+            <a:r>
+              <a:t>String text = "5";</a:t>
+            </a:r>
+            <a:br/>
+            <a:r>
+              <a:t>int hours = Integer.parseInt(text);</a:t>
+            </a:r>
+            <a:br/>
+            <a:r>
+              <a:t>int minutes = hours * 60;</a:t>
+            </a:r>
+            <a:br/>
+            <a:r>
+              <a:t>System.out.println(minutes);</a:t>
+            </a:r>
+          </a:p>
+        </p:txBody>
+      </p:sp>
+      <p:sp>
+        <p:nvSpPr>
+          <p:cNvPr id="10" name="Rounded Rectangle 9"/>
+          <p:cNvSpPr/>
+          <p:nvPr/>
+        </p:nvSpPr>
+        <p:spPr>
+          <a:xfrm>
+            <a:off x="8156448" y="1325880"/>
+            <a:ext cx="3401568" cy="4709160"/>
           </a:xfrm>
           <a:prstGeom prst="roundRect">
             <a:avLst/>
@@ -6344,14 +8355,14 @@
       </p:sp>
       <p:sp>
         <p:nvSpPr>
-          <p:cNvPr id="9" name="TextBox 8"/>
+          <p:cNvPr id="11" name="TextBox 10"/>
           <p:cNvSpPr txBox="1"/>
           <p:nvPr/>
         </p:nvSpPr>
         <p:spPr>
           <a:xfrm>
-            <a:off x="850392" y="1453895"/>
-            <a:ext cx="685800" cy="384048"/>
+            <a:off x="8412480" y="1627632"/>
+            <a:ext cx="2880360" cy="320040"/>
           </a:xfrm>
           <a:prstGeom prst="rect">
             <a:avLst/>
@@ -6373,21 +8384,21 @@
               </a:defRPr>
             </a:pPr>
             <a:r>
-              <a:t>PASO 1</a:t>
-            </a:r>
-          </a:p>
-        </p:txBody>
-      </p:sp>
-      <p:sp>
-        <p:nvSpPr>
-          <p:cNvPr id="10" name="TextBox 9"/>
+              <a:t>LEE Y PREDICE</a:t>
+            </a:r>
+          </a:p>
+        </p:txBody>
+      </p:sp>
+      <p:sp>
+        <p:nvSpPr>
+          <p:cNvPr id="12" name="TextBox 11"/>
           <p:cNvSpPr txBox="1"/>
           <p:nvPr/>
         </p:nvSpPr>
         <p:spPr>
           <a:xfrm>
-            <a:off x="1664208" y="1417319"/>
-            <a:ext cx="9464040" cy="829818"/>
+            <a:off x="8394192" y="2103120"/>
+            <a:ext cx="2788920" cy="3474720"/>
           </a:xfrm>
           <a:prstGeom prst="rect">
             <a:avLst/>
@@ -6395,13 +8406,16 @@
           <a:noFill/>
         </p:spPr>
         <p:txBody>
-          <a:bodyPr wrap="square" lIns="45720" rIns="45720" tIns="36576" bIns="36576" anchor="t">
+          <a:bodyPr wrap="square" lIns="73152" rIns="45720" tIns="36576">
             <a:spAutoFit/>
           </a:bodyPr>
           <a:lstStyle/>
           <a:p>
-            <a:pPr algn="l">
-              <a:defRPr sz="2000" b="0">
+            <a:pPr>
+              <a:spcAft>
+                <a:spcPts val="900"/>
+              </a:spcAft>
+              <a:defRPr sz="1700">
                 <a:solidFill>
                   <a:srgbClr val="1C2330"/>
                 </a:solidFill>
@@ -6409,116 +8423,15 @@
               </a:defRPr>
             </a:pPr>
             <a:r>
-              <a:t>Predice antes de ejecutar cuando haya código.</a:t>
-            </a:r>
-          </a:p>
-        </p:txBody>
-      </p:sp>
-      <p:sp>
-        <p:nvSpPr>
-          <p:cNvPr id="11" name="Rounded Rectangle 10"/>
-          <p:cNvSpPr/>
-          <p:nvPr/>
-        </p:nvSpPr>
-        <p:spPr>
-          <a:xfrm>
-            <a:off x="658368" y="2542032"/>
-            <a:ext cx="10835640" cy="1049274"/>
-          </a:xfrm>
-          <a:prstGeom prst="roundRect">
-            <a:avLst/>
-          </a:prstGeom>
-          <a:solidFill>
-            <a:srgbClr val="FFFFFF"/>
-          </a:solidFill>
-          <a:ln>
-            <a:solidFill>
-              <a:srgbClr val="E5E9EF"/>
-            </a:solidFill>
-          </a:ln>
-        </p:spPr>
-        <p:style>
-          <a:lnRef idx="1">
-            <a:schemeClr val="accent1"/>
-          </a:lnRef>
-          <a:fillRef idx="3">
-            <a:schemeClr val="accent1"/>
-          </a:fillRef>
-          <a:effectRef idx="2">
-            <a:schemeClr val="accent1"/>
-          </a:effectRef>
-          <a:fontRef idx="minor">
-            <a:schemeClr val="lt1"/>
-          </a:fontRef>
-        </p:style>
-        <p:txBody>
-          <a:bodyPr rtlCol="0" anchor="ctr"/>
-          <a:lstStyle/>
-          <a:p>
-            <a:pPr algn="ctr"/>
-          </a:p>
-        </p:txBody>
-      </p:sp>
-      <p:sp>
-        <p:nvSpPr>
-          <p:cNvPr id="12" name="TextBox 11"/>
-          <p:cNvSpPr txBox="1"/>
-          <p:nvPr/>
-        </p:nvSpPr>
-        <p:spPr>
-          <a:xfrm>
-            <a:off x="850392" y="2688336"/>
-            <a:ext cx="685800" cy="384048"/>
-          </a:xfrm>
-          <a:prstGeom prst="rect">
-            <a:avLst/>
-          </a:prstGeom>
-          <a:noFill/>
-        </p:spPr>
-        <p:txBody>
-          <a:bodyPr wrap="square" lIns="45720" rIns="45720" tIns="36576" bIns="36576" anchor="t">
-            <a:spAutoFit/>
-          </a:bodyPr>
-          <a:lstStyle/>
-          <a:p>
-            <a:pPr algn="l">
-              <a:defRPr sz="1200" b="1">
-                <a:solidFill>
-                  <a:srgbClr val="2F5BA8"/>
-                </a:solidFill>
-                <a:latin typeface="Aptos"/>
-              </a:defRPr>
-            </a:pPr>
-            <a:r>
-              <a:t>PASO 2</a:t>
-            </a:r>
-          </a:p>
-        </p:txBody>
-      </p:sp>
-      <p:sp>
-        <p:nvSpPr>
-          <p:cNvPr id="13" name="TextBox 12"/>
-          <p:cNvSpPr txBox="1"/>
-          <p:nvPr/>
-        </p:nvSpPr>
-        <p:spPr>
-          <a:xfrm>
-            <a:off x="1664208" y="2651760"/>
-            <a:ext cx="9464040" cy="829818"/>
-          </a:xfrm>
-          <a:prstGeom prst="rect">
-            <a:avLst/>
-          </a:prstGeom>
-          <a:noFill/>
-        </p:spPr>
-        <p:txBody>
-          <a:bodyPr wrap="square" lIns="45720" rIns="45720" tIns="36576" bIns="36576" anchor="t">
-            <a:spAutoFit/>
-          </a:bodyPr>
-          <a:lstStyle/>
-          <a:p>
-            <a:pPr algn="l">
-              <a:defRPr sz="2000" b="0">
+              <a:t>•  Salida esperada: 300</a:t>
+            </a:r>
+          </a:p>
+          <a:p>
+            <a:pPr>
+              <a:spcAft>
+                <a:spcPts val="900"/>
+              </a:spcAft>
+              <a:defRPr sz="1700">
                 <a:solidFill>
                   <a:srgbClr val="1C2330"/>
                 </a:solidFill>
@@ -6526,241 +8439,7 @@
               </a:defRPr>
             </a:pPr>
             <a:r>
-              <a:t>Realiza la micropráctica o modificación prevista.</a:t>
-            </a:r>
-          </a:p>
-        </p:txBody>
-      </p:sp>
-      <p:sp>
-        <p:nvSpPr>
-          <p:cNvPr id="14" name="Rounded Rectangle 13"/>
-          <p:cNvSpPr/>
-          <p:nvPr/>
-        </p:nvSpPr>
-        <p:spPr>
-          <a:xfrm>
-            <a:off x="658368" y="3776472"/>
-            <a:ext cx="10835640" cy="1049274"/>
-          </a:xfrm>
-          <a:prstGeom prst="roundRect">
-            <a:avLst/>
-          </a:prstGeom>
-          <a:solidFill>
-            <a:srgbClr val="FFFFFF"/>
-          </a:solidFill>
-          <a:ln>
-            <a:solidFill>
-              <a:srgbClr val="E5E9EF"/>
-            </a:solidFill>
-          </a:ln>
-        </p:spPr>
-        <p:style>
-          <a:lnRef idx="1">
-            <a:schemeClr val="accent1"/>
-          </a:lnRef>
-          <a:fillRef idx="3">
-            <a:schemeClr val="accent1"/>
-          </a:fillRef>
-          <a:effectRef idx="2">
-            <a:schemeClr val="accent1"/>
-          </a:effectRef>
-          <a:fontRef idx="minor">
-            <a:schemeClr val="lt1"/>
-          </a:fontRef>
-        </p:style>
-        <p:txBody>
-          <a:bodyPr rtlCol="0" anchor="ctr"/>
-          <a:lstStyle/>
-          <a:p>
-            <a:pPr algn="ctr"/>
-          </a:p>
-        </p:txBody>
-      </p:sp>
-      <p:sp>
-        <p:nvSpPr>
-          <p:cNvPr id="15" name="TextBox 14"/>
-          <p:cNvSpPr txBox="1"/>
-          <p:nvPr/>
-        </p:nvSpPr>
-        <p:spPr>
-          <a:xfrm>
-            <a:off x="850392" y="3922776"/>
-            <a:ext cx="685800" cy="384048"/>
-          </a:xfrm>
-          <a:prstGeom prst="rect">
-            <a:avLst/>
-          </a:prstGeom>
-          <a:noFill/>
-        </p:spPr>
-        <p:txBody>
-          <a:bodyPr wrap="square" lIns="45720" rIns="45720" tIns="36576" bIns="36576" anchor="t">
-            <a:spAutoFit/>
-          </a:bodyPr>
-          <a:lstStyle/>
-          <a:p>
-            <a:pPr algn="l">
-              <a:defRPr sz="1200" b="1">
-                <a:solidFill>
-                  <a:srgbClr val="2F5BA8"/>
-                </a:solidFill>
-                <a:latin typeface="Aptos"/>
-              </a:defRPr>
-            </a:pPr>
-            <a:r>
-              <a:t>PASO 3</a:t>
-            </a:r>
-          </a:p>
-        </p:txBody>
-      </p:sp>
-      <p:sp>
-        <p:nvSpPr>
-          <p:cNvPr id="16" name="TextBox 15"/>
-          <p:cNvSpPr txBox="1"/>
-          <p:nvPr/>
-        </p:nvSpPr>
-        <p:spPr>
-          <a:xfrm>
-            <a:off x="1664208" y="3886200"/>
-            <a:ext cx="9464040" cy="829818"/>
-          </a:xfrm>
-          <a:prstGeom prst="rect">
-            <a:avLst/>
-          </a:prstGeom>
-          <a:noFill/>
-        </p:spPr>
-        <p:txBody>
-          <a:bodyPr wrap="square" lIns="45720" rIns="45720" tIns="36576" bIns="36576" anchor="t">
-            <a:spAutoFit/>
-          </a:bodyPr>
-          <a:lstStyle/>
-          <a:p>
-            <a:pPr algn="l">
-              <a:defRPr sz="2000" b="0">
-                <a:solidFill>
-                  <a:srgbClr val="1C2330"/>
-                </a:solidFill>
-                <a:latin typeface="Aptos"/>
-              </a:defRPr>
-            </a:pPr>
-            <a:r>
-              <a:t>Prueba el caso normal y, cuando exista una decisión o conversión, también el caso alternativo o erróneo.</a:t>
-            </a:r>
-          </a:p>
-        </p:txBody>
-      </p:sp>
-      <p:sp>
-        <p:nvSpPr>
-          <p:cNvPr id="17" name="Rounded Rectangle 16"/>
-          <p:cNvSpPr/>
-          <p:nvPr/>
-        </p:nvSpPr>
-        <p:spPr>
-          <a:xfrm>
-            <a:off x="658368" y="5010912"/>
-            <a:ext cx="10835640" cy="1049274"/>
-          </a:xfrm>
-          <a:prstGeom prst="roundRect">
-            <a:avLst/>
-          </a:prstGeom>
-          <a:solidFill>
-            <a:srgbClr val="FFFFFF"/>
-          </a:solidFill>
-          <a:ln>
-            <a:solidFill>
-              <a:srgbClr val="E5E9EF"/>
-            </a:solidFill>
-          </a:ln>
-        </p:spPr>
-        <p:style>
-          <a:lnRef idx="1">
-            <a:schemeClr val="accent1"/>
-          </a:lnRef>
-          <a:fillRef idx="3">
-            <a:schemeClr val="accent1"/>
-          </a:fillRef>
-          <a:effectRef idx="2">
-            <a:schemeClr val="accent1"/>
-          </a:effectRef>
-          <a:fontRef idx="minor">
-            <a:schemeClr val="lt1"/>
-          </a:fontRef>
-        </p:style>
-        <p:txBody>
-          <a:bodyPr rtlCol="0" anchor="ctr"/>
-          <a:lstStyle/>
-          <a:p>
-            <a:pPr algn="ctr"/>
-          </a:p>
-        </p:txBody>
-      </p:sp>
-      <p:sp>
-        <p:nvSpPr>
-          <p:cNvPr id="18" name="TextBox 17"/>
-          <p:cNvSpPr txBox="1"/>
-          <p:nvPr/>
-        </p:nvSpPr>
-        <p:spPr>
-          <a:xfrm>
-            <a:off x="850392" y="5157216"/>
-            <a:ext cx="685800" cy="384048"/>
-          </a:xfrm>
-          <a:prstGeom prst="rect">
-            <a:avLst/>
-          </a:prstGeom>
-          <a:noFill/>
-        </p:spPr>
-        <p:txBody>
-          <a:bodyPr wrap="square" lIns="45720" rIns="45720" tIns="36576" bIns="36576" anchor="t">
-            <a:spAutoFit/>
-          </a:bodyPr>
-          <a:lstStyle/>
-          <a:p>
-            <a:pPr algn="l">
-              <a:defRPr sz="1200" b="1">
-                <a:solidFill>
-                  <a:srgbClr val="2F5BA8"/>
-                </a:solidFill>
-                <a:latin typeface="Aptos"/>
-              </a:defRPr>
-            </a:pPr>
-            <a:r>
-              <a:t>PASO 4</a:t>
-            </a:r>
-          </a:p>
-        </p:txBody>
-      </p:sp>
-      <p:sp>
-        <p:nvSpPr>
-          <p:cNvPr id="19" name="TextBox 18"/>
-          <p:cNvSpPr txBox="1"/>
-          <p:nvPr/>
-        </p:nvSpPr>
-        <p:spPr>
-          <a:xfrm>
-            <a:off x="1664208" y="5120640"/>
-            <a:ext cx="9464040" cy="829818"/>
-          </a:xfrm>
-          <a:prstGeom prst="rect">
-            <a:avLst/>
-          </a:prstGeom>
-          <a:noFill/>
-        </p:spPr>
-        <p:txBody>
-          <a:bodyPr wrap="square" lIns="45720" rIns="45720" tIns="36576" bIns="36576" anchor="t">
-            <a:spAutoFit/>
-          </a:bodyPr>
-          <a:lstStyle/>
-          <a:p>
-            <a:pPr algn="l">
-              <a:defRPr sz="2000" b="0">
-                <a:solidFill>
-                  <a:srgbClr val="1C2330"/>
-                </a:solidFill>
-                <a:latin typeface="Aptos"/>
-              </a:defRPr>
-            </a:pPr>
-            <a:r>
-              <a:t>Conserva el código o resultado en el repositorio o espacio indicado.</a:t>
+              <a:t>•  Parsear texto no es lo mismo que convertir entre tipos numéricos.</a:t>
             </a:r>
           </a:p>
         </p:txBody>
@@ -6900,7 +8579,7 @@
               </a:defRPr>
             </a:pPr>
             <a:r>
-              <a:t>APLICAR Y DECIDIR</a:t>
+              <a:t>CONTRASTAR PARA DECIDIR</a:t>
             </a:r>
           </a:p>
         </p:txBody>
@@ -6936,7 +8615,7 @@
               </a:defRPr>
             </a:pPr>
             <a:r>
-              <a:t>Actividad central · 2</a:t>
+              <a:t>Conversión automática y casting</a:t>
             </a:r>
           </a:p>
         </p:txBody>
@@ -7028,8 +8707,8 @@
         </p:nvSpPr>
         <p:spPr>
           <a:xfrm>
-            <a:off x="658368" y="1307592"/>
-            <a:ext cx="10835640" cy="2226564"/>
+            <a:off x="621792" y="1325880"/>
+            <a:ext cx="5230368" cy="3401568"/>
           </a:xfrm>
           <a:prstGeom prst="roundRect">
             <a:avLst/>
@@ -7039,7 +8718,7 @@
           </a:solidFill>
           <a:ln>
             <a:solidFill>
-              <a:srgbClr val="E5E9EF"/>
+              <a:srgbClr val="445B80"/>
             </a:solidFill>
           </a:ln>
         </p:spPr>
@@ -7067,14 +8746,59 @@
       </p:sp>
       <p:sp>
         <p:nvSpPr>
-          <p:cNvPr id="9" name="TextBox 8"/>
+          <p:cNvPr id="9" name="Rounded Rectangle 8"/>
+          <p:cNvSpPr/>
+          <p:nvPr/>
+        </p:nvSpPr>
+        <p:spPr>
+          <a:xfrm>
+            <a:off x="850392" y="1572768"/>
+            <a:ext cx="566928" cy="475488"/>
+          </a:xfrm>
+          <a:prstGeom prst="roundRect">
+            <a:avLst/>
+          </a:prstGeom>
+          <a:solidFill>
+            <a:srgbClr val="445B80"/>
+          </a:solidFill>
+          <a:ln>
+            <a:solidFill>
+              <a:srgbClr val="445B80"/>
+            </a:solidFill>
+          </a:ln>
+        </p:spPr>
+        <p:style>
+          <a:lnRef idx="1">
+            <a:schemeClr val="accent1"/>
+          </a:lnRef>
+          <a:fillRef idx="3">
+            <a:schemeClr val="accent1"/>
+          </a:fillRef>
+          <a:effectRef idx="2">
+            <a:schemeClr val="accent1"/>
+          </a:effectRef>
+          <a:fontRef idx="minor">
+            <a:schemeClr val="lt1"/>
+          </a:fontRef>
+        </p:style>
+        <p:txBody>
+          <a:bodyPr rtlCol="0" anchor="ctr"/>
+          <a:lstStyle/>
+          <a:p>
+            <a:pPr algn="ctr"/>
+          </a:p>
+        </p:txBody>
+      </p:sp>
+      <p:sp>
+        <p:nvSpPr>
+          <p:cNvPr id="10" name="TextBox 9"/>
           <p:cNvSpPr txBox="1"/>
           <p:nvPr/>
         </p:nvSpPr>
         <p:spPr>
           <a:xfrm>
-            <a:off x="850392" y="1453895"/>
-            <a:ext cx="685800" cy="384048"/>
+            <a:off x="850392" y="1682496"/>
+            <a:ext cx="566928" cy="182880"/>
           </a:xfrm>
           <a:prstGeom prst="rect">
             <a:avLst/>
@@ -7087,30 +8811,30 @@
           </a:bodyPr>
           <a:lstStyle/>
           <a:p>
-            <a:pPr algn="l">
-              <a:defRPr sz="1200" b="1">
+            <a:pPr algn="ctr">
+              <a:defRPr sz="1300" b="1">
                 <a:solidFill>
-                  <a:srgbClr val="2F5BA8"/>
+                  <a:srgbClr val="FFFFFF"/>
                 </a:solidFill>
                 <a:latin typeface="Aptos"/>
               </a:defRPr>
             </a:pPr>
             <a:r>
-              <a:t>PASO 6</a:t>
-            </a:r>
-          </a:p>
-        </p:txBody>
-      </p:sp>
-      <p:sp>
-        <p:nvSpPr>
-          <p:cNvPr id="10" name="TextBox 9"/>
+              <a:t>A</a:t>
+            </a:r>
+          </a:p>
+        </p:txBody>
+      </p:sp>
+      <p:sp>
+        <p:nvSpPr>
+          <p:cNvPr id="11" name="TextBox 10"/>
           <p:cNvSpPr txBox="1"/>
           <p:nvPr/>
         </p:nvSpPr>
         <p:spPr>
           <a:xfrm>
-            <a:off x="1664208" y="1417319"/>
-            <a:ext cx="9464040" cy="2007108"/>
+            <a:off x="896112" y="2304288"/>
+            <a:ext cx="4663440" cy="2011680"/>
           </a:xfrm>
           <a:prstGeom prst="rect">
             <a:avLst/>
@@ -7118,35 +8842,42 @@
           <a:noFill/>
         </p:spPr>
         <p:txBody>
-          <a:bodyPr wrap="square" lIns="45720" rIns="45720" tIns="36576" bIns="36576" anchor="t">
+          <a:bodyPr wrap="none" lIns="164592" rIns="164592" tIns="109728" bIns="109728">
             <a:spAutoFit/>
           </a:bodyPr>
           <a:lstStyle/>
           <a:p>
-            <a:pPr algn="l">
-              <a:defRPr sz="2000" b="0">
+            <a:pPr>
+              <a:spcAft>
+                <a:spcPts val="0"/>
+              </a:spcAft>
+              <a:defRPr sz="1600">
                 <a:solidFill>
                   <a:srgbClr val="1C2330"/>
                 </a:solidFill>
-                <a:latin typeface="Aptos"/>
+                <a:latin typeface="Liberation Mono"/>
               </a:defRPr>
             </a:pPr>
             <a:r>
-              <a:t>Registra una sola entrada en el diario individual; no crees un informe paralelo.</a:t>
-            </a:r>
-          </a:p>
-        </p:txBody>
-      </p:sp>
-      <p:sp>
-        <p:nvSpPr>
-          <p:cNvPr id="11" name="Rounded Rectangle 10"/>
+              <a:t>AMPLIACIÓN · int whole = 7;</a:t>
+            </a:r>
+            <a:br/>
+            <a:r>
+              <a:t>double wider = whole; // 7.0</a:t>
+            </a:r>
+          </a:p>
+        </p:txBody>
+      </p:sp>
+      <p:sp>
+        <p:nvSpPr>
+          <p:cNvPr id="12" name="Rounded Rectangle 11"/>
           <p:cNvSpPr/>
           <p:nvPr/>
         </p:nvSpPr>
         <p:spPr>
           <a:xfrm>
-            <a:off x="658368" y="3776472"/>
-            <a:ext cx="10835640" cy="2226564"/>
+            <a:off x="6153912" y="1325880"/>
+            <a:ext cx="5230368" cy="3401568"/>
           </a:xfrm>
           <a:prstGeom prst="roundRect">
             <a:avLst/>
@@ -7156,7 +8887,7 @@
           </a:solidFill>
           <a:ln>
             <a:solidFill>
-              <a:srgbClr val="E5E9EF"/>
+              <a:srgbClr val="2F5BA8"/>
             </a:solidFill>
           </a:ln>
         </p:spPr>
@@ -7184,14 +8915,59 @@
       </p:sp>
       <p:sp>
         <p:nvSpPr>
-          <p:cNvPr id="12" name="TextBox 11"/>
+          <p:cNvPr id="13" name="Rounded Rectangle 12"/>
+          <p:cNvSpPr/>
+          <p:nvPr/>
+        </p:nvSpPr>
+        <p:spPr>
+          <a:xfrm>
+            <a:off x="6382512" y="1572768"/>
+            <a:ext cx="566928" cy="475488"/>
+          </a:xfrm>
+          <a:prstGeom prst="roundRect">
+            <a:avLst/>
+          </a:prstGeom>
+          <a:solidFill>
+            <a:srgbClr val="2F5BA8"/>
+          </a:solidFill>
+          <a:ln>
+            <a:solidFill>
+              <a:srgbClr val="2F5BA8"/>
+            </a:solidFill>
+          </a:ln>
+        </p:spPr>
+        <p:style>
+          <a:lnRef idx="1">
+            <a:schemeClr val="accent1"/>
+          </a:lnRef>
+          <a:fillRef idx="3">
+            <a:schemeClr val="accent1"/>
+          </a:fillRef>
+          <a:effectRef idx="2">
+            <a:schemeClr val="accent1"/>
+          </a:effectRef>
+          <a:fontRef idx="minor">
+            <a:schemeClr val="lt1"/>
+          </a:fontRef>
+        </p:style>
+        <p:txBody>
+          <a:bodyPr rtlCol="0" anchor="ctr"/>
+          <a:lstStyle/>
+          <a:p>
+            <a:pPr algn="ctr"/>
+          </a:p>
+        </p:txBody>
+      </p:sp>
+      <p:sp>
+        <p:nvSpPr>
+          <p:cNvPr id="14" name="TextBox 13"/>
           <p:cNvSpPr txBox="1"/>
           <p:nvPr/>
         </p:nvSpPr>
         <p:spPr>
           <a:xfrm>
-            <a:off x="850392" y="3922776"/>
-            <a:ext cx="685800" cy="384048"/>
+            <a:off x="6382512" y="1682496"/>
+            <a:ext cx="566928" cy="182880"/>
           </a:xfrm>
           <a:prstGeom prst="rect">
             <a:avLst/>
@@ -7204,30 +8980,118 @@
           </a:bodyPr>
           <a:lstStyle/>
           <a:p>
-            <a:pPr algn="l">
-              <a:defRPr sz="1200" b="1">
+            <a:pPr algn="ctr">
+              <a:defRPr sz="1300" b="1">
                 <a:solidFill>
-                  <a:srgbClr val="2F5BA8"/>
+                  <a:srgbClr val="FFFFFF"/>
                 </a:solidFill>
                 <a:latin typeface="Aptos"/>
               </a:defRPr>
             </a:pPr>
             <a:r>
-              <a:t>PASO 7</a:t>
-            </a:r>
-          </a:p>
-        </p:txBody>
-      </p:sp>
-      <p:sp>
-        <p:nvSpPr>
-          <p:cNvPr id="13" name="TextBox 12"/>
+              <a:t>B</a:t>
+            </a:r>
+          </a:p>
+        </p:txBody>
+      </p:sp>
+      <p:sp>
+        <p:nvSpPr>
+          <p:cNvPr id="15" name="TextBox 14"/>
           <p:cNvSpPr txBox="1"/>
           <p:nvPr/>
         </p:nvSpPr>
         <p:spPr>
           <a:xfrm>
-            <a:off x="1664208" y="3886200"/>
-            <a:ext cx="9464040" cy="2007108"/>
+            <a:off x="6428232" y="2304288"/>
+            <a:ext cx="4663440" cy="2011680"/>
+          </a:xfrm>
+          <a:prstGeom prst="rect">
+            <a:avLst/>
+          </a:prstGeom>
+          <a:noFill/>
+        </p:spPr>
+        <p:txBody>
+          <a:bodyPr wrap="none" lIns="164592" rIns="164592" tIns="109728" bIns="109728">
+            <a:spAutoFit/>
+          </a:bodyPr>
+          <a:lstStyle/>
+          <a:p>
+            <a:pPr>
+              <a:spcAft>
+                <a:spcPts val="0"/>
+              </a:spcAft>
+              <a:defRPr sz="1600">
+                <a:solidFill>
+                  <a:srgbClr val="1C2330"/>
+                </a:solidFill>
+                <a:latin typeface="Liberation Mono"/>
+              </a:defRPr>
+            </a:pPr>
+            <a:r>
+              <a:t>CASTING · double price = 12.75;</a:t>
+            </a:r>
+            <a:br/>
+            <a:r>
+              <a:t>int wholePrice = (int) price; // 12</a:t>
+            </a:r>
+          </a:p>
+        </p:txBody>
+      </p:sp>
+      <p:sp>
+        <p:nvSpPr>
+          <p:cNvPr id="16" name="Rounded Rectangle 15"/>
+          <p:cNvSpPr/>
+          <p:nvPr/>
+        </p:nvSpPr>
+        <p:spPr>
+          <a:xfrm>
+            <a:off x="621792" y="5010912"/>
+            <a:ext cx="10762488" cy="932688"/>
+          </a:xfrm>
+          <a:prstGeom prst="roundRect">
+            <a:avLst/>
+          </a:prstGeom>
+          <a:solidFill>
+            <a:srgbClr val="121824"/>
+          </a:solidFill>
+          <a:ln>
+            <a:solidFill>
+              <a:srgbClr val="121824"/>
+            </a:solidFill>
+          </a:ln>
+        </p:spPr>
+        <p:style>
+          <a:lnRef idx="1">
+            <a:schemeClr val="accent1"/>
+          </a:lnRef>
+          <a:fillRef idx="3">
+            <a:schemeClr val="accent1"/>
+          </a:fillRef>
+          <a:effectRef idx="2">
+            <a:schemeClr val="accent1"/>
+          </a:effectRef>
+          <a:fontRef idx="minor">
+            <a:schemeClr val="lt1"/>
+          </a:fontRef>
+        </p:style>
+        <p:txBody>
+          <a:bodyPr rtlCol="0" anchor="ctr"/>
+          <a:lstStyle/>
+          <a:p>
+            <a:pPr algn="ctr"/>
+          </a:p>
+        </p:txBody>
+      </p:sp>
+      <p:sp>
+        <p:nvSpPr>
+          <p:cNvPr id="17" name="TextBox 16"/>
+          <p:cNvSpPr txBox="1"/>
+          <p:nvPr/>
+        </p:nvSpPr>
+        <p:spPr>
+          <a:xfrm>
+            <a:off x="896112" y="5230368"/>
+            <a:ext cx="10204704" cy="475488"/>
           </a:xfrm>
           <a:prstGeom prst="rect">
             <a:avLst/>
@@ -7240,16 +9104,16 @@
           </a:bodyPr>
           <a:lstStyle/>
           <a:p>
-            <a:pPr algn="l">
-              <a:defRPr sz="2000" b="0">
+            <a:pPr algn="ctr">
+              <a:defRPr sz="1700" b="1">
                 <a:solidFill>
-                  <a:srgbClr val="1C2330"/>
+                  <a:srgbClr val="FFFFFF"/>
                 </a:solidFill>
                 <a:latin typeface="Aptos"/>
               </a:defRPr>
             </a:pPr>
             <a:r>
-              <a:t>¿Qué puedes señalar, explicar y probar al terminar este checkpoint?</a:t>
+              <a:t>El casting descarta la parte decimal hacia cero; no redondea.</a:t>
             </a:r>
           </a:p>
         </p:txBody>
@@ -7389,7 +9253,7 @@
               </a:defRPr>
             </a:pPr>
             <a:r>
-              <a:t>COMPROBAR</a:t>
+              <a:t>CONTRASTAR PARA DECIDIR</a:t>
             </a:r>
           </a:p>
         </p:txBody>
@@ -7425,7 +9289,7 @@
               </a:defRPr>
             </a:pPr>
             <a:r>
-              <a:t>Evidencia y comprobación</a:t>
+              <a:t>Compila, pero falla al ejecutar</a:t>
             </a:r>
           </a:p>
         </p:txBody>
@@ -7517,8 +9381,173 @@
         </p:nvSpPr>
         <p:spPr>
           <a:xfrm>
-            <a:off x="713232" y="1298448"/>
-            <a:ext cx="420624" cy="420624"/>
+            <a:off x="621792" y="1325880"/>
+            <a:ext cx="5230368" cy="3401568"/>
+          </a:xfrm>
+          <a:prstGeom prst="roundRect">
+            <a:avLst/>
+          </a:prstGeom>
+          <a:solidFill>
+            <a:srgbClr val="FFFFFF"/>
+          </a:solidFill>
+          <a:ln>
+            <a:solidFill>
+              <a:srgbClr val="445B80"/>
+            </a:solidFill>
+          </a:ln>
+        </p:spPr>
+        <p:style>
+          <a:lnRef idx="1">
+            <a:schemeClr val="accent1"/>
+          </a:lnRef>
+          <a:fillRef idx="3">
+            <a:schemeClr val="accent1"/>
+          </a:fillRef>
+          <a:effectRef idx="2">
+            <a:schemeClr val="accent1"/>
+          </a:effectRef>
+          <a:fontRef idx="minor">
+            <a:schemeClr val="lt1"/>
+          </a:fontRef>
+        </p:style>
+        <p:txBody>
+          <a:bodyPr rtlCol="0" anchor="ctr"/>
+          <a:lstStyle/>
+          <a:p>
+            <a:pPr algn="ctr"/>
+          </a:p>
+        </p:txBody>
+      </p:sp>
+      <p:sp>
+        <p:nvSpPr>
+          <p:cNvPr id="9" name="Rounded Rectangle 8"/>
+          <p:cNvSpPr/>
+          <p:nvPr/>
+        </p:nvSpPr>
+        <p:spPr>
+          <a:xfrm>
+            <a:off x="850392" y="1572768"/>
+            <a:ext cx="566928" cy="475488"/>
+          </a:xfrm>
+          <a:prstGeom prst="roundRect">
+            <a:avLst/>
+          </a:prstGeom>
+          <a:solidFill>
+            <a:srgbClr val="445B80"/>
+          </a:solidFill>
+          <a:ln>
+            <a:solidFill>
+              <a:srgbClr val="445B80"/>
+            </a:solidFill>
+          </a:ln>
+        </p:spPr>
+        <p:style>
+          <a:lnRef idx="1">
+            <a:schemeClr val="accent1"/>
+          </a:lnRef>
+          <a:fillRef idx="3">
+            <a:schemeClr val="accent1"/>
+          </a:fillRef>
+          <a:effectRef idx="2">
+            <a:schemeClr val="accent1"/>
+          </a:effectRef>
+          <a:fontRef idx="minor">
+            <a:schemeClr val="lt1"/>
+          </a:fontRef>
+        </p:style>
+        <p:txBody>
+          <a:bodyPr rtlCol="0" anchor="ctr"/>
+          <a:lstStyle/>
+          <a:p>
+            <a:pPr algn="ctr"/>
+          </a:p>
+        </p:txBody>
+      </p:sp>
+      <p:sp>
+        <p:nvSpPr>
+          <p:cNvPr id="10" name="TextBox 9"/>
+          <p:cNvSpPr txBox="1"/>
+          <p:nvPr/>
+        </p:nvSpPr>
+        <p:spPr>
+          <a:xfrm>
+            <a:off x="850392" y="1682496"/>
+            <a:ext cx="566928" cy="182880"/>
+          </a:xfrm>
+          <a:prstGeom prst="rect">
+            <a:avLst/>
+          </a:prstGeom>
+          <a:noFill/>
+        </p:spPr>
+        <p:txBody>
+          <a:bodyPr wrap="square" lIns="45720" rIns="45720" tIns="36576" bIns="36576" anchor="t">
+            <a:spAutoFit/>
+          </a:bodyPr>
+          <a:lstStyle/>
+          <a:p>
+            <a:pPr algn="ctr">
+              <a:defRPr sz="1300" b="1">
+                <a:solidFill>
+                  <a:srgbClr val="FFFFFF"/>
+                </a:solidFill>
+                <a:latin typeface="Aptos"/>
+              </a:defRPr>
+            </a:pPr>
+            <a:r>
+              <a:t>A</a:t>
+            </a:r>
+          </a:p>
+        </p:txBody>
+      </p:sp>
+      <p:sp>
+        <p:nvSpPr>
+          <p:cNvPr id="11" name="TextBox 10"/>
+          <p:cNvSpPr txBox="1"/>
+          <p:nvPr/>
+        </p:nvSpPr>
+        <p:spPr>
+          <a:xfrm>
+            <a:off x="896112" y="2304288"/>
+            <a:ext cx="4663440" cy="2011680"/>
+          </a:xfrm>
+          <a:prstGeom prst="rect">
+            <a:avLst/>
+          </a:prstGeom>
+          <a:noFill/>
+        </p:spPr>
+        <p:txBody>
+          <a:bodyPr wrap="none" lIns="164592" rIns="164592" tIns="109728" bIns="109728">
+            <a:spAutoFit/>
+          </a:bodyPr>
+          <a:lstStyle/>
+          <a:p>
+            <a:pPr>
+              <a:spcAft>
+                <a:spcPts val="0"/>
+              </a:spcAft>
+              <a:defRPr sz="1600">
+                <a:solidFill>
+                  <a:srgbClr val="1C2330"/>
+                </a:solidFill>
+                <a:latin typeface="Liberation Mono"/>
+              </a:defRPr>
+            </a:pPr>
+            <a:r>
+              <a:t>VÁLIDO · Integer.parseInt("12") → 12</a:t>
+            </a:r>
+          </a:p>
+        </p:txBody>
+      </p:sp>
+      <p:sp>
+        <p:nvSpPr>
+          <p:cNvPr id="12" name="Rounded Rectangle 11"/>
+          <p:cNvSpPr/>
+          <p:nvPr/>
+        </p:nvSpPr>
+        <p:spPr>
+          <a:xfrm>
+            <a:off x="6153912" y="1325880"/>
+            <a:ext cx="5230368" cy="3401568"/>
           </a:xfrm>
           <a:prstGeom prst="roundRect">
             <a:avLst/>
@@ -7556,56 +9585,20 @@
       </p:sp>
       <p:sp>
         <p:nvSpPr>
-          <p:cNvPr id="9" name="TextBox 8"/>
-          <p:cNvSpPr txBox="1"/>
-          <p:nvPr/>
-        </p:nvSpPr>
-        <p:spPr>
-          <a:xfrm>
-            <a:off x="1389888" y="1280160"/>
-            <a:ext cx="9829800" cy="1624584"/>
-          </a:xfrm>
-          <a:prstGeom prst="rect">
-            <a:avLst/>
-          </a:prstGeom>
-          <a:noFill/>
-        </p:spPr>
-        <p:txBody>
-          <a:bodyPr wrap="square" lIns="45720" rIns="45720" tIns="36576" bIns="36576" anchor="t">
-            <a:spAutoFit/>
-          </a:bodyPr>
-          <a:lstStyle/>
-          <a:p>
-            <a:pPr algn="l">
-              <a:defRPr sz="1900" b="0">
-                <a:solidFill>
-                  <a:srgbClr val="1C2330"/>
-                </a:solidFill>
-                <a:latin typeface="Aptos"/>
-              </a:defRPr>
-            </a:pPr>
-            <a:r>
-              <a:t>conserva el código o la prueba en el lugar indicado por la sesión;</a:t>
-            </a:r>
-          </a:p>
-        </p:txBody>
-      </p:sp>
-      <p:sp>
-        <p:nvSpPr>
-          <p:cNvPr id="10" name="Rounded Rectangle 9"/>
+          <p:cNvPr id="13" name="Rounded Rectangle 12"/>
           <p:cNvSpPr/>
           <p:nvPr/>
         </p:nvSpPr>
         <p:spPr>
           <a:xfrm>
-            <a:off x="713232" y="2959607"/>
-            <a:ext cx="420624" cy="420624"/>
+            <a:off x="6382512" y="1572768"/>
+            <a:ext cx="566928" cy="475488"/>
           </a:xfrm>
           <a:prstGeom prst="roundRect">
             <a:avLst/>
           </a:prstGeom>
           <a:solidFill>
-            <a:srgbClr val="FFFFFF"/>
+            <a:srgbClr val="2F5BA8"/>
           </a:solidFill>
           <a:ln>
             <a:solidFill>
@@ -7637,14 +9630,14 @@
       </p:sp>
       <p:sp>
         <p:nvSpPr>
-          <p:cNvPr id="11" name="TextBox 10"/>
+          <p:cNvPr id="14" name="TextBox 13"/>
           <p:cNvSpPr txBox="1"/>
           <p:nvPr/>
         </p:nvSpPr>
         <p:spPr>
           <a:xfrm>
-            <a:off x="1389888" y="2941319"/>
-            <a:ext cx="9829800" cy="1624584"/>
+            <a:off x="6382512" y="1682496"/>
+            <a:ext cx="566928" cy="182880"/>
           </a:xfrm>
           <a:prstGeom prst="rect">
             <a:avLst/>
@@ -7657,40 +9650,79 @@
           </a:bodyPr>
           <a:lstStyle/>
           <a:p>
-            <a:pPr algn="l">
-              <a:defRPr sz="1900" b="0">
+            <a:pPr algn="ctr">
+              <a:defRPr sz="1300" b="1">
                 <a:solidFill>
-                  <a:srgbClr val="1C2330"/>
+                  <a:srgbClr val="FFFFFF"/>
                 </a:solidFill>
                 <a:latin typeface="Aptos"/>
               </a:defRPr>
             </a:pPr>
             <a:r>
-              <a:t>añade una sola entrada al diario individual con prueba, bloqueo y siguiente paso;</a:t>
-            </a:r>
-          </a:p>
-        </p:txBody>
-      </p:sp>
-      <p:sp>
-        <p:nvSpPr>
-          <p:cNvPr id="12" name="Rounded Rectangle 11"/>
+              <a:t>B</a:t>
+            </a:r>
+          </a:p>
+        </p:txBody>
+      </p:sp>
+      <p:sp>
+        <p:nvSpPr>
+          <p:cNvPr id="15" name="TextBox 14"/>
+          <p:cNvSpPr txBox="1"/>
+          <p:nvPr/>
+        </p:nvSpPr>
+        <p:spPr>
+          <a:xfrm>
+            <a:off x="6428232" y="2304288"/>
+            <a:ext cx="4663440" cy="2011680"/>
+          </a:xfrm>
+          <a:prstGeom prst="rect">
+            <a:avLst/>
+          </a:prstGeom>
+          <a:noFill/>
+        </p:spPr>
+        <p:txBody>
+          <a:bodyPr wrap="none" lIns="164592" rIns="164592" tIns="109728" bIns="109728">
+            <a:spAutoFit/>
+          </a:bodyPr>
+          <a:lstStyle/>
+          <a:p>
+            <a:pPr>
+              <a:spcAft>
+                <a:spcPts val="0"/>
+              </a:spcAft>
+              <a:defRPr sz="1600">
+                <a:solidFill>
+                  <a:srgbClr val="1C2330"/>
+                </a:solidFill>
+                <a:latin typeface="Liberation Mono"/>
+              </a:defRPr>
+            </a:pPr>
+            <a:r>
+              <a:t>ERROR · Integer.parseInt("hola") → NumberFormatException</a:t>
+            </a:r>
+          </a:p>
+        </p:txBody>
+      </p:sp>
+      <p:sp>
+        <p:nvSpPr>
+          <p:cNvPr id="16" name="Rounded Rectangle 15"/>
           <p:cNvSpPr/>
           <p:nvPr/>
         </p:nvSpPr>
         <p:spPr>
           <a:xfrm>
-            <a:off x="713232" y="4620767"/>
-            <a:ext cx="420624" cy="420624"/>
+            <a:off x="621792" y="5010912"/>
+            <a:ext cx="10762488" cy="932688"/>
           </a:xfrm>
           <a:prstGeom prst="roundRect">
             <a:avLst/>
           </a:prstGeom>
           <a:solidFill>
-            <a:srgbClr val="FFFFFF"/>
+            <a:srgbClr val="121824"/>
           </a:solidFill>
           <a:ln>
             <a:solidFill>
-              <a:srgbClr val="2F5BA8"/>
+              <a:srgbClr val="121824"/>
             </a:solidFill>
           </a:ln>
         </p:spPr>
@@ -7718,14 +9750,14 @@
       </p:sp>
       <p:sp>
         <p:nvSpPr>
-          <p:cNvPr id="13" name="TextBox 12"/>
+          <p:cNvPr id="17" name="TextBox 16"/>
           <p:cNvSpPr txBox="1"/>
           <p:nvPr/>
         </p:nvSpPr>
         <p:spPr>
           <a:xfrm>
-            <a:off x="1389888" y="4602480"/>
-            <a:ext cx="9829800" cy="1624584"/>
+            <a:off x="896112" y="5230368"/>
+            <a:ext cx="10204704" cy="475488"/>
           </a:xfrm>
           <a:prstGeom prst="rect">
             <a:avLst/>
@@ -7738,16 +9770,16 @@
           </a:bodyPr>
           <a:lstStyle/>
           <a:p>
-            <a:pPr algn="l">
-              <a:defRPr sz="1900" b="0">
+            <a:pPr algn="ctr">
+              <a:defRPr sz="1700" b="1">
                 <a:solidFill>
-                  <a:srgbClr val="1C2330"/>
+                  <a:srgbClr val="FFFFFF"/>
                 </a:solidFill>
                 <a:latin typeface="Aptos"/>
               </a:defRPr>
             </a:pPr>
             <a:r>
-              <a:t>no copies la misma reflexión en otro documento; el Site personal seleccionará evidencias al cerrar H1.</a:t>
+              <a:t>H1 observa y explica el error de ejecución; try-catch llegará más adelante.</a:t>
             </a:r>
           </a:p>
         </p:txBody>
@@ -7887,7 +9919,7 @@
               </a:defRPr>
             </a:pPr>
             <a:r>
-              <a:t>LÍMITES QUE PROTEGEN EL APRENDIZAJE</a:t>
+              <a:t>APLICAR Y DECIDIR</a:t>
             </a:r>
           </a:p>
         </p:txBody>
@@ -7923,7 +9955,7 @@
               </a:defRPr>
             </a:pPr>
             <a:r>
-              <a:t>Seguridad y uso responsable</a:t>
+              <a:t>Prueba entrada válida e inválida</a:t>
             </a:r>
           </a:p>
         </p:txBody>
@@ -8015,8 +10047,8 @@
         </p:nvSpPr>
         <p:spPr>
           <a:xfrm>
-            <a:off x="621792" y="1298448"/>
-            <a:ext cx="5230368" cy="4553712"/>
+            <a:off x="658368" y="1307592"/>
+            <a:ext cx="10835640" cy="1049274"/>
           </a:xfrm>
           <a:prstGeom prst="roundRect">
             <a:avLst/>
@@ -8054,57 +10086,14 @@
       </p:sp>
       <p:sp>
         <p:nvSpPr>
-          <p:cNvPr id="9" name="Rounded Rectangle 8"/>
-          <p:cNvSpPr/>
-          <p:nvPr/>
-        </p:nvSpPr>
-        <p:spPr>
-          <a:xfrm>
-            <a:off x="841248" y="1527048"/>
-            <a:ext cx="237744" cy="4096512"/>
-          </a:xfrm>
-          <a:prstGeom prst="roundRect">
-            <a:avLst/>
-          </a:prstGeom>
-          <a:solidFill>
-            <a:srgbClr val="247E5C"/>
-          </a:solidFill>
-          <a:ln>
-            <a:noFill/>
-          </a:ln>
-        </p:spPr>
-        <p:style>
-          <a:lnRef idx="1">
-            <a:schemeClr val="accent1"/>
-          </a:lnRef>
-          <a:fillRef idx="3">
-            <a:schemeClr val="accent1"/>
-          </a:fillRef>
-          <a:effectRef idx="2">
-            <a:schemeClr val="accent1"/>
-          </a:effectRef>
-          <a:fontRef idx="minor">
-            <a:schemeClr val="lt1"/>
-          </a:fontRef>
-        </p:style>
-        <p:txBody>
-          <a:bodyPr rtlCol="0" anchor="ctr"/>
-          <a:lstStyle/>
-          <a:p>
-            <a:pPr algn="ctr"/>
-          </a:p>
-        </p:txBody>
-      </p:sp>
-      <p:sp>
-        <p:nvSpPr>
-          <p:cNvPr id="10" name="TextBox 9"/>
+          <p:cNvPr id="9" name="TextBox 8"/>
           <p:cNvSpPr txBox="1"/>
           <p:nvPr/>
         </p:nvSpPr>
         <p:spPr>
           <a:xfrm>
-            <a:off x="1280160" y="1527048"/>
-            <a:ext cx="4224528" cy="4160520"/>
+            <a:off x="850392" y="1453895"/>
+            <a:ext cx="685800" cy="384048"/>
           </a:xfrm>
           <a:prstGeom prst="rect">
             <a:avLst/>
@@ -8118,7 +10107,43 @@
           <a:lstStyle/>
           <a:p>
             <a:pPr algn="l">
-              <a:defRPr sz="1900" b="0">
+              <a:defRPr sz="1200" b="1">
+                <a:solidFill>
+                  <a:srgbClr val="2F5BA8"/>
+                </a:solidFill>
+                <a:latin typeface="Aptos"/>
+              </a:defRPr>
+            </a:pPr>
+            <a:r>
+              <a:t>PASO 1</a:t>
+            </a:r>
+          </a:p>
+        </p:txBody>
+      </p:sp>
+      <p:sp>
+        <p:nvSpPr>
+          <p:cNvPr id="10" name="TextBox 9"/>
+          <p:cNvSpPr txBox="1"/>
+          <p:nvPr/>
+        </p:nvSpPr>
+        <p:spPr>
+          <a:xfrm>
+            <a:off x="1664208" y="1417319"/>
+            <a:ext cx="9464040" cy="829818"/>
+          </a:xfrm>
+          <a:prstGeom prst="rect">
+            <a:avLst/>
+          </a:prstGeom>
+          <a:noFill/>
+        </p:spPr>
+        <p:txBody>
+          <a:bodyPr wrap="square" lIns="45720" rIns="45720" tIns="36576" bIns="36576" anchor="t">
+            <a:spAutoFit/>
+          </a:bodyPr>
+          <a:lstStyle/>
+          <a:p>
+            <a:pPr algn="l">
+              <a:defRPr sz="2000" b="0">
                 <a:solidFill>
                   <a:srgbClr val="1C2330"/>
                 </a:solidFill>
@@ -8126,7 +10151,7 @@
               </a:defRPr>
             </a:pPr>
             <a:r>
-              <a:t>Usa datos ficticios y no publiques credenciales ni información personal.</a:t>
+              <a:t>Pide un nombre ficticio y úsalo en un saludo.</a:t>
             </a:r>
           </a:p>
         </p:txBody>
@@ -8139,8 +10164,8 @@
         </p:nvSpPr>
         <p:spPr>
           <a:xfrm>
-            <a:off x="6126479" y="1298448"/>
-            <a:ext cx="5230368" cy="4553712"/>
+            <a:off x="658368" y="2542032"/>
+            <a:ext cx="10835640" cy="1049274"/>
           </a:xfrm>
           <a:prstGeom prst="roundRect">
             <a:avLst/>
@@ -8178,57 +10203,14 @@
       </p:sp>
       <p:sp>
         <p:nvSpPr>
-          <p:cNvPr id="12" name="Rounded Rectangle 11"/>
-          <p:cNvSpPr/>
-          <p:nvPr/>
-        </p:nvSpPr>
-        <p:spPr>
-          <a:xfrm>
-            <a:off x="6345936" y="1527048"/>
-            <a:ext cx="237744" cy="4096512"/>
-          </a:xfrm>
-          <a:prstGeom prst="roundRect">
-            <a:avLst/>
-          </a:prstGeom>
-          <a:solidFill>
-            <a:srgbClr val="C07020"/>
-          </a:solidFill>
-          <a:ln>
-            <a:noFill/>
-          </a:ln>
-        </p:spPr>
-        <p:style>
-          <a:lnRef idx="1">
-            <a:schemeClr val="accent1"/>
-          </a:lnRef>
-          <a:fillRef idx="3">
-            <a:schemeClr val="accent1"/>
-          </a:fillRef>
-          <a:effectRef idx="2">
-            <a:schemeClr val="accent1"/>
-          </a:effectRef>
-          <a:fontRef idx="minor">
-            <a:schemeClr val="lt1"/>
-          </a:fontRef>
-        </p:style>
-        <p:txBody>
-          <a:bodyPr rtlCol="0" anchor="ctr"/>
-          <a:lstStyle/>
-          <a:p>
-            <a:pPr algn="ctr"/>
-          </a:p>
-        </p:txBody>
-      </p:sp>
-      <p:sp>
-        <p:nvSpPr>
-          <p:cNvPr id="13" name="TextBox 12"/>
+          <p:cNvPr id="12" name="TextBox 11"/>
           <p:cNvSpPr txBox="1"/>
           <p:nvPr/>
         </p:nvSpPr>
         <p:spPr>
           <a:xfrm>
-            <a:off x="6784847" y="1527048"/>
-            <a:ext cx="4224528" cy="4160520"/>
+            <a:off x="850392" y="2688336"/>
+            <a:ext cx="685800" cy="384048"/>
           </a:xfrm>
           <a:prstGeom prst="rect">
             <a:avLst/>
@@ -8242,7 +10224,43 @@
           <a:lstStyle/>
           <a:p>
             <a:pPr algn="l">
-              <a:defRPr sz="1900" b="0">
+              <a:defRPr sz="1200" b="1">
+                <a:solidFill>
+                  <a:srgbClr val="2F5BA8"/>
+                </a:solidFill>
+                <a:latin typeface="Aptos"/>
+              </a:defRPr>
+            </a:pPr>
+            <a:r>
+              <a:t>PASO 2</a:t>
+            </a:r>
+          </a:p>
+        </p:txBody>
+      </p:sp>
+      <p:sp>
+        <p:nvSpPr>
+          <p:cNvPr id="13" name="TextBox 12"/>
+          <p:cNvSpPr txBox="1"/>
+          <p:nvPr/>
+        </p:nvSpPr>
+        <p:spPr>
+          <a:xfrm>
+            <a:off x="1664208" y="2651760"/>
+            <a:ext cx="9464040" cy="829818"/>
+          </a:xfrm>
+          <a:prstGeom prst="rect">
+            <a:avLst/>
+          </a:prstGeom>
+          <a:noFill/>
+        </p:spPr>
+        <p:txBody>
+          <a:bodyPr wrap="square" lIns="45720" rIns="45720" tIns="36576" bIns="36576" anchor="t">
+            <a:spAutoFit/>
+          </a:bodyPr>
+          <a:lstStyle/>
+          <a:p>
+            <a:pPr algn="l">
+              <a:defRPr sz="2000" b="0">
                 <a:solidFill>
                   <a:srgbClr val="1C2330"/>
                 </a:solidFill>
@@ -8250,7 +10268,241 @@
               </a:defRPr>
             </a:pPr>
             <a:r>
-              <a:t>Si utilizas IA de forma sustantiva, registra propósito, propuesta, cambios propios y validación en el registro de IA del hito.</a:t>
+              <a:t>Lee horas como texto, conviértelas a int y calcula minutos.</a:t>
+            </a:r>
+          </a:p>
+        </p:txBody>
+      </p:sp>
+      <p:sp>
+        <p:nvSpPr>
+          <p:cNvPr id="14" name="Rounded Rectangle 13"/>
+          <p:cNvSpPr/>
+          <p:nvPr/>
+        </p:nvSpPr>
+        <p:spPr>
+          <a:xfrm>
+            <a:off x="658368" y="3776472"/>
+            <a:ext cx="10835640" cy="1049274"/>
+          </a:xfrm>
+          <a:prstGeom prst="roundRect">
+            <a:avLst/>
+          </a:prstGeom>
+          <a:solidFill>
+            <a:srgbClr val="FFFFFF"/>
+          </a:solidFill>
+          <a:ln>
+            <a:solidFill>
+              <a:srgbClr val="E5E9EF"/>
+            </a:solidFill>
+          </a:ln>
+        </p:spPr>
+        <p:style>
+          <a:lnRef idx="1">
+            <a:schemeClr val="accent1"/>
+          </a:lnRef>
+          <a:fillRef idx="3">
+            <a:schemeClr val="accent1"/>
+          </a:fillRef>
+          <a:effectRef idx="2">
+            <a:schemeClr val="accent1"/>
+          </a:effectRef>
+          <a:fontRef idx="minor">
+            <a:schemeClr val="lt1"/>
+          </a:fontRef>
+        </p:style>
+        <p:txBody>
+          <a:bodyPr rtlCol="0" anchor="ctr"/>
+          <a:lstStyle/>
+          <a:p>
+            <a:pPr algn="ctr"/>
+          </a:p>
+        </p:txBody>
+      </p:sp>
+      <p:sp>
+        <p:nvSpPr>
+          <p:cNvPr id="15" name="TextBox 14"/>
+          <p:cNvSpPr txBox="1"/>
+          <p:nvPr/>
+        </p:nvSpPr>
+        <p:spPr>
+          <a:xfrm>
+            <a:off x="850392" y="3922776"/>
+            <a:ext cx="685800" cy="384048"/>
+          </a:xfrm>
+          <a:prstGeom prst="rect">
+            <a:avLst/>
+          </a:prstGeom>
+          <a:noFill/>
+        </p:spPr>
+        <p:txBody>
+          <a:bodyPr wrap="square" lIns="45720" rIns="45720" tIns="36576" bIns="36576" anchor="t">
+            <a:spAutoFit/>
+          </a:bodyPr>
+          <a:lstStyle/>
+          <a:p>
+            <a:pPr algn="l">
+              <a:defRPr sz="1200" b="1">
+                <a:solidFill>
+                  <a:srgbClr val="2F5BA8"/>
+                </a:solidFill>
+                <a:latin typeface="Aptos"/>
+              </a:defRPr>
+            </a:pPr>
+            <a:r>
+              <a:t>PASO 3</a:t>
+            </a:r>
+          </a:p>
+        </p:txBody>
+      </p:sp>
+      <p:sp>
+        <p:nvSpPr>
+          <p:cNvPr id="16" name="TextBox 15"/>
+          <p:cNvSpPr txBox="1"/>
+          <p:nvPr/>
+        </p:nvSpPr>
+        <p:spPr>
+          <a:xfrm>
+            <a:off x="1664208" y="3886200"/>
+            <a:ext cx="9464040" cy="829818"/>
+          </a:xfrm>
+          <a:prstGeom prst="rect">
+            <a:avLst/>
+          </a:prstGeom>
+          <a:noFill/>
+        </p:spPr>
+        <p:txBody>
+          <a:bodyPr wrap="square" lIns="45720" rIns="45720" tIns="36576" bIns="36576" anchor="t">
+            <a:spAutoFit/>
+          </a:bodyPr>
+          <a:lstStyle/>
+          <a:p>
+            <a:pPr algn="l">
+              <a:defRPr sz="2000" b="0">
+                <a:solidFill>
+                  <a:srgbClr val="1C2330"/>
+                </a:solidFill>
+                <a:latin typeface="Aptos"/>
+              </a:defRPr>
+            </a:pPr>
+            <a:r>
+              <a:t>Ejecuta con un número válido y registra salida esperada y observada.</a:t>
+            </a:r>
+          </a:p>
+        </p:txBody>
+      </p:sp>
+      <p:sp>
+        <p:nvSpPr>
+          <p:cNvPr id="17" name="Rounded Rectangle 16"/>
+          <p:cNvSpPr/>
+          <p:nvPr/>
+        </p:nvSpPr>
+        <p:spPr>
+          <a:xfrm>
+            <a:off x="658368" y="5010912"/>
+            <a:ext cx="10835640" cy="1049274"/>
+          </a:xfrm>
+          <a:prstGeom prst="roundRect">
+            <a:avLst/>
+          </a:prstGeom>
+          <a:solidFill>
+            <a:srgbClr val="FFFFFF"/>
+          </a:solidFill>
+          <a:ln>
+            <a:solidFill>
+              <a:srgbClr val="E5E9EF"/>
+            </a:solidFill>
+          </a:ln>
+        </p:spPr>
+        <p:style>
+          <a:lnRef idx="1">
+            <a:schemeClr val="accent1"/>
+          </a:lnRef>
+          <a:fillRef idx="3">
+            <a:schemeClr val="accent1"/>
+          </a:fillRef>
+          <a:effectRef idx="2">
+            <a:schemeClr val="accent1"/>
+          </a:effectRef>
+          <a:fontRef idx="minor">
+            <a:schemeClr val="lt1"/>
+          </a:fontRef>
+        </p:style>
+        <p:txBody>
+          <a:bodyPr rtlCol="0" anchor="ctr"/>
+          <a:lstStyle/>
+          <a:p>
+            <a:pPr algn="ctr"/>
+          </a:p>
+        </p:txBody>
+      </p:sp>
+      <p:sp>
+        <p:nvSpPr>
+          <p:cNvPr id="18" name="TextBox 17"/>
+          <p:cNvSpPr txBox="1"/>
+          <p:nvPr/>
+        </p:nvSpPr>
+        <p:spPr>
+          <a:xfrm>
+            <a:off x="850392" y="5157216"/>
+            <a:ext cx="685800" cy="384048"/>
+          </a:xfrm>
+          <a:prstGeom prst="rect">
+            <a:avLst/>
+          </a:prstGeom>
+          <a:noFill/>
+        </p:spPr>
+        <p:txBody>
+          <a:bodyPr wrap="square" lIns="45720" rIns="45720" tIns="36576" bIns="36576" anchor="t">
+            <a:spAutoFit/>
+          </a:bodyPr>
+          <a:lstStyle/>
+          <a:p>
+            <a:pPr algn="l">
+              <a:defRPr sz="1200" b="1">
+                <a:solidFill>
+                  <a:srgbClr val="2F5BA8"/>
+                </a:solidFill>
+                <a:latin typeface="Aptos"/>
+              </a:defRPr>
+            </a:pPr>
+            <a:r>
+              <a:t>PASO 4</a:t>
+            </a:r>
+          </a:p>
+        </p:txBody>
+      </p:sp>
+      <p:sp>
+        <p:nvSpPr>
+          <p:cNvPr id="19" name="TextBox 18"/>
+          <p:cNvSpPr txBox="1"/>
+          <p:nvPr/>
+        </p:nvSpPr>
+        <p:spPr>
+          <a:xfrm>
+            <a:off x="1664208" y="5120640"/>
+            <a:ext cx="9464040" cy="829818"/>
+          </a:xfrm>
+          <a:prstGeom prst="rect">
+            <a:avLst/>
+          </a:prstGeom>
+          <a:noFill/>
+        </p:spPr>
+        <p:txBody>
+          <a:bodyPr wrap="square" lIns="45720" rIns="45720" tIns="36576" bIns="36576" anchor="t">
+            <a:spAutoFit/>
+          </a:bodyPr>
+          <a:lstStyle/>
+          <a:p>
+            <a:pPr algn="l">
+              <a:defRPr sz="2000" b="0">
+                <a:solidFill>
+                  <a:srgbClr val="1C2330"/>
+                </a:solidFill>
+                <a:latin typeface="Aptos"/>
+              </a:defRPr>
+            </a:pPr>
+            <a:r>
+              <a:t>Ejecuta con hola, identifica cuándo falla y explica por qué.</a:t>
             </a:r>
           </a:p>
         </p:txBody>
@@ -8390,7 +10642,7 @@
               </a:defRPr>
             </a:pPr>
             <a:r>
-              <a:t>EXPLICAR Y DEFENDER</a:t>
+              <a:t>COMPROBAR</a:t>
             </a:r>
           </a:p>
         </p:txBody>
@@ -8426,7 +10678,7 @@
               </a:defRPr>
             </a:pPr>
             <a:r>
-              <a:t>Cierre y defensa</a:t>
+              <a:t>Qué debe demostrar la prueba</a:t>
             </a:r>
           </a:p>
         </p:txBody>
@@ -8518,14 +10770,14 @@
         </p:nvSpPr>
         <p:spPr>
           <a:xfrm>
-            <a:off x="621792" y="1298448"/>
-            <a:ext cx="10927080" cy="1828800"/>
+            <a:off x="713232" y="1298448"/>
+            <a:ext cx="420624" cy="420624"/>
           </a:xfrm>
           <a:prstGeom prst="roundRect">
             <a:avLst/>
           </a:prstGeom>
           <a:solidFill>
-            <a:srgbClr val="2F5BA8"/>
+            <a:srgbClr val="FFFFFF"/>
           </a:solidFill>
           <a:ln>
             <a:solidFill>
@@ -8563,8 +10815,8 @@
         </p:nvSpPr>
         <p:spPr>
           <a:xfrm>
-            <a:off x="932688" y="1591056"/>
-            <a:ext cx="10241280" cy="256032"/>
+            <a:off x="1389888" y="1280160"/>
+            <a:ext cx="9829800" cy="1209294"/>
           </a:xfrm>
           <a:prstGeom prst="rect">
             <a:avLst/>
@@ -8578,29 +10830,74 @@
           <a:lstStyle/>
           <a:p>
             <a:pPr algn="l">
-              <a:defRPr sz="1300" b="1">
+              <a:defRPr sz="1900" b="0">
                 <a:solidFill>
-                  <a:srgbClr val="FFFFFF"/>
+                  <a:srgbClr val="1C2330"/>
                 </a:solidFill>
                 <a:latin typeface="Aptos"/>
               </a:defRPr>
             </a:pPr>
             <a:r>
-              <a:t>PREGUNTA O DECISIÓN DE SALIDA</a:t>
-            </a:r>
-          </a:p>
-        </p:txBody>
-      </p:sp>
-      <p:sp>
-        <p:nvSpPr>
-          <p:cNvPr id="10" name="TextBox 9"/>
+              <a:t>Uso una sola instancia de Scanner.</a:t>
+            </a:r>
+          </a:p>
+        </p:txBody>
+      </p:sp>
+      <p:sp>
+        <p:nvSpPr>
+          <p:cNvPr id="10" name="Rounded Rectangle 9"/>
+          <p:cNvSpPr/>
+          <p:nvPr/>
+        </p:nvSpPr>
+        <p:spPr>
+          <a:xfrm>
+            <a:off x="713232" y="2544318"/>
+            <a:ext cx="420624" cy="420624"/>
+          </a:xfrm>
+          <a:prstGeom prst="roundRect">
+            <a:avLst/>
+          </a:prstGeom>
+          <a:solidFill>
+            <a:srgbClr val="FFFFFF"/>
+          </a:solidFill>
+          <a:ln>
+            <a:solidFill>
+              <a:srgbClr val="2F5BA8"/>
+            </a:solidFill>
+          </a:ln>
+        </p:spPr>
+        <p:style>
+          <a:lnRef idx="1">
+            <a:schemeClr val="accent1"/>
+          </a:lnRef>
+          <a:fillRef idx="3">
+            <a:schemeClr val="accent1"/>
+          </a:fillRef>
+          <a:effectRef idx="2">
+            <a:schemeClr val="accent1"/>
+          </a:effectRef>
+          <a:fontRef idx="minor">
+            <a:schemeClr val="lt1"/>
+          </a:fontRef>
+        </p:style>
+        <p:txBody>
+          <a:bodyPr rtlCol="0" anchor="ctr"/>
+          <a:lstStyle/>
+          <a:p>
+            <a:pPr algn="ctr"/>
+          </a:p>
+        </p:txBody>
+      </p:sp>
+      <p:sp>
+        <p:nvSpPr>
+          <p:cNvPr id="11" name="TextBox 10"/>
           <p:cNvSpPr txBox="1"/>
           <p:nvPr/>
         </p:nvSpPr>
         <p:spPr>
           <a:xfrm>
-            <a:off x="932688" y="1975104"/>
-            <a:ext cx="10058400" cy="822960"/>
+            <a:off x="1389888" y="2526029"/>
+            <a:ext cx="9829800" cy="1209294"/>
           </a:xfrm>
           <a:prstGeom prst="rect">
             <a:avLst/>
@@ -8614,29 +10911,74 @@
           <a:lstStyle/>
           <a:p>
             <a:pPr algn="l">
-              <a:defRPr sz="2500" b="1">
+              <a:defRPr sz="1900" b="0">
                 <a:solidFill>
-                  <a:srgbClr val="FFFFFF"/>
+                  <a:srgbClr val="1C2330"/>
                 </a:solidFill>
                 <a:latin typeface="Aptos"/>
               </a:defRPr>
             </a:pPr>
             <a:r>
-              <a:t>¿Qué puedes señalar, explicar y probar al terminar este checkpoint?</a:t>
-            </a:r>
-          </a:p>
-        </p:txBody>
-      </p:sp>
-      <p:sp>
-        <p:nvSpPr>
-          <p:cNvPr id="11" name="TextBox 10"/>
+              <a:t>La entrada afecta a la salida o al cálculo.</a:t>
+            </a:r>
+          </a:p>
+        </p:txBody>
+      </p:sp>
+      <p:sp>
+        <p:nvSpPr>
+          <p:cNvPr id="12" name="Rounded Rectangle 11"/>
+          <p:cNvSpPr/>
+          <p:nvPr/>
+        </p:nvSpPr>
+        <p:spPr>
+          <a:xfrm>
+            <a:off x="713232" y="3790187"/>
+            <a:ext cx="420624" cy="420624"/>
+          </a:xfrm>
+          <a:prstGeom prst="roundRect">
+            <a:avLst/>
+          </a:prstGeom>
+          <a:solidFill>
+            <a:srgbClr val="FFFFFF"/>
+          </a:solidFill>
+          <a:ln>
+            <a:solidFill>
+              <a:srgbClr val="2F5BA8"/>
+            </a:solidFill>
+          </a:ln>
+        </p:spPr>
+        <p:style>
+          <a:lnRef idx="1">
+            <a:schemeClr val="accent1"/>
+          </a:lnRef>
+          <a:fillRef idx="3">
+            <a:schemeClr val="accent1"/>
+          </a:fillRef>
+          <a:effectRef idx="2">
+            <a:schemeClr val="accent1"/>
+          </a:effectRef>
+          <a:fontRef idx="minor">
+            <a:schemeClr val="lt1"/>
+          </a:fontRef>
+        </p:style>
+        <p:txBody>
+          <a:bodyPr rtlCol="0" anchor="ctr"/>
+          <a:lstStyle/>
+          <a:p>
+            <a:pPr algn="ctr"/>
+          </a:p>
+        </p:txBody>
+      </p:sp>
+      <p:sp>
+        <p:nvSpPr>
+          <p:cNvPr id="13" name="TextBox 12"/>
           <p:cNvSpPr txBox="1"/>
           <p:nvPr/>
         </p:nvSpPr>
         <p:spPr>
           <a:xfrm>
-            <a:off x="749808" y="3886200"/>
-            <a:ext cx="10607040" cy="1280160"/>
+            <a:off x="1389888" y="3771900"/>
+            <a:ext cx="9829800" cy="1209294"/>
           </a:xfrm>
           <a:prstGeom prst="rect">
             <a:avLst/>
@@ -8644,21 +10986,102 @@
           <a:noFill/>
         </p:spPr>
         <p:txBody>
-          <a:bodyPr wrap="square" lIns="45720" rIns="45720" tIns="36576" bIns="36576" anchor="ctr">
+          <a:bodyPr wrap="square" lIns="45720" rIns="45720" tIns="36576" bIns="36576" anchor="t">
             <a:spAutoFit/>
           </a:bodyPr>
           <a:lstStyle/>
           <a:p>
-            <a:pPr algn="ctr">
-              <a:defRPr sz="2300" b="1">
+            <a:pPr algn="l">
+              <a:defRPr sz="1900" b="0">
                 <a:solidFill>
-                  <a:srgbClr val="247E5C"/>
+                  <a:srgbClr val="1C2330"/>
                 </a:solidFill>
                 <a:latin typeface="Aptos"/>
               </a:defRPr>
             </a:pPr>
             <a:r>
-              <a:t>La sesión termina cuando la evidencia existe, está comprobada y puede defenderse.</a:t>
+              <a:t>Distingo nextLine, parseInt, ampliación y casting.</a:t>
+            </a:r>
+          </a:p>
+        </p:txBody>
+      </p:sp>
+      <p:sp>
+        <p:nvSpPr>
+          <p:cNvPr id="14" name="Rounded Rectangle 13"/>
+          <p:cNvSpPr/>
+          <p:nvPr/>
+        </p:nvSpPr>
+        <p:spPr>
+          <a:xfrm>
+            <a:off x="713232" y="5036057"/>
+            <a:ext cx="420624" cy="420624"/>
+          </a:xfrm>
+          <a:prstGeom prst="roundRect">
+            <a:avLst/>
+          </a:prstGeom>
+          <a:solidFill>
+            <a:srgbClr val="FFFFFF"/>
+          </a:solidFill>
+          <a:ln>
+            <a:solidFill>
+              <a:srgbClr val="2F5BA8"/>
+            </a:solidFill>
+          </a:ln>
+        </p:spPr>
+        <p:style>
+          <a:lnRef idx="1">
+            <a:schemeClr val="accent1"/>
+          </a:lnRef>
+          <a:fillRef idx="3">
+            <a:schemeClr val="accent1"/>
+          </a:fillRef>
+          <a:effectRef idx="2">
+            <a:schemeClr val="accent1"/>
+          </a:effectRef>
+          <a:fontRef idx="minor">
+            <a:schemeClr val="lt1"/>
+          </a:fontRef>
+        </p:style>
+        <p:txBody>
+          <a:bodyPr rtlCol="0" anchor="ctr"/>
+          <a:lstStyle/>
+          <a:p>
+            <a:pPr algn="ctr"/>
+          </a:p>
+        </p:txBody>
+      </p:sp>
+      <p:sp>
+        <p:nvSpPr>
+          <p:cNvPr id="15" name="TextBox 14"/>
+          <p:cNvSpPr txBox="1"/>
+          <p:nvPr/>
+        </p:nvSpPr>
+        <p:spPr>
+          <a:xfrm>
+            <a:off x="1389888" y="5017770"/>
+            <a:ext cx="9829800" cy="1209294"/>
+          </a:xfrm>
+          <a:prstGeom prst="rect">
+            <a:avLst/>
+          </a:prstGeom>
+          <a:noFill/>
+        </p:spPr>
+        <p:txBody>
+          <a:bodyPr wrap="square" lIns="45720" rIns="45720" tIns="36576" bIns="36576" anchor="t">
+            <a:spAutoFit/>
+          </a:bodyPr>
+          <a:lstStyle/>
+          <a:p>
+            <a:pPr algn="l">
+              <a:defRPr sz="1900" b="0">
+                <a:solidFill>
+                  <a:srgbClr val="1C2330"/>
+                </a:solidFill>
+                <a:latin typeface="Aptos"/>
+              </a:defRPr>
+            </a:pPr>
+            <a:r>
+              <a:t>Distingo error de compilación y error de ejecución.</a:t>
             </a:r>
           </a:p>
         </p:txBody>

--- a/02-PROFESORADO/03-PRESENTACIONES/POR-SESION/h1/S212-entrada-por-teclado-con-scanner-presentacion.pptx
+++ b/02-PROFESORADO/03-PRESENTACIONES/POR-SESION/h1/S212-entrada-por-teclado-con-scanner-presentacion.pptx
@@ -512,12 +512,12 @@
           <a:lstStyle/>
           <a:p>
             <a:r>
-              <a:t>Objetivo docente: Leer entrada, convertir tipos y reconocer errores de conversión.</a:t>
-            </a:r>
-          </a:p>
-          <a:p>
-            <a:r>
-              <a:t>Diapositiva 1 de 11: Scanner y conversiones</a:t>
+              <a:t>Objetivo docente: Al terminar, debes leer entrada, guardarla, convertir texto a número cuando haga falta y reconocer errores de conversión.</a:t>
+            </a:r>
+          </a:p>
+          <a:p>
+            <a:r>
+              <a:t>Diapositiva 1 de 11: Qué vas a aprender</a:t>
             </a:r>
           </a:p>
           <a:p>
@@ -527,7 +527,7 @@
           </a:p>
           <a:p>
             <a:r>
-              <a:t>Presenta el producto y anticipa la evidencia: Quede diagnóstico.</a:t>
+              <a:t>Presenta el producto y anticipa la evidencia: Hoy la evidencia debe incluir una entrada válida, resultado esperado, resultado obtenido y explicación de qué ocurre con una entrada no convertible.</a:t>
             </a:r>
           </a:p>
           <a:p>
@@ -537,57 +537,7 @@
           </a:p>
           <a:p>
             <a:r>
-              <a:t>- 00:00–00:05 / D1: MICROINVESTIGACIÓN: No expliques Scanner aún. Genera necesidad.</a:t>
-            </a:r>
-          </a:p>
-          <a:p>
-            <a:r>
-              <a:t>- 00:05–00:11 / D2: PÍLDORA DOCENTE 1/4: Explica import, lectura y variable destino. No introduzcas todo Scanner.</a:t>
-            </a:r>
-          </a:p>
-          <a:p>
-            <a:r>
-              <a:t>- 00:11–00:17 / D3: ACTIVIDAD: Circula sin añadir teoría.</a:t>
-            </a:r>
-          </a:p>
-          <a:p>
-            <a:r>
-              <a:t>- 00:17–00:20 / D4: CONFLICTO: Plantea una operación con el texto y pregunta qué falta.</a:t>
-            </a:r>
-          </a:p>
-          <a:p>
-            <a:r>
-              <a:t>- 00:20–00:25 / D5: PÍLDORA DOCENTE 2/4: Explica parseo como conversión desde String compatible.</a:t>
-            </a:r>
-          </a:p>
-          <a:p>
-            <a:r>
-              <a:t>- 00:25–00:29 / D6: EXPERIMENTO: Ejecuta con dos entradas válidas.</a:t>
-            </a:r>
-          </a:p>
-          <a:p>
-            <a:r>
-              <a:t>- 00:29–00:33 / D7: PÍLDORA DOCENTE 3/4: Presenta la idea pequeño→grande como en Tema 1, sin memorizar toda la jerarquía.</a:t>
-            </a:r>
-          </a:p>
-          <a:p>
-            <a:r>
-              <a:t>- 00:33–00:37 / D8: PÍLDORA DOCENTE 4/4: Explica que no redondea en este ejemplo; pierde parte decimal.</a:t>
-            </a:r>
-          </a:p>
-          <a:p>
-            <a:r>
-              <a:t>- 00:37–00:40 / D9: ERROR ÚTIL: Haz predecir compilación y ejecución. No introduzcas try-catch.</a:t>
-            </a:r>
-          </a:p>
-          <a:p>
-            <a:r>
-              <a:t>- 00:40–00:43 / D10: ACTIVIDAD: Pide evidencia concreta.</a:t>
-            </a:r>
-          </a:p>
-          <a:p>
-            <a:r>
-              <a:t>- 00:43–00:45 / D11: CIERRE: Haz preguntas rápidas.</a:t>
+              <a:t>- 45 minutos: Construid una prueba con entrada válida: por ejemplo horas como texto, conversión a int, cálculo de minutos y salida. Después probad una entrada no convertible y explicad cuándo falla: al compilar o al ejecutar.</a:t>
             </a:r>
           </a:p>
           <a:p>
@@ -597,12 +547,122 @@
           </a:p>
           <a:p>
             <a:r>
-              <a:t>- PÍLDORA DOCENTE 1/4: Explica import, lectura y variable destino. No introduzcas todo Scanner, PÍLDORA DOCENTE 2/4: Explica parseo como conversión desde String compatible, PÍLDORA DOCENTE 3/4: Presenta la idea pequeño→grande como en Tema 1, sin memorizar toda la jerarquía.</a:t>
-            </a:r>
-          </a:p>
-          <a:p>
-            <a:r>
-              <a:t>- PÍLDORA DOCENTE 4/4: Explica que no redondea en este ejemplo; pierde parte decimal.</a:t>
+              <a:t>- Úsala al pasar de datos escritos en código a datos introducidos por consola.</a:t>
+            </a:r>
+          </a:p>
+          <a:p>
+            <a:r>
+              <a:t>- Scanner permite leer lo que una persona escribe. nextLine() devuelve siempre un String. Si queremos calcular con un número escrito por teclado, necesitamos parsear ese texto.</a:t>
+            </a:r>
+          </a:p>
+          <a:p>
+            <a:r>
+              <a:t>- Empieza por el flujo pedir, leer y guardar creando una sola instancia reutilizable de Scanner:</a:t>
+            </a:r>
+          </a:p>
+          <a:p>
+            <a:r>
+              <a:t>- import java.util.Scanner;</a:t>
+            </a:r>
+          </a:p>
+          <a:p>
+            <a:r>
+              <a:t>- public class Main {</a:t>
+            </a:r>
+          </a:p>
+          <a:p>
+            <a:r>
+              <a:t>- public static void main(String[] argumentos) {</a:t>
+            </a:r>
+          </a:p>
+          <a:p>
+            <a:r>
+              <a:t>- Scanner teclado = new Scanner(System.in);</a:t>
+            </a:r>
+          </a:p>
+          <a:p>
+            <a:r>
+              <a:t>- System.out.print("Escribe un nombre ficticio: ");</a:t>
+            </a:r>
+          </a:p>
+          <a:p>
+            <a:r>
+              <a:t>- String nombreUsuario = teclado.nextLine();</a:t>
+            </a:r>
+          </a:p>
+          <a:p>
+            <a:r>
+              <a:t>- System.out.println("Hola, " + nombreUsuario);</a:t>
+            </a:r>
+          </a:p>
+          <a:p>
+            <a:r>
+              <a:t>- }</a:t>
+            </a:r>
+          </a:p>
+          <a:p>
+            <a:r>
+              <a:t>- Pregunta:</a:t>
+            </a:r>
+          </a:p>
+          <a:p>
+            <a:r>
+              <a:t>- Qué parte prepara la lectura, qué variable guarda el Scanner y qué devuelve teclado.nextLine().</a:t>
+            </a:r>
+          </a:p>
+          <a:p>
+            <a:r>
+              <a:t>- Una segunda lectura reutiliza la misma instancia:</a:t>
+            </a:r>
+          </a:p>
+          <a:p>
+            <a:r>
+              <a:t>- System.out.print("Escribe las horas de estudio: ");</a:t>
+            </a:r>
+          </a:p>
+          <a:p>
+            <a:r>
+              <a:t>- String texto = teclado.nextLine();</a:t>
+            </a:r>
+          </a:p>
+          <a:p>
+            <a:r>
+              <a:t>- int horas = Integer.parseInt(texto);</a:t>
+            </a:r>
+          </a:p>
+          <a:p>
+            <a:r>
+              <a:t>- La forma compacta siguiente puede leer una línea, pero no será el modelo de H1 porque oculta la reutilización del mismo Scanner:</a:t>
+            </a:r>
+          </a:p>
+          <a:p>
+            <a:r>
+              <a:t>- String nombreUsuario = new Scanner(System.in).nextLine();</a:t>
+            </a:r>
+          </a:p>
+          <a:p>
+            <a:r>
+              <a:t>- Contrasta usar y no usar lo leído:</a:t>
+            </a:r>
+          </a:p>
+          <a:p>
+            <a:r>
+              <a:t>- System.out.println("Hola");</a:t>
+            </a:r>
+          </a:p>
+          <a:p>
+            <a:r>
+              <a:t>- En cuál de los dos programas la entrada afecta al comportamiento observable.</a:t>
+            </a:r>
+          </a:p>
+          <a:p>
+            <a:r>
+              <a:t>- Dibuja el flujo en la pizarra:</a:t>
+            </a:r>
+          </a:p>
+          <a:p>
+            <a:r>
+              <a:t>- TECLADO -&gt; nextLine() -&gt; String -&gt; variable -&gt; programa -&gt; salida</a:t>
             </a:r>
           </a:p>
           <a:p>
@@ -677,7 +737,7 @@
           <a:lstStyle/>
           <a:p>
             <a:r>
-              <a:t>Objetivo docente: Leer entrada, convertir tipos y reconocer errores de conversión.</a:t>
+              <a:t>Objetivo docente: Al terminar, debes leer entrada, guardarla, convertir texto a número cuando haga falta y reconocer errores de conversión.</a:t>
             </a:r>
           </a:p>
           <a:p>
@@ -697,7 +757,7 @@
           </a:p>
           <a:p>
             <a:r>
-              <a:t>- ¿Qué devuelve nextLine(), qué hace parseInt y qué información puede perder un casting?</a:t>
+              <a:t>- ¿Qué devuelve nextLine() y en qué se diferencian parseInt y parseDouble?</a:t>
             </a:r>
           </a:p>
           <a:p>
@@ -772,12 +832,12 @@
           <a:lstStyle/>
           <a:p>
             <a:r>
-              <a:t>Objetivo docente: Leer entrada, convertir tipos y reconocer errores de conversión.</a:t>
-            </a:r>
-          </a:p>
-          <a:p>
-            <a:r>
-              <a:t>Diapositiva 11 de 11: Fuentes utilizadas</a:t>
+              <a:t>Objetivo docente: Al terminar, debes leer entrada, guardarla, convertir texto a número cuando haga falta y reconocer errores de conversión.</a:t>
+            </a:r>
+          </a:p>
+          <a:p>
+            <a:r>
+              <a:t>Diapositiva 11 de 11: Fuentes diferenciadas</a:t>
             </a:r>
           </a:p>
           <a:p>
@@ -792,17 +852,17 @@
           </a:p>
           <a:p>
             <a:r>
-              <a:t>- Libro: capítulo 02 · Tema 1: entrada y conversiones</a:t>
-            </a:r>
-          </a:p>
-          <a:p>
-            <a:r>
-              <a:t>- Fichas S206-S215 y píldoras H1</a:t>
-            </a:r>
-          </a:p>
-          <a:p>
-            <a:r>
-              <a:t>- Ejemplos revisados y adaptados a MiniJarvis; no se copian errores ni capturas antiguas del PDF.</a:t>
+              <a:t>- Libro por hitos · Capítulo 02: Scanner y parseo</a:t>
+            </a:r>
+          </a:p>
+          <a:p>
+            <a:r>
+              <a:t>- PDF Tema 1 · §§4 y 6: entrada y conversiones</a:t>
+            </a:r>
+          </a:p>
+          <a:p>
+            <a:r>
+              <a:t>- Proyecto MiniJarvis · fichas S206-S215, píldoras H1 y criterios de evidencia</a:t>
             </a:r>
           </a:p>
           <a:p>
@@ -877,7 +937,7 @@
           <a:lstStyle/>
           <a:p>
             <a:r>
-              <a:t>Objetivo docente: Leer entrada, convertir tipos y reconocer errores de conversión.</a:t>
+              <a:t>Objetivo docente: Al terminar, debes leer entrada, guardarla, convertir texto a número cuando haga falta y reconocer errores de conversión.</a:t>
             </a:r>
           </a:p>
           <a:p>
@@ -892,12 +952,12 @@
           </a:p>
           <a:p>
             <a:r>
-              <a:t>- Objetivo: Leer entrada, convertir tipos y reconocer errores de conversión.</a:t>
-            </a:r>
-          </a:p>
-          <a:p>
-            <a:r>
-              <a:t>- Comprobación: Quede diagnóstico.</a:t>
+              <a:t>- Objetivo: Al terminar, debes leer entrada, guardarla, convertir texto a número cuando haga falta y reconocer errores de conversión.</a:t>
+            </a:r>
+          </a:p>
+          <a:p>
+            <a:r>
+              <a:t>- Comprobación: Hoy la evidencia debe incluir una entrada válida, resultado esperado, resultado obtenido y explicación de qué ocurre con una entrada no convertible.</a:t>
             </a:r>
           </a:p>
           <a:p>
@@ -972,7 +1032,7 @@
           <a:lstStyle/>
           <a:p>
             <a:r>
-              <a:t>Objetivo docente: Leer entrada, convertir tipos y reconocer errores de conversión.</a:t>
+              <a:t>Objetivo docente: Al terminar, debes leer entrada, guardarla, convertir texto a número cuando haga falta y reconocer errores de conversión.</a:t>
             </a:r>
           </a:p>
           <a:p>
@@ -1092,7 +1152,7 @@
           <a:lstStyle/>
           <a:p>
             <a:r>
-              <a:t>Objetivo docente: Leer entrada, convertir tipos y reconocer errores de conversión.</a:t>
+              <a:t>Objetivo docente: Al terminar, debes leer entrada, guardarla, convertir texto a número cuando haga falta y reconocer errores de conversión.</a:t>
             </a:r>
           </a:p>
           <a:p>
@@ -1223,7 +1283,7 @@
           <a:lstStyle/>
           <a:p>
             <a:r>
-              <a:t>Objetivo docente: Leer entrada, convertir tipos y reconocer errores de conversión.</a:t>
+              <a:t>Objetivo docente: Al terminar, debes leer entrada, guardarla, convertir texto a número cuando haga falta y reconocer errores de conversión.</a:t>
             </a:r>
           </a:p>
           <a:p>
@@ -1343,12 +1403,12 @@
           <a:lstStyle/>
           <a:p>
             <a:r>
-              <a:t>Objetivo docente: Leer entrada, convertir tipos y reconocer errores de conversión.</a:t>
-            </a:r>
-          </a:p>
-          <a:p>
-            <a:r>
-              <a:t>Diapositiva 6 de 11: Conversión automática y casting</a:t>
+              <a:t>Objetivo docente: Al terminar, debes leer entrada, guardarla, convertir texto a número cuando haga falta y reconocer errores de conversión.</a:t>
+            </a:r>
+          </a:p>
+          <a:p>
+            <a:r>
+              <a:t>Diapositiva 6 de 11: Consulta: texto a int o double</a:t>
             </a:r>
           </a:p>
           <a:p>
@@ -1363,27 +1423,17 @@
           </a:p>
           <a:p>
             <a:r>
-              <a:t>- AMPLIACIÓN · int whole = 7;</a:t>
-            </a:r>
-          </a:p>
-          <a:p>
-            <a:r>
-              <a:t>double wider = whole; // 7.0</a:t>
-            </a:r>
-          </a:p>
-          <a:p>
-            <a:r>
-              <a:t>- CASTING · double price = 12.75;</a:t>
-            </a:r>
-          </a:p>
-          <a:p>
-            <a:r>
-              <a:t>int wholePrice = (int) price; // 12</a:t>
-            </a:r>
-          </a:p>
-          <a:p>
-            <a:r>
-              <a:t>- El casting descarta la parte decimal hacia cero; no redondea.</a:t>
+              <a:t>- ENTERO · Integer.parseInt("12") → 12</a:t>
+            </a:r>
+          </a:p>
+          <a:p>
+            <a:r>
+              <a:t>- DECIMAL · Double.parseDouble("12.5") → 12.5</a:t>
+            </a:r>
+          </a:p>
+          <a:p>
+            <a:r>
+              <a:t>- Ambos convierten texto; fallan durante la ejecución si el formato no es válido.</a:t>
             </a:r>
           </a:p>
           <a:p>
@@ -1458,7 +1508,7 @@
           <a:lstStyle/>
           <a:p>
             <a:r>
-              <a:t>Objetivo docente: Leer entrada, convertir tipos y reconocer errores de conversión.</a:t>
+              <a:t>Objetivo docente: Al terminar, debes leer entrada, guardarla, convertir texto a número cuando haga falta y reconocer errores de conversión.</a:t>
             </a:r>
           </a:p>
           <a:p>
@@ -1563,7 +1613,7 @@
           <a:lstStyle/>
           <a:p>
             <a:r>
-              <a:t>Objetivo docente: Leer entrada, convertir tipos y reconocer errores de conversión.</a:t>
+              <a:t>Objetivo docente: Al terminar, debes leer entrada, guardarla, convertir texto a número cuando haga falta y reconocer errores de conversión.</a:t>
             </a:r>
           </a:p>
           <a:p>
@@ -1673,7 +1723,7 @@
           <a:lstStyle/>
           <a:p>
             <a:r>
-              <a:t>Objetivo docente: Leer entrada, convertir tipos y reconocer errores de conversión.</a:t>
+              <a:t>Objetivo docente: Al terminar, debes leer entrada, guardarla, convertir texto a número cuando haga falta y reconocer errores de conversión.</a:t>
             </a:r>
           </a:p>
           <a:p>
@@ -1688,7 +1738,7 @@
           </a:p>
           <a:p>
             <a:r>
-              <a:t>Comprueba la evidencia en su fuente canónica: Quede diagnóstico.</a:t>
+              <a:t>Comprueba la evidencia en su fuente canónica: Hoy la evidencia debe incluir una entrada válida, resultado esperado, resultado obtenido y explicación de qué ocurre con una entrada no convertible.</a:t>
             </a:r>
           </a:p>
           <a:p>
@@ -1703,7 +1753,7 @@
           </a:p>
           <a:p>
             <a:r>
-              <a:t>- Distingo nextLine, parseInt, ampliación y casting.</a:t>
+              <a:t>- Distingo nextLine, parseInt y parseDouble.</a:t>
             </a:r>
           </a:p>
           <a:p>
@@ -4917,7 +4967,7 @@
               </a:defRPr>
             </a:pPr>
             <a:r>
-              <a:t>Scanner y conversiones</a:t>
+              <a:t>Qué vas a aprender</a:t>
             </a:r>
           </a:p>
         </p:txBody>
@@ -4953,7 +5003,7 @@
               </a:defRPr>
             </a:pPr>
             <a:r>
-              <a:t>H1 — Primer MiniJarvis</a:t>
+              <a:t>H1 — Primer asistente ejecutable</a:t>
             </a:r>
           </a:p>
         </p:txBody>
@@ -4997,42 +5047,6 @@
       <p:sp>
         <p:nvSpPr>
           <p:cNvPr id="9" name="TextBox 8"/>
-          <p:cNvSpPr txBox="1"/>
-          <p:nvPr/>
-        </p:nvSpPr>
-        <p:spPr>
-          <a:xfrm>
-            <a:off x="713232" y="4965192"/>
-            <a:ext cx="10241280" cy="594360"/>
-          </a:xfrm>
-          <a:prstGeom prst="rect">
-            <a:avLst/>
-          </a:prstGeom>
-          <a:noFill/>
-        </p:spPr>
-        <p:txBody>
-          <a:bodyPr wrap="square" lIns="45720" rIns="45720" tIns="36576" bIns="36576" anchor="t">
-            <a:spAutoFit/>
-          </a:bodyPr>
-          <a:lstStyle/>
-          <a:p>
-            <a:pPr algn="l">
-              <a:defRPr sz="1700" b="0">
-                <a:solidFill>
-                  <a:srgbClr val="D2D9E4"/>
-                </a:solidFill>
-                <a:latin typeface="Aptos"/>
-              </a:defRPr>
-            </a:pPr>
-            <a:r>
-              <a:t>Individual con contraste por parejas o equipo cuando la práctica lo requiera</a:t>
-            </a:r>
-          </a:p>
-        </p:txBody>
-      </p:sp>
-      <p:sp>
-        <p:nvSpPr>
-          <p:cNvPr id="10" name="TextBox 9"/>
           <p:cNvSpPr txBox="1"/>
           <p:nvPr/>
         </p:nvSpPr>
@@ -5316,7 +5330,7 @@
               </a:defRPr>
             </a:pPr>
             <a:r>
-              <a:t>MiniJarvis · 1.º DAW · Sesión 212 · H1 — Primer MiniJarvis</a:t>
+              <a:t>MiniJarvis · 1.º DAW · Sesión 212 · H1 — Primer asistente ejecutable</a:t>
             </a:r>
           </a:p>
         </p:txBody>
@@ -5433,7 +5447,7 @@
               </a:defRPr>
             </a:pPr>
             <a:r>
-              <a:t>¿Qué devuelve nextLine(), qué hace parseInt y qué información puede perder un casting?</a:t>
+              <a:t>¿Qué devuelve nextLine() y en qué se diferencian parseInt y parseDouble?</a:t>
             </a:r>
           </a:p>
         </p:txBody>
@@ -5645,7 +5659,7 @@
               </a:defRPr>
             </a:pPr>
             <a:r>
-              <a:t>Fuentes utilizadas</a:t>
+              <a:t>Fuentes diferenciadas</a:t>
             </a:r>
           </a:p>
         </p:txBody>
@@ -5724,7 +5738,7 @@
               </a:defRPr>
             </a:pPr>
             <a:r>
-              <a:t>MiniJarvis · 1.º DAW · Sesión 212 · H1 — Primer MiniJarvis</a:t>
+              <a:t>MiniJarvis · 1.º DAW · Sesión 212 · H1 — Primer asistente ejecutable</a:t>
             </a:r>
           </a:p>
         </p:txBody>
@@ -5799,7 +5813,7 @@
               </a:defRPr>
             </a:pPr>
             <a:r>
-              <a:t>•  Libro: capítulo 02 · Tema 1: entrada y conversiones</a:t>
+              <a:t>•  Libro por hitos · Capítulo 02: Scanner y parseo</a:t>
             </a:r>
           </a:p>
           <a:p>
@@ -5815,7 +5829,7 @@
               </a:defRPr>
             </a:pPr>
             <a:r>
-              <a:t>•  Fichas S206-S215 y píldoras H1</a:t>
+              <a:t>•  PDF Tema 1 · §§4 y 6: entrada y conversiones</a:t>
             </a:r>
           </a:p>
           <a:p>
@@ -5831,7 +5845,7 @@
               </a:defRPr>
             </a:pPr>
             <a:r>
-              <a:t>•  Ejemplos revisados y adaptados a MiniJarvis; no se copian errores ni capturas antiguas del PDF.</a:t>
+              <a:t>•  Proyecto MiniJarvis · fichas S206-S215, píldoras H1 y criterios de evidencia</a:t>
             </a:r>
           </a:p>
         </p:txBody>
@@ -6122,7 +6136,7 @@
               </a:defRPr>
             </a:pPr>
             <a:r>
-              <a:t>MiniJarvis · 1.º DAW · Sesión 212 · H1 — Primer MiniJarvis</a:t>
+              <a:t>MiniJarvis · 1.º DAW · Sesión 212 · H1 — Primer asistente ejecutable</a:t>
             </a:r>
           </a:p>
         </p:txBody>
@@ -6203,7 +6217,7 @@
               </a:defRPr>
             </a:pPr>
             <a:r>
-              <a:t>Objetivo: Leer entrada, convertir tipos y reconocer errores de conversión.</a:t>
+              <a:t>Objetivo: Al terminar, debes leer entrada, guardarla, convertir texto a número cuando haga falta y reconocer errores de conversión.</a:t>
             </a:r>
           </a:p>
         </p:txBody>
@@ -6284,7 +6298,7 @@
               </a:defRPr>
             </a:pPr>
             <a:r>
-              <a:t>Comprobación: Quede diagnóstico.</a:t>
+              <a:t>Comprobación: Hoy la evidencia debe incluir una entrada válida, resultado esperado, resultado obtenido y explicación de qué ocurre con una entrada no convertible.</a:t>
             </a:r>
           </a:p>
         </p:txBody>
@@ -6539,7 +6553,7 @@
               </a:defRPr>
             </a:pPr>
             <a:r>
-              <a:t>MiniJarvis · 1.º DAW · Sesión 212 · H1 — Primer MiniJarvis</a:t>
+              <a:t>MiniJarvis · 1.º DAW · Sesión 212 · H1 — Primer asistente ejecutable</a:t>
             </a:r>
           </a:p>
         </p:txBody>
@@ -7711,7 +7725,7 @@
               </a:defRPr>
             </a:pPr>
             <a:r>
-              <a:t>MiniJarvis · 1.º DAW · Sesión 212 · H1 — Primer MiniJarvis</a:t>
+              <a:t>MiniJarvis · 1.º DAW · Sesión 212 · H1 — Primer asistente ejecutable</a:t>
             </a:r>
           </a:p>
         </p:txBody>
@@ -8207,7 +8221,7 @@
               </a:defRPr>
             </a:pPr>
             <a:r>
-              <a:t>MiniJarvis · 1.º DAW · Sesión 212 · H1 — Primer MiniJarvis</a:t>
+              <a:t>MiniJarvis · 1.º DAW · Sesión 212 · H1 — Primer asistente ejecutable</a:t>
             </a:r>
           </a:p>
         </p:txBody>
@@ -8615,7 +8629,7 @@
               </a:defRPr>
             </a:pPr>
             <a:r>
-              <a:t>Conversión automática y casting</a:t>
+              <a:t>Consulta: texto a int o double</a:t>
             </a:r>
           </a:p>
         </p:txBody>
@@ -8694,7 +8708,7 @@
               </a:defRPr>
             </a:pPr>
             <a:r>
-              <a:t>MiniJarvis · 1.º DAW · Sesión 212 · H1 — Primer MiniJarvis</a:t>
+              <a:t>MiniJarvis · 1.º DAW · Sesión 212 · H1 — Primer asistente ejecutable</a:t>
             </a:r>
           </a:p>
         </p:txBody>
@@ -8859,11 +8873,7 @@
               </a:defRPr>
             </a:pPr>
             <a:r>
-              <a:t>AMPLIACIÓN · int whole = 7;</a:t>
-            </a:r>
-            <a:br/>
-            <a:r>
-              <a:t>double wider = whole; // 7.0</a:t>
+              <a:t>ENTERO · Integer.parseInt("12") → 12</a:t>
             </a:r>
           </a:p>
         </p:txBody>
@@ -9028,11 +9038,7 @@
               </a:defRPr>
             </a:pPr>
             <a:r>
-              <a:t>CASTING · double price = 12.75;</a:t>
-            </a:r>
-            <a:br/>
-            <a:r>
-              <a:t>int wholePrice = (int) price; // 12</a:t>
+              <a:t>DECIMAL · Double.parseDouble("12.5") → 12.5</a:t>
             </a:r>
           </a:p>
         </p:txBody>
@@ -9113,7 +9119,7 @@
               </a:defRPr>
             </a:pPr>
             <a:r>
-              <a:t>El casting descarta la parte decimal hacia cero; no redondea.</a:t>
+              <a:t>Ambos convierten texto; fallan durante la ejecución si el formato no es válido.</a:t>
             </a:r>
           </a:p>
         </p:txBody>
@@ -9368,7 +9374,7 @@
               </a:defRPr>
             </a:pPr>
             <a:r>
-              <a:t>MiniJarvis · 1.º DAW · Sesión 212 · H1 — Primer MiniJarvis</a:t>
+              <a:t>MiniJarvis · 1.º DAW · Sesión 212 · H1 — Primer asistente ejecutable</a:t>
             </a:r>
           </a:p>
         </p:txBody>
@@ -10034,7 +10040,7 @@
               </a:defRPr>
             </a:pPr>
             <a:r>
-              <a:t>MiniJarvis · 1.º DAW · Sesión 212 · H1 — Primer MiniJarvis</a:t>
+              <a:t>MiniJarvis · 1.º DAW · Sesión 212 · H1 — Primer asistente ejecutable</a:t>
             </a:r>
           </a:p>
         </p:txBody>
@@ -10757,7 +10763,7 @@
               </a:defRPr>
             </a:pPr>
             <a:r>
-              <a:t>MiniJarvis · 1.º DAW · Sesión 212 · H1 — Primer MiniJarvis</a:t>
+              <a:t>MiniJarvis · 1.º DAW · Sesión 212 · H1 — Primer asistente ejecutable</a:t>
             </a:r>
           </a:p>
         </p:txBody>
@@ -11000,7 +11006,7 @@
               </a:defRPr>
             </a:pPr>
             <a:r>
-              <a:t>Distingo nextLine, parseInt, ampliación y casting.</a:t>
+              <a:t>Distingo nextLine, parseInt y parseDouble.</a:t>
             </a:r>
           </a:p>
         </p:txBody>

--- a/02-PROFESORADO/03-PRESENTACIONES/POR-SESION/h1/S212-entrada-por-teclado-con-scanner-presentacion.pptx
+++ b/02-PROFESORADO/03-PRESENTACIONES/POR-SESION/h1/S212-entrada-por-teclado-con-scanner-presentacion.pptx
@@ -6081,7 +6081,7 @@
               </a:defRPr>
             </a:pPr>
             <a:r>
-              <a:t>He producido o actualizado: Código o ejercicio corto con entrada numérica, cálculo, comparación y prueba con dato válido e inválido.</a:t>
+              <a:t>Pueden explicar qué están intentando conseguir.</a:t>
             </a:r>
           </a:p>
         </p:txBody>
@@ -6162,7 +6162,7 @@
               </a:defRPr>
             </a:pPr>
             <a:r>
-              <a:t>Puedo señalar dónde está.</a:t>
+              <a:t>Registran una decisión, prueba o bloqueo; no muestran solo el resultado final.</a:t>
             </a:r>
           </a:p>
         </p:txBody>
@@ -6243,7 +6243,7 @@
               </a:defRPr>
             </a:pPr>
             <a:r>
-              <a:t>Puedo explicar una decisión tomada.</a:t>
+              <a:t>Todas las personas pueden describir su aportación.</a:t>
             </a:r>
           </a:p>
         </p:txBody>
@@ -6324,7 +6324,7 @@
               </a:defRPr>
             </a:pPr>
             <a:r>
-              <a:t>Puedo mostrar una prueba o comprobación.</a:t>
+              <a:t>Comprueban el producto con un criterio observable.</a:t>
             </a:r>
           </a:p>
         </p:txBody>
@@ -6405,7 +6405,7 @@
               </a:defRPr>
             </a:pPr>
             <a:r>
-              <a:t>He registrado mi aportación individual si el trabajo era de equipo.</a:t>
+              <a:t>No usan datos personales, credenciales ni respuestas de ejemplo antes del intento propio.</a:t>
             </a:r>
           </a:p>
         </p:txBody>

--- a/02-PROFESORADO/03-PRESENTACIONES/POR-SESION/h1/S212-entrada-por-teclado-con-scanner-presentacion.pptx
+++ b/02-PROFESORADO/03-PRESENTACIONES/POR-SESION/h1/S212-entrada-por-teclado-con-scanner-presentacion.pptx
@@ -3378,8 +3378,8 @@
         </p:nvSpPr>
         <p:spPr>
           <a:xfrm>
-            <a:off x="713232" y="6272784"/>
-            <a:ext cx="10607040" cy="201168"/>
+            <a:off x="713232" y="4965192"/>
+            <a:ext cx="10241280" cy="594360"/>
           </a:xfrm>
           <a:prstGeom prst="rect">
             <a:avLst/>
@@ -3393,6 +3393,42 @@
           <a:lstStyle/>
           <a:p>
             <a:pPr algn="l">
+              <a:defRPr sz="1700" b="0">
+                <a:solidFill>
+                  <a:srgbClr val="D2D9E4"/>
+                </a:solidFill>
+                <a:latin typeface="Aptos"/>
+              </a:defRPr>
+            </a:pPr>
+            <a:r>
+              <a:t>Individual → puesta en común en equipo</a:t>
+            </a:r>
+          </a:p>
+        </p:txBody>
+      </p:sp>
+      <p:sp>
+        <p:nvSpPr>
+          <p:cNvPr id="10" name="TextBox 9"/>
+          <p:cNvSpPr txBox="1"/>
+          <p:nvPr/>
+        </p:nvSpPr>
+        <p:spPr>
+          <a:xfrm>
+            <a:off x="713232" y="6272784"/>
+            <a:ext cx="10607040" cy="201168"/>
+          </a:xfrm>
+          <a:prstGeom prst="rect">
+            <a:avLst/>
+          </a:prstGeom>
+          <a:noFill/>
+        </p:spPr>
+        <p:txBody>
+          <a:bodyPr wrap="square" lIns="45720" rIns="45720" tIns="36576" bIns="36576" anchor="t">
+            <a:spAutoFit/>
+          </a:bodyPr>
+          <a:lstStyle/>
+          <a:p>
+            <a:pPr algn="l">
               <a:defRPr sz="1000" b="1">
                 <a:solidFill>
                   <a:srgbClr val="A0AAB9"/>
@@ -3401,7 +3437,7 @@
               </a:defRPr>
             </a:pPr>
             <a:r>
-              <a:t>MINIJARVIS · PROGRAMACIÓN + ENTORNOS DE DESARROLLO</a:t>
+              <a:t>MINIJARVIS · PROGRAMACIÓN</a:t>
             </a:r>
           </a:p>
         </p:txBody>

--- a/02-PROFESORADO/03-PRESENTACIONES/POR-SESION/h1/S212-entrada-por-teclado-con-scanner-presentacion.pptx
+++ b/02-PROFESORADO/03-PRESENTACIONES/POR-SESION/h1/S212-entrada-por-teclado-con-scanner-presentacion.pptx
@@ -637,6 +637,16 @@
           </a:p>
           <a:p>
             <a:r>
+              <a:t>- que realiza un cálculo y muestra su resultado;</a:t>
+            </a:r>
+          </a:p>
+          <a:p>
+            <a:r>
+              <a:t>- que produce y muestra una comparación booleana sin usarla para decidir el flujo;</a:t>
+            </a:r>
+          </a:p>
+          <a:p>
+            <a:r>
               <a:t>- que explica la diferencia entre parseo, conversión implícita y casting;</a:t>
             </a:r>
           </a:p>
@@ -725,7 +735,7 @@
           </a:p>
           <a:p>
             <a:r>
-              <a:t>Los valores de prueba sirven para comprobar que la lectura y la conversión funcionan. Comparadores, operadores lógicos, decisiones e `if/else` se trabajan en S213; no son el objetivo curricular de S212.</a:t>
+              <a:t>Los valores de prueba sirven para comprobar lectura, conversión, cálculo y una comparación booleana observable. Los operadores lógicos complejos, `if`, `if/else` y cualquier bifurcación comienzan en H2; no forman parte de S212.</a:t>
             </a:r>
           </a:p>
           <a:p/>
@@ -794,7 +804,7 @@
           <a:p/>
           <a:p>
             <a:r>
-              <a:t>12–22 min — Núcleo práctico individual: usar Scanner, pedir, leer con nextLine(), almacenar, parsear con Integer.parseInt o Double.parseDouble, utilizar el dato y comprobar una entrada válida.</a:t>
+              <a:t>12–22 min — Núcleo práctico individual: usar Scanner, leer con nextLine(), almacenar, parsear, calcular y mostrar una comparación booleana sin bifurcación.</a:t>
             </a:r>
           </a:p>
           <a:p/>
@@ -899,7 +909,7 @@
           </a:p>
           <a:p>
             <a:r>
-              <a:t>Reloj fuente 12–22 min: duración compartida 600 segundos. Trabajo: Núcleo práctico individual: usar Scanner, pedir, leer con nextLine(), almacenar, parsear con Integer.parseInt o Double.parseDouble, utilizar el dato y comprobar una entrada válida. Función del soporte: explicación.</a:t>
+              <a:t>Reloj fuente 12–22 min: duración compartida 600 segundos. Trabajo: Núcleo práctico individual: usar Scanner, leer con nextLine(), almacenar, parsear, calcular y mostrar una comparación booleana sin bifurcación. Función del soporte: explicación.</a:t>
             </a:r>
           </a:p>
           <a:p/>
@@ -982,7 +992,7 @@
           </a:p>
           <a:p>
             <a:r>
-              <a:t>Reloj fuente 12–22 min: duración compartida 600 segundos. Trabajo: Núcleo práctico individual: usar Scanner, pedir, leer con nextLine(), almacenar, parsear con Integer.parseInt o Double.parseDouble, utilizar el dato y comprobar una entrada válida. Función del soporte: explicación.</a:t>
+              <a:t>Reloj fuente 12–22 min: duración compartida 600 segundos. Trabajo: Núcleo práctico individual: usar Scanner, leer con nextLine(), almacenar, parsear, calcular y mostrar una comparación booleana sin bifurcación. Función del soporte: explicación.</a:t>
             </a:r>
           </a:p>
           <a:p/>
@@ -1074,7 +1084,7 @@
           </a:p>
           <a:p>
             <a:r>
-              <a:t>Reloj fuente 12–22 min: duración compartida 600 segundos. Trabajo: Núcleo práctico individual: usar Scanner, pedir, leer con nextLine(), almacenar, parsear con Integer.parseInt o Double.parseDouble, utilizar el dato y comprobar una entrada válida. Función del soporte: explicación.</a:t>
+              <a:t>Reloj fuente 12–22 min: duración compartida 600 segundos. Trabajo: Núcleo práctico individual: usar Scanner, leer con nextLine(), almacenar, parsear, calcular y mostrar una comparación booleana sin bifurcación. Función del soporte: explicación.</a:t>
             </a:r>
           </a:p>
           <a:p/>
@@ -1157,7 +1167,7 @@
           </a:p>
           <a:p>
             <a:r>
-              <a:t>Reloj fuente 12–22 min: duración compartida 600 segundos. Trabajo: Núcleo práctico individual: usar Scanner, pedir, leer con nextLine(), almacenar, parsear con Integer.parseInt o Double.parseDouble, utilizar el dato y comprobar una entrada válida. Función del soporte: actividad.</a:t>
+              <a:t>Reloj fuente 12–22 min: duración compartida 600 segundos. Trabajo: Núcleo práctico individual: usar Scanner, leer con nextLine(), almacenar, parsear, calcular y mostrar una comparación booleana sin bifurcación. Función del soporte: actividad.</a:t>
             </a:r>
           </a:p>
           <a:p/>
@@ -1168,7 +1178,7 @@
           </a:p>
           <a:p>
             <a:r>
-              <a:t>&gt; Pide unas horas como texto, conviértelas a `int`, calcula los minutos y muestra el resultado. Predice primero la salida para una entrada válida. Después prueba una entrada no convertible y explica qué instrucción falla y por qué.</a:t>
+              <a:t>&gt; Pide unas horas como texto, conviértelas a `int`, calcula los minutos, compara las horas con una referencia y muestra tanto el cálculo como el resultado `boolean`. No utilices ese resultado para decidir instrucciones. Predice primero la salida para una entrada válida. Después prueba una entrada no convertible y explica qué instrucción falla y por qué.</a:t>
             </a:r>
           </a:p>
         </p:txBody>
@@ -2534,7 +2544,7 @@
           </a:p>
           <a:p>
             <a:r>
-              <a:t>&gt; Hoy MiniJarvis ya no solo muestra datos escritos por quien programa. Ahora reacciona a una entrada. Como esa entrada llega mediante `nextLine()` en forma de texto, debemos decidir cuándo convertirla y comprobar qué ocurre tanto con una entrada válida como con otra no convertible.</a:t>
+              <a:t>&gt; Hoy MiniJarvis recibe texto con `nextLine()`, lo convierte, calcula y muestra una comparación booleana. El programa sigue siendo secuencial: utilizar ese resultado para decidir instrucciones corresponde a H2. También comprobamos qué ocurre con una entrada no convertible.</a:t>
             </a:r>
           </a:p>
           <a:p/>
@@ -2545,7 +2555,7 @@
           </a:p>
           <a:p>
             <a:r>
-              <a:t>&gt; ¿Qué devuelve `nextLine()`, dónde se almacena, cuándo necesitas parsear y por qué `Integer.parseInt("hola")` puede provocar una `NumberFormatException` durante la ejecución aunque el programa compile?</a:t>
+              <a:t>&gt; ¿Qué devuelve `nextLine()`, dónde se almacena, cuándo necesitas parsear, qué cálculo y comparación se realizan, qué `boolean` se muestra y por qué `Integer.parseInt("hola")` puede provocar una `NumberFormatException` durante la ejecución aunque el programa compile?</a:t>
             </a:r>
           </a:p>
           <a:p/>
@@ -2654,7 +2664,7 @@
           </a:p>
           <a:p>
             <a:r>
-              <a:t>&gt; Hoy MiniJarvis ya no solo muestra datos escritos por quien programa. Ahora reacciona a una entrada. Como esa entrada llega mediante `nextLine()` en forma de texto, debemos decidir cuándo convertirla y comprobar qué ocurre tanto con una entrada válida como con otra no convertible.</a:t>
+              <a:t>&gt; Hoy MiniJarvis recibe texto con `nextLine()`, lo convierte, calcula y muestra una comparación booleana. El programa sigue siendo secuencial: utilizar ese resultado para decidir instrucciones corresponde a H2. También comprobamos qué ocurre con una entrada no convertible.</a:t>
             </a:r>
           </a:p>
           <a:p/>
@@ -2665,7 +2675,7 @@
           </a:p>
           <a:p>
             <a:r>
-              <a:t>&gt; ¿Qué devuelve `nextLine()`, dónde se almacena, cuándo necesitas parsear y por qué `Integer.parseInt("hola")` puede provocar una `NumberFormatException` durante la ejecución aunque el programa compile?</a:t>
+              <a:t>&gt; ¿Qué devuelve `nextLine()`, dónde se almacena, cuándo necesitas parsear, qué cálculo y comparación se realizan, qué `boolean` se muestra y por qué `Integer.parseInt("hola")` puede provocar una `NumberFormatException` durante la ejecución aunque el programa compile?</a:t>
             </a:r>
           </a:p>
           <a:p/>
@@ -3138,7 +3148,7 @@
           </a:p>
           <a:p>
             <a:r>
-              <a:t>Reloj fuente 12–22 min: duración compartida 600 segundos. Trabajo: Núcleo práctico individual: usar Scanner, pedir, leer con nextLine(), almacenar, parsear con Integer.parseInt o Double.parseDouble, utilizar el dato y comprobar una entrada válida. Función del soporte: explicación.</a:t>
+              <a:t>Reloj fuente 12–22 min: duración compartida 600 segundos. Trabajo: Núcleo práctico individual: usar Scanner, leer con nextLine(), almacenar, parsear, calcular y mostrar una comparación booleana sin bifurcación. Función del soporte: explicación.</a:t>
             </a:r>
           </a:p>
           <a:p/>
@@ -3230,7 +3240,7 @@
           </a:p>
           <a:p>
             <a:r>
-              <a:t>Reloj fuente 12–22 min: duración compartida 600 segundos. Trabajo: Núcleo práctico individual: usar Scanner, pedir, leer con nextLine(), almacenar, parsear con Integer.parseInt o Double.parseDouble, utilizar el dato y comprobar una entrada válida. Función del soporte: explicación.</a:t>
+              <a:t>Reloj fuente 12–22 min: duración compartida 600 segundos. Trabajo: Núcleo práctico individual: usar Scanner, leer con nextLine(), almacenar, parsear, calcular y mostrar una comparación booleana sin bifurcación. Función del soporte: explicación.</a:t>
             </a:r>
           </a:p>
           <a:p/>
@@ -3242,6 +3252,12 @@
           <a:p>
             <a:r>
               <a:t>Leer cifras con `nextLine()` sigue produciendo un `String`. Para operar numéricamente hay que transformar ese texto en un valor numérico compatible.</a:t>
+            </a:r>
+          </a:p>
+          <a:p/>
+          <a:p>
+            <a:r>
+              <a:t>&gt; `horas &gt;= 4` produce un `boolean`. En H1 lo almacenamos y mostramos; no lo utilizamos con `if` ni para elegir caminos de ejecución.</a:t>
             </a:r>
           </a:p>
         </p:txBody>
@@ -3322,7 +3338,7 @@
           </a:p>
           <a:p>
             <a:r>
-              <a:t>Reloj fuente 12–22 min: duración compartida 600 segundos. Trabajo: Núcleo práctico individual: usar Scanner, pedir, leer con nextLine(), almacenar, parsear con Integer.parseInt o Double.parseDouble, utilizar el dato y comprobar una entrada válida. Función del soporte: explicación.</a:t>
+              <a:t>Reloj fuente 12–22 min: duración compartida 600 segundos. Trabajo: Núcleo práctico individual: usar Scanner, leer con nextLine(), almacenar, parsear, calcular y mostrar una comparación booleana sin bifurcación. Función del soporte: explicación.</a:t>
             </a:r>
           </a:p>
           <a:p/>
@@ -3334,6 +3350,12 @@
           <a:p>
             <a:r>
               <a:t>Leer cifras con `nextLine()` sigue produciendo un `String`. Para operar numéricamente hay que transformar ese texto en un valor numérico compatible.</a:t>
+            </a:r>
+          </a:p>
+          <a:p/>
+          <a:p>
+            <a:r>
+              <a:t>&gt; `horas &gt;= 4` produce un `boolean`. En H1 lo almacenamos y mostramos; no lo utilizamos con `if` ni para elegir caminos de ejecución.</a:t>
             </a:r>
           </a:p>
         </p:txBody>
@@ -6510,7 +6532,7 @@
               </a:defRPr>
             </a:pPr>
             <a:r>
-              <a:t>Modalidad publicada: Individual → puesta en común en equipo</a:t>
+              <a:t>Modalidad publicada: Individual → contraste por parejas</a:t>
             </a:r>
           </a:p>
         </p:txBody>
@@ -6564,7 +6586,7 @@
   </p:clrMapOvr>
   <p:extLst>
     <p:ext uri="urn:minijarvis:semantic-render:v1">
-      <ns0:renderMetadata xmlns:ns0="urn:minijarvis:semantic-render:v1">{"session": "212", "source_files": {"teacher": "/mnt/compartido/Programación-26-27/Minijarvis/02-PROFESORADO/02-SESIONES/h1/S212-entrada-por-teclado-con-scanner-docente.md", "student_fallback": "/mnt/compartido/Programación-26-27/Minijarvis/01-ALUMNADO/03-SESIONES/h1/S212-entrada-por-teclado-con-scanner-alumnado.md"}, "layout": "title", "plan_index": 0, "recognition": false, "unit_ids": ["unit-0", "unit-1", "unit-2", "unit-17", "unit-18", "unit-19", "unit-13", "unit-23", "unit-24", "unit-25", "unit-26", "unit-27", "unit-28", "unit-29"], "roles": {"unit-0": "core", "unit-1": "core", "unit-2": "core", "unit-17": "core", "unit-18": "core", "unit-19": "unknown", "unit-13": "core", "unit-23": "core", "unit-24": "core", "unit-25": "core", "unit-26": "core", "unit-27": "core", "unit-28": "core", "unit-29": "core"}, "source_refs": [{"source": "teacher", "heading": "Qué vas a aprender", "block_index": 0, "fragment": 0}, {"source": "teacher", "heading": "Antes de entrar en clase", "block_index": 1, "fragment": 0}, {"source": "teacher", "heading": "Apertura docente", "block_index": 2, "fragment": 0}, {"source": "teacher", "heading": "Observación docente", "block_index": 20, "fragment": 0}, {"source": "teacher", "heading": "Andamiaje ante bloqueos", "block_index": 21, "fragment": 0}, {"source": "teacher", "heading": "Límite de la sesión", "block_index": 22, "fragment": 0}, {"source": "teacher", "heading": "Errores frecuentes que debes cortar", "block_index": 15, "fragment": 0}, {"source": "teacher", "heading": "Ideas y ejemplos", "block_index": 4, "fragment": 0}, {"source": "teacher", "heading": "Temporalización orientativa", "block_index": 3, "fragment": 0}, {"source": "teacher", "heading": "Temporalización orientativa", "block_index": 3, "fragment": 0}, {"source": "teacher", "heading": "Temporalización orientativa", "block_index": 3, "fragment": 0}, {"source": "teacher", "heading": "Temporalización orientativa", "block_index": 3, "fragment": 0}, {"source": "teacher", "heading": "Temporalización orientativa", "block_index": 3, "fragment": 0}, {"source": "teacher", "heading": "Temporalización orientativa", "block_index": 3, "fragment": 0}, {"source": "teacher", "heading": "Temporalización orientativa", "block_index": 3, "fragment": 0}], "visible_sources": [], "notes_sources": [{"function": "preparation", "heading": "Antes de entrar en clase", "sha256": "a3067fadeb174efede162ee403bcc098cb158a56e5ba10b30931e645b659b35d"}, {"function": "explanations", "heading": "Apertura docente", "sha256": "e4f600617e7990ed53e5633bd78b47f45388ebc5f44820786b2b21c4d78c04df"}, {"function": "explanations", "heading": "Apertura docente", "sha256": "ce1f0857d26380a2db4fa3a708eee1789fad11e95e032b739b314d5785066212"}, {"function": "explanations", "heading": "Apertura docente", "sha256": "e047b115652e71b06ea6c3bd537bfbfd81268d1daf232009e630fa8ff2f7524f"}, {"function": "explanations", "heading": "Apertura docente", "sha256": "961a36ac1093894fee007ef1fca1e4742fada4cd15b2c78a5cc5f7df8caa61e0"}, {"function": "observation", "heading": "Observación docente", "sha256": "2e9c80d870522826e7567ba0fa7d8a1669df1afe27478998cd1b11535b2abe46"}, {"function": "observation", "heading": "Observación docente", "sha256": "1db7cb0e6a865a8ee8c931a14d77a62f4813f88b46a77be4fdcb10bd4dc1422a"}, {"function": "scaffolding", "heading": "Andamiaje ante bloqueos", "sha256": "7a2b37a8cf6a0f40e92ea4d97dfc9b9ebd96ce4b3c88433a1c2074d1a43b08ba"}, {"function": "scaffolding", "heading": "Andamiaje ante bloqueos", "sha256": "31d258a047a69a4a8da955003f7ac6b2db41b956444157b8734cf7f26ac053cc"}, {"function": "other", "heading": "Límite de la sesión", "sha256": "85efae75f11c922cf3acebfb52fd391b84c703e62ab47734190ab2b7323ef6c2"}, {"function": "common_error", "heading": "Errores frecuentes que debes cortar", "sha256": "88e6c965d7fd538458d3776e1d35ff43a4cf568f9e67cf26341fc02d50ac02dc"}, {"function": "timeline", "heading": "Temporalización orientativa", "sha256": "4ad1c0a0969811e89ac56ec8e8a84578d3b48d1635826aac73a35914cc82f3d2"}, {"function": "timeline", "heading": "Temporalización orientativa", "sha256": "0587a0ab30f41e5a062a6df24a32afccac70c03c5d7c8bc4a9ce88e7cdaf6c3c"}, {"function": "timeline", "heading": "Temporalización orientativa", "sha256": "886e6ce6ecda3145b846a0cc053b4b166ec428b1437db0ff8f2e97163729df16"}, {"function": "timeline", "heading": "Temporalización orientativa", "sha256": "81636e380c287f2b709054f6905cd4e8125c6024ef064e7a5bcefb5b7ac58b5d"}, {"function": "timeline", "heading": "Temporalización orientativa", "sha256": "7164a78ecce26814679cb52ea33be37c80d9316cef04f24ec9d8cb6f5272deb1"}, {"function": "timeline", "heading": "Temporalización orientativa", "sha256": "a8593f90131e5949510e38c0a4e4648c3730d232dc946874166449aa3917d5a0"}, {"function": "timeline", "heading": "Temporalización orientativa", "sha256": "478459fc4f16cb0b69af127f88127cd53cab4f85b539755a0cb4fc88291e2f77"}], "relations": {"source_supports_enriched": true}, "timeline_refs": [0], "composition": {"origin_slides": [1]}, "timing": {"seconds": 0, "allocations": [{"source_index": 0, "seconds": 0, "decision": "Intervalo compartido íntegro; propietario contable seleccionado por función de actividad y referencia timeline de unidad (identidad semántica en empates). Soporte, sin duplicación contable. Portada limitada a la apertura inicial: las referencias timeline presenter-only no convierten la portada en soporte de todos los tramos.", "source_time": "0–4 min", "source_seconds": 240, "is_owner": false, "function": "concepts"}], "clock_intervals": [0], "presenter_notes": "Reloj fuente 0–4 min: duración compartida 240 segundos. Trabajo: Presentar el flujo completo y predecir qué devuelve nextLine(). Función del soporte: explicación.", "shared_intervals": [{"source_index": 0, "source_time": "0–4 min", "seconds": 240, "is_owner": false, "function": "concepts", "action": "Presentar el flujo completo y predecir qué devuelve nextLine().", "concurrent": false, "parallel_work": ""}]}, "code_blocks": [], "representation_needs": []}</ns0:renderMetadata>
+      <ns0:renderMetadata xmlns:ns0="urn:minijarvis:semantic-render:v1">{"session": "212", "source_files": {"teacher": "/mnt/compartido/Programación-26-27/Minijarvis/02-PROFESORADO/02-SESIONES/h1/S212-entrada-por-teclado-con-scanner-docente.md", "student_fallback": "/mnt/compartido/Programación-26-27/Minijarvis/01-ALUMNADO/03-SESIONES/h1/S212-entrada-por-teclado-con-scanner-alumnado.md"}, "layout": "title", "plan_index": 0, "recognition": false, "unit_ids": ["unit-0", "unit-1", "unit-2", "unit-17", "unit-18", "unit-19", "unit-13", "unit-22", "unit-23", "unit-24", "unit-25", "unit-26", "unit-27", "unit-28"], "roles": {"unit-0": "core", "unit-1": "core", "unit-2": "core", "unit-17": "core", "unit-18": "core", "unit-19": "unknown", "unit-13": "core", "unit-22": "core", "unit-23": "core", "unit-24": "core", "unit-25": "core", "unit-26": "core", "unit-27": "core", "unit-28": "core"}, "source_refs": [{"source": "teacher", "heading": "Qué vas a aprender", "block_index": 0, "fragment": 0}, {"source": "teacher", "heading": "Antes de entrar en clase", "block_index": 1, "fragment": 0}, {"source": "teacher", "heading": "Apertura docente", "block_index": 2, "fragment": 0}, {"source": "teacher", "heading": "Observación docente", "block_index": 20, "fragment": 0}, {"source": "teacher", "heading": "Andamiaje ante bloqueos", "block_index": 21, "fragment": 0}, {"source": "teacher", "heading": "Límite de la sesión", "block_index": 22, "fragment": 0}, {"source": "teacher", "heading": "Errores frecuentes que debes cortar", "block_index": 15, "fragment": 0}, {"source": "teacher", "heading": "Ideas y ejemplos", "block_index": 4, "fragment": 0}, {"source": "teacher", "heading": "Temporalización orientativa", "block_index": 3, "fragment": 0}, {"source": "teacher", "heading": "Temporalización orientativa", "block_index": 3, "fragment": 0}, {"source": "teacher", "heading": "Temporalización orientativa", "block_index": 3, "fragment": 0}, {"source": "teacher", "heading": "Temporalización orientativa", "block_index": 3, "fragment": 0}, {"source": "teacher", "heading": "Temporalización orientativa", "block_index": 3, "fragment": 0}, {"source": "teacher", "heading": "Temporalización orientativa", "block_index": 3, "fragment": 0}, {"source": "teacher", "heading": "Temporalización orientativa", "block_index": 3, "fragment": 0}], "visible_sources": [], "notes_sources": [{"function": "preparation", "heading": "Antes de entrar en clase", "sha256": "a3067fadeb174efede162ee403bcc098cb158a56e5ba10b30931e645b659b35d"}, {"function": "explanations", "heading": "Apertura docente", "sha256": "e4f600617e7990ed53e5633bd78b47f45388ebc5f44820786b2b21c4d78c04df"}, {"function": "explanations", "heading": "Apertura docente", "sha256": "ce1f0857d26380a2db4fa3a708eee1789fad11e95e032b739b314d5785066212"}, {"function": "explanations", "heading": "Apertura docente", "sha256": "e047b115652e71b06ea6c3bd537bfbfd81268d1daf232009e630fa8ff2f7524f"}, {"function": "explanations", "heading": "Apertura docente", "sha256": "961a36ac1093894fee007ef1fca1e4742fada4cd15b2c78a5cc5f7df8caa61e0"}, {"function": "observation", "heading": "Observación docente", "sha256": "2e9c80d870522826e7567ba0fa7d8a1669df1afe27478998cd1b11535b2abe46"}, {"function": "observation", "heading": "Observación docente", "sha256": "7ea60e9b6edc1cb92b7f47eb9d39770d0a18f7cc0ad6e638bbd69f4505996c1a"}, {"function": "scaffolding", "heading": "Andamiaje ante bloqueos", "sha256": "7a2b37a8cf6a0f40e92ea4d97dfc9b9ebd96ce4b3c88433a1c2074d1a43b08ba"}, {"function": "scaffolding", "heading": "Andamiaje ante bloqueos", "sha256": "31d258a047a69a4a8da955003f7ac6b2db41b956444157b8734cf7f26ac053cc"}, {"function": "other", "heading": "Límite de la sesión", "sha256": "4c822bc80c164ddec145450761253207645014f0a852d934d0648f6f03458146"}, {"function": "common_error", "heading": "Errores frecuentes que debes cortar", "sha256": "88e6c965d7fd538458d3776e1d35ff43a4cf568f9e67cf26341fc02d50ac02dc"}, {"function": "timeline", "heading": "Temporalización orientativa", "sha256": "4ad1c0a0969811e89ac56ec8e8a84578d3b48d1635826aac73a35914cc82f3d2"}, {"function": "timeline", "heading": "Temporalización orientativa", "sha256": "0587a0ab30f41e5a062a6df24a32afccac70c03c5d7c8bc4a9ce88e7cdaf6c3c"}, {"function": "timeline", "heading": "Temporalización orientativa", "sha256": "4730a34595da4e9191aaea7f3ae5eac1527294bdc1d68439481612dfa860f3ec"}, {"function": "timeline", "heading": "Temporalización orientativa", "sha256": "81636e380c287f2b709054f6905cd4e8125c6024ef064e7a5bcefb5b7ac58b5d"}, {"function": "timeline", "heading": "Temporalización orientativa", "sha256": "7164a78ecce26814679cb52ea33be37c80d9316cef04f24ec9d8cb6f5272deb1"}, {"function": "timeline", "heading": "Temporalización orientativa", "sha256": "a8593f90131e5949510e38c0a4e4648c3730d232dc946874166449aa3917d5a0"}, {"function": "timeline", "heading": "Temporalización orientativa", "sha256": "478459fc4f16cb0b69af127f88127cd53cab4f85b539755a0cb4fc88291e2f77"}], "relations": {"source_supports_enriched": true}, "timeline_refs": [0], "composition": {"origin_slides": [1]}, "timing": {"seconds": 0, "allocations": [{"source_index": 0, "seconds": 0, "decision": "Intervalo compartido íntegro; propietario contable seleccionado por función de actividad y referencia timeline de unidad (identidad semántica en empates). Soporte, sin duplicación contable. Portada limitada a la apertura inicial: las referencias timeline presenter-only no convierten la portada en soporte de todos los tramos.", "source_time": "0–4 min", "source_seconds": 240, "is_owner": false, "function": "concepts"}], "clock_intervals": [0], "presenter_notes": "Reloj fuente 0–4 min: duración compartida 240 segundos. Trabajo: Presentar el flujo completo y predecir qué devuelve nextLine(). Función del soporte: explicación.", "shared_intervals": [{"source_index": 0, "source_time": "0–4 min", "seconds": 240, "is_owner": false, "function": "concepts", "action": "Presentar el flujo completo y predecir qué devuelve nextLine().", "concurrent": false, "parallel_work": ""}]}, "code_blocks": [], "representation_needs": []}</ns0:renderMetadata>
     </p:ext>
   </p:extLst>
 </p:sld>
@@ -6823,7 +6845,7 @@
   </p:clrMapOvr>
   <p:extLst>
     <p:ext uri="urn:minijarvis:semantic-render:v1">
-      <ns0:renderMetadata xmlns:ns0="urn:minijarvis:semantic-render:v1">{"session": "212", "source_files": {"teacher": "/mnt/compartido/Programación-26-27/Minijarvis/02-PROFESORADO/02-SESIONES/h1/S212-entrada-por-teclado-con-scanner-docente.md", "student_fallback": "/mnt/compartido/Programación-26-27/Minijarvis/01-ALUMNADO/03-SESIONES/h1/S212-entrada-por-teclado-con-scanner-alumnado.md"}, "layout": "code", "plan_index": 2, "recognition": false, "unit_ids": ["unit-7"], "roles": {"unit-7": "core"}, "source_refs": [{"source": "teacher", "heading": "parseDouble y parseBoolean", "block_index": 9, "fragment": 0}, {"source": "teacher", "heading": "Ideas y ejemplos", "block_index": 4, "fragment": 0}], "visible_sources": [{"index": 14, "sha256": "ae3cff37bf123bbba7070556e6e5b730c201422d71bc825d11511b52d3f7a6a6"}, {"index": 15, "sha256": "871a132947b5033ba3e42992110e248d8b998979e573848d4d3d22577f2c4c91"}], "notes_sources": [{"function": "concept", "heading": "parseDouble y parseBoolean", "sha256": "a50aad84a7f4acf34b5ec832e4f2461546828c983dc6570562f823484e00fbc4"}], "relations": {"unit_relations": {"unit-7": {"question_context": ["context", "question"]}}, "schedule": null, "source_supports_enriched": true}, "timeline_refs": [2], "composition": {"origin_slides": [11]}, "timing": {"seconds": 0, "allocations": [{"source_index": 2, "seconds": 0, "decision": "Intervalo compartido íntegro; propietario contable seleccionado por función de actividad y referencia timeline de unidad (identidad semántica en empates). Soporte, sin duplicación contable. ", "source_time": "12–22 min", "source_seconds": 600, "is_owner": false, "function": "concept"}], "clock_intervals": [2], "presenter_notes": "Reloj fuente 12–22 min: duración compartida 600 segundos. Trabajo: Núcleo práctico individual: usar Scanner, pedir, leer con nextLine(), almacenar, parsear con Integer.parseInt o Double.parseDouble, utilizar el dato y comprobar una entrada válida. Función del soporte: explicación.", "shared_intervals": [{"source_index": 2, "source_time": "12–22 min", "seconds": 600, "is_owner": false, "function": "concept", "action": "Núcleo práctico individual: usar Scanner, pedir, leer con nextLine(), almacenar, parsear con Integer.parseInt o Double.parseDouble, utilizar el dato y comprobar una entrada válida.", "concurrent": false, "parallel_work": ""}]}, "code_blocks": ["String texto = \"7.5\";\ndouble nota = Double.parseDouble(texto);"], "representation_needs": []}</ns0:renderMetadata>
+      <ns0:renderMetadata xmlns:ns0="urn:minijarvis:semantic-render:v1">{"session": "212", "source_files": {"teacher": "/mnt/compartido/Programación-26-27/Minijarvis/02-PROFESORADO/02-SESIONES/h1/S212-entrada-por-teclado-con-scanner-docente.md", "student_fallback": "/mnt/compartido/Programación-26-27/Minijarvis/01-ALUMNADO/03-SESIONES/h1/S212-entrada-por-teclado-con-scanner-alumnado.md"}, "layout": "code", "plan_index": 2, "recognition": false, "unit_ids": ["unit-7"], "roles": {"unit-7": "core"}, "source_refs": [{"source": "teacher", "heading": "parseDouble y parseBoolean", "block_index": 9, "fragment": 0}, {"source": "teacher", "heading": "Ideas y ejemplos", "block_index": 4, "fragment": 0}], "visible_sources": [{"index": 16, "sha256": "ae3cff37bf123bbba7070556e6e5b730c201422d71bc825d11511b52d3f7a6a6"}, {"index": 17, "sha256": "871a132947b5033ba3e42992110e248d8b998979e573848d4d3d22577f2c4c91"}], "notes_sources": [{"function": "concept", "heading": "parseDouble y parseBoolean", "sha256": "a50aad84a7f4acf34b5ec832e4f2461546828c983dc6570562f823484e00fbc4"}], "relations": {"unit_relations": {"unit-7": {"question_context": ["context", "question"]}}, "schedule": null, "source_supports_enriched": true}, "timeline_refs": [2], "composition": {"origin_slides": [12]}, "timing": {"seconds": 0, "allocations": [{"source_index": 2, "seconds": 0, "decision": "Intervalo compartido íntegro; propietario contable seleccionado por función de actividad y referencia timeline de unidad (identidad semántica en empates). Soporte, sin duplicación contable. ", "source_time": "12–22 min", "source_seconds": 600, "is_owner": false, "function": "concept"}], "clock_intervals": [2], "presenter_notes": "Reloj fuente 12–22 min: duración compartida 600 segundos. Trabajo: Núcleo práctico individual: usar Scanner, leer con nextLine(), almacenar, parsear, calcular y mostrar una comparación booleana sin bifurcación. Función del soporte: explicación.", "shared_intervals": [{"source_index": 2, "source_time": "12–22 min", "seconds": 600, "is_owner": false, "function": "concept", "action": "Núcleo práctico individual: usar Scanner, leer con nextLine(), almacenar, parsear, calcular y mostrar una comparación booleana sin bifurcación.", "concurrent": false, "parallel_work": ""}]}, "code_blocks": ["String texto = \"7.5\";\ndouble nota = Double.parseDouble(texto);"], "representation_needs": []}</ns0:renderMetadata>
     </p:ext>
   </p:extLst>
 </p:sld>
@@ -7066,7 +7088,7 @@
   </p:clrMapOvr>
   <p:extLst>
     <p:ext uri="urn:minijarvis:semantic-render:v1">
-      <ns0:renderMetadata xmlns:ns0="urn:minijarvis:semantic-render:v1">{"session": "212", "source_files": {"teacher": "/mnt/compartido/Programación-26-27/Minijarvis/02-PROFESORADO/02-SESIONES/h1/S212-entrada-por-teclado-con-scanner-docente.md", "student_fallback": "/mnt/compartido/Programación-26-27/Minijarvis/01-ALUMNADO/03-SESIONES/h1/S212-entrada-por-teclado-con-scanner-alumnado.md"}, "layout": "recognition", "plan_index": 2, "recognition": true, "unit_ids": ["unit-8"], "roles": {"unit-8": "recognition"}, "source_refs": [{"source": "teacher", "heading": "parseDouble y parseBoolean", "block_index": 9, "fragment": 1}, {"source": "teacher", "heading": "Ideas y ejemplos", "block_index": 4, "fragment": 0}], "visible_sources": [{"index": 17, "sha256": "5e214fbe203ea20aeb9b32a7826061b79eb50c894582c64976c5a9bb5581b840"}, {"index": 18, "sha256": "5831e10ff85607a8737cc861ca8b1f484a334d4531f13ca0178c9165fb9b9277"}], "notes_sources": [{"function": "facilitation", "heading": "parseDouble y parseBoolean", "sha256": "a24212521e63e3eb6a2384e362f148cc6f36520542c4fe37b7ed6dff6853137a"}, {"function": "visible_detail", "heading": "parseDouble y parseBoolean", "sha256": "5831e10ff85607a8737cc861ca8b1f484a334d4531f13ca0178c9165fb9b9277"}], "relations": {"unit_relations": {"unit-8": {}}, "schedule": null, "source_supports_enriched": true}, "timeline_refs": [2], "composition": {"origin_slides": [12]}, "timing": {"seconds": 0, "allocations": [{"source_index": 2, "seconds": 0, "decision": "Intervalo compartido íntegro; propietario contable seleccionado por función de actividad y referencia timeline de unidad (identidad semántica en empates). Soporte, sin duplicación contable. ", "source_time": "12–22 min", "source_seconds": 600, "is_owner": false, "function": "concept"}], "clock_intervals": [2], "presenter_notes": "Reloj fuente 12–22 min: duración compartida 600 segundos. Trabajo: Núcleo práctico individual: usar Scanner, pedir, leer con nextLine(), almacenar, parsear con Integer.parseInt o Double.parseDouble, utilizar el dato y comprobar una entrada válida. Función del soporte: explicación.", "shared_intervals": [{"source_index": 2, "source_time": "12–22 min", "seconds": 600, "is_owner": false, "function": "concept", "action": "Núcleo práctico individual: usar Scanner, pedir, leer con nextLine(), almacenar, parsear con Integer.parseInt o Double.parseDouble, utilizar el dato y comprobar una entrada válida.", "concurrent": false, "parallel_work": ""}]}, "code_blocks": ["boolean correcto = Boolean.parseBoolean(texto);"], "representation_needs": []}</ns0:renderMetadata>
+      <ns0:renderMetadata xmlns:ns0="urn:minijarvis:semantic-render:v1">{"session": "212", "source_files": {"teacher": "/mnt/compartido/Programación-26-27/Minijarvis/02-PROFESORADO/02-SESIONES/h1/S212-entrada-por-teclado-con-scanner-docente.md", "student_fallback": "/mnt/compartido/Programación-26-27/Minijarvis/01-ALUMNADO/03-SESIONES/h1/S212-entrada-por-teclado-con-scanner-alumnado.md"}, "layout": "recognition", "plan_index": 2, "recognition": true, "unit_ids": ["unit-8"], "roles": {"unit-8": "recognition"}, "source_refs": [{"source": "teacher", "heading": "parseDouble y parseBoolean", "block_index": 9, "fragment": 1}, {"source": "teacher", "heading": "Ideas y ejemplos", "block_index": 4, "fragment": 0}], "visible_sources": [{"index": 19, "sha256": "5e214fbe203ea20aeb9b32a7826061b79eb50c894582c64976c5a9bb5581b840"}, {"index": 20, "sha256": "5831e10ff85607a8737cc861ca8b1f484a334d4531f13ca0178c9165fb9b9277"}], "notes_sources": [{"function": "facilitation", "heading": "parseDouble y parseBoolean", "sha256": "a24212521e63e3eb6a2384e362f148cc6f36520542c4fe37b7ed6dff6853137a"}, {"function": "visible_detail", "heading": "parseDouble y parseBoolean", "sha256": "5831e10ff85607a8737cc861ca8b1f484a334d4531f13ca0178c9165fb9b9277"}], "relations": {"unit_relations": {"unit-8": {}}, "schedule": null, "source_supports_enriched": true}, "timeline_refs": [2], "composition": {"origin_slides": [13]}, "timing": {"seconds": 0, "allocations": [{"source_index": 2, "seconds": 0, "decision": "Intervalo compartido íntegro; propietario contable seleccionado por función de actividad y referencia timeline de unidad (identidad semántica en empates). Soporte, sin duplicación contable. ", "source_time": "12–22 min", "source_seconds": 600, "is_owner": false, "function": "concept"}], "clock_intervals": [2], "presenter_notes": "Reloj fuente 12–22 min: duración compartida 600 segundos. Trabajo: Núcleo práctico individual: usar Scanner, leer con nextLine(), almacenar, parsear, calcular y mostrar una comparación booleana sin bifurcación. Función del soporte: explicación.", "shared_intervals": [{"source_index": 2, "source_time": "12–22 min", "seconds": 600, "is_owner": false, "function": "concept", "action": "Núcleo práctico individual: usar Scanner, leer con nextLine(), almacenar, parsear, calcular y mostrar una comparación booleana sin bifurcación.", "concurrent": false, "parallel_work": ""}]}, "code_blocks": ["boolean correcto = Boolean.parseBoolean(texto);"], "representation_needs": []}</ns0:renderMetadata>
     </p:ext>
   </p:extLst>
 </p:sld>
@@ -7421,7 +7443,7 @@
   </p:clrMapOvr>
   <p:extLst>
     <p:ext uri="urn:minijarvis:semantic-render:v1">
-      <ns0:renderMetadata xmlns:ns0="urn:minijarvis:semantic-render:v1">{"session": "212", "source_files": {"teacher": "/mnt/compartido/Programación-26-27/Minijarvis/02-PROFESORADO/02-SESIONES/h1/S212-entrada-por-teclado-con-scanner-docente.md", "student_fallback": "/mnt/compartido/Programación-26-27/Minijarvis/01-ALUMNADO/03-SESIONES/h1/S212-entrada-por-teclado-con-scanner-alumnado.md"}, "layout": "code", "plan_index": 3, "recognition": false, "unit_ids": ["unit-10"], "roles": {"unit-10": "core"}, "source_refs": [{"source": "teacher", "heading": "Contraste con parseo", "block_index": 12, "fragment": 0}, {"source": "teacher", "heading": "Ideas y ejemplos", "block_index": 4, "fragment": 0}, {"source": "teacher", "heading": "Parseo, conversión implícita y casting no son lo mismo", "block_index": 10, "fragment": 0}], "visible_sources": [{"index": 0, "sha256": "157f1d3055a186d99b0dee93fc71e9444cc48e9a559966bc48193c3380090d76"}, {"index": 1, "sha256": "4294642bf850b0e54321456e1b34fbfcde30474bfd57b287fe547547860f2544"}, {"index": 2, "sha256": "a57f7fcf5b5551b8f06ef7c7afd77d6f1d156721c96a183b2725c52a16226a8f"}], "notes_sources": [{"function": "concept", "heading": "Contraste con parseo", "sha256": "df9acf2e0cc9e2f7147f4ae4b90b1e1f9eeda1377e5dbfd9739ecfa79384031d"}], "relations": {"unit_relations": {"unit-10": {"question_context": ["context", "question"]}}, "schedule": null, "source_supports_enriched": true}, "timeline_refs": [2], "composition": {"origin_slides": [13]}, "timing": {"seconds": 0, "allocations": [{"source_index": 2, "seconds": 0, "decision": "Intervalo compartido íntegro; propietario contable seleccionado por función de actividad y referencia timeline de unidad (identidad semántica en empates). Soporte, sin duplicación contable. ", "source_time": "12–22 min", "source_seconds": 600, "is_owner": false, "function": "concept"}], "clock_intervals": [2], "presenter_notes": "Reloj fuente 12–22 min: duración compartida 600 segundos. Trabajo: Núcleo práctico individual: usar Scanner, pedir, leer con nextLine(), almacenar, parsear con Integer.parseInt o Double.parseDouble, utilizar el dato y comprobar una entrada válida. Función del soporte: explicación.", "shared_intervals": [{"source_index": 2, "source_time": "12–22 min", "seconds": 600, "is_owner": false, "function": "concept", "action": "Núcleo práctico individual: usar Scanner, pedir, leer con nextLine(), almacenar, parsear con Integer.parseInt o Double.parseDouble, utilizar el dato y comprobar una entrada válida.", "concurrent": false, "parallel_work": ""}]}, "code_blocks": ["String texto = \"4\";\nint horas = Integer.parseInt(texto);\n\nint otrasHoras = 4;\ndouble horasDecimales = otrasHoras;"], "representation_needs": []}</ns0:renderMetadata>
+      <ns0:renderMetadata xmlns:ns0="urn:minijarvis:semantic-render:v1">{"session": "212", "source_files": {"teacher": "/mnt/compartido/Programación-26-27/Minijarvis/02-PROFESORADO/02-SESIONES/h1/S212-entrada-por-teclado-con-scanner-docente.md", "student_fallback": "/mnt/compartido/Programación-26-27/Minijarvis/01-ALUMNADO/03-SESIONES/h1/S212-entrada-por-teclado-con-scanner-alumnado.md"}, "layout": "code", "plan_index": 3, "recognition": false, "unit_ids": ["unit-10"], "roles": {"unit-10": "core"}, "source_refs": [{"source": "teacher", "heading": "Contraste con parseo", "block_index": 12, "fragment": 0}, {"source": "teacher", "heading": "Ideas y ejemplos", "block_index": 4, "fragment": 0}, {"source": "teacher", "heading": "Parseo, conversión implícita y casting no son lo mismo", "block_index": 10, "fragment": 0}], "visible_sources": [{"index": 0, "sha256": "157f1d3055a186d99b0dee93fc71e9444cc48e9a559966bc48193c3380090d76"}, {"index": 1, "sha256": "4294642bf850b0e54321456e1b34fbfcde30474bfd57b287fe547547860f2544"}, {"index": 2, "sha256": "a57f7fcf5b5551b8f06ef7c7afd77d6f1d156721c96a183b2725c52a16226a8f"}], "notes_sources": [{"function": "concept", "heading": "Contraste con parseo", "sha256": "df9acf2e0cc9e2f7147f4ae4b90b1e1f9eeda1377e5dbfd9739ecfa79384031d"}], "relations": {"unit_relations": {"unit-10": {"question_context": ["context", "question"]}}, "schedule": null, "source_supports_enriched": true}, "timeline_refs": [2], "composition": {"origin_slides": [14]}, "timing": {"seconds": 0, "allocations": [{"source_index": 2, "seconds": 0, "decision": "Intervalo compartido íntegro; propietario contable seleccionado por función de actividad y referencia timeline de unidad (identidad semántica en empates). Soporte, sin duplicación contable. ", "source_time": "12–22 min", "source_seconds": 600, "is_owner": false, "function": "concept"}], "clock_intervals": [2], "presenter_notes": "Reloj fuente 12–22 min: duración compartida 600 segundos. Trabajo: Núcleo práctico individual: usar Scanner, leer con nextLine(), almacenar, parsear, calcular y mostrar una comparación booleana sin bifurcación. Función del soporte: explicación.", "shared_intervals": [{"source_index": 2, "source_time": "12–22 min", "seconds": 600, "is_owner": false, "function": "concept", "action": "Núcleo práctico individual: usar Scanner, leer con nextLine(), almacenar, parsear, calcular y mostrar una comparación booleana sin bifurcación.", "concurrent": false, "parallel_work": ""}]}, "code_blocks": ["String texto = \"4\";\nint horas = Integer.parseInt(texto);\n\nint otrasHoras = 4;\ndouble horasDecimales = otrasHoras;"], "representation_needs": []}</ns0:renderMetadata>
     </p:ext>
   </p:extLst>
 </p:sld>
@@ -7482,7 +7504,7 @@
               </a:defRPr>
             </a:pPr>
             <a:r>
-              <a:t>INDIVIDUAL</a:t>
+              <a:t>Proceso: PREDICE → EJECUTA → CONTRASTA</a:t>
             </a:r>
           </a:p>
         </p:txBody>
@@ -7573,14 +7595,14 @@
       </p:sp>
       <p:sp>
         <p:nvSpPr>
-          <p:cNvPr id="5" name="Proceso de predicción" descr="Proceso de predicción"/>
+          <p:cNvPr id="5" name="Contenido" descr="Contenido"/>
           <p:cNvSpPr txBox="1"/>
           <p:nvPr/>
         </p:nvSpPr>
         <p:spPr>
           <a:xfrm>
             <a:off x="640080" y="1825752"/>
-            <a:ext cx="10881360" cy="499871"/>
+            <a:ext cx="10881360" cy="2511552"/>
           </a:xfrm>
           <a:prstGeom prst="rect">
             <a:avLst/>
@@ -7595,20 +7617,20 @@
           <a:p>
             <a:pPr>
               <a:lnSpc>
-                <a:spcPts val="2640"/>
-              </a:lnSpc>
-              <a:spcAft>
-                <a:spcPts val="0"/>
-              </a:spcAft>
-              <a:defRPr sz="2400" b="1">
-                <a:solidFill>
-                  <a:srgbClr val="2F5BA8"/>
+                <a:spcPts val="3080"/>
+              </a:lnSpc>
+              <a:spcAft>
+                <a:spcPts val="0"/>
+              </a:spcAft>
+              <a:defRPr sz="2800" b="0">
+                <a:solidFill>
+                  <a:srgbClr val="1C2330"/>
                 </a:solidFill>
                 <a:latin typeface="Liberation Sans"/>
               </a:defRPr>
             </a:pPr>
             <a:r>
-              <a:t>Proceso: PREDICE → EJECUTA → CONTRASTA</a:t>
+              <a:t>Antes de contrastar con otra persona, cada estudiante realiza un intento propio: utiliza una instancia reutilizable de Scanner, almacena la lectura, predice el tipo devuelto por nextLine() y distingue si un posible fallo aparece al compilar o al ejecutar.</a:t>
             </a:r>
           </a:p>
         </p:txBody>
@@ -7621,8 +7643,8 @@
         </p:nvSpPr>
         <p:spPr>
           <a:xfrm>
-            <a:off x="640080" y="2599943"/>
-            <a:ext cx="10881360" cy="2511552"/>
+            <a:off x="640080" y="4428744"/>
+            <a:ext cx="10881360" cy="1729232"/>
           </a:xfrm>
           <a:prstGeom prst="rect">
             <a:avLst/>
@@ -7650,49 +7672,7 @@
               </a:defRPr>
             </a:pPr>
             <a:r>
-              <a:t>Antes de contrastar con otra persona, cada estudiante realiza un intento propio: utiliza una instancia reutilizable de Scanner, almacena la lectura, predice el tipo devuelto por nextLine() y distingue si un posible fallo aparece al compilar o al ejecutar.</a:t>
-            </a:r>
-          </a:p>
-        </p:txBody>
-      </p:sp>
-      <p:sp>
-        <p:nvSpPr>
-          <p:cNvPr id="7" name="Contenido" descr="Contenido"/>
-          <p:cNvSpPr txBox="1"/>
-          <p:nvPr/>
-        </p:nvSpPr>
-        <p:spPr>
-          <a:xfrm>
-            <a:off x="640080" y="5202936"/>
-            <a:ext cx="10881360" cy="946912"/>
-          </a:xfrm>
-          <a:prstGeom prst="rect">
-            <a:avLst/>
-          </a:prstGeom>
-          <a:noFill/>
-        </p:spPr>
-        <p:txBody>
-          <a:bodyPr wrap="square" lIns="109728" rIns="109728" tIns="73152" bIns="73152">
-            <a:noAutofit/>
-          </a:bodyPr>
-          <a:lstStyle/>
-          <a:p>
-            <a:pPr>
-              <a:lnSpc>
-                <a:spcPts val="3080"/>
-              </a:lnSpc>
-              <a:spcAft>
-                <a:spcPts val="0"/>
-              </a:spcAft>
-              <a:defRPr sz="2800" b="0">
-                <a:solidFill>
-                  <a:srgbClr val="1C2330"/>
-                </a:solidFill>
-                <a:latin typeface="Liberation Sans"/>
-              </a:defRPr>
-            </a:pPr>
-            <a:r>
-              <a:t>Pide unas horas como texto, conviértelas a int, calcula los minutos y muestra el resultado.</a:t>
+              <a:t>Pide unas horas como texto, conviértelas a int, calcula los minutos, compara las horas con una referencia y muestra tanto el cálculo como el resultado boolean.</a:t>
             </a:r>
           </a:p>
         </p:txBody>
@@ -7704,7 +7684,7 @@
   </p:clrMapOvr>
   <p:extLst>
     <p:ext uri="urn:minijarvis:semantic-render:v1">
-      <ns0:renderMetadata xmlns:ns0="urn:minijarvis:semantic-render:v1">{"session": "212", "source_files": {"teacher": "/mnt/compartido/Programación-26-27/Minijarvis/02-PROFESORADO/02-SESIONES/h1/S212-entrada-por-teclado-con-scanner-docente.md", "student_fallback": "/mnt/compartido/Programación-26-27/Minijarvis/01-ALUMNADO/03-SESIONES/h1/S212-entrada-por-teclado-con-scanner-alumnado.md"}, "layout": "prediction", "plan_index": 4, "recognition": false, "unit_ids": ["unit-14"], "roles": {"unit-14": "core"}, "source_refs": [{"source": "teacher", "heading": "Leer, convertir, predecir y probar — INDIVIDUAL", "block_index": 17, "fragment": 0}, {"source": "teacher", "heading": "Secuencia de trabajo y modalidad", "block_index": 16, "fragment": 0}], "visible_sources": [{"index": 0, "sha256": "34a937c5c1d1a33bc1768ab253c0d0861dbcdab988555f5ca59078a4e7607426"}, {"index": 2, "sha256": "454cf71510ed0fb773d6ace20b34f0d675754c6bc5f41fc74697aa9a10527e78"}], "notes_sources": [{"function": "facilitation", "heading": "Leer, convertir, predecir y probar — INDIVIDUAL", "sha256": "9d7aa9e883947d88a9e36a225666b753e509e1f562b3f64455cd8850810490f2"}, {"function": "visible_detail", "heading": "Leer, convertir, predecir y probar — INDIVIDUAL", "sha256": "454cf71510ed0fb773d6ace20b34f0d675754c6bc5f41fc74697aa9a10527e78"}], "relations": {"unit_relations": {"unit-14": {"prediction_cycle": ["prediction", "execution", "contrast"]}}, "schedule": null, "source_supports_enriched": true}, "timeline_refs": [2], "composition": {"origin_slides": [14]}, "timing": {"seconds": 600, "allocations": [{"source_index": 2, "seconds": 600, "decision": "Intervalo compartido íntegro; propietario contable seleccionado por función de actividad y referencia timeline de unidad (identidad semántica en empates). Propietario. ", "source_time": "12–22 min", "source_seconds": 600, "is_owner": true, "function": "activity"}], "clock_intervals": [2], "presenter_notes": "Reloj fuente 12–22 min: duración compartida 600 segundos. Trabajo: Núcleo práctico individual: usar Scanner, pedir, leer con nextLine(), almacenar, parsear con Integer.parseInt o Double.parseDouble, utilizar el dato y comprobar una entrada válida. Función del soporte: actividad.", "shared_intervals": [{"source_index": 2, "source_time": "12–22 min", "seconds": 600, "is_owner": true, "function": "activity", "action": "Núcleo práctico individual: usar Scanner, pedir, leer con nextLine(), almacenar, parsear con Integer.parseInt o Double.parseDouble, utilizar el dato y comprobar una entrada válida.", "concurrent": false, "parallel_work": ""}]}, "code_blocks": [], "representation_needs": []}</ns0:renderMetadata>
+      <ns0:renderMetadata xmlns:ns0="urn:minijarvis:semantic-render:v1">{"session": "212", "source_files": {"teacher": "/mnt/compartido/Programación-26-27/Minijarvis/02-PROFESORADO/02-SESIONES/h1/S212-entrada-por-teclado-con-scanner-docente.md", "student_fallback": "/mnt/compartido/Programación-26-27/Minijarvis/01-ALUMNADO/03-SESIONES/h1/S212-entrada-por-teclado-con-scanner-alumnado.md"}, "layout": "linked_prediction", "plan_index": 4, "recognition": false, "unit_ids": ["unit-14"], "roles": {"unit-14": "core"}, "source_refs": [{"source": "teacher", "heading": "Leer, convertir, predecir y probar — INDIVIDUAL", "block_index": 17, "fragment": 0}, {"source": "teacher", "heading": "Secuencia de trabajo y modalidad", "block_index": 16, "fragment": 0}], "visible_sources": [{"index": 0, "sha256": "34a937c5c1d1a33bc1768ab253c0d0861dbcdab988555f5ca59078a4e7607426"}, {"index": 2, "sha256": "6906bceff81cbb43b9cedfdf7b20e426cd310f05237e30915b35e7f75d953af8"}], "notes_sources": [{"function": "facilitation", "heading": "Leer, convertir, predecir y probar — INDIVIDUAL", "sha256": "9d7aa9e883947d88a9e36a225666b753e509e1f562b3f64455cd8850810490f2"}, {"function": "visible_detail", "heading": "Leer, convertir, predecir y probar — INDIVIDUAL", "sha256": "6906bceff81cbb43b9cedfdf7b20e426cd310f05237e30915b35e7f75d953af8"}], "relations": {"unit_relations": {"unit-14": {"prediction_cycle": ["prediction", "execution", "contrast"]}}, "schedule": null, "source_supports_enriched": true}, "timeline_refs": [2], "composition": {"origin_slides": [15, 16]}, "timing": {"seconds": 600, "allocations": [{"source_index": 2, "seconds": 600, "decision": "Intervalo compartido íntegro; propietario contable seleccionado por función de actividad y referencia timeline de unidad (identidad semántica en empates). Propietario. ", "source_time": "12–22 min", "source_seconds": 600, "is_owner": true, "function": "activity"}], "clock_intervals": [2], "presenter_notes": "Reloj fuente 12–22 min: duración compartida 600 segundos. Trabajo: Núcleo práctico individual: usar Scanner, leer con nextLine(), almacenar, parsear, calcular y mostrar una comparación booleana sin bifurcación. Función del soporte: actividad.", "shared_intervals": [{"source_index": 2, "source_time": "12–22 min", "seconds": 600, "is_owner": true, "function": "activity", "action": "Núcleo práctico individual: usar Scanner, leer con nextLine(), almacenar, parsear, calcular y mostrar una comparación booleana sin bifurcación.", "concurrent": false, "parallel_work": ""}]}, "code_blocks": [], "representation_needs": []}</ns0:renderMetadata>
     </p:ext>
   </p:extLst>
 </p:sld>
@@ -8253,7 +8233,7 @@
   </p:clrMapOvr>
   <p:extLst>
     <p:ext uri="urn:minijarvis:semantic-render:v1">
-      <ns0:renderMetadata xmlns:ns0="urn:minijarvis:semantic-render:v1">{"session": "212", "source_files": {"teacher": "/mnt/compartido/Programación-26-27/Minijarvis/02-PROFESORADO/02-SESIONES/h1/S212-entrada-por-teclado-con-scanner-docente.md", "student_fallback": "/mnt/compartido/Programación-26-27/Minijarvis/01-ALUMNADO/03-SESIONES/h1/S212-entrada-por-teclado-con-scanner-alumnado.md"}, "layout": "focus", "plan_index": 5, "recognition": false, "unit_ids": ["unit-15"], "roles": {"unit-15": "core"}, "source_refs": [{"source": "teacher", "heading": "Comparar, probar y explicar — PAREJAS", "block_index": 18, "fragment": 0}, {"source": "teacher", "heading": "Secuencia de trabajo y modalidad", "block_index": 16, "fragment": 0}], "visible_sources": [{"index": 1, "sha256": "7be289ae1f6255d0744ac83878126a1ab41a3ca1ad1268e8a86366be7875f42a"}], "notes_sources": [{"function": "facilitation", "heading": "Comparar, probar y explicar — PAREJAS", "sha256": "eb92a2b4be6c112c0307bb5e3b53f8fc607a707f2f96a31c9530fa1a862c1a92"}, {"function": "facilitation", "heading": "Comparar, probar y explicar — PAREJAS", "sha256": "4e16c748eb854cd306b4df2b332471f0fe71bbcb7ec7c778ad677b1b82c066e2"}], "relations": {"unit_relations": {"unit-15": {}}, "schedule": null, "source_supports_enriched": true}, "timeline_refs": [3], "composition": {"origin_slides": [15, 16]}, "timing": {"seconds": 0, "allocations": [{"source_index": 3, "seconds": 0, "decision": "Intervalo compartido íntegro; propietario contable seleccionado por función de actividad y referencia timeline de unidad (identidad semántica en empates). Soporte, sin duplicación contable. ", "source_time": "22–30 min", "source_seconds": 480, "is_owner": false, "function": "activity"}], "clock_intervals": [3], "presenter_notes": "Reloj fuente 22–30 min: duración compartida 480 segundos. Trabajo: Núcleo práctico por parejas: comparar implementaciones, contrastar predicciones y analizar una entrada no convertible. Función del soporte: actividad.", "shared_intervals": [{"source_index": 3, "source_time": "22–30 min", "seconds": 480, "is_owner": false, "function": "activity", "action": "Núcleo práctico por parejas: comparar implementaciones, contrastar predicciones y analizar una entrada no convertible.", "concurrent": false, "parallel_work": ""}]}, "code_blocks": [], "representation_needs": []}</ns0:renderMetadata>
+      <ns0:renderMetadata xmlns:ns0="urn:minijarvis:semantic-render:v1">{"session": "212", "source_files": {"teacher": "/mnt/compartido/Programación-26-27/Minijarvis/02-PROFESORADO/02-SESIONES/h1/S212-entrada-por-teclado-con-scanner-docente.md", "student_fallback": "/mnt/compartido/Programación-26-27/Minijarvis/01-ALUMNADO/03-SESIONES/h1/S212-entrada-por-teclado-con-scanner-alumnado.md"}, "layout": "focus", "plan_index": 5, "recognition": false, "unit_ids": ["unit-15"], "roles": {"unit-15": "core"}, "source_refs": [{"source": "teacher", "heading": "Comparar, probar y explicar — PAREJAS", "block_index": 18, "fragment": 0}, {"source": "teacher", "heading": "Secuencia de trabajo y modalidad", "block_index": 16, "fragment": 0}], "visible_sources": [{"index": 1, "sha256": "7be289ae1f6255d0744ac83878126a1ab41a3ca1ad1268e8a86366be7875f42a"}], "notes_sources": [{"function": "facilitation", "heading": "Comparar, probar y explicar — PAREJAS", "sha256": "eb92a2b4be6c112c0307bb5e3b53f8fc607a707f2f96a31c9530fa1a862c1a92"}, {"function": "facilitation", "heading": "Comparar, probar y explicar — PAREJAS", "sha256": "4e16c748eb854cd306b4df2b332471f0fe71bbcb7ec7c778ad677b1b82c066e2"}], "relations": {"unit_relations": {"unit-15": {}}, "schedule": null, "source_supports_enriched": true}, "timeline_refs": [3], "composition": {"origin_slides": [17, 18]}, "timing": {"seconds": 0, "allocations": [{"source_index": 3, "seconds": 0, "decision": "Intervalo compartido íntegro; propietario contable seleccionado por función de actividad y referencia timeline de unidad (identidad semántica en empates). Soporte, sin duplicación contable. ", "source_time": "22–30 min", "source_seconds": 480, "is_owner": false, "function": "activity"}], "clock_intervals": [3], "presenter_notes": "Reloj fuente 22–30 min: duración compartida 480 segundos. Trabajo: Núcleo práctico por parejas: comparar implementaciones, contrastar predicciones y analizar una entrada no convertible. Función del soporte: actividad.", "shared_intervals": [{"source_index": 3, "source_time": "22–30 min", "seconds": 480, "is_owner": false, "function": "activity", "action": "Núcleo práctico por parejas: comparar implementaciones, contrastar predicciones y analizar una entrada no convertible.", "concurrent": false, "parallel_work": ""}]}, "code_blocks": [], "representation_needs": []}</ns0:renderMetadata>
     </p:ext>
   </p:extLst>
 </p:sld>
@@ -8482,7 +8462,7 @@
               </a:defRPr>
             </a:pPr>
             <a:r>
-              <a:t>petición → lectura → almacenamiento → conversión → uso → salida</a:t>
+              <a:t>petición → lectura → almacenamiento → conversión → cálculo → comparación booleana → salida</a:t>
             </a:r>
           </a:p>
         </p:txBody>
@@ -8494,7 +8474,7 @@
   </p:clrMapOvr>
   <p:extLst>
     <p:ext uri="urn:minijarvis:semantic-render:v1">
-      <ns0:renderMetadata xmlns:ns0="urn:minijarvis:semantic-render:v1">{"session": "212", "source_files": {"teacher": "/mnt/compartido/Programación-26-27/Minijarvis/02-PROFESORADO/02-SESIONES/h1/S212-entrada-por-teclado-con-scanner-docente.md", "student_fallback": "/mnt/compartido/Programación-26-27/Minijarvis/01-ALUMNADO/03-SESIONES/h1/S212-entrada-por-teclado-con-scanner-alumnado.md"}, "layout": "activity", "plan_index": 5, "recognition": false, "unit_ids": ["unit-15"], "roles": {"unit-15": "core"}, "source_refs": [{"source": "teacher", "heading": "Comparar, probar y explicar — PAREJAS", "block_index": 18, "fragment": 0}, {"source": "teacher", "heading": "Secuencia de trabajo y modalidad", "block_index": 16, "fragment": 0}], "visible_sources": [{"index": 3, "sha256": "518ae7712d441d26be392f7baecb1069d7452a8d7c7289e3f400a066e78693af"}], "notes_sources": [{"function": "facilitation", "heading": "Comparar, probar y explicar — PAREJAS", "sha256": "eb92a2b4be6c112c0307bb5e3b53f8fc607a707f2f96a31c9530fa1a862c1a92"}, {"function": "facilitation", "heading": "Comparar, probar y explicar — PAREJAS", "sha256": "4e16c748eb854cd306b4df2b332471f0fe71bbcb7ec7c778ad677b1b82c066e2"}], "relations": {"unit_relations": {"unit-15": {}}, "schedule": null, "presentation_normalizations": {"petición -&gt; lectura -&gt; almacenamiento -&gt; conversión -&gt; uso -&gt; salida": "petición → lectura → almacenamiento → conversión → uso → salida"}, "source_supports_enriched": true}, "timeline_refs": [3], "composition": {"origin_slides": [15, 16]}, "timing": {"seconds": 480, "allocations": [{"source_index": 3, "seconds": 480, "decision": "Intervalo compartido íntegro; propietario contable seleccionado por función de actividad y referencia timeline de unidad (identidad semántica en empates). Propietario. ", "source_time": "22–30 min", "source_seconds": 480, "is_owner": true, "function": "activity"}], "clock_intervals": [3], "presenter_notes": "Reloj fuente 22–30 min: duración compartida 480 segundos. Trabajo: Núcleo práctico por parejas: comparar implementaciones, contrastar predicciones y analizar una entrada no convertible. Función del soporte: actividad.", "shared_intervals": [{"source_index": 3, "source_time": "22–30 min", "seconds": 480, "is_owner": true, "function": "activity", "action": "Núcleo práctico por parejas: comparar implementaciones, contrastar predicciones y analizar una entrada no convertible.", "concurrent": false, "parallel_work": ""}]}, "code_blocks": [], "representation_needs": []}</ns0:renderMetadata>
+      <ns0:renderMetadata xmlns:ns0="urn:minijarvis:semantic-render:v1">{"session": "212", "source_files": {"teacher": "/mnt/compartido/Programación-26-27/Minijarvis/02-PROFESORADO/02-SESIONES/h1/S212-entrada-por-teclado-con-scanner-docente.md", "student_fallback": "/mnt/compartido/Programación-26-27/Minijarvis/01-ALUMNADO/03-SESIONES/h1/S212-entrada-por-teclado-con-scanner-alumnado.md"}, "layout": "activity", "plan_index": 5, "recognition": false, "unit_ids": ["unit-15"], "roles": {"unit-15": "core"}, "source_refs": [{"source": "teacher", "heading": "Comparar, probar y explicar — PAREJAS", "block_index": 18, "fragment": 0}, {"source": "teacher", "heading": "Secuencia de trabajo y modalidad", "block_index": 16, "fragment": 0}], "visible_sources": [{"index": 3, "sha256": "5d922d076451cd52eb065da2ac6b750e20ae254fb52201235556e72b0bfd5f97"}], "notes_sources": [{"function": "facilitation", "heading": "Comparar, probar y explicar — PAREJAS", "sha256": "eb92a2b4be6c112c0307bb5e3b53f8fc607a707f2f96a31c9530fa1a862c1a92"}, {"function": "facilitation", "heading": "Comparar, probar y explicar — PAREJAS", "sha256": "4e16c748eb854cd306b4df2b332471f0fe71bbcb7ec7c778ad677b1b82c066e2"}], "relations": {"unit_relations": {"unit-15": {}}, "schedule": null, "presentation_normalizations": {"petición -&gt; lectura -&gt; almacenamiento -&gt; conversión -&gt; cálculo -&gt; comparación booleana -&gt; salida": "petición → lectura → almacenamiento → conversión → cálculo → comparación booleana → salida"}, "source_supports_enriched": true}, "timeline_refs": [3], "composition": {"origin_slides": [17, 18]}, "timing": {"seconds": 480, "allocations": [{"source_index": 3, "seconds": 480, "decision": "Intervalo compartido íntegro; propietario contable seleccionado por función de actividad y referencia timeline de unidad (identidad semántica en empates). Propietario. ", "source_time": "22–30 min", "source_seconds": 480, "is_owner": true, "function": "activity"}], "clock_intervals": [3], "presenter_notes": "Reloj fuente 22–30 min: duración compartida 480 segundos. Trabajo: Núcleo práctico por parejas: comparar implementaciones, contrastar predicciones y analizar una entrada no convertible. Función del soporte: actividad.", "shared_intervals": [{"source_index": 3, "source_time": "22–30 min", "seconds": 480, "is_owner": true, "function": "activity", "action": "Núcleo práctico por parejas: comparar implementaciones, contrastar predicciones y analizar una entrada no convertible.", "concurrent": false, "parallel_work": ""}]}, "code_blocks": [], "representation_needs": []}</ns0:renderMetadata>
     </p:ext>
   </p:extLst>
 </p:sld>
@@ -8692,7 +8672,7 @@
         <p:spPr>
           <a:xfrm>
             <a:off x="640080" y="1987804"/>
-            <a:ext cx="5257800" cy="2176272"/>
+            <a:ext cx="5257800" cy="2846832"/>
           </a:xfrm>
           <a:prstGeom prst="rect">
             <a:avLst/>
@@ -8727,7 +8707,7 @@
               </a:defRPr>
             </a:pPr>
             <a:r>
-              <a:t>GitHub: código con Scanner, lectura almacenada, conversión cuando proceda y pruebas reproducibles con una entrada válida y otra no convertible.</a:t>
+              <a:t>GitHub: código con Scanner, lectura almacenada, conversión, cálculo, comparación booleana visible sin bifurcación y pruebas reproducibles con una entrada válida y otra no convertible.</a:t>
             </a:r>
           </a:p>
         </p:txBody>
@@ -8741,7 +8721,7 @@
         <p:spPr>
           <a:xfrm>
             <a:off x="6080760" y="1987804"/>
-            <a:ext cx="5257800" cy="2176272"/>
+            <a:ext cx="5257800" cy="2846832"/>
           </a:xfrm>
           <a:prstGeom prst="rect">
             <a:avLst/>
@@ -8788,7 +8768,7 @@
   </p:clrMapOvr>
   <p:extLst>
     <p:ext uri="urn:minijarvis:semantic-render:v1">
-      <ns0:renderMetadata xmlns:ns0="urn:minijarvis:semantic-render:v1">{"session": "212", "source_files": {"teacher": "/mnt/compartido/Programación-26-27/Minijarvis/02-PROFESORADO/02-SESIONES/h1/S212-entrada-por-teclado-con-scanner-docente.md", "student_fallback": "/mnt/compartido/Programación-26-27/Minijarvis/01-ALUMNADO/03-SESIONES/h1/S212-entrada-por-teclado-con-scanner-alumnado.md"}, "layout": "activity", "plan_index": 5, "recognition": false, "unit_ids": ["unit-16"], "roles": {"unit-16": "core"}, "source_refs": [{"source": "teacher", "heading": "Evidencia que permanece", "block_index": 19, "fragment": 0}], "visible_sources": [{"index": 4, "sha256": "644ecd37c6644af178479ecbde040b4ed59de39b42c7c8357dc75c6e9dc4fc64"}], "notes_sources": [{"function": "facilitation", "heading": "Evidencia que permanece", "sha256": "9e9eef13e95cff218ab94b20ca3c12359b1b6bbc28b0f83bb597214f299e0818"}], "relations": {"unit_relations": {"unit-16": {"reproducible_test": ["input", "expected", "obtained", "meaning"]}}, "schedule": null, "source_supports_enriched": true}, "timeline_refs": [3], "composition": {"origin_slides": [17, 18, 19]}, "timing": {"seconds": 0, "allocations": [{"source_index": 3, "seconds": 0, "decision": "Intervalo compartido íntegro; propietario contable seleccionado por función de actividad y referencia timeline de unidad (identidad semántica en empates). Soporte, sin duplicación contable. ", "source_time": "22–30 min", "source_seconds": 480, "is_owner": false, "function": "evidence"}], "clock_intervals": [3], "presenter_notes": "Reloj fuente 22–30 min: duración compartida 480 segundos. Trabajo: Núcleo práctico por parejas: comparar implementaciones, contrastar predicciones y analizar una entrada no convertible. Función del soporte: apoyo al trabajo.", "shared_intervals": [{"source_index": 3, "source_time": "22–30 min", "seconds": 480, "is_owner": false, "function": "evidence", "action": "Núcleo práctico por parejas: comparar implementaciones, contrastar predicciones y analizar una entrada no convertible.", "concurrent": false, "parallel_work": ""}]}, "code_blocks": [], "representation_needs": []}</ns0:renderMetadata>
+      <ns0:renderMetadata xmlns:ns0="urn:minijarvis:semantic-render:v1">{"session": "212", "source_files": {"teacher": "/mnt/compartido/Programación-26-27/Minijarvis/02-PROFESORADO/02-SESIONES/h1/S212-entrada-por-teclado-con-scanner-docente.md", "student_fallback": "/mnt/compartido/Programación-26-27/Minijarvis/01-ALUMNADO/03-SESIONES/h1/S212-entrada-por-teclado-con-scanner-alumnado.md"}, "layout": "activity", "plan_index": 5, "recognition": false, "unit_ids": ["unit-16"], "roles": {"unit-16": "core"}, "source_refs": [{"source": "teacher", "heading": "Evidencia que permanece", "block_index": 19, "fragment": 0}], "visible_sources": [{"index": 4, "sha256": "0d3cb8fedeeb70576bbdac2e0ddd36bee3e7047a51888661e85e8929ec42e1cc"}], "notes_sources": [{"function": "facilitation", "heading": "Evidencia que permanece", "sha256": "9e9eef13e95cff218ab94b20ca3c12359b1b6bbc28b0f83bb597214f299e0818"}], "relations": {"unit_relations": {"unit-16": {"reproducible_test": ["input", "expected", "obtained", "meaning"]}}, "schedule": null, "source_supports_enriched": true}, "timeline_refs": [3], "composition": {"origin_slides": [19, 20, 21]}, "timing": {"seconds": 0, "allocations": [{"source_index": 3, "seconds": 0, "decision": "Intervalo compartido íntegro; propietario contable seleccionado por función de actividad y referencia timeline de unidad (identidad semántica en empates). Soporte, sin duplicación contable. ", "source_time": "22–30 min", "source_seconds": 480, "is_owner": false, "function": "evidence"}], "clock_intervals": [3], "presenter_notes": "Reloj fuente 22–30 min: duración compartida 480 segundos. Trabajo: Núcleo práctico por parejas: comparar implementaciones, contrastar predicciones y analizar una entrada no convertible. Función del soporte: apoyo al trabajo.", "shared_intervals": [{"source_index": 3, "source_time": "22–30 min", "seconds": 480, "is_owner": false, "function": "evidence", "action": "Núcleo práctico por parejas: comparar implementaciones, contrastar predicciones y analizar una entrada no convertible.", "concurrent": false, "parallel_work": ""}]}, "code_blocks": [], "representation_needs": []}</ns0:renderMetadata>
     </p:ext>
   </p:extLst>
 </p:sld>
@@ -9131,7 +9111,7 @@
   </p:clrMapOvr>
   <p:extLst>
     <p:ext uri="urn:minijarvis:semantic-render:v1">
-      <ns0:renderMetadata xmlns:ns0="urn:minijarvis:semantic-render:v1">{"session": "212", "source_files": {"teacher": "/mnt/compartido/Programación-26-27/Minijarvis/02-PROFESORADO/02-SESIONES/h1/S212-entrada-por-teclado-con-scanner-docente.md", "student_fallback": "/mnt/compartido/Programación-26-27/Minijarvis/01-ALUMNADO/03-SESIONES/h1/S212-entrada-por-teclado-con-scanner-alumnado.md"}, "layout": "activity", "plan_index": 5, "recognition": false, "unit_ids": ["unit-16"], "roles": {"unit-16": "core"}, "source_refs": [{"source": "teacher", "heading": "Evidencia que permanece", "block_index": 19, "fragment": 0}], "visible_sources": [{"index": 4, "sha256": "644ecd37c6644af178479ecbde040b4ed59de39b42c7c8357dc75c6e9dc4fc64"}], "notes_sources": [{"function": "facilitation", "heading": "Evidencia que permanece", "sha256": "9e9eef13e95cff218ab94b20ca3c12359b1b6bbc28b0f83bb597214f299e0818"}], "relations": {"unit_relations": {"unit-16": {"reproducible_test": ["input", "expected", "obtained", "meaning"]}}, "schedule": null, "source_supports_enriched": true}, "timeline_refs": [3], "composition": {"origin_slides": [17, 18, 19]}, "timing": {"seconds": 0, "allocations": [{"source_index": 3, "seconds": 0, "decision": "Intervalo compartido íntegro; propietario contable seleccionado por función de actividad y referencia timeline de unidad (identidad semántica en empates). Soporte, sin duplicación contable. ", "source_time": "22–30 min", "source_seconds": 480, "is_owner": false, "function": "evidence"}], "clock_intervals": [3], "presenter_notes": "Reloj fuente 22–30 min: duración compartida 480 segundos. Trabajo: Núcleo práctico por parejas: comparar implementaciones, contrastar predicciones y analizar una entrada no convertible. Función del soporte: apoyo al trabajo.", "shared_intervals": [{"source_index": 3, "source_time": "22–30 min", "seconds": 480, "is_owner": false, "function": "evidence", "action": "Núcleo práctico por parejas: comparar implementaciones, contrastar predicciones y analizar una entrada no convertible.", "concurrent": false, "parallel_work": ""}]}, "code_blocks": [], "representation_needs": []}</ns0:renderMetadata>
+      <ns0:renderMetadata xmlns:ns0="urn:minijarvis:semantic-render:v1">{"session": "212", "source_files": {"teacher": "/mnt/compartido/Programación-26-27/Minijarvis/02-PROFESORADO/02-SESIONES/h1/S212-entrada-por-teclado-con-scanner-docente.md", "student_fallback": "/mnt/compartido/Programación-26-27/Minijarvis/01-ALUMNADO/03-SESIONES/h1/S212-entrada-por-teclado-con-scanner-alumnado.md"}, "layout": "activity", "plan_index": 5, "recognition": false, "unit_ids": ["unit-16"], "roles": {"unit-16": "core"}, "source_refs": [{"source": "teacher", "heading": "Evidencia que permanece", "block_index": 19, "fragment": 0}], "visible_sources": [{"index": 4, "sha256": "0d3cb8fedeeb70576bbdac2e0ddd36bee3e7047a51888661e85e8929ec42e1cc"}], "notes_sources": [{"function": "facilitation", "heading": "Evidencia que permanece", "sha256": "9e9eef13e95cff218ab94b20ca3c12359b1b6bbc28b0f83bb597214f299e0818"}], "relations": {"unit_relations": {"unit-16": {"reproducible_test": ["input", "expected", "obtained", "meaning"]}}, "schedule": null, "source_supports_enriched": true}, "timeline_refs": [3], "composition": {"origin_slides": [19, 20, 21]}, "timing": {"seconds": 0, "allocations": [{"source_index": 3, "seconds": 0, "decision": "Intervalo compartido íntegro; propietario contable seleccionado por función de actividad y referencia timeline de unidad (identidad semántica en empates). Soporte, sin duplicación contable. ", "source_time": "22–30 min", "source_seconds": 480, "is_owner": false, "function": "evidence"}], "clock_intervals": [3], "presenter_notes": "Reloj fuente 22–30 min: duración compartida 480 segundos. Trabajo: Núcleo práctico por parejas: comparar implementaciones, contrastar predicciones y analizar una entrada no convertible. Función del soporte: apoyo al trabajo.", "shared_intervals": [{"source_index": 3, "source_time": "22–30 min", "seconds": 480, "is_owner": false, "function": "evidence", "action": "Núcleo práctico por parejas: comparar implementaciones, contrastar predicciones y analizar una entrada no convertible.", "concurrent": false, "parallel_work": ""}]}, "code_blocks": [], "representation_needs": []}</ns0:renderMetadata>
     </p:ext>
   </p:extLst>
 </p:sld>
@@ -9280,198 +9260,19 @@
       </p:sp>
       <p:sp>
         <p:nvSpPr>
-          <p:cNvPr id="5" name="Código editable" descr="Código editable"/>
-          <p:cNvSpPr txBox="1"/>
-          <p:nvPr/>
-        </p:nvSpPr>
-        <p:spPr>
-          <a:xfrm>
-            <a:off x="640080" y="1874519"/>
-            <a:ext cx="6629400" cy="3391662"/>
-          </a:xfrm>
-          <a:prstGeom prst="rect">
-            <a:avLst/>
-          </a:prstGeom>
-          <a:solidFill>
-            <a:srgbClr val="FFFFFF"/>
-          </a:solidFill>
-        </p:spPr>
-        <p:txBody>
-          <a:bodyPr wrap="square" lIns="109728" rIns="109728" tIns="73152" bIns="73152">
-            <a:noAutofit/>
-          </a:bodyPr>
-          <a:lstStyle/>
-          <a:p>
-            <a:pPr marL="335280" indent="-335280">
-              <a:lnSpc>
-                <a:spcPts val="2310"/>
-              </a:lnSpc>
-              <a:spcAft>
-                <a:spcPts val="0"/>
-              </a:spcAft>
-              <a:defRPr sz="2200" b="0">
-                <a:solidFill>
-                  <a:srgbClr val="1C2330"/>
-                </a:solidFill>
-                <a:latin typeface="Liberation Mono"/>
-              </a:defRPr>
-            </a:pPr>
-            <a:r>
-              <a:t>Prueba: conversión de horas.</a:t>
-            </a:r>
-          </a:p>
-          <a:p>
-            <a:pPr marL="335280" indent="-335280">
-              <a:lnSpc>
-                <a:spcPts val="2310"/>
-              </a:lnSpc>
-              <a:spcAft>
-                <a:spcPts val="0"/>
-              </a:spcAft>
-              <a:defRPr sz="2200" b="0">
-                <a:solidFill>
-                  <a:srgbClr val="1C2330"/>
-                </a:solidFill>
-                <a:latin typeface="Liberation Mono"/>
-              </a:defRPr>
-            </a:pPr>
-            <a:r>
-              <a:t>Entrada válida: 5</a:t>
-            </a:r>
-          </a:p>
-          <a:p>
-            <a:pPr marL="335280" indent="-335280">
-              <a:lnSpc>
-                <a:spcPts val="2310"/>
-              </a:lnSpc>
-              <a:spcAft>
-                <a:spcPts val="0"/>
-              </a:spcAft>
-              <a:defRPr sz="2200" b="0">
-                <a:solidFill>
-                  <a:srgbClr val="1C2330"/>
-                </a:solidFill>
-                <a:latin typeface="Liberation Mono"/>
-              </a:defRPr>
-            </a:pPr>
-            <a:r>
-              <a:t>Salida esperada: 300 minutos.</a:t>
-            </a:r>
-          </a:p>
-          <a:p>
-            <a:pPr marL="335280" indent="-335280">
-              <a:lnSpc>
-                <a:spcPts val="2310"/>
-              </a:lnSpc>
-              <a:spcAft>
-                <a:spcPts val="0"/>
-              </a:spcAft>
-              <a:defRPr sz="2200" b="0">
-                <a:solidFill>
-                  <a:srgbClr val="1C2330"/>
-                </a:solidFill>
-                <a:latin typeface="Liberation Mono"/>
-              </a:defRPr>
-            </a:pPr>
-            <a:r>
-              <a:t>Salida obtenida: 300 minutos.</a:t>
-            </a:r>
-          </a:p>
-          <a:p>
-            <a:pPr marL="335280" indent="-335280">
-              <a:lnSpc>
-                <a:spcPts val="2310"/>
-              </a:lnSpc>
-              <a:spcAft>
-                <a:spcPts val="0"/>
-              </a:spcAft>
-              <a:defRPr sz="2200" b="0">
-                <a:solidFill>
-                  <a:srgbClr val="1C2330"/>
-                </a:solidFill>
-                <a:latin typeface="Liberation Mono"/>
-              </a:defRPr>
-            </a:pPr>
-            <a:r>
-              <a:t>Demuestra: el texto leído se convierte a int y se usa en una operación.</a:t>
-            </a:r>
-          </a:p>
-          <a:p>
-            <a:pPr marL="335280" indent="-335280">
-              <a:lnSpc>
-                <a:spcPts val="2310"/>
-              </a:lnSpc>
-              <a:spcAft>
-                <a:spcPts val="0"/>
-              </a:spcAft>
-              <a:defRPr sz="2200" b="0">
-                <a:solidFill>
-                  <a:srgbClr val="1C2330"/>
-                </a:solidFill>
-                <a:latin typeface="Liberation Mono"/>
-              </a:defRPr>
-            </a:pPr>
-            <a:r>
-              <a:t>Entrada no convertible: hola</a:t>
-            </a:r>
-          </a:p>
-          <a:p>
-            <a:pPr marL="335280" indent="-335280">
-              <a:lnSpc>
-                <a:spcPts val="2310"/>
-              </a:lnSpc>
-              <a:spcAft>
-                <a:spcPts val="0"/>
-              </a:spcAft>
-              <a:defRPr sz="2200" b="0">
-                <a:solidFill>
-                  <a:srgbClr val="1C2330"/>
-                </a:solidFill>
-                <a:latin typeface="Liberation Mono"/>
-              </a:defRPr>
-            </a:pPr>
-            <a:r>
-              <a:t>Resultado: error durante la ejecución al aplicar Integer.parseInt.</a:t>
-            </a:r>
-          </a:p>
-          <a:p>
-            <a:pPr marL="335280" indent="-335280">
-              <a:lnSpc>
-                <a:spcPts val="2310"/>
-              </a:lnSpc>
-              <a:spcAft>
-                <a:spcPts val="0"/>
-              </a:spcAft>
-              <a:defRPr sz="2200" b="0">
-                <a:solidFill>
-                  <a:srgbClr val="1C2330"/>
-                </a:solidFill>
-                <a:latin typeface="Liberation Mono"/>
-              </a:defRPr>
-            </a:pPr>
-            <a:r>
-              <a:t>Demuestra: compilar no garantiza que cualquier entrada sea convertible.</a:t>
-            </a:r>
-          </a:p>
-        </p:txBody>
-      </p:sp>
-      <p:sp>
-        <p:nvSpPr>
-          <p:cNvPr id="6" name="Referente o acción" descr="Referente o acción"/>
-          <p:cNvSpPr txBox="1"/>
-          <p:nvPr/>
-        </p:nvSpPr>
-        <p:spPr>
-          <a:xfrm>
-            <a:off x="7680960" y="1874519"/>
-            <a:ext cx="3840480" cy="2846832"/>
-          </a:xfrm>
-          <a:prstGeom prst="rect">
-            <a:avLst/>
-          </a:prstGeom>
-          <a:solidFill>
-            <a:srgbClr val="FFFFFF"/>
-          </a:solidFill>
+          <p:cNvPr id="5" name="Acción" descr="Acción"/>
+          <p:cNvSpPr txBox="1"/>
+          <p:nvPr/>
+        </p:nvSpPr>
+        <p:spPr>
+          <a:xfrm>
+            <a:off x="640080" y="1406652"/>
+            <a:ext cx="10881360" cy="443992"/>
+          </a:xfrm>
+          <a:prstGeom prst="rect">
+            <a:avLst/>
+          </a:prstGeom>
+          <a:noFill/>
         </p:spPr>
         <p:txBody>
           <a:bodyPr wrap="square" lIns="109728" rIns="109728" tIns="73152" bIns="73152">
@@ -9481,12 +9282,54 @@
           <a:p>
             <a:pPr>
               <a:lnSpc>
-                <a:spcPts val="2640"/>
-              </a:lnSpc>
-              <a:spcAft>
-                <a:spcPts val="0"/>
-              </a:spcAft>
-              <a:defRPr sz="2400" b="0">
+                <a:spcPts val="2200"/>
+              </a:lnSpc>
+              <a:spcAft>
+                <a:spcPts val="0"/>
+              </a:spcAft>
+              <a:defRPr sz="2000" b="1">
+                <a:solidFill>
+                  <a:srgbClr val="2F5BA8"/>
+                </a:solidFill>
+                <a:latin typeface="Liberation Sans"/>
+              </a:defRPr>
+            </a:pPr>
+            <a:r>
+              <a:t>QUÉ HACER</a:t>
+            </a:r>
+          </a:p>
+        </p:txBody>
+      </p:sp>
+      <p:sp>
+        <p:nvSpPr>
+          <p:cNvPr id="6" name="Contenido" descr="Contenido"/>
+          <p:cNvSpPr txBox="1"/>
+          <p:nvPr/>
+        </p:nvSpPr>
+        <p:spPr>
+          <a:xfrm>
+            <a:off x="640080" y="1987804"/>
+            <a:ext cx="10881360" cy="1338072"/>
+          </a:xfrm>
+          <a:prstGeom prst="rect">
+            <a:avLst/>
+          </a:prstGeom>
+          <a:noFill/>
+        </p:spPr>
+        <p:txBody>
+          <a:bodyPr wrap="square" lIns="109728" rIns="109728" tIns="73152" bIns="73152">
+            <a:noAutofit/>
+          </a:bodyPr>
+          <a:lstStyle/>
+          <a:p>
+            <a:pPr>
+              <a:lnSpc>
+                <a:spcPts val="3080"/>
+              </a:lnSpc>
+              <a:spcAft>
+                <a:spcPts val="0"/>
+              </a:spcAft>
+              <a:defRPr sz="2800" b="0">
                 <a:solidFill>
                   <a:srgbClr val="1C2330"/>
                 </a:solidFill>
@@ -9506,7 +9349,7 @@
   </p:clrMapOvr>
   <p:extLst>
     <p:ext uri="urn:minijarvis:semantic-render:v1">
-      <ns0:renderMetadata xmlns:ns0="urn:minijarvis:semantic-render:v1">{"session": "212", "source_files": {"teacher": "/mnt/compartido/Programación-26-27/Minijarvis/02-PROFESORADO/02-SESIONES/h1/S212-entrada-por-teclado-con-scanner-docente.md", "student_fallback": "/mnt/compartido/Programación-26-27/Minijarvis/01-ALUMNADO/03-SESIONES/h1/S212-entrada-por-teclado-con-scanner-alumnado.md"}, "layout": "study", "plan_index": 5, "recognition": false, "unit_ids": ["unit-16"], "roles": {"unit-16": "core"}, "source_refs": [{"source": "teacher", "heading": "Evidencia que permanece", "block_index": 19, "fragment": 0}], "visible_sources": [{"index": 5, "sha256": "fe2f51f52301fd4ad05932018b8c56eba6b5d3cf6f74df904702c93c9ec21e8a"}, {"index": 7, "sha256": "cfb203e7ea56805e8663708ff1bd51652ed3dd35939466279b724a7d536032c6"}], "notes_sources": [{"function": "facilitation", "heading": "Evidencia que permanece", "sha256": "9e9eef13e95cff218ab94b20ca3c12359b1b6bbc28b0f83bb597214f299e0818"}], "relations": {"unit_relations": {"unit-16": {"reproducible_test": ["input", "expected", "obtained", "meaning"]}}, "schedule": null, "source_supports_enriched": true}, "timeline_refs": [3], "composition": {"origin_slides": [17, 18, 19]}, "timing": {"seconds": 0, "allocations": [{"source_index": 3, "seconds": 0, "decision": "Intervalo compartido íntegro; propietario contable seleccionado por función de actividad y referencia timeline de unidad (identidad semántica en empates). Soporte, sin duplicación contable. ", "source_time": "22–30 min", "source_seconds": 480, "is_owner": false, "function": "evidence"}], "clock_intervals": [3], "presenter_notes": "Reloj fuente 22–30 min: duración compartida 480 segundos. Trabajo: Núcleo práctico por parejas: comparar implementaciones, contrastar predicciones y analizar una entrada no convertible. Función del soporte: apoyo al trabajo.", "shared_intervals": [{"source_index": 3, "source_time": "22–30 min", "seconds": 480, "is_owner": false, "function": "evidence", "action": "Núcleo práctico por parejas: comparar implementaciones, contrastar predicciones y analizar una entrada no convertible.", "concurrent": false, "parallel_work": ""}]}, "code_blocks": [], "representation_needs": []}</ns0:renderMetadata>
+      <ns0:renderMetadata xmlns:ns0="urn:minijarvis:semantic-render:v1">{"session": "212", "source_files": {"teacher": "/mnt/compartido/Programación-26-27/Minijarvis/02-PROFESORADO/02-SESIONES/h1/S212-entrada-por-teclado-con-scanner-docente.md", "student_fallback": "/mnt/compartido/Programación-26-27/Minijarvis/01-ALUMNADO/03-SESIONES/h1/S212-entrada-por-teclado-con-scanner-alumnado.md"}, "layout": "activity", "plan_index": 5, "recognition": false, "unit_ids": ["unit-16"], "roles": {"unit-16": "core"}, "source_refs": [{"source": "teacher", "heading": "Evidencia que permanece", "block_index": 19, "fragment": 0}], "visible_sources": [{"index": 5, "sha256": "fe2f51f52301fd4ad05932018b8c56eba6b5d3cf6f74df904702c93c9ec21e8a"}], "notes_sources": [{"function": "facilitation", "heading": "Evidencia que permanece", "sha256": "9e9eef13e95cff218ab94b20ca3c12359b1b6bbc28b0f83bb597214f299e0818"}], "relations": {"unit_relations": {"unit-16": {"reproducible_test": ["input", "expected", "obtained", "meaning"]}}, "schedule": null, "source_supports_enriched": true}, "timeline_refs": [3], "composition": {"origin_slides": [19, 20, 21]}, "timing": {"seconds": 0, "allocations": [{"source_index": 3, "seconds": 0, "decision": "Intervalo compartido íntegro; propietario contable seleccionado por función de actividad y referencia timeline de unidad (identidad semántica en empates). Soporte, sin duplicación contable. ", "source_time": "22–30 min", "source_seconds": 480, "is_owner": false, "function": "evidence"}], "clock_intervals": [3], "presenter_notes": "Reloj fuente 22–30 min: duración compartida 480 segundos. Trabajo: Núcleo práctico por parejas: comparar implementaciones, contrastar predicciones y analizar una entrada no convertible. Función del soporte: apoyo al trabajo.", "shared_intervals": [{"source_index": 3, "source_time": "22–30 min", "seconds": 480, "is_owner": false, "function": "evidence", "action": "Núcleo práctico por parejas: comparar implementaciones, contrastar predicciones y analizar una entrada no convertible.", "concurrent": false, "parallel_work": ""}]}, "code_blocks": [], "representation_needs": []}</ns0:renderMetadata>
     </p:ext>
   </p:extLst>
 </p:sld>
@@ -9606,7 +9449,7 @@
               </a:defRPr>
             </a:pPr>
             <a:r>
-              <a:t>Seguridad y uso de IA</a:t>
+              <a:t>Evidencia que permanece</a:t>
             </a:r>
           </a:p>
         </p:txBody>
@@ -9697,14 +9540,14 @@
       </p:sp>
       <p:sp>
         <p:nvSpPr>
-          <p:cNvPr id="6" name="Acción o criterio 0" descr="Acción o criterio 0"/>
+          <p:cNvPr id="6" name="Código editable" descr="Código editable"/>
           <p:cNvSpPr txBox="1"/>
           <p:nvPr/>
         </p:nvSpPr>
         <p:spPr>
           <a:xfrm>
             <a:off x="640080" y="1987804"/>
-            <a:ext cx="5257800" cy="1170432"/>
+            <a:ext cx="10881360" cy="3978402"/>
           </a:xfrm>
           <a:prstGeom prst="rect">
             <a:avLst/>
@@ -9712,181 +9555,200 @@
           <a:solidFill>
             <a:srgbClr val="FFFFFF"/>
           </a:solidFill>
-          <a:ln>
-            <a:solidFill>
-              <a:srgbClr val="2F5BA8"/>
-            </a:solidFill>
-          </a:ln>
-        </p:spPr>
-        <p:txBody>
-          <a:bodyPr wrap="square" lIns="109728" rIns="109728" tIns="73152" bIns="73152">
-            <a:noAutofit/>
-          </a:bodyPr>
-          <a:lstStyle/>
-          <a:p>
-            <a:pPr>
-              <a:lnSpc>
-                <a:spcPts val="2640"/>
-              </a:lnSpc>
-              <a:spcAft>
-                <a:spcPts val="0"/>
-              </a:spcAft>
-              <a:defRPr sz="2400" b="0">
-                <a:solidFill>
-                  <a:srgbClr val="1C2330"/>
-                </a:solidFill>
-                <a:latin typeface="Liberation Sans"/>
-              </a:defRPr>
-            </a:pPr>
-            <a:r>
-              <a:t>Trabaja únicamente con datos ficticios.</a:t>
-            </a:r>
-          </a:p>
-        </p:txBody>
-      </p:sp>
-      <p:sp>
-        <p:nvSpPr>
-          <p:cNvPr id="7" name="Acción o criterio 1" descr="Acción o criterio 1"/>
-          <p:cNvSpPr txBox="1"/>
-          <p:nvPr/>
-        </p:nvSpPr>
-        <p:spPr>
-          <a:xfrm>
-            <a:off x="6080760" y="1987804"/>
-            <a:ext cx="5257800" cy="1170432"/>
-          </a:xfrm>
-          <a:prstGeom prst="rect">
-            <a:avLst/>
-          </a:prstGeom>
-          <a:solidFill>
-            <a:srgbClr val="FFFFFF"/>
-          </a:solidFill>
-          <a:ln>
-            <a:solidFill>
-              <a:srgbClr val="2F5BA8"/>
-            </a:solidFill>
-          </a:ln>
-        </p:spPr>
-        <p:txBody>
-          <a:bodyPr wrap="square" lIns="109728" rIns="109728" tIns="73152" bIns="73152">
-            <a:noAutofit/>
-          </a:bodyPr>
-          <a:lstStyle/>
-          <a:p>
-            <a:pPr>
-              <a:lnSpc>
-                <a:spcPts val="2640"/>
-              </a:lnSpc>
-              <a:spcAft>
-                <a:spcPts val="0"/>
-              </a:spcAft>
-              <a:defRPr sz="2400" b="0">
-                <a:solidFill>
-                  <a:srgbClr val="1C2330"/>
-                </a:solidFill>
-                <a:latin typeface="Liberation Sans"/>
-              </a:defRPr>
-            </a:pPr>
-            <a:r>
-              <a:t>No escribas contraseñas, tokens, claves API ni datos personales.</a:t>
-            </a:r>
-          </a:p>
-        </p:txBody>
-      </p:sp>
-      <p:sp>
-        <p:nvSpPr>
-          <p:cNvPr id="8" name="Acción o criterio 2" descr="Acción o criterio 2"/>
-          <p:cNvSpPr txBox="1"/>
-          <p:nvPr/>
-        </p:nvSpPr>
-        <p:spPr>
-          <a:xfrm>
-            <a:off x="640080" y="3249676"/>
-            <a:ext cx="5257800" cy="1840991"/>
-          </a:xfrm>
-          <a:prstGeom prst="rect">
-            <a:avLst/>
-          </a:prstGeom>
-          <a:solidFill>
-            <a:srgbClr val="FFFFFF"/>
-          </a:solidFill>
-          <a:ln>
-            <a:solidFill>
-              <a:srgbClr val="2F5BA8"/>
-            </a:solidFill>
-          </a:ln>
-        </p:spPr>
-        <p:txBody>
-          <a:bodyPr wrap="square" lIns="109728" rIns="109728" tIns="73152" bIns="73152">
-            <a:noAutofit/>
-          </a:bodyPr>
-          <a:lstStyle/>
-          <a:p>
-            <a:pPr>
-              <a:lnSpc>
-                <a:spcPts val="2640"/>
-              </a:lnSpc>
-              <a:spcAft>
-                <a:spcPts val="0"/>
-              </a:spcAft>
-              <a:defRPr sz="2400" b="0">
-                <a:solidFill>
-                  <a:srgbClr val="1C2330"/>
-                </a:solidFill>
-                <a:latin typeface="Liberation Sans"/>
-              </a:defRPr>
-            </a:pPr>
-            <a:r>
-              <a:t>Si utilizas IA en un uso permitido, registra qué pediste, qué recibiste, qué cambiaste y cómo lo comprobaste.</a:t>
-            </a:r>
-          </a:p>
-        </p:txBody>
-      </p:sp>
-      <p:sp>
-        <p:nvSpPr>
-          <p:cNvPr id="9" name="Acción o criterio 3" descr="Acción o criterio 3"/>
-          <p:cNvSpPr txBox="1"/>
-          <p:nvPr/>
-        </p:nvSpPr>
-        <p:spPr>
-          <a:xfrm>
-            <a:off x="6080760" y="3249676"/>
-            <a:ext cx="5257800" cy="1840991"/>
-          </a:xfrm>
-          <a:prstGeom prst="rect">
-            <a:avLst/>
-          </a:prstGeom>
-          <a:solidFill>
-            <a:srgbClr val="FFFFFF"/>
-          </a:solidFill>
-          <a:ln>
-            <a:solidFill>
-              <a:srgbClr val="2F5BA8"/>
-            </a:solidFill>
-          </a:ln>
-        </p:spPr>
-        <p:txBody>
-          <a:bodyPr wrap="square" lIns="109728" rIns="109728" tIns="73152" bIns="73152">
-            <a:noAutofit/>
-          </a:bodyPr>
-          <a:lstStyle/>
-          <a:p>
-            <a:pPr>
-              <a:lnSpc>
-                <a:spcPts val="2640"/>
-              </a:lnSpc>
-              <a:spcAft>
-                <a:spcPts val="0"/>
-              </a:spcAft>
-              <a:defRPr sz="2400" b="0">
-                <a:solidFill>
-                  <a:srgbClr val="1C2330"/>
-                </a:solidFill>
-                <a:latin typeface="Liberation Sans"/>
-              </a:defRPr>
-            </a:pPr>
-            <a:r>
-              <a:t>Los ejemplos de Laura solo se consultan después del intento propio.</a:t>
+        </p:spPr>
+        <p:txBody>
+          <a:bodyPr wrap="square" lIns="109728" rIns="109728" tIns="73152" bIns="73152">
+            <a:noAutofit/>
+          </a:bodyPr>
+          <a:lstStyle/>
+          <a:p>
+            <a:pPr marL="335280" indent="-335280">
+              <a:lnSpc>
+                <a:spcPts val="2310"/>
+              </a:lnSpc>
+              <a:spcAft>
+                <a:spcPts val="0"/>
+              </a:spcAft>
+              <a:defRPr sz="2200" b="0">
+                <a:solidFill>
+                  <a:srgbClr val="1C2330"/>
+                </a:solidFill>
+                <a:latin typeface="Liberation Mono"/>
+              </a:defRPr>
+            </a:pPr>
+            <a:r>
+              <a:t>Prueba: conversión de horas.</a:t>
+            </a:r>
+          </a:p>
+          <a:p>
+            <a:pPr marL="335280" indent="-335280">
+              <a:lnSpc>
+                <a:spcPts val="2310"/>
+              </a:lnSpc>
+              <a:spcAft>
+                <a:spcPts val="0"/>
+              </a:spcAft>
+              <a:defRPr sz="2200" b="0">
+                <a:solidFill>
+                  <a:srgbClr val="1C2330"/>
+                </a:solidFill>
+                <a:latin typeface="Liberation Mono"/>
+              </a:defRPr>
+            </a:pPr>
+            <a:r>
+              <a:t>Entrada válida: 5</a:t>
+            </a:r>
+          </a:p>
+          <a:p>
+            <a:pPr marL="335280" indent="-335280">
+              <a:lnSpc>
+                <a:spcPts val="2310"/>
+              </a:lnSpc>
+              <a:spcAft>
+                <a:spcPts val="0"/>
+              </a:spcAft>
+              <a:defRPr sz="2200" b="0">
+                <a:solidFill>
+                  <a:srgbClr val="1C2330"/>
+                </a:solidFill>
+                <a:latin typeface="Liberation Mono"/>
+              </a:defRPr>
+            </a:pPr>
+            <a:r>
+              <a:t>Salida esperada: 300 minutos.</a:t>
+            </a:r>
+          </a:p>
+          <a:p>
+            <a:pPr marL="335280" indent="-335280">
+              <a:lnSpc>
+                <a:spcPts val="2310"/>
+              </a:lnSpc>
+              <a:spcAft>
+                <a:spcPts val="0"/>
+              </a:spcAft>
+              <a:defRPr sz="2200" b="0">
+                <a:solidFill>
+                  <a:srgbClr val="1C2330"/>
+                </a:solidFill>
+                <a:latin typeface="Liberation Mono"/>
+              </a:defRPr>
+            </a:pPr>
+            <a:r>
+              <a:t>Salida obtenida: 300 minutos.</a:t>
+            </a:r>
+          </a:p>
+          <a:p>
+            <a:pPr marL="335280" indent="-335280">
+              <a:lnSpc>
+                <a:spcPts val="2310"/>
+              </a:lnSpc>
+              <a:spcAft>
+                <a:spcPts val="0"/>
+              </a:spcAft>
+              <a:defRPr sz="2200" b="0">
+                <a:solidFill>
+                  <a:srgbClr val="1C2330"/>
+                </a:solidFill>
+                <a:latin typeface="Liberation Mono"/>
+              </a:defRPr>
+            </a:pPr>
+            <a:r>
+              <a:t>Comparación: 5 &gt;= 4</a:t>
+            </a:r>
+          </a:p>
+          <a:p>
+            <a:pPr marL="335280" indent="-335280">
+              <a:lnSpc>
+                <a:spcPts val="2310"/>
+              </a:lnSpc>
+              <a:spcAft>
+                <a:spcPts val="0"/>
+              </a:spcAft>
+              <a:defRPr sz="2200" b="0">
+                <a:solidFill>
+                  <a:srgbClr val="1C2330"/>
+                </a:solidFill>
+                <a:latin typeface="Liberation Mono"/>
+              </a:defRPr>
+            </a:pPr>
+            <a:r>
+              <a:t>Resultado booleano esperado y obtenido: true.</a:t>
+            </a:r>
+          </a:p>
+          <a:p>
+            <a:pPr marL="335280" indent="-335280">
+              <a:lnSpc>
+                <a:spcPts val="2310"/>
+              </a:lnSpc>
+              <a:spcAft>
+                <a:spcPts val="0"/>
+              </a:spcAft>
+              <a:defRPr sz="2200" b="0">
+                <a:solidFill>
+                  <a:srgbClr val="1C2330"/>
+                </a:solidFill>
+                <a:latin typeface="Liberation Mono"/>
+              </a:defRPr>
+            </a:pPr>
+            <a:r>
+              <a:t>Demuestra: el texto leído se convierte a int, se usa en una operación y produce un booleano visible sin bifurcación.</a:t>
+            </a:r>
+          </a:p>
+          <a:p>
+            <a:pPr marL="335280" indent="-335280">
+              <a:lnSpc>
+                <a:spcPts val="2310"/>
+              </a:lnSpc>
+              <a:spcAft>
+                <a:spcPts val="0"/>
+              </a:spcAft>
+              <a:defRPr sz="2200" b="0">
+                <a:solidFill>
+                  <a:srgbClr val="1C2330"/>
+                </a:solidFill>
+                <a:latin typeface="Liberation Mono"/>
+              </a:defRPr>
+            </a:pPr>
+            <a:r>
+              <a:t>Entrada no convertible: hola</a:t>
+            </a:r>
+          </a:p>
+          <a:p>
+            <a:pPr marL="335280" indent="-335280">
+              <a:lnSpc>
+                <a:spcPts val="2310"/>
+              </a:lnSpc>
+              <a:spcAft>
+                <a:spcPts val="0"/>
+              </a:spcAft>
+              <a:defRPr sz="2200" b="0">
+                <a:solidFill>
+                  <a:srgbClr val="1C2330"/>
+                </a:solidFill>
+                <a:latin typeface="Liberation Mono"/>
+              </a:defRPr>
+            </a:pPr>
+            <a:r>
+              <a:t>Resultado: error durante la ejecución al aplicar Integer.parseInt.</a:t>
+            </a:r>
+          </a:p>
+          <a:p>
+            <a:pPr marL="335280" indent="-335280">
+              <a:lnSpc>
+                <a:spcPts val="2310"/>
+              </a:lnSpc>
+              <a:spcAft>
+                <a:spcPts val="0"/>
+              </a:spcAft>
+              <a:defRPr sz="2200" b="0">
+                <a:solidFill>
+                  <a:srgbClr val="1C2330"/>
+                </a:solidFill>
+                <a:latin typeface="Liberation Mono"/>
+              </a:defRPr>
+            </a:pPr>
+            <a:r>
+              <a:t>Demuestra: compilar no garantiza que cualquier entrada sea convertible.</a:t>
             </a:r>
           </a:p>
         </p:txBody>
@@ -9898,7 +9760,7 @@
   </p:clrMapOvr>
   <p:extLst>
     <p:ext uri="urn:minijarvis:semantic-render:v1">
-      <ns0:renderMetadata xmlns:ns0="urn:minijarvis:semantic-render:v1">{"session": "212", "source_files": {"teacher": "/mnt/compartido/Programación-26-27/Minijarvis/02-PROFESORADO/02-SESIONES/h1/S212-entrada-por-teclado-con-scanner-docente.md", "student_fallback": "/mnt/compartido/Programación-26-27/Minijarvis/01-ALUMNADO/03-SESIONES/h1/S212-entrada-por-teclado-con-scanner-alumnado.md"}, "layout": "activity", "plan_index": 5, "recognition": false, "unit_ids": ["unit-22"], "roles": {"unit-22": "core"}, "source_refs": [{"source": "student_fallback", "heading": "Seguridad y uso de IA", "block_index": null, "fragment": 0}], "visible_sources": [{"index": 8, "sha256": "61337aa7d62b810fc872b64ccf50a7b9620d423d2be91b3dfff6d304f2bec734"}], "notes_sources": [], "relations": {"unit_relations": {"unit-22": {}}, "schedule": null, "source_supports_enriched": true}, "timeline_refs": [3], "composition": {"origin_slides": [20]}, "timing": {"seconds": 0, "allocations": [{"source_index": 3, "seconds": 0, "decision": "Intervalo compartido íntegro; propietario contable seleccionado por función de actividad y referencia timeline de unidad (identidad semántica en empates). Soporte, sin duplicación contable. ", "source_time": "22–30 min", "source_seconds": 480, "is_owner": false, "function": "security"}], "clock_intervals": [3], "presenter_notes": "Reloj fuente 22–30 min: duración compartida 480 segundos. Trabajo: Núcleo práctico por parejas: comparar implementaciones, contrastar predicciones y analizar una entrada no convertible. Función del soporte: apoyo al trabajo.", "shared_intervals": [{"source_index": 3, "source_time": "22–30 min", "seconds": 480, "is_owner": false, "function": "security", "action": "Núcleo práctico por parejas: comparar implementaciones, contrastar predicciones y analizar una entrada no convertible.", "concurrent": false, "parallel_work": ""}]}, "code_blocks": [], "representation_needs": []}</ns0:renderMetadata>
+      <ns0:renderMetadata xmlns:ns0="urn:minijarvis:semantic-render:v1">{"session": "212", "source_files": {"teacher": "/mnt/compartido/Programación-26-27/Minijarvis/02-PROFESORADO/02-SESIONES/h1/S212-entrada-por-teclado-con-scanner-docente.md", "student_fallback": "/mnt/compartido/Programación-26-27/Minijarvis/01-ALUMNADO/03-SESIONES/h1/S212-entrada-por-teclado-con-scanner-alumnado.md"}, "layout": "activity", "plan_index": 5, "recognition": false, "unit_ids": ["unit-16"], "roles": {"unit-16": "core"}, "source_refs": [{"source": "teacher", "heading": "Evidencia que permanece", "block_index": 19, "fragment": 0}], "visible_sources": [{"index": 7, "sha256": "083be7ae44ea2ed3c8dab2fa97d3ee9b27e338a089e290661ad182a03fba5c8a"}], "notes_sources": [{"function": "facilitation", "heading": "Evidencia que permanece", "sha256": "9e9eef13e95cff218ab94b20ca3c12359b1b6bbc28b0f83bb597214f299e0818"}], "relations": {"unit_relations": {"unit-16": {"reproducible_test": ["input", "expected", "obtained", "meaning"]}}, "schedule": null, "source_supports_enriched": true}, "timeline_refs": [3], "composition": {"origin_slides": [19, 20, 21]}, "timing": {"seconds": 0, "allocations": [{"source_index": 3, "seconds": 0, "decision": "Intervalo compartido íntegro; propietario contable seleccionado por función de actividad y referencia timeline de unidad (identidad semántica en empates). Soporte, sin duplicación contable. ", "source_time": "22–30 min", "source_seconds": 480, "is_owner": false, "function": "evidence"}], "clock_intervals": [3], "presenter_notes": "Reloj fuente 22–30 min: duración compartida 480 segundos. Trabajo: Núcleo práctico por parejas: comparar implementaciones, contrastar predicciones y analizar una entrada no convertible. Función del soporte: apoyo al trabajo.", "shared_intervals": [{"source_index": 3, "source_time": "22–30 min", "seconds": 480, "is_owner": false, "function": "evidence", "action": "Núcleo práctico por parejas: comparar implementaciones, contrastar predicciones y analizar una entrada no convertible.", "concurrent": false, "parallel_work": ""}]}, "code_blocks": [], "representation_needs": []}</ns0:renderMetadata>
     </p:ext>
   </p:extLst>
 </p:sld>
@@ -10054,7 +9916,7 @@
         <p:spPr>
           <a:xfrm>
             <a:off x="640080" y="1417320"/>
-            <a:ext cx="10881360" cy="1729232"/>
+            <a:ext cx="10881360" cy="2120392"/>
           </a:xfrm>
           <a:prstGeom prst="rect">
             <a:avLst/>
@@ -10084,7 +9946,7 @@
               </a:defRPr>
             </a:pPr>
             <a:r>
-              <a:t>Al terminar, cada persona debe poder pedir un dato, leerlo con una instancia reutilizable de Scanner, guardarlo, convertirlo cuando corresponda y utilizarlo en el programa.</a:t>
+              <a:t>Al terminar, cada persona debe poder pedir un dato, leerlo con una instancia reutilizable de Scanner, guardarlo, convertirlo, realizar un cálculo y producir y mostrar una comparación booleana sin bifurcar el flujo.</a:t>
             </a:r>
           </a:p>
         </p:txBody>
@@ -10097,7 +9959,7 @@
         </p:nvSpPr>
         <p:spPr>
           <a:xfrm>
-            <a:off x="640080" y="3237992"/>
+            <a:off x="640080" y="3629152"/>
             <a:ext cx="10881360" cy="1729232"/>
           </a:xfrm>
           <a:prstGeom prst="rect">
@@ -10138,7 +10000,7 @@
   </p:clrMapOvr>
   <p:extLst>
     <p:ext uri="urn:minijarvis:semantic-render:v1">
-      <ns0:renderMetadata xmlns:ns0="urn:minijarvis:semantic-render:v1">{"session": "212", "source_files": {"teacher": "/mnt/compartido/Programación-26-27/Minijarvis/02-PROFESORADO/02-SESIONES/h1/S212-entrada-por-teclado-con-scanner-docente.md", "student_fallback": "/mnt/compartido/Programación-26-27/Minijarvis/01-ALUMNADO/03-SESIONES/h1/S212-entrada-por-teclado-con-scanner-alumnado.md"}, "layout": "concept", "plan_index": 0, "recognition": false, "unit_ids": ["unit-0"], "roles": {"unit-0": "core"}, "source_refs": [{"source": "teacher", "heading": "Qué vas a aprender", "block_index": 0, "fragment": 0}], "visible_sources": [{"index": 0, "sha256": "975792d0ea110231424d29928344bdd5f3959ca5e0e7f6b540f4b0068b856628"}, {"index": 1, "sha256": "6b08f28e09a6d7ed1ebf3effde11d30ae12066eb2b571ac6465a17b5ff7c8924"}], "notes_sources": [], "relations": {"unit_relations": {"unit-0": {}}, "schedule": null, "source_supports_enriched": true}, "timeline_refs": [0], "composition": {"origin_slides": [2]}, "timing": {"seconds": 240, "allocations": [{"source_index": 0, "seconds": 240, "decision": "Intervalo compartido íntegro; propietario contable seleccionado por función de actividad y referencia timeline de unidad (identidad semántica en empates). Propietario. ", "source_time": "0–4 min", "source_seconds": 240, "is_owner": true, "function": "concepts"}], "clock_intervals": [0], "presenter_notes": "Reloj fuente 0–4 min: duración compartida 240 segundos. Trabajo: Presentar el flujo completo y predecir qué devuelve nextLine(). Función del soporte: explicación.", "shared_intervals": [{"source_index": 0, "source_time": "0–4 min", "seconds": 240, "is_owner": true, "function": "concepts", "action": "Presentar el flujo completo y predecir qué devuelve nextLine().", "concurrent": false, "parallel_work": ""}]}, "code_blocks": [], "representation_needs": []}</ns0:renderMetadata>
+      <ns0:renderMetadata xmlns:ns0="urn:minijarvis:semantic-render:v1">{"session": "212", "source_files": {"teacher": "/mnt/compartido/Programación-26-27/Minijarvis/02-PROFESORADO/02-SESIONES/h1/S212-entrada-por-teclado-con-scanner-docente.md", "student_fallback": "/mnt/compartido/Programación-26-27/Minijarvis/01-ALUMNADO/03-SESIONES/h1/S212-entrada-por-teclado-con-scanner-alumnado.md"}, "layout": "concept", "plan_index": 0, "recognition": false, "unit_ids": ["unit-0"], "roles": {"unit-0": "core"}, "source_refs": [{"source": "teacher", "heading": "Qué vas a aprender", "block_index": 0, "fragment": 0}], "visible_sources": [{"index": 0, "sha256": "a224d4fd279576dc466420a73162aafb4ce6a505b80a5adaadd8276b217f2b06"}, {"index": 1, "sha256": "6b08f28e09a6d7ed1ebf3effde11d30ae12066eb2b571ac6465a17b5ff7c8924"}], "notes_sources": [], "relations": {"unit_relations": {"unit-0": {}}, "schedule": null, "source_supports_enriched": true}, "timeline_refs": [0], "composition": {"origin_slides": [2]}, "timing": {"seconds": 240, "allocations": [{"source_index": 0, "seconds": 240, "decision": "Intervalo compartido íntegro; propietario contable seleccionado por función de actividad y referencia timeline de unidad (identidad semántica en empates). Propietario. ", "source_time": "0–4 min", "source_seconds": 240, "is_owner": true, "function": "concepts"}], "clock_intervals": [0], "presenter_notes": "Reloj fuente 0–4 min: duración compartida 240 segundos. Trabajo: Presentar el flujo completo y predecir qué devuelve nextLine(). Función del soporte: explicación.", "shared_intervals": [{"source_index": 0, "source_time": "0–4 min", "seconds": 240, "is_owner": true, "function": "concepts", "action": "Presentar el flujo completo y predecir qué devuelve nextLine().", "concurrent": false, "parallel_work": ""}]}, "code_blocks": [], "representation_needs": []}</ns0:renderMetadata>
     </p:ext>
   </p:extLst>
 </p:sld>
@@ -10502,7 +10364,7 @@
   </p:clrMapOvr>
   <p:extLst>
     <p:ext uri="urn:minijarvis:semantic-render:v1">
-      <ns0:renderMetadata xmlns:ns0="urn:minijarvis:semantic-render:v1">{"session": "212", "source_files": {"teacher": "/mnt/compartido/Programación-26-27/Minijarvis/02-PROFESORADO/02-SESIONES/h1/S212-entrada-por-teclado-con-scanner-docente.md", "student_fallback": "/mnt/compartido/Programación-26-27/Minijarvis/01-ALUMNADO/03-SESIONES/h1/S212-entrada-por-teclado-con-scanner-alumnado.md"}, "layout": "code", "plan_index": 6, "recognition": false, "unit_ids": ["unit-9"], "roles": {"unit-9": "core"}, "source_refs": [{"source": "teacher", "heading": "Conversión implícita", "block_index": 11, "fragment": 0}, {"source": "teacher", "heading": "Ideas y ejemplos", "block_index": 4, "fragment": 0}, {"source": "teacher", "heading": "Parseo, conversión implícita y casting no son lo mismo", "block_index": 10, "fragment": 0}], "visible_sources": [{"index": 1, "sha256": "551bf615f18b5ffe479a8e209cfb76e7a679dbecde303fd0e959888be87e0c06"}, {"index": 3, "sha256": "ba99281e9ef950d52a1cc7caf7f4871b224f97711c5766ae0601a83be0bfbdf7"}, {"index": 5, "sha256": "34050e9295c864aeaa348fdbe7a70f59e2648fde6276e88c38d2a938423ac4b4"}, {"index": 6, "sha256": "2b28179faa3f92a6523a56f4c08768a4fcc9969ed9a0782587f6027f36df8ebe"}], "notes_sources": [{"function": "concept", "heading": "Conversión implícita", "sha256": "df9acf2e0cc9e2f7147f4ae4b90b1e1f9eeda1377e5dbfd9739ecfa79384031d"}, {"function": "facilitation", "heading": "Conversión implícita", "sha256": "91dc42d8554344bc307d2b9ff2fc47212ff514826ea16a654d5ec7a8b8dc88ca"}, {"function": "facilitation", "heading": "Conversión implícita", "sha256": "ae3e8f2179319d967dc7e32becf941fd3f92de4bc3273fa611b64fabef3a2124"}, {"function": "facilitation", "heading": "Conversión implícita", "sha256": "039fb19b5a26e24139f7119a1508cd31500b57eaabef8c3382c4e4b7ba814bf3"}], "relations": {"unit_relations": {"unit-9": {"question_context": ["context", "question"]}}, "schedule": null, "presentation_normalizations": {"7 -&gt; 7.0": "7 → 7.0"}, "source_supports_enriched": true}, "timeline_refs": [4], "composition": {"origin_slides": [21, 22]}, "timing": {"seconds": 0, "allocations": [{"source_index": 4, "seconds": 0, "decision": "Intervalo compartido íntegro; propietario contable seleccionado por función de actividad y referencia timeline de unidad (identidad semántica en empates). Soporte, sin duplicación contable. ", "source_time": "30–36 min", "source_seconds": 360, "is_owner": false, "function": "concept"}], "clock_intervals": [4], "presenter_notes": "Reloj fuente 30–36 min: duración compartida 360 segundos. Trabajo: Contraste guiado: distinguir conversión implícita y casting; usar (int) 3.999 como predicción central sobre pérdida de información. Función del soporte: explicación.", "shared_intervals": [{"source_index": 4, "source_time": "30–36 min", "seconds": 360, "is_owner": false, "function": "concept", "action": "Contraste guiado: distinguir conversión implícita y casting; usar (int) 3.999 como predicción central sobre pérdida de información.", "concurrent": false, "parallel_work": ""}]}, "code_blocks": ["int entero = 7;\ndouble valorAmpliado = entero;", "int horas = 4;\ndouble horasDecimales = horas;"], "representation_needs": []}</ns0:renderMetadata>
+      <ns0:renderMetadata xmlns:ns0="urn:minijarvis:semantic-render:v1">{"session": "212", "source_files": {"teacher": "/mnt/compartido/Programación-26-27/Minijarvis/02-PROFESORADO/02-SESIONES/h1/S212-entrada-por-teclado-con-scanner-docente.md", "student_fallback": "/mnt/compartido/Programación-26-27/Minijarvis/01-ALUMNADO/03-SESIONES/h1/S212-entrada-por-teclado-con-scanner-alumnado.md"}, "layout": "code", "plan_index": 6, "recognition": false, "unit_ids": ["unit-9"], "roles": {"unit-9": "core"}, "source_refs": [{"source": "teacher", "heading": "Conversión implícita", "block_index": 11, "fragment": 0}, {"source": "teacher", "heading": "Ideas y ejemplos", "block_index": 4, "fragment": 0}, {"source": "teacher", "heading": "Parseo, conversión implícita y casting no son lo mismo", "block_index": 10, "fragment": 0}], "visible_sources": [{"index": 1, "sha256": "551bf615f18b5ffe479a8e209cfb76e7a679dbecde303fd0e959888be87e0c06"}, {"index": 3, "sha256": "ba99281e9ef950d52a1cc7caf7f4871b224f97711c5766ae0601a83be0bfbdf7"}, {"index": 5, "sha256": "34050e9295c864aeaa348fdbe7a70f59e2648fde6276e88c38d2a938423ac4b4"}, {"index": 6, "sha256": "2b28179faa3f92a6523a56f4c08768a4fcc9969ed9a0782587f6027f36df8ebe"}], "notes_sources": [{"function": "concept", "heading": "Conversión implícita", "sha256": "df9acf2e0cc9e2f7147f4ae4b90b1e1f9eeda1377e5dbfd9739ecfa79384031d"}, {"function": "facilitation", "heading": "Conversión implícita", "sha256": "91dc42d8554344bc307d2b9ff2fc47212ff514826ea16a654d5ec7a8b8dc88ca"}, {"function": "facilitation", "heading": "Conversión implícita", "sha256": "ae3e8f2179319d967dc7e32becf941fd3f92de4bc3273fa611b64fabef3a2124"}, {"function": "facilitation", "heading": "Conversión implícita", "sha256": "039fb19b5a26e24139f7119a1508cd31500b57eaabef8c3382c4e4b7ba814bf3"}], "relations": {"unit_relations": {"unit-9": {"question_context": ["context", "question"]}}, "schedule": null, "presentation_normalizations": {"7 -&gt; 7.0": "7 → 7.0"}, "source_supports_enriched": true}, "timeline_refs": [4], "composition": {"origin_slides": [22, 23]}, "timing": {"seconds": 0, "allocations": [{"source_index": 4, "seconds": 0, "decision": "Intervalo compartido íntegro; propietario contable seleccionado por función de actividad y referencia timeline de unidad (identidad semántica en empates). Soporte, sin duplicación contable. ", "source_time": "30–36 min", "source_seconds": 360, "is_owner": false, "function": "concept"}], "clock_intervals": [4], "presenter_notes": "Reloj fuente 30–36 min: duración compartida 360 segundos. Trabajo: Contraste guiado: distinguir conversión implícita y casting; usar (int) 3.999 como predicción central sobre pérdida de información. Función del soporte: explicación.", "shared_intervals": [{"source_index": 4, "source_time": "30–36 min", "seconds": 360, "is_owner": false, "function": "concept", "action": "Contraste guiado: distinguir conversión implícita y casting; usar (int) 3.999 como predicción central sobre pérdida de información.", "concurrent": false, "parallel_work": ""}]}, "code_blocks": ["int entero = 7;\ndouble valorAmpliado = entero;", "int horas = 4;\ndouble horasDecimales = horas;"], "representation_needs": []}</ns0:renderMetadata>
     </p:ext>
   </p:extLst>
 </p:sld>
@@ -10824,7 +10686,7 @@
   </p:clrMapOvr>
   <p:extLst>
     <p:ext uri="urn:minijarvis:semantic-render:v1">
-      <ns0:renderMetadata xmlns:ns0="urn:minijarvis:semantic-render:v1">{"session": "212", "source_files": {"teacher": "/mnt/compartido/Programación-26-27/Minijarvis/02-PROFESORADO/02-SESIONES/h1/S212-entrada-por-teclado-con-scanner-docente.md", "student_fallback": "/mnt/compartido/Programación-26-27/Minijarvis/01-ALUMNADO/03-SESIONES/h1/S212-entrada-por-teclado-con-scanner-alumnado.md"}, "layout": "code", "plan_index": 7, "recognition": false, "unit_ids": ["unit-11"], "roles": {"unit-11": "core"}, "source_refs": [{"source": "teacher", "heading": "Casting y pérdida de información", "block_index": 13, "fragment": 0}, {"source": "teacher", "heading": "Ideas y ejemplos", "block_index": 4, "fragment": 0}], "visible_sources": [{"index": 0, "sha256": "49cdc26b072a11b6593d0ccb91589f1fdc19adf08e530df5e8c3b0af274daa18"}, {"index": 2, "sha256": "5da3534e9c5972d567661fad79c140b5d95ea93f5a3f2a0c8e32750bd6a8e98e"}, {"index": 4, "sha256": "d769eb6941367b4002658e71b0072bcc65b7724850e37acddebd27ea7eea6102"}], "notes_sources": [{"function": "concept", "heading": "Casting y pérdida de información", "sha256": "bf470470f6c5f5502e22034c3517ab1a631b56d2ba7e9fd1b901b831bb6c4d15"}, {"function": "concept", "heading": "Casting y pérdida de información", "sha256": "df9acf2e0cc9e2f7147f4ae4b90b1e1f9eeda1377e5dbfd9739ecfa79384031d"}, {"function": "facilitation", "heading": "Casting y pérdida de información", "sha256": "ae3e8f2179319d967dc7e32becf941fd3f92de4bc3273fa611b64fabef3a2124"}, {"function": "facilitation", "heading": "Casting y pérdida de información", "sha256": "039fb19b5a26e24139f7119a1508cd31500b57eaabef8c3382c4e4b7ba814bf3"}, {"function": "facilitation", "heading": "Casting y pérdida de información", "sha256": "7e2efc4707dc6e87a1172f168169de621303e0831cc07eed5a408e736d7f77ac"}, {"function": "facilitation", "heading": "Casting y pérdida de información", "sha256": "8a23a5a3595f92251a994bfd4855f9449b8eb114e9ec7903e626981ca86815b7"}], "relations": {"unit_relations": {"unit-11": {"question_context": ["context", "question"]}}, "schedule": null, "presentation_normalizations": {"precioEntero -&gt; 12": "precioEntero → 12"}, "source_supports_enriched": true}, "timeline_refs": [4], "composition": {"origin_slides": [23]}, "timing": {"seconds": 0, "allocations": [{"source_index": 4, "seconds": 0, "decision": "Intervalo compartido íntegro; propietario contable seleccionado por función de actividad y referencia timeline de unidad (identidad semántica en empates). Soporte, sin duplicación contable. ", "source_time": "30–36 min", "source_seconds": 360, "is_owner": false, "function": "concept"}], "clock_intervals": [4], "presenter_notes": "Reloj fuente 30–36 min: duración compartida 360 segundos. Trabajo: Contraste guiado: distinguir conversión implícita y casting; usar (int) 3.999 como predicción central sobre pérdida de información. Función del soporte: explicación.", "shared_intervals": [{"source_index": 4, "source_time": "30–36 min", "seconds": 360, "is_owner": false, "function": "concept", "action": "Contraste guiado: distinguir conversión implícita y casting; usar (int) 3.999 como predicción central sobre pérdida de información.", "concurrent": false, "parallel_work": ""}]}, "code_blocks": ["double precio = 12.75;\nint precioEntero = (int) precio;", "double nota = 7.99;\nint notaEntera = (int) nota;"], "representation_needs": []}</ns0:renderMetadata>
+      <ns0:renderMetadata xmlns:ns0="urn:minijarvis:semantic-render:v1">{"session": "212", "source_files": {"teacher": "/mnt/compartido/Programación-26-27/Minijarvis/02-PROFESORADO/02-SESIONES/h1/S212-entrada-por-teclado-con-scanner-docente.md", "student_fallback": "/mnt/compartido/Programación-26-27/Minijarvis/01-ALUMNADO/03-SESIONES/h1/S212-entrada-por-teclado-con-scanner-alumnado.md"}, "layout": "code", "plan_index": 7, "recognition": false, "unit_ids": ["unit-11"], "roles": {"unit-11": "core"}, "source_refs": [{"source": "teacher", "heading": "Casting y pérdida de información", "block_index": 13, "fragment": 0}, {"source": "teacher", "heading": "Ideas y ejemplos", "block_index": 4, "fragment": 0}], "visible_sources": [{"index": 0, "sha256": "49cdc26b072a11b6593d0ccb91589f1fdc19adf08e530df5e8c3b0af274daa18"}, {"index": 2, "sha256": "5da3534e9c5972d567661fad79c140b5d95ea93f5a3f2a0c8e32750bd6a8e98e"}, {"index": 4, "sha256": "d769eb6941367b4002658e71b0072bcc65b7724850e37acddebd27ea7eea6102"}], "notes_sources": [{"function": "concept", "heading": "Casting y pérdida de información", "sha256": "bf470470f6c5f5502e22034c3517ab1a631b56d2ba7e9fd1b901b831bb6c4d15"}, {"function": "concept", "heading": "Casting y pérdida de información", "sha256": "df9acf2e0cc9e2f7147f4ae4b90b1e1f9eeda1377e5dbfd9739ecfa79384031d"}, {"function": "facilitation", "heading": "Casting y pérdida de información", "sha256": "ae3e8f2179319d967dc7e32becf941fd3f92de4bc3273fa611b64fabef3a2124"}, {"function": "facilitation", "heading": "Casting y pérdida de información", "sha256": "039fb19b5a26e24139f7119a1508cd31500b57eaabef8c3382c4e4b7ba814bf3"}, {"function": "facilitation", "heading": "Casting y pérdida de información", "sha256": "7e2efc4707dc6e87a1172f168169de621303e0831cc07eed5a408e736d7f77ac"}, {"function": "facilitation", "heading": "Casting y pérdida de información", "sha256": "8a23a5a3595f92251a994bfd4855f9449b8eb114e9ec7903e626981ca86815b7"}], "relations": {"unit_relations": {"unit-11": {"question_context": ["context", "question"]}}, "schedule": null, "presentation_normalizations": {"precioEntero -&gt; 12": "precioEntero → 12"}, "source_supports_enriched": true}, "timeline_refs": [4], "composition": {"origin_slides": [24]}, "timing": {"seconds": 0, "allocations": [{"source_index": 4, "seconds": 0, "decision": "Intervalo compartido íntegro; propietario contable seleccionado por función de actividad y referencia timeline de unidad (identidad semántica en empates). Soporte, sin duplicación contable. ", "source_time": "30–36 min", "source_seconds": 360, "is_owner": false, "function": "concept"}], "clock_intervals": [4], "presenter_notes": "Reloj fuente 30–36 min: duración compartida 360 segundos. Trabajo: Contraste guiado: distinguir conversión implícita y casting; usar (int) 3.999 como predicción central sobre pérdida de información. Función del soporte: explicación.", "shared_intervals": [{"source_index": 4, "source_time": "30–36 min", "seconds": 360, "is_owner": false, "function": "concept", "action": "Contraste guiado: distinguir conversión implícita y casting; usar (int) 3.999 como predicción central sobre pérdida de información.", "concurrent": false, "parallel_work": ""}]}, "code_blocks": ["double precio = 12.75;\nint precioEntero = (int) precio;", "double nota = 7.99;\nint notaEntera = (int) nota;"], "representation_needs": []}</ns0:renderMetadata>
     </p:ext>
   </p:extLst>
 </p:sld>
@@ -11020,7 +10882,7 @@
   </p:clrMapOvr>
   <p:extLst>
     <p:ext uri="urn:minijarvis:semantic-render:v1">
-      <ns0:renderMetadata xmlns:ns0="urn:minijarvis:semantic-render:v1">{"session": "212", "source_files": {"teacher": "/mnt/compartido/Programación-26-27/Minijarvis/02-PROFESORADO/02-SESIONES/h1/S212-entrada-por-teclado-con-scanner-docente.md", "student_fallback": "/mnt/compartido/Programación-26-27/Minijarvis/01-ALUMNADO/03-SESIONES/h1/S212-entrada-por-teclado-con-scanner-alumnado.md"}, "layout": "code", "plan_index": 7, "recognition": false, "unit_ids": ["unit-11"], "roles": {"unit-11": "core"}, "source_refs": [{"source": "teacher", "heading": "Casting y pérdida de información", "block_index": 13, "fragment": 0}, {"source": "teacher", "heading": "Ideas y ejemplos", "block_index": 4, "fragment": 0}], "visible_sources": [{"index": 5, "sha256": "aaf5da3b6e16f8cdfad700a28c40c798736253e691fa901eb1ee46d23a289570"}], "notes_sources": [], "relations": {"unit_relations": {"unit-11": {"question_context": ["context", "question"]}}, "schedule": null, "presentation_normalizations": {"notaEntera -&gt; 7": "notaEntera → 7"}, "source_supports_enriched": true}, "timeline_refs": [4], "composition": {"origin_slides": [24]}, "timing": {"seconds": 0, "allocations": [{"source_index": 4, "seconds": 0, "decision": "Intervalo compartido íntegro; propietario contable seleccionado por función de actividad y referencia timeline de unidad (identidad semántica en empates). Soporte, sin duplicación contable. ", "source_time": "30–36 min", "source_seconds": 360, "is_owner": false, "function": "concept"}], "clock_intervals": [4], "presenter_notes": "Reloj fuente 30–36 min: duración compartida 360 segundos. Trabajo: Contraste guiado: distinguir conversión implícita y casting; usar (int) 3.999 como predicción central sobre pérdida de información. Función del soporte: explicación.", "shared_intervals": [{"source_index": 4, "source_time": "30–36 min", "seconds": 360, "is_owner": false, "function": "concept", "action": "Contraste guiado: distinguir conversión implícita y casting; usar (int) 3.999 como predicción central sobre pérdida de información.", "concurrent": false, "parallel_work": ""}]}, "code_blocks": [], "representation_needs": []}</ns0:renderMetadata>
+      <ns0:renderMetadata xmlns:ns0="urn:minijarvis:semantic-render:v1">{"session": "212", "source_files": {"teacher": "/mnt/compartido/Programación-26-27/Minijarvis/02-PROFESORADO/02-SESIONES/h1/S212-entrada-por-teclado-con-scanner-docente.md", "student_fallback": "/mnt/compartido/Programación-26-27/Minijarvis/01-ALUMNADO/03-SESIONES/h1/S212-entrada-por-teclado-con-scanner-alumnado.md"}, "layout": "code", "plan_index": 7, "recognition": false, "unit_ids": ["unit-11"], "roles": {"unit-11": "core"}, "source_refs": [{"source": "teacher", "heading": "Casting y pérdida de información", "block_index": 13, "fragment": 0}, {"source": "teacher", "heading": "Ideas y ejemplos", "block_index": 4, "fragment": 0}], "visible_sources": [{"index": 5, "sha256": "aaf5da3b6e16f8cdfad700a28c40c798736253e691fa901eb1ee46d23a289570"}], "notes_sources": [], "relations": {"unit_relations": {"unit-11": {"question_context": ["context", "question"]}}, "schedule": null, "presentation_normalizations": {"notaEntera -&gt; 7": "notaEntera → 7"}, "source_supports_enriched": true}, "timeline_refs": [4], "composition": {"origin_slides": [25]}, "timing": {"seconds": 0, "allocations": [{"source_index": 4, "seconds": 0, "decision": "Intervalo compartido íntegro; propietario contable seleccionado por función de actividad y referencia timeline de unidad (identidad semántica en empates). Soporte, sin duplicación contable. ", "source_time": "30–36 min", "source_seconds": 360, "is_owner": false, "function": "concept"}], "clock_intervals": [4], "presenter_notes": "Reloj fuente 30–36 min: duración compartida 360 segundos. Trabajo: Contraste guiado: distinguir conversión implícita y casting; usar (int) 3.999 como predicción central sobre pérdida de información. Función del soporte: explicación.", "shared_intervals": [{"source_index": 4, "source_time": "30–36 min", "seconds": 360, "is_owner": false, "function": "concept", "action": "Contraste guiado: distinguir conversión implícita y casting; usar (int) 3.999 como predicción central sobre pérdida de información.", "concurrent": false, "parallel_work": ""}]}, "code_blocks": [], "representation_needs": []}</ns0:renderMetadata>
     </p:ext>
   </p:extLst>
 </p:sld>
@@ -11321,7 +11183,7 @@
   </p:clrMapOvr>
   <p:extLst>
     <p:ext uri="urn:minijarvis:semantic-render:v1">
-      <ns0:renderMetadata xmlns:ns0="urn:minijarvis:semantic-render:v1">{"session": "212", "source_files": {"teacher": "/mnt/compartido/Programación-26-27/Minijarvis/02-PROFESORADO/02-SESIONES/h1/S212-entrada-por-teclado-con-scanner-docente.md", "student_fallback": "/mnt/compartido/Programación-26-27/Minijarvis/01-ALUMNADO/03-SESIONES/h1/S212-entrada-por-teclado-con-scanner-alumnado.md"}, "layout": "prediction", "plan_index": 7, "recognition": false, "unit_ids": ["unit-11"], "roles": {"unit-11": "core"}, "source_refs": [{"source": "teacher", "heading": "Casting y pérdida de información", "block_index": 13, "fragment": 0}, {"source": "teacher", "heading": "Ideas y ejemplos", "block_index": 4, "fragment": 0}], "visible_sources": [{"index": 7, "sha256": "1e506708e2392c647aa7f9a388c6f43afd4b85b31eda4bd80ba53ee4058b9de5"}, {"index": 8, "sha256": "9a5d0eaf396728ce1c03a52d529ba0aa92087c3723ecfee7e5e2ba915f0839f0"}], "notes_sources": [], "relations": {"unit_relations": {"unit-11": {"question_context": ["context", "question"]}}, "schedule": null, "reveal_phase": "prediction", "source_supports_enriched": true}, "timeline_refs": [4], "composition": {"origin_slides": [24]}, "timing": {"seconds": 360, "allocations": [{"source_index": 4, "seconds": 360, "decision": "Intervalo compartido íntegro; propietario contable seleccionado por función de actividad y referencia timeline de unidad (identidad semántica en empates). Propietario. ", "source_time": "30–36 min", "source_seconds": 360, "is_owner": true, "function": "concept"}], "clock_intervals": [4], "presenter_notes": "Reloj fuente 30–36 min: duración compartida 360 segundos. Trabajo: Contraste guiado: distinguir conversión implícita y casting; usar (int) 3.999 como predicción central sobre pérdida de información. Función del soporte: explicación.", "shared_intervals": [{"source_index": 4, "source_time": "30–36 min", "seconds": 360, "is_owner": true, "function": "concept", "action": "Contraste guiado: distinguir conversión implícita y casting; usar (int) 3.999 como predicción central sobre pérdida de información.", "concurrent": false, "parallel_work": ""}]}, "code_blocks": ["double valor = 3.999;\nint resultado = (int) valor;"], "representation_needs": []}</ns0:renderMetadata>
+      <ns0:renderMetadata xmlns:ns0="urn:minijarvis:semantic-render:v1">{"session": "212", "source_files": {"teacher": "/mnt/compartido/Programación-26-27/Minijarvis/02-PROFESORADO/02-SESIONES/h1/S212-entrada-por-teclado-con-scanner-docente.md", "student_fallback": "/mnt/compartido/Programación-26-27/Minijarvis/01-ALUMNADO/03-SESIONES/h1/S212-entrada-por-teclado-con-scanner-alumnado.md"}, "layout": "prediction", "plan_index": 7, "recognition": false, "unit_ids": ["unit-11"], "roles": {"unit-11": "core"}, "source_refs": [{"source": "teacher", "heading": "Casting y pérdida de información", "block_index": 13, "fragment": 0}, {"source": "teacher", "heading": "Ideas y ejemplos", "block_index": 4, "fragment": 0}], "visible_sources": [{"index": 7, "sha256": "1e506708e2392c647aa7f9a388c6f43afd4b85b31eda4bd80ba53ee4058b9de5"}, {"index": 8, "sha256": "9a5d0eaf396728ce1c03a52d529ba0aa92087c3723ecfee7e5e2ba915f0839f0"}], "notes_sources": [], "relations": {"unit_relations": {"unit-11": {"question_context": ["context", "question"]}}, "schedule": null, "reveal_phase": "prediction", "source_supports_enriched": true}, "timeline_refs": [4], "composition": {"origin_slides": [25]}, "timing": {"seconds": 360, "allocations": [{"source_index": 4, "seconds": 360, "decision": "Intervalo compartido íntegro; propietario contable seleccionado por función de actividad y referencia timeline de unidad (identidad semántica en empates). Propietario. ", "source_time": "30–36 min", "source_seconds": 360, "is_owner": true, "function": "concept"}], "clock_intervals": [4], "presenter_notes": "Reloj fuente 30–36 min: duración compartida 360 segundos. Trabajo: Contraste guiado: distinguir conversión implícita y casting; usar (int) 3.999 como predicción central sobre pérdida de información. Función del soporte: explicación.", "shared_intervals": [{"source_index": 4, "source_time": "30–36 min", "seconds": 360, "is_owner": true, "function": "concept", "action": "Contraste guiado: distinguir conversión implícita y casting; usar (int) 3.999 como predicción central sobre pérdida de información.", "concurrent": false, "parallel_work": ""}]}, "code_blocks": ["double valor = 3.999;\nint resultado = (int) valor;"], "representation_needs": []}</ns0:renderMetadata>
     </p:ext>
   </p:extLst>
 </p:sld>
@@ -11599,7 +11461,7 @@
   </p:clrMapOvr>
   <p:extLst>
     <p:ext uri="urn:minijarvis:semantic-render:v1">
-      <ns0:renderMetadata xmlns:ns0="urn:minijarvis:semantic-render:v1">{"session": "212", "source_files": {"teacher": "/mnt/compartido/Programación-26-27/Minijarvis/02-PROFESORADO/02-SESIONES/h1/S212-entrada-por-teclado-con-scanner-docente.md", "student_fallback": "/mnt/compartido/Programación-26-27/Minijarvis/01-ALUMNADO/03-SESIONES/h1/S212-entrada-por-teclado-con-scanner-alumnado.md"}, "layout": "contrast", "plan_index": 7, "recognition": false, "unit_ids": ["unit-11"], "roles": {"unit-11": "core"}, "source_refs": [{"source": "teacher", "heading": "Casting y pérdida de información", "block_index": 13, "fragment": 0}, {"source": "teacher", "heading": "Ideas y ejemplos", "block_index": 4, "fragment": 0}], "visible_sources": [{"index": 9, "sha256": "76fdd0938f54765f6e78b29da5d3639a2ce93c06e0884b9674385f881b8cb2ec"}, {"index": 11, "sha256": "6db132863eea6ab4fccfe258d9313433b2e56d17f567712f5d6145207216317c"}], "notes_sources": [], "relations": {"unit_relations": {"unit-11": {"question_context": ["context", "question"]}}, "schedule": null, "reveal_phase": "contrast", "presentation_normalizations": {"Explica que este casting no redondea: descarta la parte decimal. La información perdida no puede recuperarse desde el `int` resultante.": "este casting no redondea: descarta la parte decimal. La información perdida no puede recuperarse desde el int resultante."}, "source_supports_enriched": true}, "timeline_refs": [4], "composition": {"origin_slides": [24]}, "timing": {"seconds": 0, "allocations": [{"source_index": 4, "seconds": 0, "decision": "Intervalo compartido íntegro; propietario contable seleccionado por función de actividad y referencia timeline de unidad (identidad semántica en empates). Soporte, sin duplicación contable. ", "source_time": "30–36 min", "source_seconds": 360, "is_owner": false, "function": "concept"}], "clock_intervals": [4], "presenter_notes": "Reloj fuente 30–36 min: duración compartida 360 segundos. Trabajo: Contraste guiado: distinguir conversión implícita y casting; usar (int) 3.999 como predicción central sobre pérdida de información. Función del soporte: explicación.", "shared_intervals": [{"source_index": 4, "source_time": "30–36 min", "seconds": 360, "is_owner": false, "function": "concept", "action": "Contraste guiado: distinguir conversión implícita y casting; usar (int) 3.999 como predicción central sobre pérdida de información.", "concurrent": false, "parallel_work": ""}]}, "code_blocks": [], "representation_needs": []}</ns0:renderMetadata>
+      <ns0:renderMetadata xmlns:ns0="urn:minijarvis:semantic-render:v1">{"session": "212", "source_files": {"teacher": "/mnt/compartido/Programación-26-27/Minijarvis/02-PROFESORADO/02-SESIONES/h1/S212-entrada-por-teclado-con-scanner-docente.md", "student_fallback": "/mnt/compartido/Programación-26-27/Minijarvis/01-ALUMNADO/03-SESIONES/h1/S212-entrada-por-teclado-con-scanner-alumnado.md"}, "layout": "contrast", "plan_index": 7, "recognition": false, "unit_ids": ["unit-11"], "roles": {"unit-11": "core"}, "source_refs": [{"source": "teacher", "heading": "Casting y pérdida de información", "block_index": 13, "fragment": 0}, {"source": "teacher", "heading": "Ideas y ejemplos", "block_index": 4, "fragment": 0}], "visible_sources": [{"index": 9, "sha256": "76fdd0938f54765f6e78b29da5d3639a2ce93c06e0884b9674385f881b8cb2ec"}, {"index": 11, "sha256": "6db132863eea6ab4fccfe258d9313433b2e56d17f567712f5d6145207216317c"}], "notes_sources": [], "relations": {"unit_relations": {"unit-11": {"question_context": ["context", "question"]}}, "schedule": null, "reveal_phase": "contrast", "presentation_normalizations": {"Explica que este casting no redondea: descarta la parte decimal. La información perdida no puede recuperarse desde el `int` resultante.": "este casting no redondea: descarta la parte decimal. La información perdida no puede recuperarse desde el int resultante."}, "source_supports_enriched": true}, "timeline_refs": [4], "composition": {"origin_slides": [25]}, "timing": {"seconds": 0, "allocations": [{"source_index": 4, "seconds": 0, "decision": "Intervalo compartido íntegro; propietario contable seleccionado por función de actividad y referencia timeline de unidad (identidad semántica en empates). Soporte, sin duplicación contable. ", "source_time": "30–36 min", "source_seconds": 360, "is_owner": false, "function": "concept"}], "clock_intervals": [4], "presenter_notes": "Reloj fuente 30–36 min: duración compartida 360 segundos. Trabajo: Contraste guiado: distinguir conversión implícita y casting; usar (int) 3.999 como predicción central sobre pérdida de información. Función del soporte: explicación.", "shared_intervals": [{"source_index": 4, "source_time": "30–36 min", "seconds": 360, "is_owner": false, "function": "concept", "action": "Contraste guiado: distinguir conversión implícita y casting; usar (int) 3.999 como predicción central sobre pérdida de información.", "concurrent": false, "parallel_work": ""}]}, "code_blocks": [], "representation_needs": []}</ns0:renderMetadata>
     </p:ext>
   </p:extLst>
 </p:sld>
@@ -11840,7 +11702,7 @@
   </p:clrMapOvr>
   <p:extLst>
     <p:ext uri="urn:minijarvis:semantic-render:v1">
-      <ns0:renderMetadata xmlns:ns0="urn:minijarvis:semantic-render:v1">{"session": "212", "source_files": {"teacher": "/mnt/compartido/Programación-26-27/Minijarvis/02-PROFESORADO/02-SESIONES/h1/S212-entrada-por-teclado-con-scanner-docente.md", "student_fallback": "/mnt/compartido/Programación-26-27/Minijarvis/01-ALUMNADO/03-SESIONES/h1/S212-entrada-por-teclado-con-scanner-alumnado.md"}, "layout": "prediction", "plan_index": 7, "recognition": true, "unit_ids": ["unit-12"], "roles": {"unit-12": "recognition"}, "source_refs": [{"source": "teacher", "heading": "Error de ejecución: NumberFormatException", "block_index": 14, "fragment": 0}, {"source": "teacher", "heading": "Ideas y ejemplos", "block_index": 4, "fragment": 0}], "visible_sources": [{"index": 12, "sha256": "bbfee73e995fe088fe025ff0278a064c597ea423d1db55f68cff6f20adf9aaac"}], "notes_sources": [{"function": "other", "heading": "Error de ejecución: NumberFormatException", "sha256": "cda081de4852e64026d778925ec6efa5b8fa965180ec573f33ec5207c3c9e704"}, {"function": "facilitation", "heading": "Error de ejecución: NumberFormatException", "sha256": "94e4ae4805143223d12d2be26124af10ad398c3b8401fb043f0d4f58baa72986"}, {"function": "visible_detail", "heading": "Error de ejecución: NumberFormatException", "sha256": "2ab40d540137276024115a19b0dfc25728ab99aa223973712aeefa3a42b62944"}], "relations": {"unit_relations": {"unit-12": {"question_context": ["context", "question"]}}, "schedule": null, "reveal_phase": "prediction", "source_supports_enriched": true}, "timeline_refs": [5], "composition": {"origin_slides": [26, 27]}, "timing": {"seconds": 240, "allocations": [{"source_index": 5, "seconds": 240, "decision": "Intervalo compartido íntegro; propietario contable seleccionado por función de actividad y referencia timeline de unidad (identidad semántica en empates). Propietario. ", "source_time": "36–40 min", "source_seconds": 240, "is_owner": true, "function": "other"}], "clock_intervals": [5], "presenter_notes": "Reloj fuente 36–40 min: duración compartida 240 segundos. Trabajo: Caso breve de análisis: reconocer NumberFormatException y distinguir error de compilación y de ejecución. Función del soporte: apoyo al trabajo.", "shared_intervals": [{"source_index": 5, "source_time": "36–40 min", "seconds": 240, "is_owner": true, "function": "other", "action": "Caso breve de análisis: reconocer NumberFormatException y distinguir error de compilación y de ejecución.", "concurrent": false, "parallel_work": ""}]}, "code_blocks": [], "representation_needs": []}</ns0:renderMetadata>
+      <ns0:renderMetadata xmlns:ns0="urn:minijarvis:semantic-render:v1">{"session": "212", "source_files": {"teacher": "/mnt/compartido/Programación-26-27/Minijarvis/02-PROFESORADO/02-SESIONES/h1/S212-entrada-por-teclado-con-scanner-docente.md", "student_fallback": "/mnt/compartido/Programación-26-27/Minijarvis/01-ALUMNADO/03-SESIONES/h1/S212-entrada-por-teclado-con-scanner-alumnado.md"}, "layout": "prediction", "plan_index": 7, "recognition": true, "unit_ids": ["unit-12"], "roles": {"unit-12": "recognition"}, "source_refs": [{"source": "teacher", "heading": "Error de ejecución: NumberFormatException", "block_index": 14, "fragment": 0}, {"source": "teacher", "heading": "Ideas y ejemplos", "block_index": 4, "fragment": 0}], "visible_sources": [{"index": 12, "sha256": "bbfee73e995fe088fe025ff0278a064c597ea423d1db55f68cff6f20adf9aaac"}], "notes_sources": [{"function": "other", "heading": "Error de ejecución: NumberFormatException", "sha256": "cda081de4852e64026d778925ec6efa5b8fa965180ec573f33ec5207c3c9e704"}, {"function": "facilitation", "heading": "Error de ejecución: NumberFormatException", "sha256": "94e4ae4805143223d12d2be26124af10ad398c3b8401fb043f0d4f58baa72986"}, {"function": "visible_detail", "heading": "Error de ejecución: NumberFormatException", "sha256": "2ab40d540137276024115a19b0dfc25728ab99aa223973712aeefa3a42b62944"}], "relations": {"unit_relations": {"unit-12": {"question_context": ["context", "question"]}}, "schedule": null, "reveal_phase": "prediction", "source_supports_enriched": true}, "timeline_refs": [5], "composition": {"origin_slides": [27, 28]}, "timing": {"seconds": 240, "allocations": [{"source_index": 5, "seconds": 240, "decision": "Intervalo compartido íntegro; propietario contable seleccionado por función de actividad y referencia timeline de unidad (identidad semántica en empates). Propietario. ", "source_time": "36–40 min", "source_seconds": 240, "is_owner": true, "function": "other"}], "clock_intervals": [5], "presenter_notes": "Reloj fuente 36–40 min: duración compartida 240 segundos. Trabajo: Caso breve de análisis: reconocer NumberFormatException y distinguir error de compilación y de ejecución. Función del soporte: apoyo al trabajo.", "shared_intervals": [{"source_index": 5, "source_time": "36–40 min", "seconds": 240, "is_owner": true, "function": "other", "action": "Caso breve de análisis: reconocer NumberFormatException y distinguir error de compilación y de ejecución.", "concurrent": false, "parallel_work": ""}]}, "code_blocks": [], "representation_needs": []}</ns0:renderMetadata>
     </p:ext>
   </p:extLst>
 </p:sld>
@@ -12081,7 +11943,7 @@
   </p:clrMapOvr>
   <p:extLst>
     <p:ext uri="urn:minijarvis:semantic-render:v1">
-      <ns0:renderMetadata xmlns:ns0="urn:minijarvis:semantic-render:v1">{"session": "212", "source_files": {"teacher": "/mnt/compartido/Programación-26-27/Minijarvis/02-PROFESORADO/02-SESIONES/h1/S212-entrada-por-teclado-con-scanner-docente.md", "student_fallback": "/mnt/compartido/Programación-26-27/Minijarvis/01-ALUMNADO/03-SESIONES/h1/S212-entrada-por-teclado-con-scanner-alumnado.md"}, "layout": "recognition", "plan_index": 7, "recognition": true, "unit_ids": ["unit-12"], "roles": {"unit-12": "recognition"}, "source_refs": [{"source": "teacher", "heading": "Error de ejecución: NumberFormatException", "block_index": 14, "fragment": 0}, {"source": "teacher", "heading": "Ideas y ejemplos", "block_index": 4, "fragment": 0}], "visible_sources": [{"index": 13, "sha256": "4cb380cc8dbd201239f52d944776b903825644c58ef275df49c8df2078139777"}, {"index": 15, "sha256": "af6b42053814d0da5a6ec622b2ac8b96f4b0ed2443fb1068a5b229ea05c8b029"}], "notes_sources": [{"function": "other", "heading": "Error de ejecución: NumberFormatException", "sha256": "cda081de4852e64026d778925ec6efa5b8fa965180ec573f33ec5207c3c9e704"}, {"function": "facilitation", "heading": "Error de ejecución: NumberFormatException", "sha256": "94e4ae4805143223d12d2be26124af10ad398c3b8401fb043f0d4f58baa72986"}], "relations": {"unit_relations": {"unit-12": {"question_context": ["context", "question"]}}, "schedule": null, "reveal_phase": "contrast", "source_supports_enriched": true}, "timeline_refs": [5], "composition": {"origin_slides": [26]}, "timing": {"seconds": 0, "allocations": [{"source_index": 5, "seconds": 0, "decision": "Intervalo compartido íntegro; propietario contable seleccionado por función de actividad y referencia timeline de unidad (identidad semántica en empates). Soporte, sin duplicación contable. ", "source_time": "36–40 min", "source_seconds": 240, "is_owner": false, "function": "other"}], "clock_intervals": [5], "presenter_notes": "Reloj fuente 36–40 min: duración compartida 240 segundos. Trabajo: Caso breve de análisis: reconocer NumberFormatException y distinguir error de compilación y de ejecución. Función del soporte: apoyo al trabajo.", "shared_intervals": [{"source_index": 5, "source_time": "36–40 min", "seconds": 240, "is_owner": false, "function": "other", "action": "Caso breve de análisis: reconocer NumberFormatException y distinguir error de compilación y de ejecución.", "concurrent": false, "parallel_work": ""}]}, "code_blocks": [], "representation_needs": []}</ns0:renderMetadata>
+      <ns0:renderMetadata xmlns:ns0="urn:minijarvis:semantic-render:v1">{"session": "212", "source_files": {"teacher": "/mnt/compartido/Programación-26-27/Minijarvis/02-PROFESORADO/02-SESIONES/h1/S212-entrada-por-teclado-con-scanner-docente.md", "student_fallback": "/mnt/compartido/Programación-26-27/Minijarvis/01-ALUMNADO/03-SESIONES/h1/S212-entrada-por-teclado-con-scanner-alumnado.md"}, "layout": "recognition", "plan_index": 7, "recognition": true, "unit_ids": ["unit-12"], "roles": {"unit-12": "recognition"}, "source_refs": [{"source": "teacher", "heading": "Error de ejecución: NumberFormatException", "block_index": 14, "fragment": 0}, {"source": "teacher", "heading": "Ideas y ejemplos", "block_index": 4, "fragment": 0}], "visible_sources": [{"index": 13, "sha256": "4cb380cc8dbd201239f52d944776b903825644c58ef275df49c8df2078139777"}, {"index": 15, "sha256": "af6b42053814d0da5a6ec622b2ac8b96f4b0ed2443fb1068a5b229ea05c8b029"}], "notes_sources": [{"function": "other", "heading": "Error de ejecución: NumberFormatException", "sha256": "cda081de4852e64026d778925ec6efa5b8fa965180ec573f33ec5207c3c9e704"}, {"function": "facilitation", "heading": "Error de ejecución: NumberFormatException", "sha256": "94e4ae4805143223d12d2be26124af10ad398c3b8401fb043f0d4f58baa72986"}], "relations": {"unit_relations": {"unit-12": {"question_context": ["context", "question"]}}, "schedule": null, "reveal_phase": "contrast", "source_supports_enriched": true}, "timeline_refs": [5], "composition": {"origin_slides": [27]}, "timing": {"seconds": 0, "allocations": [{"source_index": 5, "seconds": 0, "decision": "Intervalo compartido íntegro; propietario contable seleccionado por función de actividad y referencia timeline de unidad (identidad semántica en empates). Soporte, sin duplicación contable. ", "source_time": "36–40 min", "source_seconds": 240, "is_owner": false, "function": "other"}], "clock_intervals": [5], "presenter_notes": "Reloj fuente 36–40 min: duración compartida 240 segundos. Trabajo: Caso breve de análisis: reconocer NumberFormatException y distinguir error de compilación y de ejecución. Función del soporte: apoyo al trabajo.", "shared_intervals": [{"source_index": 5, "source_time": "36–40 min", "seconds": 240, "is_owner": false, "function": "other", "action": "Caso breve de análisis: reconocer NumberFormatException y distinguir error de compilación y de ejecución.", "concurrent": false, "parallel_work": ""}]}, "code_blocks": [], "representation_needs": []}</ns0:renderMetadata>
     </p:ext>
   </p:extLst>
 </p:sld>
@@ -12322,7 +12184,7 @@
   </p:clrMapOvr>
   <p:extLst>
     <p:ext uri="urn:minijarvis:semantic-render:v1">
-      <ns0:renderMetadata xmlns:ns0="urn:minijarvis:semantic-render:v1">{"session": "212", "source_files": {"teacher": "/mnt/compartido/Programación-26-27/Minijarvis/02-PROFESORADO/02-SESIONES/h1/S212-entrada-por-teclado-con-scanner-docente.md", "student_fallback": "/mnt/compartido/Programación-26-27/Minijarvis/01-ALUMNADO/03-SESIONES/h1/S212-entrada-por-teclado-con-scanner-alumnado.md"}, "layout": "recognition", "plan_index": 7, "recognition": true, "unit_ids": ["unit-12"], "roles": {"unit-12": "recognition"}, "source_refs": [{"source": "teacher", "heading": "Error de ejecución: NumberFormatException", "block_index": 14, "fragment": 0}, {"source": "teacher", "heading": "Ideas y ejemplos", "block_index": 4, "fragment": 0}], "visible_sources": [{"index": 15, "sha256": "af6b42053814d0da5a6ec622b2ac8b96f4b0ed2443fb1068a5b229ea05c8b029"}, {"index": 16, "sha256": "2ab40d540137276024115a19b0dfc25728ab99aa223973712aeefa3a42b62944"}], "notes_sources": [{"function": "visible_detail", "heading": "Error de ejecución: NumberFormatException", "sha256": "2ab40d540137276024115a19b0dfc25728ab99aa223973712aeefa3a42b62944"}], "relations": {"unit_relations": {"unit-12": {"question_context": ["context", "question"]}}, "schedule": null, "reveal_phase": "contrast", "source_supports_enriched": true}, "timeline_refs": [5], "composition": {"origin_slides": [27]}, "timing": {"seconds": 0, "allocations": [{"source_index": 5, "seconds": 0, "decision": "Intervalo compartido íntegro; propietario contable seleccionado por función de actividad y referencia timeline de unidad (identidad semántica en empates). Soporte, sin duplicación contable. ", "source_time": "36–40 min", "source_seconds": 240, "is_owner": false, "function": "other"}], "clock_intervals": [5], "presenter_notes": "Reloj fuente 36–40 min: duración compartida 240 segundos. Trabajo: Caso breve de análisis: reconocer NumberFormatException y distinguir error de compilación y de ejecución. Función del soporte: apoyo al trabajo.", "shared_intervals": [{"source_index": 5, "source_time": "36–40 min", "seconds": 240, "is_owner": false, "function": "other", "action": "Caso breve de análisis: reconocer NumberFormatException y distinguir error de compilación y de ejecución.", "concurrent": false, "parallel_work": ""}]}, "code_blocks": [], "representation_needs": []}</ns0:renderMetadata>
+      <ns0:renderMetadata xmlns:ns0="urn:minijarvis:semantic-render:v1">{"session": "212", "source_files": {"teacher": "/mnt/compartido/Programación-26-27/Minijarvis/02-PROFESORADO/02-SESIONES/h1/S212-entrada-por-teclado-con-scanner-docente.md", "student_fallback": "/mnt/compartido/Programación-26-27/Minijarvis/01-ALUMNADO/03-SESIONES/h1/S212-entrada-por-teclado-con-scanner-alumnado.md"}, "layout": "recognition", "plan_index": 7, "recognition": true, "unit_ids": ["unit-12"], "roles": {"unit-12": "recognition"}, "source_refs": [{"source": "teacher", "heading": "Error de ejecución: NumberFormatException", "block_index": 14, "fragment": 0}, {"source": "teacher", "heading": "Ideas y ejemplos", "block_index": 4, "fragment": 0}], "visible_sources": [{"index": 15, "sha256": "af6b42053814d0da5a6ec622b2ac8b96f4b0ed2443fb1068a5b229ea05c8b029"}, {"index": 16, "sha256": "2ab40d540137276024115a19b0dfc25728ab99aa223973712aeefa3a42b62944"}], "notes_sources": [{"function": "visible_detail", "heading": "Error de ejecución: NumberFormatException", "sha256": "2ab40d540137276024115a19b0dfc25728ab99aa223973712aeefa3a42b62944"}], "relations": {"unit_relations": {"unit-12": {"question_context": ["context", "question"]}}, "schedule": null, "reveal_phase": "contrast", "source_supports_enriched": true}, "timeline_refs": [5], "composition": {"origin_slides": [28]}, "timing": {"seconds": 0, "allocations": [{"source_index": 5, "seconds": 0, "decision": "Intervalo compartido íntegro; propietario contable seleccionado por función de actividad y referencia timeline de unidad (identidad semántica en empates). Soporte, sin duplicación contable. ", "source_time": "36–40 min", "source_seconds": 240, "is_owner": false, "function": "other"}], "clock_intervals": [5], "presenter_notes": "Reloj fuente 36–40 min: duración compartida 240 segundos. Trabajo: Caso breve de análisis: reconocer NumberFormatException y distinguir error de compilación y de ejecución. Función del soporte: apoyo al trabajo.", "shared_intervals": [{"source_index": 5, "source_time": "36–40 min", "seconds": 240, "is_owner": false, "function": "other", "action": "Caso breve de análisis: reconocer NumberFormatException y distinguir error de compilación y de ejecución.", "concurrent": false, "parallel_work": ""}]}, "code_blocks": [], "representation_needs": []}</ns0:renderMetadata>
     </p:ext>
   </p:extLst>
 </p:sld>
@@ -12527,7 +12389,7 @@
         <p:spPr>
           <a:xfrm>
             <a:off x="640080" y="3237992"/>
-            <a:ext cx="10881360" cy="946912"/>
+            <a:ext cx="10881360" cy="1338072"/>
           </a:xfrm>
           <a:prstGeom prst="rect">
             <a:avLst/>
@@ -12555,7 +12417,7 @@
               </a:defRPr>
             </a:pPr>
             <a:r>
-              <a:t>Hoy MiniJarvis ya no solo muestra datos escritos por quien programa.</a:t>
+              <a:t>Hoy MiniJarvis recibe texto con nextLine(), lo convierte, calcula y muestra una comparación booleana.</a:t>
             </a:r>
           </a:p>
         </p:txBody>
@@ -12567,7 +12429,7 @@
   </p:clrMapOvr>
   <p:extLst>
     <p:ext uri="urn:minijarvis:semantic-render:v1">
-      <ns0:renderMetadata xmlns:ns0="urn:minijarvis:semantic-render:v1">{"session": "212", "source_files": {"teacher": "/mnt/compartido/Programación-26-27/Minijarvis/02-PROFESORADO/02-SESIONES/h1/S212-entrada-por-teclado-con-scanner-docente.md", "student_fallback": "/mnt/compartido/Programación-26-27/Minijarvis/01-ALUMNADO/03-SESIONES/h1/S212-entrada-por-teclado-con-scanner-alumnado.md"}, "layout": "closure", "plan_index": 8, "recognition": false, "unit_ids": ["unit-20", "unit-21"], "roles": {"unit-20": "core", "unit-21": "core"}, "source_refs": [{"source": "teacher", "heading": "Comprueba lo aprendido", "block_index": 23, "fragment": 0}, {"source": "teacher", "heading": "Al terminar", "block_index": 24, "fragment": 0}], "visible_sources": [{"index": 0, "sha256": "fded35c47365df0f70eb2b325bb3877c839e22b2f54ef5f903a230efb463815e"}, {"index": 2, "sha256": "d85134a936ba20175f065ebb0c2b9b4917e6f0bc3e10fe992c73f28610248147"}], "notes_sources": [{"function": "individual_check", "heading": "Comprueba lo aprendido", "sha256": "dae03982d930a360cc6f21f6182bdcfffd59c916b3cd04bb2bc0c7f6a450910a"}, {"function": "individual_check", "heading": "Comprueba lo aprendido", "sha256": "c54f205b33bd0dd1f4ec5e9ca0395c54a3e3633b76fe0bb5b87a0f6041c4f4f5"}, {"function": "continuity", "heading": "Al terminar", "sha256": "9d40efbe5ad0fc9c32015397e1dec5d0214a068d96da951fbfce4de6a198b684"}, {"function": "facilitation", "heading": "Comprueba lo aprendido", "sha256": "5ac270c14daf9145b5fa6b3260aaee7fce13571ee2fba5f4f556b6f5b86f5a90"}, {"function": "visible_detail", "heading": "Comprueba lo aprendido", "sha256": "d85134a936ba20175f065ebb0c2b9b4917e6f0bc3e10fe992c73f28610248147"}, {"function": "closure", "heading": "Comprueba lo aprendido", "sha256": "6e2ddcb8f7deda6961b8d1d19a1090dddd89e3a56e9fbb5c0c18eb93f33d3e07"}, {"function": "closure", "heading": "Comprueba lo aprendido", "sha256": "fded35c47365df0f70eb2b325bb3877c839e22b2f54ef5f903a230efb463815e"}], "relations": {"unit_relations": {"unit-20": {"question_context": ["context", "question"], "recognition_context": ["unit-12"]}}, "schedule": null, "source_supports_enriched": true}, "timeline_refs": [6], "composition": {"origin_slides": [28, 29]}, "timing": {"seconds": 300, "allocations": [{"source_index": 6, "seconds": 300, "decision": "Intervalo compartido íntegro; propietario contable seleccionado por función de actividad y referencia timeline de unidad (identidad semántica en empates). Propietario. ", "source_time": "40–45 min", "source_seconds": 300, "is_owner": true, "function": "individual_check"}], "clock_intervals": [6], "presenter_notes": "Reloj fuente 40–45 min: duración compartida 300 segundos. Trabajo: Comprobar la prueba, explicar el recorrido del dato y cerrar. Función del soporte: comprobación individual.", "shared_intervals": [{"source_index": 6, "source_time": "40–45 min", "seconds": 300, "is_owner": true, "function": "individual_check", "action": "Comprobar la prueba, explicar el recorrido del dato y cerrar.", "concurrent": false, "parallel_work": ""}]}, "code_blocks": [], "representation_needs": []}</ns0:renderMetadata>
+      <ns0:renderMetadata xmlns:ns0="urn:minijarvis:semantic-render:v1">{"session": "212", "source_files": {"teacher": "/mnt/compartido/Programación-26-27/Minijarvis/02-PROFESORADO/02-SESIONES/h1/S212-entrada-por-teclado-con-scanner-docente.md", "student_fallback": "/mnt/compartido/Programación-26-27/Minijarvis/01-ALUMNADO/03-SESIONES/h1/S212-entrada-por-teclado-con-scanner-alumnado.md"}, "layout": "closure", "plan_index": 8, "recognition": false, "unit_ids": ["unit-20", "unit-21"], "roles": {"unit-20": "core", "unit-21": "core"}, "source_refs": [{"source": "teacher", "heading": "Comprueba lo aprendido", "block_index": 23, "fragment": 0}, {"source": "teacher", "heading": "Al terminar", "block_index": 24, "fragment": 0}], "visible_sources": [{"index": 0, "sha256": "fded35c47365df0f70eb2b325bb3877c839e22b2f54ef5f903a230efb463815e"}, {"index": 2, "sha256": "17c4166c70ba0ab8958b5806c2b9daf358dcba3982cdf26192463447d636023b"}], "notes_sources": [{"function": "individual_check", "heading": "Comprueba lo aprendido", "sha256": "dae03982d930a360cc6f21f6182bdcfffd59c916b3cd04bb2bc0c7f6a450910a"}, {"function": "individual_check", "heading": "Comprueba lo aprendido", "sha256": "c54f205b33bd0dd1f4ec5e9ca0395c54a3e3633b76fe0bb5b87a0f6041c4f4f5"}, {"function": "continuity", "heading": "Al terminar", "sha256": "9d40efbe5ad0fc9c32015397e1dec5d0214a068d96da951fbfce4de6a198b684"}, {"function": "facilitation", "heading": "Comprueba lo aprendido", "sha256": "5ac270c14daf9145b5fa6b3260aaee7fce13571ee2fba5f4f556b6f5b86f5a90"}, {"function": "visible_detail", "heading": "Comprueba lo aprendido", "sha256": "17c4166c70ba0ab8958b5806c2b9daf358dcba3982cdf26192463447d636023b"}, {"function": "closure", "heading": "Comprueba lo aprendido", "sha256": "aaf60bbf415d4cb577f0e1589729865681fe53e9b4e1f74e65657bf8246dabd2"}, {"function": "closure", "heading": "Comprueba lo aprendido", "sha256": "fded35c47365df0f70eb2b325bb3877c839e22b2f54ef5f903a230efb463815e"}], "relations": {"unit_relations": {"unit-20": {"question_context": ["context", "question"], "recognition_context": ["unit-12"]}}, "schedule": null, "source_supports_enriched": true}, "timeline_refs": [6], "composition": {"origin_slides": [29, 30]}, "timing": {"seconds": 300, "allocations": [{"source_index": 6, "seconds": 300, "decision": "Intervalo compartido íntegro; propietario contable seleccionado por función de actividad y referencia timeline de unidad (identidad semántica en empates). Propietario. ", "source_time": "40–45 min", "source_seconds": 300, "is_owner": true, "function": "individual_check"}], "clock_intervals": [6], "presenter_notes": "Reloj fuente 40–45 min: duración compartida 300 segundos. Trabajo: Comprobar la prueba, explicar el recorrido del dato y cerrar. Función del soporte: comprobación individual.", "shared_intervals": [{"source_index": 6, "source_time": "40–45 min", "seconds": 300, "is_owner": true, "function": "individual_check", "action": "Comprobar la prueba, explicar el recorrido del dato y cerrar.", "concurrent": false, "parallel_work": ""}]}, "code_blocks": [], "representation_needs": []}</ns0:renderMetadata>
     </p:ext>
   </p:extLst>
 </p:sld>
@@ -12726,7 +12588,7 @@
         <p:spPr>
           <a:xfrm>
             <a:off x="640080" y="1417320"/>
-            <a:ext cx="10881360" cy="2120392"/>
+            <a:ext cx="10881360" cy="2511552"/>
           </a:xfrm>
           <a:prstGeom prst="rect">
             <a:avLst/>
@@ -12761,7 +12623,7 @@
                   <a:srgbClr val="FFFFFF"/>
                 </a:solidFill>
               </a:rPr>
-              <a:t>¿Qué devuelve nextLine(), dónde se almacena, cuándo necesitas parsear </a:t>
+              <a:t>¿Qué devuelve nextLine(), dónde se almacena, cuándo necesitas parsear, qué cálculo y comparación se realizan, qué boolean se muestra </a:t>
             </a:r>
             <a:r>
               <a:rPr sz="2400">
@@ -12781,7 +12643,7 @@
   </p:clrMapOvr>
   <p:extLst>
     <p:ext uri="urn:minijarvis:semantic-render:v1">
-      <ns0:renderMetadata xmlns:ns0="urn:minijarvis:semantic-render:v1">{"session": "212", "source_files": {"teacher": "/mnt/compartido/Programación-26-27/Minijarvis/02-PROFESORADO/02-SESIONES/h1/S212-entrada-por-teclado-con-scanner-docente.md", "student_fallback": "/mnt/compartido/Programación-26-27/Minijarvis/01-ALUMNADO/03-SESIONES/h1/S212-entrada-por-teclado-con-scanner-alumnado.md"}, "layout": "closure", "plan_index": 8, "recognition": false, "unit_ids": ["unit-20", "unit-21"], "roles": {"unit-20": "core", "unit-21": "core"}, "source_refs": [{"source": "teacher", "heading": "Comprueba lo aprendido", "block_index": 23, "fragment": 0}, {"source": "teacher", "heading": "Al terminar", "block_index": 24, "fragment": 0}], "visible_sources": [{"index": 3, "sha256": "6e2ddcb8f7deda6961b8d1d19a1090dddd89e3a56e9fbb5c0c18eb93f33d3e07"}], "notes_sources": [{"function": "individual_check", "heading": "Comprueba lo aprendido", "sha256": "dae03982d930a360cc6f21f6182bdcfffd59c916b3cd04bb2bc0c7f6a450910a"}, {"function": "individual_check", "heading": "Comprueba lo aprendido", "sha256": "c54f205b33bd0dd1f4ec5e9ca0395c54a3e3633b76fe0bb5b87a0f6041c4f4f5"}, {"function": "continuity", "heading": "Al terminar", "sha256": "9d40efbe5ad0fc9c32015397e1dec5d0214a068d96da951fbfce4de6a198b684"}, {"function": "facilitation", "heading": "Comprueba lo aprendido", "sha256": "5ac270c14daf9145b5fa6b3260aaee7fce13571ee2fba5f4f556b6f5b86f5a90"}, {"function": "visible_detail", "heading": "Comprueba lo aprendido", "sha256": "d85134a936ba20175f065ebb0c2b9b4917e6f0bc3e10fe992c73f28610248147"}, {"function": "closure", "heading": "Comprueba lo aprendido", "sha256": "6e2ddcb8f7deda6961b8d1d19a1090dddd89e3a56e9fbb5c0c18eb93f33d3e07"}, {"function": "closure", "heading": "Comprueba lo aprendido", "sha256": "fded35c47365df0f70eb2b325bb3877c839e22b2f54ef5f903a230efb463815e"}], "relations": {"unit_relations": {"unit-20": {"question_context": ["context", "question"], "recognition_context": ["unit-12"]}}, "schedule": null, "source_supports_enriched": true}, "timeline_refs": [6], "composition": {"origin_slides": [28, 29]}, "timing": {"seconds": 0, "allocations": [{"source_index": 6, "seconds": 0, "decision": "Intervalo compartido íntegro; propietario contable seleccionado por función de actividad y referencia timeline de unidad (identidad semántica en empates). Soporte, sin duplicación contable. ", "source_time": "40–45 min", "source_seconds": 300, "is_owner": false, "function": "individual_check"}], "clock_intervals": [6], "presenter_notes": "Reloj fuente 40–45 min: duración compartida 300 segundos. Trabajo: Comprobar la prueba, explicar el recorrido del dato y cerrar. Función del soporte: comprobación individual.", "shared_intervals": [{"source_index": 6, "source_time": "40–45 min", "seconds": 300, "is_owner": false, "function": "individual_check", "action": "Comprobar la prueba, explicar el recorrido del dato y cerrar.", "concurrent": false, "parallel_work": ""}]}, "code_blocks": [], "representation_needs": []}</ns0:renderMetadata>
+      <ns0:renderMetadata xmlns:ns0="urn:minijarvis:semantic-render:v1">{"session": "212", "source_files": {"teacher": "/mnt/compartido/Programación-26-27/Minijarvis/02-PROFESORADO/02-SESIONES/h1/S212-entrada-por-teclado-con-scanner-docente.md", "student_fallback": "/mnt/compartido/Programación-26-27/Minijarvis/01-ALUMNADO/03-SESIONES/h1/S212-entrada-por-teclado-con-scanner-alumnado.md"}, "layout": "closure", "plan_index": 8, "recognition": false, "unit_ids": ["unit-20", "unit-21"], "roles": {"unit-20": "core", "unit-21": "core"}, "source_refs": [{"source": "teacher", "heading": "Comprueba lo aprendido", "block_index": 23, "fragment": 0}, {"source": "teacher", "heading": "Al terminar", "block_index": 24, "fragment": 0}], "visible_sources": [{"index": 3, "sha256": "aaf60bbf415d4cb577f0e1589729865681fe53e9b4e1f74e65657bf8246dabd2"}], "notes_sources": [{"function": "individual_check", "heading": "Comprueba lo aprendido", "sha256": "dae03982d930a360cc6f21f6182bdcfffd59c916b3cd04bb2bc0c7f6a450910a"}, {"function": "individual_check", "heading": "Comprueba lo aprendido", "sha256": "c54f205b33bd0dd1f4ec5e9ca0395c54a3e3633b76fe0bb5b87a0f6041c4f4f5"}, {"function": "continuity", "heading": "Al terminar", "sha256": "9d40efbe5ad0fc9c32015397e1dec5d0214a068d96da951fbfce4de6a198b684"}, {"function": "facilitation", "heading": "Comprueba lo aprendido", "sha256": "5ac270c14daf9145b5fa6b3260aaee7fce13571ee2fba5f4f556b6f5b86f5a90"}, {"function": "visible_detail", "heading": "Comprueba lo aprendido", "sha256": "17c4166c70ba0ab8958b5806c2b9daf358dcba3982cdf26192463447d636023b"}, {"function": "closure", "heading": "Comprueba lo aprendido", "sha256": "aaf60bbf415d4cb577f0e1589729865681fe53e9b4e1f74e65657bf8246dabd2"}, {"function": "closure", "heading": "Comprueba lo aprendido", "sha256": "fded35c47365df0f70eb2b325bb3877c839e22b2f54ef5f903a230efb463815e"}], "relations": {"unit_relations": {"unit-20": {"question_context": ["context", "question"], "recognition_context": ["unit-12"]}}, "schedule": null, "source_supports_enriched": true}, "timeline_refs": [6], "composition": {"origin_slides": [29, 30]}, "timing": {"seconds": 0, "allocations": [{"source_index": 6, "seconds": 0, "decision": "Intervalo compartido íntegro; propietario contable seleccionado por función de actividad y referencia timeline de unidad (identidad semántica en empates). Soporte, sin duplicación contable. ", "source_time": "40–45 min", "source_seconds": 300, "is_owner": false, "function": "individual_check"}], "clock_intervals": [6], "presenter_notes": "Reloj fuente 40–45 min: duración compartida 300 segundos. Trabajo: Comprobar la prueba, explicar el recorrido del dato y cerrar. Función del soporte: comprobación individual.", "shared_intervals": [{"source_index": 6, "source_time": "40–45 min", "seconds": 300, "is_owner": false, "function": "individual_check", "action": "Comprobar la prueba, explicar el recorrido del dato y cerrar.", "concurrent": false, "parallel_work": ""}]}, "code_blocks": [], "representation_needs": []}</ns0:renderMetadata>
     </p:ext>
   </p:extLst>
 </p:sld>
@@ -14845,7 +14707,7 @@
   </p:clrMapOvr>
   <p:extLst>
     <p:ext uri="urn:minijarvis:semantic-render:v1">
-      <ns0:renderMetadata xmlns:ns0="urn:minijarvis:semantic-render:v1">{"session": "212", "source_files": {"teacher": "/mnt/compartido/Programación-26-27/Minijarvis/02-PROFESORADO/02-SESIONES/h1/S212-entrada-por-teclado-con-scanner-docente.md", "student_fallback": "/mnt/compartido/Programación-26-27/Minijarvis/01-ALUMNADO/03-SESIONES/h1/S212-entrada-por-teclado-con-scanner-alumnado.md"}, "layout": "comparison", "plan_index": 2, "recognition": false, "unit_ids": ["unit-5"], "roles": {"unit-5": "core"}, "source_refs": [{"source": "teacher", "heading": "Leer no es lo mismo que utilizar", "block_index": 7, "fragment": 0}, {"source": "teacher", "heading": "Ideas y ejemplos", "block_index": 4, "fragment": 0}], "visible_sources": [{"index": 1, "sha256": "829de6650426fc0c8f8928cc4f685fb7f5ef5d3fd1b3abf0c56e5b17be452125"}, {"index": 2, "sha256": "161d7ef17c91ecab84f0ccda74ca584016a2a6a8977da292a53fa5d7ade2f38e"}, {"index": 3, "sha256": "1a6e5b02f60280c42c237635998730c957461835e53bb41fe4f6b6218ac51f22"}, {"index": 4, "sha256": "8508ccfa3c69dfd07f4746d6e59007c50ba74195569469974380867a9926b3d4"}], "notes_sources": [{"function": "concept", "heading": "Leer no es lo mismo que utilizar", "sha256": "df9acf2e0cc9e2f7147f4ae4b90b1e1f9eeda1377e5dbfd9739ecfa79384031d"}, {"function": "facilitation", "heading": "Leer no es lo mismo que utilizar", "sha256": "dfb221ea8b691ec6b9dd242dd5b2c525ce0d25ef61faccb3947828bd5879a314"}, {"function": "visible_detail", "heading": "Leer no es lo mismo que utilizar", "sha256": "1a6e5b02f60280c42c237635998730c957461835e53bb41fe4f6b6218ac51f22"}], "relations": {"unit_relations": {"unit-5": {"question_context": ["context", "question"], "contrast": ["example", "counterexample"]}}, "schedule": null, "comparison_layout": "stacked_with_context", "source_supports_enriched": true}, "timeline_refs": [2], "composition": {"origin_slides": [8]}, "timing": {"seconds": 0, "allocations": [{"source_index": 2, "seconds": 0, "decision": "Intervalo compartido íntegro; propietario contable seleccionado por función de actividad y referencia timeline de unidad (identidad semántica en empates). Soporte, sin duplicación contable. ", "source_time": "12–22 min", "source_seconds": 600, "is_owner": false, "function": "concept"}], "clock_intervals": [2], "presenter_notes": "Reloj fuente 12–22 min: duración compartida 600 segundos. Trabajo: Núcleo práctico individual: usar Scanner, pedir, leer con nextLine(), almacenar, parsear con Integer.parseInt o Double.parseDouble, utilizar el dato y comprobar una entrada válida. Función del soporte: explicación.", "shared_intervals": [{"source_index": 2, "source_time": "12–22 min", "seconds": 600, "is_owner": false, "function": "concept", "action": "Núcleo práctico individual: usar Scanner, pedir, leer con nextLine(), almacenar, parsear con Integer.parseInt o Double.parseDouble, utilizar el dato y comprobar una entrada válida.", "concurrent": false, "parallel_work": ""}]}, "code_blocks": ["String nombreUsuario = teclado.nextLine();\nSystem.out.println(\"Hola, \" + nombreUsuario);", "String nombreUsuario = teclado.nextLine();\nSystem.out.println(\"Hola\");"], "representation_needs": []}</ns0:renderMetadata>
+      <ns0:renderMetadata xmlns:ns0="urn:minijarvis:semantic-render:v1">{"session": "212", "source_files": {"teacher": "/mnt/compartido/Programación-26-27/Minijarvis/02-PROFESORADO/02-SESIONES/h1/S212-entrada-por-teclado-con-scanner-docente.md", "student_fallback": "/mnt/compartido/Programación-26-27/Minijarvis/01-ALUMNADO/03-SESIONES/h1/S212-entrada-por-teclado-con-scanner-alumnado.md"}, "layout": "comparison", "plan_index": 2, "recognition": false, "unit_ids": ["unit-5"], "roles": {"unit-5": "core"}, "source_refs": [{"source": "teacher", "heading": "Leer no es lo mismo que utilizar", "block_index": 7, "fragment": 0}, {"source": "teacher", "heading": "Ideas y ejemplos", "block_index": 4, "fragment": 0}], "visible_sources": [{"index": 1, "sha256": "829de6650426fc0c8f8928cc4f685fb7f5ef5d3fd1b3abf0c56e5b17be452125"}, {"index": 2, "sha256": "161d7ef17c91ecab84f0ccda74ca584016a2a6a8977da292a53fa5d7ade2f38e"}, {"index": 3, "sha256": "1a6e5b02f60280c42c237635998730c957461835e53bb41fe4f6b6218ac51f22"}, {"index": 4, "sha256": "8508ccfa3c69dfd07f4746d6e59007c50ba74195569469974380867a9926b3d4"}], "notes_sources": [{"function": "concept", "heading": "Leer no es lo mismo que utilizar", "sha256": "df9acf2e0cc9e2f7147f4ae4b90b1e1f9eeda1377e5dbfd9739ecfa79384031d"}, {"function": "facilitation", "heading": "Leer no es lo mismo que utilizar", "sha256": "dfb221ea8b691ec6b9dd242dd5b2c525ce0d25ef61faccb3947828bd5879a314"}, {"function": "visible_detail", "heading": "Leer no es lo mismo que utilizar", "sha256": "1a6e5b02f60280c42c237635998730c957461835e53bb41fe4f6b6218ac51f22"}], "relations": {"unit_relations": {"unit-5": {"question_context": ["context", "question"], "contrast": ["example", "counterexample"]}}, "schedule": null, "comparison_layout": "stacked_with_context", "source_supports_enriched": true}, "timeline_refs": [2], "composition": {"origin_slides": [8]}, "timing": {"seconds": 0, "allocations": [{"source_index": 2, "seconds": 0, "decision": "Intervalo compartido íntegro; propietario contable seleccionado por función de actividad y referencia timeline de unidad (identidad semántica en empates). Soporte, sin duplicación contable. ", "source_time": "12–22 min", "source_seconds": 600, "is_owner": false, "function": "concept"}], "clock_intervals": [2], "presenter_notes": "Reloj fuente 12–22 min: duración compartida 600 segundos. Trabajo: Núcleo práctico individual: usar Scanner, leer con nextLine(), almacenar, parsear, calcular y mostrar una comparación booleana sin bifurcación. Función del soporte: explicación.", "shared_intervals": [{"source_index": 2, "source_time": "12–22 min", "seconds": 600, "is_owner": false, "function": "concept", "action": "Núcleo práctico individual: usar Scanner, leer con nextLine(), almacenar, parsear, calcular y mostrar una comparación booleana sin bifurcación.", "concurrent": false, "parallel_work": ""}]}, "code_blocks": ["String nombreUsuario = teclado.nextLine();\nSystem.out.println(\"Hola, \" + nombreUsuario);", "String nombreUsuario = teclado.nextLine();\nSystem.out.println(\"Hola\");"], "representation_needs": []}</ns0:renderMetadata>
     </p:ext>
   </p:extLst>
 </p:sld>
@@ -15151,7 +15013,7 @@
         <p:spPr>
           <a:xfrm>
             <a:off x="640080" y="3945636"/>
-            <a:ext cx="10881360" cy="1338072"/>
+            <a:ext cx="10881360" cy="1924812"/>
           </a:xfrm>
           <a:prstGeom prst="rect">
             <a:avLst/>
@@ -15238,7 +15100,45 @@
               </a:defRPr>
             </a:pPr>
             <a:r>
+              <a:t>boolean alcanzaReferencia = horas &gt;= 4;</a:t>
+            </a:r>
+          </a:p>
+          <a:p>
+            <a:pPr marL="335280" indent="-335280">
+              <a:lnSpc>
+                <a:spcPts val="2310"/>
+              </a:lnSpc>
+              <a:spcAft>
+                <a:spcPts val="0"/>
+              </a:spcAft>
+              <a:defRPr sz="2200" b="0">
+                <a:solidFill>
+                  <a:srgbClr val="1C2330"/>
+                </a:solidFill>
+                <a:latin typeface="Liberation Mono"/>
+              </a:defRPr>
+            </a:pPr>
+            <a:r>
               <a:t>System.out.println(minutos);</a:t>
+            </a:r>
+          </a:p>
+          <a:p>
+            <a:pPr marL="335280" indent="-335280">
+              <a:lnSpc>
+                <a:spcPts val="2310"/>
+              </a:lnSpc>
+              <a:spcAft>
+                <a:spcPts val="0"/>
+              </a:spcAft>
+              <a:defRPr sz="2200" b="0">
+                <a:solidFill>
+                  <a:srgbClr val="1C2330"/>
+                </a:solidFill>
+                <a:latin typeface="Liberation Mono"/>
+              </a:defRPr>
+            </a:pPr>
+            <a:r>
+              <a:t>System.out.println(alcanzaReferencia);</a:t>
             </a:r>
           </a:p>
         </p:txBody>
@@ -15250,7 +15150,7 @@
   </p:clrMapOvr>
   <p:extLst>
     <p:ext uri="urn:minijarvis:semantic-render:v1">
-      <ns0:renderMetadata xmlns:ns0="urn:minijarvis:semantic-render:v1">{"session": "212", "source_files": {"teacher": "/mnt/compartido/Programación-26-27/Minijarvis/02-PROFESORADO/02-SESIONES/h1/S212-entrada-por-teclado-con-scanner-docente.md", "student_fallback": "/mnt/compartido/Programación-26-27/Minijarvis/01-ALUMNADO/03-SESIONES/h1/S212-entrada-por-teclado-con-scanner-alumnado.md"}, "layout": "linked_prediction", "plan_index": 2, "recognition": false, "unit_ids": ["unit-6"], "roles": {"unit-6": "core"}, "source_refs": [{"source": "teacher", "heading": "Parsear texto para obtener un número", "block_index": 8, "fragment": 0}, {"source": "teacher", "heading": "Ideas y ejemplos", "block_index": 4, "fragment": 0}], "visible_sources": [{"index": 5, "sha256": "79830f3ce9436372074c5ef0b454a51ec9ac4ff6022833a2b073d058dffd5998"}, {"index": 6, "sha256": "d9bff3a0b82503c4d642f0fd6efb4490fcedbe1d9ff5495d0a7bbde405729de7"}, {"index": 8, "sha256": "9687046121d7a64adf5ef69a25a86ee5b76d220db799b37e0af07d3046913369"}, {"index": 10, "sha256": "8c7f2c29d9b71e6d4636498df74a5476ac6fe7a28b9b64dae450a469e8e11520"}], "notes_sources": [{"function": "visible_detail", "heading": "Parsear texto para obtener un número", "sha256": "79830f3ce9436372074c5ef0b454a51ec9ac4ff6022833a2b073d058dffd5998"}, {"function": "facilitation", "heading": "Parsear texto para obtener un número", "sha256": "cdd72339db576213907886645ecc00e3a26cd19abb961dd7d04d3511edf6b440"}, {"function": "facilitation", "heading": "Parsear texto para obtener un número", "sha256": "880be94128932778cc96e863e0099c9a5c298fd4d81ea4d60705e050e5de9a0a"}, {"function": "facilitation", "heading": "Parsear texto para obtener un número", "sha256": "de4811ac88e323b39c819a0e89127dba4a89592f7332a8ec3af44b33d6ec1803"}], "relations": {"unit_relations": {"unit-6": {"prediction_cycle": ["prediction", "execution", "contrast"], "question_context": ["context", "question"]}}, "schedule": null, "presentation_normalizations": {"String -&gt; parseo -&gt; número": "String → parseo → número"}, "source_supports_enriched": true}, "timeline_refs": [2], "composition": {"origin_slides": [9, 10]}, "timing": {"seconds": 0, "allocations": [{"source_index": 2, "seconds": 0, "decision": "Intervalo compartido íntegro; propietario contable seleccionado por función de actividad y referencia timeline de unidad (identidad semántica en empates). Soporte, sin duplicación contable. ", "source_time": "12–22 min", "source_seconds": 600, "is_owner": false, "function": "concept"}], "clock_intervals": [2], "presenter_notes": "Reloj fuente 12–22 min: duración compartida 600 segundos. Trabajo: Núcleo práctico individual: usar Scanner, pedir, leer con nextLine(), almacenar, parsear con Integer.parseInt o Double.parseDouble, utilizar el dato y comprobar una entrada válida. Función del soporte: explicación.", "shared_intervals": [{"source_index": 2, "source_time": "12–22 min", "seconds": 600, "is_owner": false, "function": "concept", "action": "Núcleo práctico individual: usar Scanner, pedir, leer con nextLine(), almacenar, parsear con Integer.parseInt o Double.parseDouble, utilizar el dato y comprobar una entrada válida.", "concurrent": false, "parallel_work": ""}]}, "code_blocks": ["String texto = \"5\";\nint horas = Integer.parseInt(texto);", "String texto = teclado.nextLine();\nint horas = Integer.parseInt(texto);\nint minutos = horas * 60;\nSystem.out.println(minutos);"], "representation_needs": []}</ns0:renderMetadata>
+      <ns0:renderMetadata xmlns:ns0="urn:minijarvis:semantic-render:v1">{"session": "212", "source_files": {"teacher": "/mnt/compartido/Programación-26-27/Minijarvis/02-PROFESORADO/02-SESIONES/h1/S212-entrada-por-teclado-con-scanner-docente.md", "student_fallback": "/mnt/compartido/Programación-26-27/Minijarvis/01-ALUMNADO/03-SESIONES/h1/S212-entrada-por-teclado-con-scanner-alumnado.md"}, "layout": "linked_prediction", "plan_index": 2, "recognition": false, "unit_ids": ["unit-6"], "roles": {"unit-6": "core"}, "source_refs": [{"source": "teacher", "heading": "Parsear texto para obtener un número", "block_index": 8, "fragment": 0}, {"source": "teacher", "heading": "Ideas y ejemplos", "block_index": 4, "fragment": 0}], "visible_sources": [{"index": 5, "sha256": "79830f3ce9436372074c5ef0b454a51ec9ac4ff6022833a2b073d058dffd5998"}, {"index": 6, "sha256": "d9bff3a0b82503c4d642f0fd6efb4490fcedbe1d9ff5495d0a7bbde405729de7"}, {"index": 8, "sha256": "9687046121d7a64adf5ef69a25a86ee5b76d220db799b37e0af07d3046913369"}, {"index": 10, "sha256": "db509dc5e7fddf983b0b6a89e92dd7ac2c96b71fece23ec8a17c8f6af976146b"}], "notes_sources": [{"function": "visible_detail", "heading": "Parsear texto para obtener un número", "sha256": "79830f3ce9436372074c5ef0b454a51ec9ac4ff6022833a2b073d058dffd5998"}, {"function": "facilitation", "heading": "Parsear texto para obtener un número", "sha256": "cdd72339db576213907886645ecc00e3a26cd19abb961dd7d04d3511edf6b440"}, {"function": "facilitation", "heading": "Parsear texto para obtener un número", "sha256": "880be94128932778cc96e863e0099c9a5c298fd4d81ea4d60705e050e5de9a0a"}, {"function": "facilitation", "heading": "Parsear texto para obtener un número", "sha256": "de4811ac88e323b39c819a0e89127dba4a89592f7332a8ec3af44b33d6ec1803"}, {"function": "facilitation", "heading": "Parsear texto para obtener un número", "sha256": "fb46e45ed9ce483b29b080f2f4e01268f058a4ab9eb9c642c92311f3632fd2fc"}, {"function": "visible_detail", "heading": "Parsear texto para obtener un número", "sha256": "e0c7bcc139019d2245719725257cb3ddfda13f612f37587ae99cf5b7fdfc0394"}], "relations": {"unit_relations": {"unit-6": {"prediction_cycle": ["prediction", "execution", "contrast"], "question_context": ["context", "question"]}}, "schedule": null, "presentation_normalizations": {"String -&gt; parseo -&gt; número": "String → parseo → número"}, "source_supports_enriched": true}, "timeline_refs": [2], "composition": {"origin_slides": [9, 10, 11]}, "timing": {"seconds": 0, "allocations": [{"source_index": 2, "seconds": 0, "decision": "Intervalo compartido íntegro; propietario contable seleccionado por función de actividad y referencia timeline de unidad (identidad semántica en empates). Soporte, sin duplicación contable. ", "source_time": "12–22 min", "source_seconds": 600, "is_owner": false, "function": "concept"}], "clock_intervals": [2], "presenter_notes": "Reloj fuente 12–22 min: duración compartida 600 segundos. Trabajo: Núcleo práctico individual: usar Scanner, leer con nextLine(), almacenar, parsear, calcular y mostrar una comparación booleana sin bifurcación. Función del soporte: explicación.", "shared_intervals": [{"source_index": 2, "source_time": "12–22 min", "seconds": 600, "is_owner": false, "function": "concept", "action": "Núcleo práctico individual: usar Scanner, leer con nextLine(), almacenar, parsear, calcular y mostrar una comparación booleana sin bifurcación.", "concurrent": false, "parallel_work": ""}]}, "code_blocks": ["String texto = \"5\";\nint horas = Integer.parseInt(texto);", "String texto = teclado.nextLine();\nint horas = Integer.parseInt(texto);\nint minutos = horas * 60;\nboolean alcanzaReferencia = horas &gt;= 4;\nSystem.out.println(minutos);\nSystem.out.println(alcanzaReferencia);"], "representation_needs": []}</ns0:renderMetadata>
     </p:ext>
   </p:extLst>
 </p:sld>
@@ -15409,6 +15309,48 @@
         <p:spPr>
           <a:xfrm>
             <a:off x="640080" y="1417320"/>
+            <a:ext cx="10881360" cy="1338072"/>
+          </a:xfrm>
+          <a:prstGeom prst="rect">
+            <a:avLst/>
+          </a:prstGeom>
+          <a:noFill/>
+        </p:spPr>
+        <p:txBody>
+          <a:bodyPr wrap="square" lIns="109728" rIns="109728" tIns="73152" bIns="73152">
+            <a:noAutofit/>
+          </a:bodyPr>
+          <a:lstStyle/>
+          <a:p>
+            <a:pPr>
+              <a:lnSpc>
+                <a:spcPts val="3080"/>
+              </a:lnSpc>
+              <a:spcAft>
+                <a:spcPts val="0"/>
+              </a:spcAft>
+              <a:defRPr sz="2800" b="0">
+                <a:solidFill>
+                  <a:srgbClr val="1C2330"/>
+                </a:solidFill>
+                <a:latin typeface="Liberation Sans"/>
+              </a:defRPr>
+            </a:pPr>
+            <a:r>
+              <a:t>Si la entrada es 2, ¿qué guarda texto, qué guarda horas, qué cálculo se muestra y qué valor tiene alcanzaReferencia?</a:t>
+            </a:r>
+          </a:p>
+        </p:txBody>
+      </p:sp>
+      <p:sp>
+        <p:nvSpPr>
+          <p:cNvPr id="6" name="Contenido" descr="Contenido"/>
+          <p:cNvSpPr txBox="1"/>
+          <p:nvPr/>
+        </p:nvSpPr>
+        <p:spPr>
+          <a:xfrm>
+            <a:off x="640080" y="2846832"/>
             <a:ext cx="10881360" cy="946912"/>
           </a:xfrm>
           <a:prstGeom prst="rect">
@@ -15437,21 +15379,21 @@
               </a:defRPr>
             </a:pPr>
             <a:r>
-              <a:t>Si la entrada es 2, ¿qué guarda texto, qué guarda horas y qué salida esperas?</a:t>
-            </a:r>
-          </a:p>
-        </p:txBody>
-      </p:sp>
-      <p:sp>
-        <p:nvSpPr>
-          <p:cNvPr id="6" name="Contenido" descr="Contenido"/>
-          <p:cNvSpPr txBox="1"/>
-          <p:nvPr/>
-        </p:nvSpPr>
-        <p:spPr>
-          <a:xfrm>
-            <a:off x="640080" y="2455672"/>
-            <a:ext cx="10881360" cy="946912"/>
+              <a:t>Después de ejecutar, contrasta la salida observada con la predicción.</a:t>
+            </a:r>
+          </a:p>
+        </p:txBody>
+      </p:sp>
+      <p:sp>
+        <p:nvSpPr>
+          <p:cNvPr id="7" name="Contenido" descr="Contenido"/>
+          <p:cNvSpPr txBox="1"/>
+          <p:nvPr/>
+        </p:nvSpPr>
+        <p:spPr>
+          <a:xfrm>
+            <a:off x="640080" y="3885184"/>
+            <a:ext cx="10881360" cy="555752"/>
           </a:xfrm>
           <a:prstGeom prst="rect">
             <a:avLst/>
@@ -15479,7 +15421,7 @@
               </a:defRPr>
             </a:pPr>
             <a:r>
-              <a:t>Después de ejecutar, contrasta la salida observada con la predicción.</a:t>
+              <a:t>horas &gt;= 4 produce un boolean.</a:t>
             </a:r>
           </a:p>
         </p:txBody>
@@ -15491,7 +15433,7 @@
   </p:clrMapOvr>
   <p:extLst>
     <p:ext uri="urn:minijarvis:semantic-render:v1">
-      <ns0:renderMetadata xmlns:ns0="urn:minijarvis:semantic-render:v1">{"session": "212", "source_files": {"teacher": "/mnt/compartido/Programación-26-27/Minijarvis/02-PROFESORADO/02-SESIONES/h1/S212-entrada-por-teclado-con-scanner-docente.md", "student_fallback": "/mnt/compartido/Programación-26-27/Minijarvis/01-ALUMNADO/03-SESIONES/h1/S212-entrada-por-teclado-con-scanner-alumnado.md"}, "layout": "linked_prediction", "plan_index": 2, "recognition": false, "unit_ids": ["unit-6"], "roles": {"unit-6": "core"}, "source_refs": [{"source": "teacher", "heading": "Parsear texto para obtener un número", "block_index": 8, "fragment": 0}, {"source": "teacher", "heading": "Ideas y ejemplos", "block_index": 4, "fragment": 0}], "visible_sources": [{"index": 12, "sha256": "e53f9d8185e2af296fefb5499793557d07430f9ffe1f34e6f46fc1afd8fd72a3"}, {"index": 13, "sha256": "ed35f3a225aeed0c8bf4819d0a5b985080428e61afd09bd37d4b4be77011e8ab"}], "notes_sources": [{"function": "visible_detail", "heading": "Parsear texto para obtener un número", "sha256": "79830f3ce9436372074c5ef0b454a51ec9ac4ff6022833a2b073d058dffd5998"}, {"function": "facilitation", "heading": "Parsear texto para obtener un número", "sha256": "cdd72339db576213907886645ecc00e3a26cd19abb961dd7d04d3511edf6b440"}, {"function": "facilitation", "heading": "Parsear texto para obtener un número", "sha256": "880be94128932778cc96e863e0099c9a5c298fd4d81ea4d60705e050e5de9a0a"}, {"function": "facilitation", "heading": "Parsear texto para obtener un número", "sha256": "de4811ac88e323b39c819a0e89127dba4a89592f7332a8ec3af44b33d6ec1803"}], "relations": {"unit_relations": {"unit-6": {"prediction_cycle": ["prediction", "execution", "contrast"], "question_context": ["context", "question"]}}, "schedule": null, "source_supports_enriched": true}, "timeline_refs": [2], "composition": {"origin_slides": [9, 10]}, "timing": {"seconds": 0, "allocations": [{"source_index": 2, "seconds": 0, "decision": "Intervalo compartido íntegro; propietario contable seleccionado por función de actividad y referencia timeline de unidad (identidad semántica en empates). Soporte, sin duplicación contable. ", "source_time": "12–22 min", "source_seconds": 600, "is_owner": false, "function": "concept"}], "clock_intervals": [2], "presenter_notes": "Reloj fuente 12–22 min: duración compartida 600 segundos. Trabajo: Núcleo práctico individual: usar Scanner, pedir, leer con nextLine(), almacenar, parsear con Integer.parseInt o Double.parseDouble, utilizar el dato y comprobar una entrada válida. Función del soporte: explicación.", "shared_intervals": [{"source_index": 2, "source_time": "12–22 min", "seconds": 600, "is_owner": false, "function": "concept", "action": "Núcleo práctico individual: usar Scanner, pedir, leer con nextLine(), almacenar, parsear con Integer.parseInt o Double.parseDouble, utilizar el dato y comprobar una entrada válida.", "concurrent": false, "parallel_work": ""}]}, "code_blocks": [], "representation_needs": []}</ns0:renderMetadata>
+      <ns0:renderMetadata xmlns:ns0="urn:minijarvis:semantic-render:v1">{"session": "212", "source_files": {"teacher": "/mnt/compartido/Programación-26-27/Minijarvis/02-PROFESORADO/02-SESIONES/h1/S212-entrada-por-teclado-con-scanner-docente.md", "student_fallback": "/mnt/compartido/Programación-26-27/Minijarvis/01-ALUMNADO/03-SESIONES/h1/S212-entrada-por-teclado-con-scanner-alumnado.md"}, "layout": "linked_prediction", "plan_index": 2, "recognition": false, "unit_ids": ["unit-6"], "roles": {"unit-6": "core"}, "source_refs": [{"source": "teacher", "heading": "Parsear texto para obtener un número", "block_index": 8, "fragment": 0}, {"source": "teacher", "heading": "Ideas y ejemplos", "block_index": 4, "fragment": 0}], "visible_sources": [{"index": 12, "sha256": "3fcef63e55861cbe090044ba3518c314170175544c1dff3a7c9187814ec4981d"}, {"index": 13, "sha256": "ed35f3a225aeed0c8bf4819d0a5b985080428e61afd09bd37d4b4be77011e8ab"}, {"index": 15, "sha256": "e0c7bcc139019d2245719725257cb3ddfda13f612f37587ae99cf5b7fdfc0394"}], "notes_sources": [{"function": "visible_detail", "heading": "Parsear texto para obtener un número", "sha256": "79830f3ce9436372074c5ef0b454a51ec9ac4ff6022833a2b073d058dffd5998"}, {"function": "facilitation", "heading": "Parsear texto para obtener un número", "sha256": "cdd72339db576213907886645ecc00e3a26cd19abb961dd7d04d3511edf6b440"}, {"function": "facilitation", "heading": "Parsear texto para obtener un número", "sha256": "880be94128932778cc96e863e0099c9a5c298fd4d81ea4d60705e050e5de9a0a"}, {"function": "facilitation", "heading": "Parsear texto para obtener un número", "sha256": "de4811ac88e323b39c819a0e89127dba4a89592f7332a8ec3af44b33d6ec1803"}, {"function": "facilitation", "heading": "Parsear texto para obtener un número", "sha256": "fb46e45ed9ce483b29b080f2f4e01268f058a4ab9eb9c642c92311f3632fd2fc"}, {"function": "visible_detail", "heading": "Parsear texto para obtener un número", "sha256": "e0c7bcc139019d2245719725257cb3ddfda13f612f37587ae99cf5b7fdfc0394"}], "relations": {"unit_relations": {"unit-6": {"prediction_cycle": ["prediction", "execution", "contrast"], "question_context": ["context", "question"]}}, "schedule": null, "source_supports_enriched": true}, "timeline_refs": [2], "composition": {"origin_slides": [9, 10, 11]}, "timing": {"seconds": 0, "allocations": [{"source_index": 2, "seconds": 0, "decision": "Intervalo compartido íntegro; propietario contable seleccionado por función de actividad y referencia timeline de unidad (identidad semántica en empates). Soporte, sin duplicación contable. ", "source_time": "12–22 min", "source_seconds": 600, "is_owner": false, "function": "concept"}], "clock_intervals": [2], "presenter_notes": "Reloj fuente 12–22 min: duración compartida 600 segundos. Trabajo: Núcleo práctico individual: usar Scanner, leer con nextLine(), almacenar, parsear, calcular y mostrar una comparación booleana sin bifurcación. Función del soporte: explicación.", "shared_intervals": [{"source_index": 2, "source_time": "12–22 min", "seconds": 600, "is_owner": false, "function": "concept", "action": "Núcleo práctico individual: usar Scanner, leer con nextLine(), almacenar, parsear, calcular y mostrar una comparación booleana sin bifurcación.", "concurrent": false, "parallel_work": ""}]}, "code_blocks": [], "representation_needs": []}</ns0:renderMetadata>
     </p:ext>
   </p:extLst>
 </p:sld>

--- a/02-PROFESORADO/03-PRESENTACIONES/POR-SESION/h1/S212-entrada-por-teclado-con-scanner-presentacion.pptx
+++ b/02-PROFESORADO/03-PRESENTACIONES/POR-SESION/h1/S212-entrada-por-teclado-con-scanner-presentacion.pptx
@@ -6406,7 +6406,7 @@
               </a:defRPr>
             </a:pPr>
             <a:r>
-              <a:t>S212 · H1 — Primer asistente ejecutable</a:t>
+              <a:t>H1.7 · H1 — Primer asistente ejecutable</a:t>
             </a:r>
           </a:p>
         </p:txBody>
@@ -6728,7 +6728,7 @@
               </a:defRPr>
             </a:pPr>
             <a:r>
-              <a:t>S212 · H1 — Primer asistente ejecutable</a:t>
+              <a:t>H1.7 · H1 — Primer asistente ejecutable</a:t>
             </a:r>
           </a:p>
         </p:txBody>
@@ -6990,7 +6990,7 @@
               </a:defRPr>
             </a:pPr>
             <a:r>
-              <a:t>S212 · H1 — Primer asistente ejecutable</a:t>
+              <a:t>H1.7 · H1 — Primer asistente ejecutable</a:t>
             </a:r>
           </a:p>
         </p:txBody>
@@ -7230,7 +7230,7 @@
               </a:defRPr>
             </a:pPr>
             <a:r>
-              <a:t>S212 · H1 — Primer asistente ejecutable</a:t>
+              <a:t>H1.7 · H1 — Primer asistente ejecutable</a:t>
             </a:r>
           </a:p>
         </p:txBody>
@@ -7588,7 +7588,7 @@
               </a:defRPr>
             </a:pPr>
             <a:r>
-              <a:t>S212 · H1 — Primer asistente ejecutable</a:t>
+              <a:t>H1.7 · H1 — Primer asistente ejecutable</a:t>
             </a:r>
           </a:p>
         </p:txBody>
@@ -7829,7 +7829,7 @@
               </a:defRPr>
             </a:pPr>
             <a:r>
-              <a:t>S212 · H1 — Primer asistente ejecutable</a:t>
+              <a:t>H1.7 · H1 — Primer asistente ejecutable</a:t>
             </a:r>
           </a:p>
         </p:txBody>
@@ -8378,7 +8378,7 @@
               </a:defRPr>
             </a:pPr>
             <a:r>
-              <a:t>S212 · H1 — Primer asistente ejecutable</a:t>
+              <a:t>H1.7 · H1 — Primer asistente ejecutable</a:t>
             </a:r>
           </a:p>
         </p:txBody>
@@ -8616,7 +8616,7 @@
               </a:defRPr>
             </a:pPr>
             <a:r>
-              <a:t>S212 · H1 — Primer asistente ejecutable</a:t>
+              <a:t>H1.7 · H1 — Primer asistente ejecutable</a:t>
             </a:r>
           </a:p>
         </p:txBody>
@@ -8910,7 +8910,7 @@
               </a:defRPr>
             </a:pPr>
             <a:r>
-              <a:t>S212 · H1 — Primer asistente ejecutable</a:t>
+              <a:t>H1.7 · H1 — Primer asistente ejecutable</a:t>
             </a:r>
           </a:p>
         </p:txBody>
@@ -9050,7 +9050,7 @@
               </a:defRPr>
             </a:pPr>
             <a:r>
-              <a:t>README: puede recoger anticipadamente un ejemplo si resulta útil; su consolidación formal corresponde a S214.</a:t>
+              <a:t>README: puede recoger anticipadamente un ejemplo si resulta útil; su consolidación formal corresponde a H1.9.</a:t>
             </a:r>
           </a:p>
         </p:txBody>
@@ -9099,7 +9099,7 @@
               </a:defRPr>
             </a:pPr>
             <a:r>
-              <a:t>Moodle / Drive / Site: sin entrega o actualización específica en S212.</a:t>
+              <a:t>Moodle / Drive / Site: sin entrega o actualización específica en H1.7.</a:t>
             </a:r>
           </a:p>
         </p:txBody>
@@ -9253,7 +9253,7 @@
               </a:defRPr>
             </a:pPr>
             <a:r>
-              <a:t>S212 · H1 — Primer asistente ejecutable</a:t>
+              <a:t>H1.7 · H1 — Primer asistente ejecutable</a:t>
             </a:r>
           </a:p>
         </p:txBody>
@@ -9491,7 +9491,7 @@
               </a:defRPr>
             </a:pPr>
             <a:r>
-              <a:t>S212 · H1 — Primer asistente ejecutable</a:t>
+              <a:t>H1.7 · H1 — Primer asistente ejecutable</a:t>
             </a:r>
           </a:p>
         </p:txBody>
@@ -9902,7 +9902,7 @@
               </a:defRPr>
             </a:pPr>
             <a:r>
-              <a:t>S212 · H1 — Primer asistente ejecutable</a:t>
+              <a:t>H1.7 · H1 — Primer asistente ejecutable</a:t>
             </a:r>
           </a:p>
         </p:txBody>
@@ -10142,7 +10142,7 @@
               </a:defRPr>
             </a:pPr>
             <a:r>
-              <a:t>S212 · H1 — Primer asistente ejecutable</a:t>
+              <a:t>H1.7 · H1 — Primer asistente ejecutable</a:t>
             </a:r>
           </a:p>
         </p:txBody>
@@ -10506,7 +10506,7 @@
               </a:defRPr>
             </a:pPr>
             <a:r>
-              <a:t>S212 · H1 — Primer asistente ejecutable</a:t>
+              <a:t>H1.7 · H1 — Primer asistente ejecutable</a:t>
             </a:r>
           </a:p>
         </p:txBody>
@@ -10828,7 +10828,7 @@
               </a:defRPr>
             </a:pPr>
             <a:r>
-              <a:t>S212 · H1 — Primer asistente ejecutable</a:t>
+              <a:t>H1.7 · H1 — Primer asistente ejecutable</a:t>
             </a:r>
           </a:p>
         </p:txBody>
@@ -11024,7 +11024,7 @@
               </a:defRPr>
             </a:pPr>
             <a:r>
-              <a:t>S212 · H1 — Primer asistente ejecutable</a:t>
+              <a:t>H1.7 · H1 — Primer asistente ejecutable</a:t>
             </a:r>
           </a:p>
         </p:txBody>
@@ -11325,7 +11325,7 @@
               </a:defRPr>
             </a:pPr>
             <a:r>
-              <a:t>S212 · H1 — Primer asistente ejecutable</a:t>
+              <a:t>H1.7 · H1 — Primer asistente ejecutable</a:t>
             </a:r>
           </a:p>
         </p:txBody>
@@ -11606,7 +11606,7 @@
               </a:defRPr>
             </a:pPr>
             <a:r>
-              <a:t>S212 · H1 — Primer asistente ejecutable</a:t>
+              <a:t>H1.7 · H1 — Primer asistente ejecutable</a:t>
             </a:r>
           </a:p>
         </p:txBody>
@@ -11847,7 +11847,7 @@
               </a:defRPr>
             </a:pPr>
             <a:r>
-              <a:t>S212 · H1 — Primer asistente ejecutable</a:t>
+              <a:t>H1.7 · H1 — Primer asistente ejecutable</a:t>
             </a:r>
           </a:p>
         </p:txBody>
@@ -12088,7 +12088,7 @@
               </a:defRPr>
             </a:pPr>
             <a:r>
-              <a:t>S212 · H1 — Primer asistente ejecutable</a:t>
+              <a:t>H1.7 · H1 — Primer asistente ejecutable</a:t>
             </a:r>
           </a:p>
         </p:txBody>
@@ -12326,7 +12326,7 @@
               </a:defRPr>
             </a:pPr>
             <a:r>
-              <a:t>S212 · H1 — Primer asistente ejecutable</a:t>
+              <a:t>H1.7 · H1 — Primer asistente ejecutable</a:t>
             </a:r>
           </a:p>
         </p:txBody>
@@ -12574,7 +12574,7 @@
               </a:defRPr>
             </a:pPr>
             <a:r>
-              <a:t>S212 · H1 — Primer asistente ejecutable</a:t>
+              <a:t>H1.7 · H1 — Primer asistente ejecutable</a:t>
             </a:r>
           </a:p>
         </p:txBody>
@@ -12785,7 +12785,7 @@
               </a:defRPr>
             </a:pPr>
             <a:r>
-              <a:t>S212 · H1 — Primer asistente ejecutable</a:t>
+              <a:t>H1.7 · H1 — Primer asistente ejecutable</a:t>
             </a:r>
           </a:p>
         </p:txBody>
@@ -13225,7 +13225,7 @@
               </a:defRPr>
             </a:pPr>
             <a:r>
-              <a:t>S212 · H1 — Primer asistente ejecutable</a:t>
+              <a:t>H1.7 · H1 — Primer asistente ejecutable</a:t>
             </a:r>
           </a:p>
         </p:txBody>
@@ -13715,7 +13715,7 @@
               </a:defRPr>
             </a:pPr>
             <a:r>
-              <a:t>S212 · H1 — Primer asistente ejecutable</a:t>
+              <a:t>H1.7 · H1 — Primer asistente ejecutable</a:t>
             </a:r>
           </a:p>
         </p:txBody>
@@ -13953,7 +13953,7 @@
               </a:defRPr>
             </a:pPr>
             <a:r>
-              <a:t>S212 · H1 — Primer asistente ejecutable</a:t>
+              <a:t>H1.7 · H1 — Primer asistente ejecutable</a:t>
             </a:r>
           </a:p>
         </p:txBody>
@@ -14401,7 +14401,7 @@
               </a:defRPr>
             </a:pPr>
             <a:r>
-              <a:t>S212 · H1 — Primer asistente ejecutable</a:t>
+              <a:t>H1.7 · H1 — Primer asistente ejecutable</a:t>
             </a:r>
           </a:p>
         </p:txBody>
@@ -14852,7 +14852,7 @@
               </a:defRPr>
             </a:pPr>
             <a:r>
-              <a:t>S212 · H1 — Primer asistente ejecutable</a:t>
+              <a:t>H1.7 · H1 — Primer asistente ejecutable</a:t>
             </a:r>
           </a:p>
         </p:txBody>
@@ -15295,7 +15295,7 @@
               </a:defRPr>
             </a:pPr>
             <a:r>
-              <a:t>S212 · H1 — Primer asistente ejecutable</a:t>
+              <a:t>H1.7 · H1 — Primer asistente ejecutable</a:t>
             </a:r>
           </a:p>
         </p:txBody>
